--- a/提交物/09_接口控制器设计实验汇报PPT/1120233061.pptx
+++ b/提交物/09_接口控制器设计实验汇报PPT/1120233061.pptx
@@ -3,26 +3,26 @@
 <p:presentation xmlns:a="http://schemas.openxmlformats.org/drawingml/2006/main" xmlns:r="http://schemas.openxmlformats.org/officeDocument/2006/relationships" xmlns:p="http://schemas.openxmlformats.org/presentationml/2006/main">
   <p:sldMasterIdLst>
     <p:sldMasterId id="2147483648" r:id="rId1"/>
-    <p:sldMasterId id="2147483651" r:id="rId2"/>
+    <p:sldMasterId id="2147483651" r:id="rId3"/>
   </p:sldMasterIdLst>
   <p:notesMasterIdLst>
-    <p:notesMasterId r:id="rId17"/>
+    <p:notesMasterId r:id="rId5"/>
   </p:notesMasterIdLst>
   <p:sldIdLst>
-    <p:sldId id="256" r:id="rId3"/>
-    <p:sldId id="257" r:id="rId4"/>
-    <p:sldId id="258" r:id="rId5"/>
-    <p:sldId id="259" r:id="rId6"/>
-    <p:sldId id="260" r:id="rId7"/>
-    <p:sldId id="261" r:id="rId8"/>
-    <p:sldId id="262" r:id="rId9"/>
-    <p:sldId id="263" r:id="rId10"/>
-    <p:sldId id="264" r:id="rId11"/>
-    <p:sldId id="265" r:id="rId12"/>
-    <p:sldId id="266" r:id="rId13"/>
-    <p:sldId id="267" r:id="rId14"/>
-    <p:sldId id="268" r:id="rId15"/>
-    <p:sldId id="269" r:id="rId16"/>
+    <p:sldId id="256" r:id="rId4"/>
+    <p:sldId id="257" r:id="rId6"/>
+    <p:sldId id="258" r:id="rId7"/>
+    <p:sldId id="259" r:id="rId8"/>
+    <p:sldId id="260" r:id="rId9"/>
+    <p:sldId id="261" r:id="rId10"/>
+    <p:sldId id="262" r:id="rId11"/>
+    <p:sldId id="263" r:id="rId12"/>
+    <p:sldId id="264" r:id="rId13"/>
+    <p:sldId id="265" r:id="rId14"/>
+    <p:sldId id="266" r:id="rId15"/>
+    <p:sldId id="267" r:id="rId16"/>
+    <p:sldId id="268" r:id="rId17"/>
+    <p:sldId id="269" r:id="rId18"/>
   </p:sldIdLst>
   <p:sldSz cx="12192000" cy="6858000"/>
   <p:notesSz cx="6858000" cy="9144000"/>
@@ -121,11 +121,6 @@
       </a:defRPr>
     </a:lvl9pPr>
   </p:defaultTextStyle>
-  <p:extLst>
-    <p:ext uri="{EFAFB233-063F-42B5-8137-9DF3F51BA10A}">
-      <p15:sldGuideLst xmlns:p15="http://schemas.microsoft.com/office/powerpoint/2012/main"/>
-    </p:ext>
-  </p:extLst>
 </p:presentation>
 </file>
 
@@ -169,9 +164,7 @@
         <p:txBody>
           <a:bodyPr/>
           <a:lstStyle/>
-          <a:p>
-            <a:endParaRPr/>
-          </a:p>
+          <a:p/>
         </p:txBody>
       </p:sp>
       <p:sp>
@@ -192,9 +185,7 @@
         <p:txBody>
           <a:bodyPr/>
           <a:lstStyle/>
-          <a:p>
-            <a:endParaRPr/>
-          </a:p>
+          <a:p/>
         </p:txBody>
       </p:sp>
       <p:sp>
@@ -215,9 +206,7 @@
         <p:txBody>
           <a:bodyPr/>
           <a:lstStyle/>
-          <a:p>
-            <a:endParaRPr/>
-          </a:p>
+          <a:p/>
         </p:txBody>
       </p:sp>
       <p:sp>
@@ -238,9 +227,7 @@
         <p:txBody>
           <a:bodyPr/>
           <a:lstStyle/>
-          <a:p>
-            <a:endParaRPr/>
-          </a:p>
+          <a:p/>
         </p:txBody>
       </p:sp>
       <p:sp>
@@ -261,9 +248,7 @@
         <p:txBody>
           <a:bodyPr/>
           <a:lstStyle/>
-          <a:p>
-            <a:endParaRPr/>
-          </a:p>
+          <a:p/>
         </p:txBody>
       </p:sp>
       <p:sp>
@@ -284,9 +269,7 @@
         <p:txBody>
           <a:bodyPr/>
           <a:lstStyle/>
-          <a:p>
-            <a:endParaRPr/>
-          </a:p>
+          <a:p/>
         </p:txBody>
       </p:sp>
     </p:spTree>
@@ -353,9 +336,7 @@
               <a:t>各位老师好，我们汇报的是基于 ST7571 的可复用 LCD SPI 接口控制器及 RISC-V 汇编图形应用。最终成果包括独立 LCD 控制器 IP、MMIO 驱动和 10 乘 20 俄罗斯方块程序。硬件负责复位、初始化、串行发送和像素映射，汇编软件负责输入、游戏规则和刷新调度。</a:t>
             </a:r>
           </a:p>
-          <a:p>
-            <a:endParaRPr/>
-          </a:p>
+          <a:p/>
           <a:p>
             <a:r>
               <a:t>内容依据：</a:t>
@@ -387,9 +368,7 @@
         <p:txBody>
           <a:bodyPr/>
           <a:lstStyle/>
-          <a:p>
-            <a:endParaRPr/>
-          </a:p>
+          <a:p/>
         </p:txBody>
       </p:sp>
     </p:spTree>
@@ -453,9 +432,7 @@
               <a:t>方块无法继续下降时，程序把活动方块按位或到固定棋盘。随后从底部向上扫描，检测 0x3FF 满行；发现满行就把上方行整体下移并清空顶行。只要本次锁定产生消行，就向 0x20000038 写一次，硬件产生约 2 kHz、120 毫秒提示音。</a:t>
             </a:r>
           </a:p>
-          <a:p>
-            <a:endParaRPr/>
-          </a:p>
+          <a:p/>
           <a:p>
             <a:r>
               <a:t>内容依据：</a:t>
@@ -487,9 +464,7 @@
         <p:txBody>
           <a:bodyPr/>
           <a:lstStyle/>
-          <a:p>
-            <a:endParaRPr/>
-          </a:p>
+          <a:p/>
         </p:txBody>
       </p:sp>
     </p:spTree>
@@ -553,9 +528,7 @@
               <a:t>刷新时，软件逐行把行号和十位数据写入 LCD_GAME_ROW，完成二十行上传后写 LCD_GAME_REFRESH。硬件把两行逻辑棋盘映射到一个八像素页面，每个方块使用八列实体和两列间隔。这样软件只处理棋盘位图，不逐像素发送一万多个显示位。</a:t>
             </a:r>
           </a:p>
-          <a:p>
-            <a:endParaRPr/>
-          </a:p>
+          <a:p/>
           <a:p>
             <a:r>
               <a:t>内容依据：</a:t>
@@ -587,9 +560,7 @@
         <p:txBody>
           <a:bodyPr/>
           <a:lstStyle/>
-          <a:p>
-            <a:endParaRPr/>
-          </a:p>
+          <a:p/>
         </p:txBody>
       </p:sp>
     </p:spTree>
@@ -653,9 +624,7 @@
               <a:t>验证分为 SPI、控制器、MMIO、游戏系统、IP 复用和实板六层。SPI 测试检查 0xA5 的八位 MSB first、RS 与空闲恢复；控制器测试检查复位、初始化与传输次数；系统测试检查二十行上传顺序、方向键、软降释放和蜂鸣器事件。所有自动化测试以断言和 PASS 作为通过条件。</a:t>
             </a:r>
           </a:p>
-          <a:p>
-            <a:endParaRPr/>
-          </a:p>
+          <a:p/>
           <a:p>
             <a:r>
               <a:t>内容依据：</a:t>
@@ -697,9 +666,7 @@
         <p:txBody>
           <a:bodyPr/>
           <a:lstStyle/>
-          <a:p>
-            <a:endParaRPr/>
-          </a:p>
+          <a:p/>
         </p:txBody>
       </p:sp>
     </p:spTree>
@@ -763,9 +730,7 @@
               <a:t>现场演示建议按上电、开始、左右移动、旋转、软降、锁定、消行蜂鸣和重新开始的顺序。已有报告记录基础 LCD 测试图案与按键路径，但仓库没有最终游戏画面、蜂鸣器和 IP Catalog 截图。本页因此只列验收点，答辩前必须插入同一 bitstream 对应的实物照片或现场视频帧。</a:t>
             </a:r>
           </a:p>
-          <a:p>
-            <a:endParaRPr/>
-          </a:p>
+          <a:p/>
           <a:p>
             <a:r>
               <a:t>内容依据：</a:t>
@@ -802,9 +767,7 @@
         <p:txBody>
           <a:bodyPr/>
           <a:lstStyle/>
-          <a:p>
-            <a:endParaRPr/>
-          </a:p>
+          <a:p/>
         </p:txBody>
       </p:sp>
     </p:spTree>
@@ -868,9 +831,7 @@
               <a:t>最终成果形成了可独立复用的 LCD SPI IP、清晰的 MMIO 软件接口和完整汇编图形应用。课程边界上，CPU 微架构和性能属于计组；本课程评价接口协议、IP 封装、汇编驱动和软硬件协同。现有仿真已经覆盖核心功能，最终提交还需把实物证据和视频与代码版本绑定。</a:t>
             </a:r>
           </a:p>
-          <a:p>
-            <a:endParaRPr/>
-          </a:p>
+          <a:p/>
           <a:p>
             <a:r>
               <a:t>内容依据：</a:t>
@@ -902,9 +863,7 @@
         <p:txBody>
           <a:bodyPr/>
           <a:lstStyle/>
-          <a:p>
-            <a:endParaRPr/>
-          </a:p>
+          <a:p/>
         </p:txBody>
       </p:sp>
     </p:spTree>
@@ -968,9 +927,7 @@
               <a:t>为减少现场切换，计组汇报按王建乐、张晓行、王建乐三段进行。王建乐负责第 1 到 3 页以及第 10 到 15 页，张晓行负责第 4 到 9 页。钱博傲负责实板材料准备，并在提问环节补充 LCD、GPIO 和 MMIO 接口问题。</a:t>
             </a:r>
           </a:p>
-          <a:p>
-            <a:endParaRPr/>
-          </a:p>
+          <a:p/>
           <a:p>
             <a:r>
               <a:t>内容依据：</a:t>
@@ -1012,7 +969,6 @@
               <a:buSzTx/>
               <a:buFontTx/>
               <a:buNone/>
-              <a:tabLst/>
               <a:defRPr/>
             </a:pPr>
             <a:endParaRPr kumimoji="0" sz="1800" b="0" i="0" u="none" strike="noStrike" kern="1200" cap="none" spc="0" normalizeH="0" baseline="0" noProof="0">
@@ -1093,9 +1049,7 @@
               <a:t>系统从手柄和拨码输入开始，汇编程序在 CPU 上运行，通过 GPIO 和 LCD MMIO 访问外设。地址译码器使用 req、ready 握手连接 LCD 控制器，控制器再把命令、数据和棋盘帧转换成 ST7571 的四线 SPI。消行事件单独写蜂鸣器寄存器，形成声音反馈。</a:t>
             </a:r>
           </a:p>
-          <a:p>
-            <a:endParaRPr/>
-          </a:p>
+          <a:p/>
           <a:p>
             <a:r>
               <a:t>内容依据：</a:t>
@@ -1132,9 +1086,7 @@
         <p:txBody>
           <a:bodyPr/>
           <a:lstStyle/>
-          <a:p>
-            <a:endParaRPr/>
-          </a:p>
+          <a:p/>
         </p:txBody>
       </p:sp>
     </p:spTree>
@@ -1198,9 +1150,7 @@
               <a:t>LCD 控制器分成上层状态机和 SPI master。状态机完成硬复位、120 毫秒等待、初始化命令和清屏，进入 IDLE 后接受软件请求。每个字节都经过 WAIT_BUSY 和 WAIT_DONE，continuation 决定完成后返回初始化、清屏或用户路径。tx_ready 只在 IDLE 且 SPI 空闲时有效。</a:t>
             </a:r>
           </a:p>
-          <a:p>
-            <a:endParaRPr/>
-          </a:p>
+          <a:p/>
           <a:p>
             <a:r>
               <a:t>内容依据：</a:t>
@@ -1232,9 +1182,7 @@
         <p:txBody>
           <a:bodyPr/>
           <a:lstStyle/>
-          <a:p>
-            <a:endParaRPr/>
-          </a:p>
+          <a:p/>
         </p:txBody>
       </p:sp>
     </p:spTree>
@@ -1298,9 +1246,7 @@
               <a:t>软件通过七个 MMIO 寄存器操作 LCD 和蜂鸣器。CMD 与 DATA 分别决定 RS 为零或一，STATUS 提供 ready 和 initialized。CTRL 支持重初始化、清屏和固定文字。GAME_ROW 上传行号与十位棋盘数据，GAME_REFRESH 触发整屏刷新。所有地址强制旁路 Cache，并保持强顺序。</a:t>
             </a:r>
           </a:p>
-          <a:p>
-            <a:endParaRPr/>
-          </a:p>
+          <a:p/>
           <a:p>
             <a:r>
               <a:t>内容依据：</a:t>
@@ -1332,9 +1278,7 @@
         <p:txBody>
           <a:bodyPr/>
           <a:lstStyle/>
-          <a:p>
-            <a:endParaRPr/>
-          </a:p>
+          <a:p/>
         </p:txBody>
       </p:sp>
     </p:spTree>
@@ -1398,9 +1342,7 @@
               <a:t>控制器已封装为 local:user:lcd_controller:1.0。IP 目录只包含 component.xml、src 和 xgui，避免把 CPU、SoC 与约束文件误纳入 IP。component.xml 声明端口、时序参数、综合与仿真文件组。仓库脚本可以重新打包并在 IP Catalog 中注册。答辩前应补入 Catalog、Block Design、Validate Design 和输出产品截图。</a:t>
             </a:r>
           </a:p>
-          <a:p>
-            <a:endParaRPr/>
-          </a:p>
+          <a:p/>
           <a:p>
             <a:r>
               <a:t>内容依据：</a:t>
@@ -1437,9 +1379,7 @@
         <p:txBody>
           <a:bodyPr/>
           <a:lstStyle/>
-          <a:p>
-            <a:endParaRPr/>
-          </a:p>
+          <a:p/>
         </p:txBody>
       </p:sp>
     </p:spTree>
@@ -1503,9 +1443,7 @@
               <a:t>汇编软件分成四层。底层驱动轮询状态并完成命令、数据、行上传和刷新。帧组织层把固定棋盘与活动方块合成二十行。游戏规则层处理碰撞、移动、旋转、锁定、消行与重开。MMIO 与硬件层完成地址译码、ready 背压、LCD 控制器和 SPI。</a:t>
             </a:r>
           </a:p>
-          <a:p>
-            <a:endParaRPr/>
-          </a:p>
+          <a:p/>
           <a:p>
             <a:r>
               <a:t>内容依据：</a:t>
@@ -1537,9 +1475,7 @@
         <p:txBody>
           <a:bodyPr/>
           <a:lstStyle/>
-          <a:p>
-            <a:endParaRPr/>
-          </a:p>
+          <a:p/>
         </p:txBody>
       </p:sp>
     </p:spTree>
@@ -1603,9 +1539,7 @@
               <a:t>棋盘在 DMEM 中保存为二十个十位行，满行值为 0x3FF。七种方块的四个旋转状态使用四乘四位图表示。当前活动方块由类型、旋转、x 和 y 描述。显示前把固定棋盘复制到临时帧，再叠加活动方块，避免修改尚未锁定的棋盘。</a:t>
             </a:r>
           </a:p>
-          <a:p>
-            <a:endParaRPr/>
-          </a:p>
+          <a:p/>
           <a:p>
             <a:r>
               <a:t>内容依据：</a:t>
@@ -1632,9 +1566,7 @@
         <p:txBody>
           <a:bodyPr/>
           <a:lstStyle/>
-          <a:p>
-            <a:endParaRPr/>
-          </a:p>
+          <a:p/>
         </p:txBody>
       </p:sp>
     </p:spTree>
@@ -1698,9 +1630,7 @@
               <a:t>移动和旋转采用试探式更新。程序先计算候选 x、y 或旋转状态，再逐位检查四乘四位图。越过左右边界、底部或与固定棋盘重叠都返回 blocked。若碰撞则撤销；旋转还尝试向左或向右偏移一次，形成简单 wall kick。</a:t>
             </a:r>
           </a:p>
-          <a:p>
-            <a:endParaRPr/>
-          </a:p>
+          <a:p/>
           <a:p>
             <a:r>
               <a:t>内容依据：</a:t>
@@ -1727,9 +1657,7 @@
         <p:txBody>
           <a:bodyPr/>
           <a:lstStyle/>
-          <a:p>
-            <a:endParaRPr/>
-          </a:p>
+          <a:p/>
         </p:txBody>
       </p:sp>
     </p:spTree>
@@ -1826,11 +1754,6 @@
         </a:xfrm>
       </p:grpSpPr>
     </p:spTree>
-    <p:extLst>
-      <p:ext uri="{BB962C8B-B14F-4D97-AF65-F5344CB8AC3E}">
-        <p14:creationId xmlns:p14="http://schemas.microsoft.com/office/powerpoint/2010/main" val="2027469194"/>
-      </p:ext>
-    </p:extLst>
   </p:cSld>
   <p:clrMapOvr>
     <a:masterClrMapping/>
@@ -1864,11 +1787,6 @@
         </a:xfrm>
       </p:grpSpPr>
     </p:spTree>
-    <p:extLst>
-      <p:ext uri="{BB962C8B-B14F-4D97-AF65-F5344CB8AC3E}">
-        <p14:creationId xmlns:p14="http://schemas.microsoft.com/office/powerpoint/2010/main" val="1680364248"/>
-      </p:ext>
-    </p:extLst>
   </p:cSld>
   <p:clrMapOvr>
     <a:masterClrMapping/>
@@ -1928,7 +1846,7 @@
         <a:spcBef>
           <a:spcPct val="20000"/>
         </a:spcBef>
-        <a:buFont typeface="Arial"/>
+        <a:buFont typeface="Arial" panose="020B0604020202020204"/>
         <a:buChar char="•"/>
         <a:defRPr sz="3200" kern="1200">
           <a:solidFill>
@@ -1943,7 +1861,7 @@
         <a:spcBef>
           <a:spcPct val="20000"/>
         </a:spcBef>
-        <a:buFont typeface="Arial"/>
+        <a:buFont typeface="Arial" panose="020B0604020202020204"/>
         <a:buChar char="–"/>
         <a:defRPr sz="2800" kern="1200">
           <a:solidFill>
@@ -1958,7 +1876,7 @@
         <a:spcBef>
           <a:spcPct val="20000"/>
         </a:spcBef>
-        <a:buFont typeface="Arial"/>
+        <a:buFont typeface="Arial" panose="020B0604020202020204"/>
         <a:buChar char="•"/>
         <a:defRPr sz="2400" kern="1200">
           <a:solidFill>
@@ -1973,7 +1891,7 @@
         <a:spcBef>
           <a:spcPct val="20000"/>
         </a:spcBef>
-        <a:buFont typeface="Arial"/>
+        <a:buFont typeface="Arial" panose="020B0604020202020204"/>
         <a:buChar char="–"/>
         <a:defRPr sz="2000" kern="1200">
           <a:solidFill>
@@ -1988,7 +1906,7 @@
         <a:spcBef>
           <a:spcPct val="20000"/>
         </a:spcBef>
-        <a:buFont typeface="Arial"/>
+        <a:buFont typeface="Arial" panose="020B0604020202020204"/>
         <a:buChar char="»"/>
         <a:defRPr sz="2000" kern="1200">
           <a:solidFill>
@@ -2003,7 +1921,7 @@
         <a:spcBef>
           <a:spcPct val="20000"/>
         </a:spcBef>
-        <a:buFont typeface="Arial"/>
+        <a:buFont typeface="Arial" panose="020B0604020202020204"/>
         <a:buChar char="•"/>
         <a:defRPr sz="2000" kern="1200">
           <a:solidFill>
@@ -2018,7 +1936,7 @@
         <a:spcBef>
           <a:spcPct val="20000"/>
         </a:spcBef>
-        <a:buFont typeface="Arial"/>
+        <a:buFont typeface="Arial" panose="020B0604020202020204"/>
         <a:buChar char="•"/>
         <a:defRPr sz="2000" kern="1200">
           <a:solidFill>
@@ -2033,7 +1951,7 @@
         <a:spcBef>
           <a:spcPct val="20000"/>
         </a:spcBef>
-        <a:buFont typeface="Arial"/>
+        <a:buFont typeface="Arial" panose="020B0604020202020204"/>
         <a:buChar char="•"/>
         <a:defRPr sz="2000" kern="1200">
           <a:solidFill>
@@ -2048,7 +1966,7 @@
         <a:spcBef>
           <a:spcPct val="20000"/>
         </a:spcBef>
-        <a:buFont typeface="Arial"/>
+        <a:buFont typeface="Arial" panose="020B0604020202020204"/>
         <a:buChar char="•"/>
         <a:defRPr sz="2000" kern="1200">
           <a:solidFill>
@@ -2188,11 +2106,6 @@
         </a:xfrm>
       </p:grpSpPr>
     </p:spTree>
-    <p:extLst>
-      <p:ext uri="{BB962C8B-B14F-4D97-AF65-F5344CB8AC3E}">
-        <p14:creationId xmlns:p14="http://schemas.microsoft.com/office/powerpoint/2010/main" val="3425176881"/>
-      </p:ext>
-    </p:extLst>
   </p:cSld>
   <p:clrMap bg1="lt1" tx1="dk1" bg2="lt2" tx2="dk2" accent1="accent1" accent2="accent2" accent3="accent3" accent4="accent4" accent5="accent5" accent6="accent6" hlink="hlink" folHlink="folHlink"/>
   <p:sldLayoutIdLst>
@@ -2222,7 +2135,7 @@
         <a:spcBef>
           <a:spcPct val="20000"/>
         </a:spcBef>
-        <a:buFont typeface="Arial"/>
+        <a:buFont typeface="Arial" panose="020B0604020202020204"/>
         <a:buChar char="•"/>
         <a:defRPr sz="3200" kern="1200">
           <a:solidFill>
@@ -2237,7 +2150,7 @@
         <a:spcBef>
           <a:spcPct val="20000"/>
         </a:spcBef>
-        <a:buFont typeface="Arial"/>
+        <a:buFont typeface="Arial" panose="020B0604020202020204"/>
         <a:buChar char="–"/>
         <a:defRPr sz="2800" kern="1200">
           <a:solidFill>
@@ -2252,7 +2165,7 @@
         <a:spcBef>
           <a:spcPct val="20000"/>
         </a:spcBef>
-        <a:buFont typeface="Arial"/>
+        <a:buFont typeface="Arial" panose="020B0604020202020204"/>
         <a:buChar char="•"/>
         <a:defRPr sz="2400" kern="1200">
           <a:solidFill>
@@ -2267,7 +2180,7 @@
         <a:spcBef>
           <a:spcPct val="20000"/>
         </a:spcBef>
-        <a:buFont typeface="Arial"/>
+        <a:buFont typeface="Arial" panose="020B0604020202020204"/>
         <a:buChar char="–"/>
         <a:defRPr sz="2000" kern="1200">
           <a:solidFill>
@@ -2282,7 +2195,7 @@
         <a:spcBef>
           <a:spcPct val="20000"/>
         </a:spcBef>
-        <a:buFont typeface="Arial"/>
+        <a:buFont typeface="Arial" panose="020B0604020202020204"/>
         <a:buChar char="»"/>
         <a:defRPr sz="2000" kern="1200">
           <a:solidFill>
@@ -2297,7 +2210,7 @@
         <a:spcBef>
           <a:spcPct val="20000"/>
         </a:spcBef>
-        <a:buFont typeface="Arial"/>
+        <a:buFont typeface="Arial" panose="020B0604020202020204"/>
         <a:buChar char="•"/>
         <a:defRPr sz="2000" kern="1200">
           <a:solidFill>
@@ -2312,7 +2225,7 @@
         <a:spcBef>
           <a:spcPct val="20000"/>
         </a:spcBef>
-        <a:buFont typeface="Arial"/>
+        <a:buFont typeface="Arial" panose="020B0604020202020204"/>
         <a:buChar char="•"/>
         <a:defRPr sz="2000" kern="1200">
           <a:solidFill>
@@ -2327,7 +2240,7 @@
         <a:spcBef>
           <a:spcPct val="20000"/>
         </a:spcBef>
-        <a:buFont typeface="Arial"/>
+        <a:buFont typeface="Arial" panose="020B0604020202020204"/>
         <a:buChar char="•"/>
         <a:defRPr sz="2000" kern="1200">
           <a:solidFill>
@@ -2342,7 +2255,7 @@
         <a:spcBef>
           <a:spcPct val="20000"/>
         </a:spcBef>
-        <a:buFont typeface="Arial"/>
+        <a:buFont typeface="Arial" panose="020B0604020202020204"/>
         <a:buChar char="•"/>
         <a:defRPr sz="2000" kern="1200">
           <a:solidFill>
@@ -2486,13 +2399,7 @@
       </p:grpSpPr>
       <p:sp>
         <p:nvSpPr>
-          <p:cNvPr id="13" name="矩形 12">
-            <a:extLst>
-              <a:ext uri="{FF2B5EF4-FFF2-40B4-BE49-F238E27FC236}">
-                <a16:creationId xmlns:a16="http://schemas.microsoft.com/office/drawing/2014/main" id="{52837C96-49ED-42B5-9B1F-F1D2E08A52C0}"/>
-              </a:ext>
-            </a:extLst>
-          </p:cNvPr>
+          <p:cNvPr id="13" name="矩形 12"/>
           <p:cNvSpPr>
             <a:spLocks noGrp="1"/>
           </p:cNvSpPr>
@@ -2538,18 +2445,20 @@
               </a:rPr>
               <a:t>汇编与接口技术课程设计</a:t>
             </a:r>
+            <a:endParaRPr sz="1125" b="1">
+              <a:solidFill>
+                <a:srgbClr val="A6B4C8"/>
+              </a:solidFill>
+              <a:latin typeface="Noto Sans SC"/>
+              <a:ea typeface="Noto Sans SC"/>
+              <a:cs typeface="Noto Sans SC"/>
+            </a:endParaRPr>
           </a:p>
         </p:txBody>
       </p:sp>
       <p:sp>
         <p:nvSpPr>
-          <p:cNvPr id="2" name="矩形 1">
-            <a:extLst>
-              <a:ext uri="{FF2B5EF4-FFF2-40B4-BE49-F238E27FC236}">
-                <a16:creationId xmlns:a16="http://schemas.microsoft.com/office/drawing/2014/main" id="{C1B282D6-754C-4139-AC55-73AD6B21DED7}"/>
-              </a:ext>
-            </a:extLst>
-          </p:cNvPr>
+          <p:cNvPr id="2" name="矩形 1"/>
           <p:cNvSpPr>
             <a:spLocks noGrp="1"/>
           </p:cNvSpPr>
@@ -2595,6 +2504,14 @@
               </a:rPr>
               <a:t>可复用 LCD SPI 控制器 IP</a:t>
             </a:r>
+            <a:endParaRPr sz="3525" b="1">
+              <a:solidFill>
+                <a:srgbClr val="EAF2FF"/>
+              </a:solidFill>
+              <a:latin typeface="Noto Sans SC"/>
+              <a:ea typeface="Noto Sans SC"/>
+              <a:cs typeface="Noto Sans SC"/>
+            </a:endParaRPr>
           </a:p>
           <a:p>
             <a:pPr>
@@ -2618,18 +2535,20 @@
               </a:rPr>
               <a:t>与 RISC-V 汇编图形应用</a:t>
             </a:r>
+            <a:endParaRPr sz="3525" b="1">
+              <a:solidFill>
+                <a:srgbClr val="EAF2FF"/>
+              </a:solidFill>
+              <a:latin typeface="Noto Sans SC"/>
+              <a:ea typeface="Noto Sans SC"/>
+              <a:cs typeface="Noto Sans SC"/>
+            </a:endParaRPr>
           </a:p>
         </p:txBody>
       </p:sp>
       <p:sp>
         <p:nvSpPr>
-          <p:cNvPr id="3" name="直接连接符 2">
-            <a:extLst>
-              <a:ext uri="{FF2B5EF4-FFF2-40B4-BE49-F238E27FC236}">
-                <a16:creationId xmlns:a16="http://schemas.microsoft.com/office/drawing/2014/main" id="{A3C622E1-1DDB-433E-8A53-B2B39BE37323}"/>
-              </a:ext>
-            </a:extLst>
-          </p:cNvPr>
+          <p:cNvPr id="3" name="直接连接符 2"/>
           <p:cNvSpPr>
             <a:spLocks noGrp="1"/>
           </p:cNvSpPr>
@@ -2654,21 +2573,15 @@
       </p:sp>
       <p:sp>
         <p:nvSpPr>
-          <p:cNvPr id="4" name="矩形 3">
-            <a:extLst>
-              <a:ext uri="{FF2B5EF4-FFF2-40B4-BE49-F238E27FC236}">
-                <a16:creationId xmlns:a16="http://schemas.microsoft.com/office/drawing/2014/main" id="{C0B21CE2-BB8B-4814-9D46-16BC26FF26F0}"/>
-              </a:ext>
-            </a:extLst>
-          </p:cNvPr>
-          <p:cNvSpPr>
-            <a:spLocks noGrp="1"/>
-          </p:cNvSpPr>
-          <p:nvPr/>
-        </p:nvSpPr>
-        <p:spPr>
-          <a:xfrm>
-            <a:off x="590550" y="4305300"/>
+          <p:cNvPr id="4" name="矩形 3"/>
+          <p:cNvSpPr>
+            <a:spLocks noGrp="1"/>
+          </p:cNvSpPr>
+          <p:nvPr/>
+        </p:nvSpPr>
+        <p:spPr>
+          <a:xfrm>
+            <a:off x="590550" y="2867025"/>
             <a:ext cx="2476500" cy="361950"/>
           </a:xfrm>
           <a:prstGeom prst="rect">
@@ -2706,27 +2619,29 @@
               </a:rPr>
               <a:t>验收汇报</a:t>
             </a:r>
+            <a:endParaRPr sz="1500" b="1" dirty="0">
+              <a:solidFill>
+                <a:srgbClr val="25D4E8"/>
+              </a:solidFill>
+              <a:latin typeface="Noto Sans SC"/>
+              <a:ea typeface="Noto Sans SC"/>
+              <a:cs typeface="Noto Sans SC"/>
+            </a:endParaRPr>
           </a:p>
         </p:txBody>
       </p:sp>
       <p:sp>
         <p:nvSpPr>
-          <p:cNvPr id="5" name="矩形 4">
-            <a:extLst>
-              <a:ext uri="{FF2B5EF4-FFF2-40B4-BE49-F238E27FC236}">
-                <a16:creationId xmlns:a16="http://schemas.microsoft.com/office/drawing/2014/main" id="{DDB736FC-AB2D-41DC-89C7-D1CE32D81295}"/>
-              </a:ext>
-            </a:extLst>
-          </p:cNvPr>
-          <p:cNvSpPr>
-            <a:spLocks noGrp="1"/>
-          </p:cNvSpPr>
-          <p:nvPr/>
-        </p:nvSpPr>
-        <p:spPr>
-          <a:xfrm>
-            <a:off x="590550" y="4857750"/>
-            <a:ext cx="8858250" cy="400050"/>
+          <p:cNvPr id="12" name="矩形 11"/>
+          <p:cNvSpPr>
+            <a:spLocks noGrp="1"/>
+          </p:cNvSpPr>
+          <p:nvPr/>
+        </p:nvSpPr>
+        <p:spPr>
+          <a:xfrm>
+            <a:off x="590550" y="4210050"/>
+            <a:ext cx="8096250" cy="228600"/>
           </a:xfrm>
           <a:prstGeom prst="rect">
             <a:avLst/>
@@ -2738,367 +2653,43 @@
         </p:spPr>
         <p:txBody>
           <a:bodyPr anchor="t">
-            <a:normAutofit/>
+            <a:noAutofit/>
           </a:bodyPr>
           <a:lstStyle/>
           <a:p>
             <a:pPr>
-              <a:defRPr sz="1650" b="0">
-                <a:solidFill>
-                  <a:srgbClr val="EAF2FF"/>
-                </a:solidFill>
-                <a:latin typeface="Noto Sans SC"/>
-                <a:ea typeface="Noto Sans SC"/>
-                <a:cs typeface="Noto Sans SC"/>
-              </a:defRPr>
-            </a:pPr>
-            <a:r>
-              <a:rPr sz="1650" b="0">
-                <a:solidFill>
-                  <a:srgbClr val="EAF2FF"/>
-                </a:solidFill>
-                <a:latin typeface="Noto Sans SC"/>
-                <a:ea typeface="Noto Sans SC"/>
-                <a:cs typeface="Noto Sans SC"/>
-              </a:rPr>
-              <a:t>ST7571 初始化、MMIO 驱动、俄罗斯方块与实板交互</a:t>
-            </a:r>
+              <a:defRPr sz="1050" b="0">
+                <a:solidFill>
+                  <a:srgbClr val="A6B4C8"/>
+                </a:solidFill>
+                <a:latin typeface="Noto Sans SC"/>
+                <a:ea typeface="Noto Sans SC"/>
+                <a:cs typeface="Noto Sans SC"/>
+              </a:defRPr>
+            </a:pPr>
+            <a:r>
+              <a:rPr sz="2000" b="0" dirty="0" err="1">
+                <a:solidFill>
+                  <a:srgbClr val="A6B4C8"/>
+                </a:solidFill>
+                <a:latin typeface="Noto Sans SC"/>
+                <a:ea typeface="Noto Sans SC"/>
+                <a:cs typeface="Noto Sans SC"/>
+              </a:rPr>
+              <a:t>成员：王建乐、张晓行、钱博傲</a:t>
+            </a:r>
+            <a:endParaRPr sz="2000" b="0" dirty="0">
+              <a:solidFill>
+                <a:srgbClr val="A6B4C8"/>
+              </a:solidFill>
+              <a:latin typeface="Noto Sans SC"/>
+              <a:ea typeface="Noto Sans SC"/>
+              <a:cs typeface="Noto Sans SC"/>
+            </a:endParaRPr>
           </a:p>
         </p:txBody>
       </p:sp>
-      <p:sp>
-        <p:nvSpPr>
-          <p:cNvPr id="6" name="矩形: 圆角 5">
-            <a:extLst>
-              <a:ext uri="{FF2B5EF4-FFF2-40B4-BE49-F238E27FC236}">
-                <a16:creationId xmlns:a16="http://schemas.microsoft.com/office/drawing/2014/main" id="{98B83389-0104-4308-A921-A218EC68849A}"/>
-              </a:ext>
-            </a:extLst>
-          </p:cNvPr>
-          <p:cNvSpPr>
-            <a:spLocks noGrp="1"/>
-          </p:cNvSpPr>
-          <p:nvPr/>
-        </p:nvSpPr>
-        <p:spPr>
-          <a:xfrm>
-            <a:off x="590550" y="5657850"/>
-            <a:ext cx="1238250" cy="304800"/>
-          </a:xfrm>
-          <a:prstGeom prst="roundRect">
-            <a:avLst>
-              <a:gd name="adj" fmla="val 50000"/>
-            </a:avLst>
-          </a:prstGeom>
-          <a:solidFill>
-            <a:srgbClr val="16243B"/>
-          </a:solidFill>
-          <a:ln w="0">
-            <a:noFill/>
-            <a:prstDash val="solid"/>
-          </a:ln>
-        </p:spPr>
-      </p:sp>
-      <p:sp>
-        <p:nvSpPr>
-          <p:cNvPr id="7" name="矩形 6">
-            <a:extLst>
-              <a:ext uri="{FF2B5EF4-FFF2-40B4-BE49-F238E27FC236}">
-                <a16:creationId xmlns:a16="http://schemas.microsoft.com/office/drawing/2014/main" id="{B35165EC-FD49-4048-8000-5BD8834671DF}"/>
-              </a:ext>
-            </a:extLst>
-          </p:cNvPr>
-          <p:cNvSpPr>
-            <a:spLocks noGrp="1"/>
-          </p:cNvSpPr>
-          <p:nvPr/>
-        </p:nvSpPr>
-        <p:spPr>
-          <a:xfrm>
-            <a:off x="590550" y="5705475"/>
-            <a:ext cx="1238250" cy="200025"/>
-          </a:xfrm>
-          <a:prstGeom prst="rect">
-            <a:avLst/>
-          </a:prstGeom>
-          <a:noFill/>
-          <a:ln w="0">
-            <a:noFill/>
-          </a:ln>
-        </p:spPr>
-        <p:txBody>
-          <a:bodyPr anchor="ctr">
-            <a:normAutofit fontScale="80577" lnSpcReduction="20000"/>
-          </a:bodyPr>
-          <a:lstStyle/>
-          <a:p>
-            <a:pPr>
-              <a:defRPr sz="975" b="1">
-                <a:solidFill>
-                  <a:srgbClr val="A78BFA"/>
-                </a:solidFill>
-                <a:latin typeface="Noto Sans SC"/>
-                <a:ea typeface="Noto Sans SC"/>
-                <a:cs typeface="Noto Sans SC"/>
-              </a:defRPr>
-            </a:pPr>
-            <a:r>
-              <a:rPr sz="975" b="1">
-                <a:solidFill>
-                  <a:srgbClr val="A78BFA"/>
-                </a:solidFill>
-                <a:latin typeface="Noto Sans SC"/>
-                <a:ea typeface="Noto Sans SC"/>
-                <a:cs typeface="Noto Sans SC"/>
-              </a:rPr>
-              <a:t>IP v1.0</a:t>
-            </a:r>
-          </a:p>
-        </p:txBody>
-      </p:sp>
-      <p:sp>
-        <p:nvSpPr>
-          <p:cNvPr id="8" name="矩形: 圆角 7">
-            <a:extLst>
-              <a:ext uri="{FF2B5EF4-FFF2-40B4-BE49-F238E27FC236}">
-                <a16:creationId xmlns:a16="http://schemas.microsoft.com/office/drawing/2014/main" id="{941949D5-E755-4892-9B96-C5FCC17E93F3}"/>
-              </a:ext>
-            </a:extLst>
-          </p:cNvPr>
-          <p:cNvSpPr>
-            <a:spLocks noGrp="1"/>
-          </p:cNvSpPr>
-          <p:nvPr/>
-        </p:nvSpPr>
-        <p:spPr>
-          <a:xfrm>
-            <a:off x="1981200" y="5657850"/>
-            <a:ext cx="1428750" cy="304800"/>
-          </a:xfrm>
-          <a:prstGeom prst="roundRect">
-            <a:avLst>
-              <a:gd name="adj" fmla="val 50000"/>
-            </a:avLst>
-          </a:prstGeom>
-          <a:solidFill>
-            <a:srgbClr val="16243B"/>
-          </a:solidFill>
-          <a:ln w="0">
-            <a:noFill/>
-            <a:prstDash val="solid"/>
-          </a:ln>
-        </p:spPr>
-      </p:sp>
-      <p:sp>
-        <p:nvSpPr>
-          <p:cNvPr id="9" name="矩形 8">
-            <a:extLst>
-              <a:ext uri="{FF2B5EF4-FFF2-40B4-BE49-F238E27FC236}">
-                <a16:creationId xmlns:a16="http://schemas.microsoft.com/office/drawing/2014/main" id="{4E4CF627-F4CB-4E84-B009-85EA47FD5550}"/>
-              </a:ext>
-            </a:extLst>
-          </p:cNvPr>
-          <p:cNvSpPr>
-            <a:spLocks noGrp="1"/>
-          </p:cNvSpPr>
-          <p:nvPr/>
-        </p:nvSpPr>
-        <p:spPr>
-          <a:xfrm>
-            <a:off x="1981200" y="5705475"/>
-            <a:ext cx="1428750" cy="200025"/>
-          </a:xfrm>
-          <a:prstGeom prst="rect">
-            <a:avLst/>
-          </a:prstGeom>
-          <a:noFill/>
-          <a:ln w="0">
-            <a:noFill/>
-          </a:ln>
-        </p:spPr>
-        <p:txBody>
-          <a:bodyPr anchor="ctr">
-            <a:normAutofit fontScale="80577" lnSpcReduction="20000"/>
-          </a:bodyPr>
-          <a:lstStyle/>
-          <a:p>
-            <a:pPr>
-              <a:defRPr sz="975" b="1">
-                <a:solidFill>
-                  <a:srgbClr val="37D99A"/>
-                </a:solidFill>
-                <a:latin typeface="Noto Sans SC"/>
-                <a:ea typeface="Noto Sans SC"/>
-                <a:cs typeface="Noto Sans SC"/>
-              </a:defRPr>
-            </a:pPr>
-            <a:r>
-              <a:rPr sz="975" b="1">
-                <a:solidFill>
-                  <a:srgbClr val="37D99A"/>
-                </a:solidFill>
-                <a:latin typeface="Noto Sans SC"/>
-                <a:ea typeface="Noto Sans SC"/>
-                <a:cs typeface="Noto Sans SC"/>
-              </a:rPr>
-              <a:t>10×20 棋盘</a:t>
-            </a:r>
-          </a:p>
-        </p:txBody>
-      </p:sp>
-      <p:sp>
-        <p:nvSpPr>
-          <p:cNvPr id="10" name="矩形: 圆角 9">
-            <a:extLst>
-              <a:ext uri="{FF2B5EF4-FFF2-40B4-BE49-F238E27FC236}">
-                <a16:creationId xmlns:a16="http://schemas.microsoft.com/office/drawing/2014/main" id="{10CEFDAE-8E39-4495-8EAD-4E9EB8742169}"/>
-              </a:ext>
-            </a:extLst>
-          </p:cNvPr>
-          <p:cNvSpPr>
-            <a:spLocks noGrp="1"/>
-          </p:cNvSpPr>
-          <p:nvPr/>
-        </p:nvSpPr>
-        <p:spPr>
-          <a:xfrm>
-            <a:off x="3562350" y="5657850"/>
-            <a:ext cx="1524000" cy="304800"/>
-          </a:xfrm>
-          <a:prstGeom prst="roundRect">
-            <a:avLst>
-              <a:gd name="adj" fmla="val 50000"/>
-            </a:avLst>
-          </a:prstGeom>
-          <a:solidFill>
-            <a:srgbClr val="16243B"/>
-          </a:solidFill>
-          <a:ln w="0">
-            <a:noFill/>
-            <a:prstDash val="solid"/>
-          </a:ln>
-        </p:spPr>
-      </p:sp>
-      <p:sp>
-        <p:nvSpPr>
-          <p:cNvPr id="11" name="矩形 10">
-            <a:extLst>
-              <a:ext uri="{FF2B5EF4-FFF2-40B4-BE49-F238E27FC236}">
-                <a16:creationId xmlns:a16="http://schemas.microsoft.com/office/drawing/2014/main" id="{67110B24-3DE6-478C-9E7B-94654D3612AD}"/>
-              </a:ext>
-            </a:extLst>
-          </p:cNvPr>
-          <p:cNvSpPr>
-            <a:spLocks noGrp="1"/>
-          </p:cNvSpPr>
-          <p:nvPr/>
-        </p:nvSpPr>
-        <p:spPr>
-          <a:xfrm>
-            <a:off x="3562350" y="5705475"/>
-            <a:ext cx="1524000" cy="200025"/>
-          </a:xfrm>
-          <a:prstGeom prst="rect">
-            <a:avLst/>
-          </a:prstGeom>
-          <a:noFill/>
-          <a:ln w="0">
-            <a:noFill/>
-          </a:ln>
-        </p:spPr>
-        <p:txBody>
-          <a:bodyPr anchor="ctr">
-            <a:normAutofit fontScale="80577" lnSpcReduction="20000"/>
-          </a:bodyPr>
-          <a:lstStyle/>
-          <a:p>
-            <a:pPr>
-              <a:defRPr sz="975" b="1">
-                <a:solidFill>
-                  <a:srgbClr val="F5B942"/>
-                </a:solidFill>
-                <a:latin typeface="Noto Sans SC"/>
-                <a:ea typeface="Noto Sans SC"/>
-                <a:cs typeface="Noto Sans SC"/>
-              </a:defRPr>
-            </a:pPr>
-            <a:r>
-              <a:rPr sz="975" b="1">
-                <a:solidFill>
-                  <a:srgbClr val="F5B942"/>
-                </a:solidFill>
-                <a:latin typeface="Noto Sans SC"/>
-                <a:ea typeface="Noto Sans SC"/>
-                <a:cs typeface="Noto Sans SC"/>
-              </a:rPr>
-              <a:t>SPI + MMIO</a:t>
-            </a:r>
-          </a:p>
-        </p:txBody>
-      </p:sp>
-      <p:sp>
-        <p:nvSpPr>
-          <p:cNvPr id="12" name="矩形 11">
-            <a:extLst>
-              <a:ext uri="{FF2B5EF4-FFF2-40B4-BE49-F238E27FC236}">
-                <a16:creationId xmlns:a16="http://schemas.microsoft.com/office/drawing/2014/main" id="{18F4131C-F10F-47DB-BBD7-982B9DE66AB7}"/>
-              </a:ext>
-            </a:extLst>
-          </p:cNvPr>
-          <p:cNvSpPr>
-            <a:spLocks noGrp="1"/>
-          </p:cNvSpPr>
-          <p:nvPr/>
-        </p:nvSpPr>
-        <p:spPr>
-          <a:xfrm>
-            <a:off x="590550" y="6172200"/>
-            <a:ext cx="8096250" cy="228600"/>
-          </a:xfrm>
-          <a:prstGeom prst="rect">
-            <a:avLst/>
-          </a:prstGeom>
-          <a:noFill/>
-          <a:ln w="0">
-            <a:noFill/>
-          </a:ln>
-        </p:spPr>
-        <p:txBody>
-          <a:bodyPr anchor="t">
-            <a:normAutofit fontScale="93214" lnSpcReduction="10000"/>
-          </a:bodyPr>
-          <a:lstStyle/>
-          <a:p>
-            <a:pPr>
-              <a:defRPr sz="1050" b="0">
-                <a:solidFill>
-                  <a:srgbClr val="A6B4C8"/>
-                </a:solidFill>
-                <a:latin typeface="Noto Sans SC"/>
-                <a:ea typeface="Noto Sans SC"/>
-                <a:cs typeface="Noto Sans SC"/>
-              </a:defRPr>
-            </a:pPr>
-            <a:r>
-              <a:rPr sz="1050" b="0">
-                <a:solidFill>
-                  <a:srgbClr val="A6B4C8"/>
-                </a:solidFill>
-                <a:latin typeface="Noto Sans SC"/>
-                <a:ea typeface="Noto Sans SC"/>
-                <a:cs typeface="Noto Sans SC"/>
-              </a:rPr>
-              <a:t>成员：王建乐、张晓行、钱博傲    日期：2026 年 9 月</a:t>
-            </a:r>
-          </a:p>
-        </p:txBody>
-      </p:sp>
     </p:spTree>
-    <p:extLst>
-      <p:ext uri="{BB962C8B-B14F-4D97-AF65-F5344CB8AC3E}">
-        <p14:creationId xmlns:p14="http://schemas.microsoft.com/office/powerpoint/2010/main" val="2010829160"/>
-      </p:ext>
-    </p:extLst>
   </p:cSld>
   <p:clrMapOvr>
     <a:masterClrMapping/>
@@ -3133,13 +2724,7 @@
       </p:grpSpPr>
       <p:sp>
         <p:nvSpPr>
-          <p:cNvPr id="25" name="矩形 24">
-            <a:extLst>
-              <a:ext uri="{FF2B5EF4-FFF2-40B4-BE49-F238E27FC236}">
-                <a16:creationId xmlns:a16="http://schemas.microsoft.com/office/drawing/2014/main" id="{893FAB91-DC30-41A9-A7AA-CE2D9B5676B7}"/>
-              </a:ext>
-            </a:extLst>
-          </p:cNvPr>
+          <p:cNvPr id="25" name="矩形 24"/>
           <p:cNvSpPr>
             <a:spLocks noGrp="1"/>
           </p:cNvSpPr>
@@ -3185,18 +2770,20 @@
               </a:rPr>
               <a:t>核心算法</a:t>
             </a:r>
+            <a:endParaRPr sz="975" b="1">
+              <a:solidFill>
+                <a:srgbClr val="25D4E8"/>
+              </a:solidFill>
+              <a:latin typeface="Noto Sans SC"/>
+              <a:ea typeface="Noto Sans SC"/>
+              <a:cs typeface="Noto Sans SC"/>
+            </a:endParaRPr>
           </a:p>
         </p:txBody>
       </p:sp>
       <p:sp>
         <p:nvSpPr>
-          <p:cNvPr id="2" name="矩形 1">
-            <a:extLst>
-              <a:ext uri="{FF2B5EF4-FFF2-40B4-BE49-F238E27FC236}">
-                <a16:creationId xmlns:a16="http://schemas.microsoft.com/office/drawing/2014/main" id="{CDCB60C7-9FB0-43F0-A03E-C85DF293BDC0}"/>
-              </a:ext>
-            </a:extLst>
-          </p:cNvPr>
+          <p:cNvPr id="2" name="矩形 1"/>
           <p:cNvSpPr>
             <a:spLocks noGrp="1"/>
           </p:cNvSpPr>
@@ -3242,18 +2829,20 @@
               </a:rPr>
               <a:t>锁定、消行与蜂鸣器反馈</a:t>
             </a:r>
+            <a:endParaRPr sz="2475" b="1">
+              <a:solidFill>
+                <a:srgbClr val="EAF2FF"/>
+              </a:solidFill>
+              <a:latin typeface="Noto Sans SC"/>
+              <a:ea typeface="Noto Sans SC"/>
+              <a:cs typeface="Noto Sans SC"/>
+            </a:endParaRPr>
           </a:p>
         </p:txBody>
       </p:sp>
       <p:sp>
         <p:nvSpPr>
-          <p:cNvPr id="3" name="直接连接符 2">
-            <a:extLst>
-              <a:ext uri="{FF2B5EF4-FFF2-40B4-BE49-F238E27FC236}">
-                <a16:creationId xmlns:a16="http://schemas.microsoft.com/office/drawing/2014/main" id="{119D463D-250F-46E0-A214-892DACCA51CF}"/>
-              </a:ext>
-            </a:extLst>
-          </p:cNvPr>
+          <p:cNvPr id="3" name="直接连接符 2"/>
           <p:cNvSpPr>
             <a:spLocks noGrp="1"/>
           </p:cNvSpPr>
@@ -3278,13 +2867,7 @@
       </p:sp>
       <p:sp>
         <p:nvSpPr>
-          <p:cNvPr id="4" name="矩形 3">
-            <a:extLst>
-              <a:ext uri="{FF2B5EF4-FFF2-40B4-BE49-F238E27FC236}">
-                <a16:creationId xmlns:a16="http://schemas.microsoft.com/office/drawing/2014/main" id="{2F8B0E6F-21E5-4E0D-9804-2024847074B8}"/>
-              </a:ext>
-            </a:extLst>
-          </p:cNvPr>
+          <p:cNvPr id="4" name="矩形 3"/>
           <p:cNvSpPr>
             <a:spLocks noGrp="1"/>
           </p:cNvSpPr>
@@ -3330,18 +2913,20 @@
               </a:rPr>
               <a:t>09</a:t>
             </a:r>
+            <a:endParaRPr sz="825" b="0">
+              <a:solidFill>
+                <a:srgbClr val="A6B4C8"/>
+              </a:solidFill>
+              <a:latin typeface="Noto Sans SC"/>
+              <a:ea typeface="Noto Sans SC"/>
+              <a:cs typeface="Noto Sans SC"/>
+            </a:endParaRPr>
           </a:p>
         </p:txBody>
       </p:sp>
       <p:sp>
         <p:nvSpPr>
-          <p:cNvPr id="5" name="矩形: 圆角 4">
-            <a:extLst>
-              <a:ext uri="{FF2B5EF4-FFF2-40B4-BE49-F238E27FC236}">
-                <a16:creationId xmlns:a16="http://schemas.microsoft.com/office/drawing/2014/main" id="{07A1C762-327F-4656-93FF-756963037007}"/>
-              </a:ext>
-            </a:extLst>
-          </p:cNvPr>
+          <p:cNvPr id="5" name="矩形: 圆角 4"/>
           <p:cNvSpPr>
             <a:spLocks noGrp="1"/>
           </p:cNvSpPr>
@@ -3370,13 +2955,7 @@
       </p:sp>
       <p:sp>
         <p:nvSpPr>
-          <p:cNvPr id="6" name="矩形 5">
-            <a:extLst>
-              <a:ext uri="{FF2B5EF4-FFF2-40B4-BE49-F238E27FC236}">
-                <a16:creationId xmlns:a16="http://schemas.microsoft.com/office/drawing/2014/main" id="{6E7CABAD-7ECD-40F9-8655-0A094A23FC02}"/>
-              </a:ext>
-            </a:extLst>
-          </p:cNvPr>
+          <p:cNvPr id="6" name="矩形 5"/>
           <p:cNvSpPr>
             <a:spLocks noGrp="1"/>
           </p:cNvSpPr>
@@ -3422,18 +3001,20 @@
               </a:rPr>
               <a:t>无法继续下降</a:t>
             </a:r>
+            <a:endParaRPr sz="1350" b="1">
+              <a:solidFill>
+                <a:srgbClr val="F5B942"/>
+              </a:solidFill>
+              <a:latin typeface="Noto Sans SC"/>
+              <a:ea typeface="Noto Sans SC"/>
+              <a:cs typeface="Noto Sans SC"/>
+            </a:endParaRPr>
           </a:p>
         </p:txBody>
       </p:sp>
       <p:sp>
         <p:nvSpPr>
-          <p:cNvPr id="7" name="矩形 6">
-            <a:extLst>
-              <a:ext uri="{FF2B5EF4-FFF2-40B4-BE49-F238E27FC236}">
-                <a16:creationId xmlns:a16="http://schemas.microsoft.com/office/drawing/2014/main" id="{D2C48FF7-E3FA-4BAD-BC4B-FF135E57BAA4}"/>
-              </a:ext>
-            </a:extLst>
-          </p:cNvPr>
+          <p:cNvPr id="7" name="矩形 6"/>
           <p:cNvSpPr>
             <a:spLocks noGrp="1"/>
           </p:cNvSpPr>
@@ -3479,18 +3060,20 @@
               </a:rPr>
               <a:t>collision = blocked</a:t>
             </a:r>
+            <a:endParaRPr sz="975" b="0">
+              <a:solidFill>
+                <a:srgbClr val="A6B4C8"/>
+              </a:solidFill>
+              <a:latin typeface="Noto Sans SC"/>
+              <a:ea typeface="Noto Sans SC"/>
+              <a:cs typeface="Noto Sans SC"/>
+            </a:endParaRPr>
           </a:p>
         </p:txBody>
       </p:sp>
       <p:sp>
         <p:nvSpPr>
-          <p:cNvPr id="8" name="矩形: 圆角 7">
-            <a:extLst>
-              <a:ext uri="{FF2B5EF4-FFF2-40B4-BE49-F238E27FC236}">
-                <a16:creationId xmlns:a16="http://schemas.microsoft.com/office/drawing/2014/main" id="{E53C7BCB-D484-4559-9E7B-94BBDC03FEDA}"/>
-              </a:ext>
-            </a:extLst>
-          </p:cNvPr>
+          <p:cNvPr id="8" name="矩形: 圆角 7"/>
           <p:cNvSpPr>
             <a:spLocks noGrp="1"/>
           </p:cNvSpPr>
@@ -3519,13 +3102,7 @@
       </p:sp>
       <p:sp>
         <p:nvSpPr>
-          <p:cNvPr id="9" name="矩形 8">
-            <a:extLst>
-              <a:ext uri="{FF2B5EF4-FFF2-40B4-BE49-F238E27FC236}">
-                <a16:creationId xmlns:a16="http://schemas.microsoft.com/office/drawing/2014/main" id="{6BDBB580-F04A-4EDA-8126-754BC19E7539}"/>
-              </a:ext>
-            </a:extLst>
-          </p:cNvPr>
+          <p:cNvPr id="9" name="矩形 8"/>
           <p:cNvSpPr>
             <a:spLocks noGrp="1"/>
           </p:cNvSpPr>
@@ -3571,18 +3148,20 @@
               </a:rPr>
               <a:t>锁定方块</a:t>
             </a:r>
+            <a:endParaRPr sz="1350" b="1">
+              <a:solidFill>
+                <a:srgbClr val="25D4E8"/>
+              </a:solidFill>
+              <a:latin typeface="Noto Sans SC"/>
+              <a:ea typeface="Noto Sans SC"/>
+              <a:cs typeface="Noto Sans SC"/>
+            </a:endParaRPr>
           </a:p>
         </p:txBody>
       </p:sp>
       <p:sp>
         <p:nvSpPr>
-          <p:cNvPr id="10" name="矩形 9">
-            <a:extLst>
-              <a:ext uri="{FF2B5EF4-FFF2-40B4-BE49-F238E27FC236}">
-                <a16:creationId xmlns:a16="http://schemas.microsoft.com/office/drawing/2014/main" id="{D3B1E8EC-2DBD-43DC-B182-2C041DBFE097}"/>
-              </a:ext>
-            </a:extLst>
-          </p:cNvPr>
+          <p:cNvPr id="10" name="矩形 9"/>
           <p:cNvSpPr>
             <a:spLocks noGrp="1"/>
           </p:cNvSpPr>
@@ -3628,18 +3207,20 @@
               </a:rPr>
               <a:t>按位或写入固定棋盘</a:t>
             </a:r>
+            <a:endParaRPr sz="975" b="0">
+              <a:solidFill>
+                <a:srgbClr val="A6B4C8"/>
+              </a:solidFill>
+              <a:latin typeface="Noto Sans SC"/>
+              <a:ea typeface="Noto Sans SC"/>
+              <a:cs typeface="Noto Sans SC"/>
+            </a:endParaRPr>
           </a:p>
         </p:txBody>
       </p:sp>
       <p:sp>
         <p:nvSpPr>
-          <p:cNvPr id="11" name="矩形: 圆角 10">
-            <a:extLst>
-              <a:ext uri="{FF2B5EF4-FFF2-40B4-BE49-F238E27FC236}">
-                <a16:creationId xmlns:a16="http://schemas.microsoft.com/office/drawing/2014/main" id="{D4AFC2CF-4E9B-41E9-BCB4-FD4AD77A9A48}"/>
-              </a:ext>
-            </a:extLst>
-          </p:cNvPr>
+          <p:cNvPr id="11" name="矩形: 圆角 10"/>
           <p:cNvSpPr>
             <a:spLocks noGrp="1"/>
           </p:cNvSpPr>
@@ -3668,13 +3249,7 @@
       </p:sp>
       <p:sp>
         <p:nvSpPr>
-          <p:cNvPr id="12" name="矩形 11">
-            <a:extLst>
-              <a:ext uri="{FF2B5EF4-FFF2-40B4-BE49-F238E27FC236}">
-                <a16:creationId xmlns:a16="http://schemas.microsoft.com/office/drawing/2014/main" id="{0158F12F-F244-46B0-BF9A-50E3DB1D8406}"/>
-              </a:ext>
-            </a:extLst>
-          </p:cNvPr>
+          <p:cNvPr id="12" name="矩形 11"/>
           <p:cNvSpPr>
             <a:spLocks noGrp="1"/>
           </p:cNvSpPr>
@@ -3720,18 +3295,20 @@
               </a:rPr>
               <a:t>自底向上扫描</a:t>
             </a:r>
+            <a:endParaRPr sz="1350" b="1">
+              <a:solidFill>
+                <a:srgbClr val="4F83FF"/>
+              </a:solidFill>
+              <a:latin typeface="Noto Sans SC"/>
+              <a:ea typeface="Noto Sans SC"/>
+              <a:cs typeface="Noto Sans SC"/>
+            </a:endParaRPr>
           </a:p>
         </p:txBody>
       </p:sp>
       <p:sp>
         <p:nvSpPr>
-          <p:cNvPr id="13" name="矩形 12">
-            <a:extLst>
-              <a:ext uri="{FF2B5EF4-FFF2-40B4-BE49-F238E27FC236}">
-                <a16:creationId xmlns:a16="http://schemas.microsoft.com/office/drawing/2014/main" id="{5D63A0D8-C17C-4EAB-899C-688B11ECEAC9}"/>
-              </a:ext>
-            </a:extLst>
-          </p:cNvPr>
+          <p:cNvPr id="13" name="矩形 12"/>
           <p:cNvSpPr>
             <a:spLocks noGrp="1"/>
           </p:cNvSpPr>
@@ -3777,18 +3354,20 @@
               </a:rPr>
               <a:t>row == 0x3FF</a:t>
             </a:r>
+            <a:endParaRPr sz="975" b="0">
+              <a:solidFill>
+                <a:srgbClr val="A6B4C8"/>
+              </a:solidFill>
+              <a:latin typeface="Noto Sans SC"/>
+              <a:ea typeface="Noto Sans SC"/>
+              <a:cs typeface="Noto Sans SC"/>
+            </a:endParaRPr>
           </a:p>
         </p:txBody>
       </p:sp>
       <p:sp>
         <p:nvSpPr>
-          <p:cNvPr id="14" name="矩形: 圆角 13">
-            <a:extLst>
-              <a:ext uri="{FF2B5EF4-FFF2-40B4-BE49-F238E27FC236}">
-                <a16:creationId xmlns:a16="http://schemas.microsoft.com/office/drawing/2014/main" id="{3BBA298D-F685-4937-AF0D-0E0D845FF762}"/>
-              </a:ext>
-            </a:extLst>
-          </p:cNvPr>
+          <p:cNvPr id="14" name="矩形: 圆角 13"/>
           <p:cNvSpPr>
             <a:spLocks noGrp="1"/>
           </p:cNvSpPr>
@@ -3817,13 +3396,7 @@
       </p:sp>
       <p:sp>
         <p:nvSpPr>
-          <p:cNvPr id="15" name="矩形 14">
-            <a:extLst>
-              <a:ext uri="{FF2B5EF4-FFF2-40B4-BE49-F238E27FC236}">
-                <a16:creationId xmlns:a16="http://schemas.microsoft.com/office/drawing/2014/main" id="{2B77C417-F4E9-4162-AA05-EEC39B8A8491}"/>
-              </a:ext>
-            </a:extLst>
-          </p:cNvPr>
+          <p:cNvPr id="15" name="矩形 14"/>
           <p:cNvSpPr>
             <a:spLocks noGrp="1"/>
           </p:cNvSpPr>
@@ -3869,18 +3442,20 @@
               </a:rPr>
               <a:t>压缩与反馈</a:t>
             </a:r>
+            <a:endParaRPr sz="1350" b="1">
+              <a:solidFill>
+                <a:srgbClr val="37D99A"/>
+              </a:solidFill>
+              <a:latin typeface="Noto Sans SC"/>
+              <a:ea typeface="Noto Sans SC"/>
+              <a:cs typeface="Noto Sans SC"/>
+            </a:endParaRPr>
           </a:p>
         </p:txBody>
       </p:sp>
       <p:sp>
         <p:nvSpPr>
-          <p:cNvPr id="16" name="矩形 15">
-            <a:extLst>
-              <a:ext uri="{FF2B5EF4-FFF2-40B4-BE49-F238E27FC236}">
-                <a16:creationId xmlns:a16="http://schemas.microsoft.com/office/drawing/2014/main" id="{4723ECC8-1931-48EB-85EF-B7FA59FD6E36}"/>
-              </a:ext>
-            </a:extLst>
-          </p:cNvPr>
+          <p:cNvPr id="16" name="矩形 15"/>
           <p:cNvSpPr>
             <a:spLocks noGrp="1"/>
           </p:cNvSpPr>
@@ -3926,6 +3501,14 @@
               </a:rPr>
               <a:t>行下移、顶行清零、触发蜂鸣器</a:t>
             </a:r>
+            <a:endParaRPr sz="975" b="0">
+              <a:solidFill>
+                <a:srgbClr val="A6B4C8"/>
+              </a:solidFill>
+              <a:latin typeface="Noto Sans SC"/>
+              <a:ea typeface="Noto Sans SC"/>
+              <a:cs typeface="Noto Sans SC"/>
+            </a:endParaRPr>
           </a:p>
         </p:txBody>
       </p:sp>
@@ -4009,13 +3592,7 @@
       </p:cxnSp>
       <p:sp>
         <p:nvSpPr>
-          <p:cNvPr id="20" name="矩形: 圆角 19">
-            <a:extLst>
-              <a:ext uri="{FF2B5EF4-FFF2-40B4-BE49-F238E27FC236}">
-                <a16:creationId xmlns:a16="http://schemas.microsoft.com/office/drawing/2014/main" id="{F4087218-8BC9-4479-95FE-439898A88C2C}"/>
-              </a:ext>
-            </a:extLst>
-          </p:cNvPr>
+          <p:cNvPr id="20" name="矩形: 圆角 19"/>
           <p:cNvSpPr>
             <a:spLocks noGrp="1"/>
           </p:cNvSpPr>
@@ -4044,13 +3621,7 @@
       </p:sp>
       <p:sp>
         <p:nvSpPr>
-          <p:cNvPr id="21" name="矩形 20">
-            <a:extLst>
-              <a:ext uri="{FF2B5EF4-FFF2-40B4-BE49-F238E27FC236}">
-                <a16:creationId xmlns:a16="http://schemas.microsoft.com/office/drawing/2014/main" id="{DF6EA5AE-7D94-4678-998E-3C82665D6935}"/>
-              </a:ext>
-            </a:extLst>
-          </p:cNvPr>
+          <p:cNvPr id="21" name="矩形 20"/>
           <p:cNvSpPr>
             <a:spLocks noGrp="1"/>
           </p:cNvSpPr>
@@ -4080,9 +3651,9 @@
                 <a:solidFill>
                   <a:srgbClr val="EAF2FF"/>
                 </a:solidFill>
-                <a:latin typeface="Consolas"/>
-                <a:ea typeface="Consolas"/>
-                <a:cs typeface="Consolas"/>
+                <a:latin typeface="Consolas" panose="020B0609020204030204"/>
+                <a:ea typeface="Consolas" panose="020B0609020204030204"/>
+                <a:cs typeface="Consolas" panose="020B0609020204030204"/>
               </a:defRPr>
             </a:pPr>
             <a:r>
@@ -4090,12 +3661,20 @@
                 <a:solidFill>
                   <a:srgbClr val="EAF2FF"/>
                 </a:solidFill>
-                <a:latin typeface="Consolas"/>
-                <a:ea typeface="Consolas"/>
-                <a:cs typeface="Consolas"/>
+                <a:latin typeface="Consolas" panose="020B0609020204030204"/>
+                <a:ea typeface="Consolas" panose="020B0609020204030204"/>
+                <a:cs typeface="Consolas" panose="020B0609020204030204"/>
               </a:rPr>
               <a:t>clear_lines:</a:t>
             </a:r>
+            <a:endParaRPr sz="1275" b="0">
+              <a:solidFill>
+                <a:srgbClr val="EAF2FF"/>
+              </a:solidFill>
+              <a:latin typeface="Consolas" panose="020B0609020204030204"/>
+              <a:ea typeface="Consolas" panose="020B0609020204030204"/>
+              <a:cs typeface="Consolas" panose="020B0609020204030204"/>
+            </a:endParaRPr>
           </a:p>
           <a:p>
             <a:pPr>
@@ -4103,9 +3682,9 @@
                 <a:solidFill>
                   <a:srgbClr val="EAF2FF"/>
                 </a:solidFill>
-                <a:latin typeface="Consolas"/>
-                <a:ea typeface="Consolas"/>
-                <a:cs typeface="Consolas"/>
+                <a:latin typeface="Consolas" panose="020B0609020204030204"/>
+                <a:ea typeface="Consolas" panose="020B0609020204030204"/>
+                <a:cs typeface="Consolas" panose="020B0609020204030204"/>
               </a:defRPr>
             </a:pPr>
             <a:r>
@@ -4113,12 +3692,20 @@
                 <a:solidFill>
                   <a:srgbClr val="EAF2FF"/>
                 </a:solidFill>
-                <a:latin typeface="Consolas"/>
-                <a:ea typeface="Consolas"/>
-                <a:cs typeface="Consolas"/>
+                <a:latin typeface="Consolas" panose="020B0609020204030204"/>
+                <a:ea typeface="Consolas" panose="020B0609020204030204"/>
+                <a:cs typeface="Consolas" panose="020B0609020204030204"/>
               </a:rPr>
               <a:t>    li   t6, 0x3FF       # 满行</a:t>
             </a:r>
+            <a:endParaRPr sz="1275" b="0">
+              <a:solidFill>
+                <a:srgbClr val="EAF2FF"/>
+              </a:solidFill>
+              <a:latin typeface="Consolas" panose="020B0609020204030204"/>
+              <a:ea typeface="Consolas" panose="020B0609020204030204"/>
+              <a:cs typeface="Consolas" panose="020B0609020204030204"/>
+            </a:endParaRPr>
           </a:p>
           <a:p>
             <a:pPr>
@@ -4126,9 +3713,9 @@
                 <a:solidFill>
                   <a:srgbClr val="EAF2FF"/>
                 </a:solidFill>
-                <a:latin typeface="Consolas"/>
-                <a:ea typeface="Consolas"/>
-                <a:cs typeface="Consolas"/>
+                <a:latin typeface="Consolas" panose="020B0609020204030204"/>
+                <a:ea typeface="Consolas" panose="020B0609020204030204"/>
+                <a:cs typeface="Consolas" panose="020B0609020204030204"/>
               </a:defRPr>
             </a:pPr>
             <a:r>
@@ -4136,12 +3723,20 @@
                 <a:solidFill>
                   <a:srgbClr val="EAF2FF"/>
                 </a:solidFill>
-                <a:latin typeface="Consolas"/>
-                <a:ea typeface="Consolas"/>
-                <a:cs typeface="Consolas"/>
+                <a:latin typeface="Consolas" panose="020B0609020204030204"/>
+                <a:ea typeface="Consolas" panose="020B0609020204030204"/>
+                <a:cs typeface="Consolas" panose="020B0609020204030204"/>
               </a:rPr>
               <a:t>    bne  t3, t6, clear_not_full</a:t>
             </a:r>
+            <a:endParaRPr sz="1275" b="0">
+              <a:solidFill>
+                <a:srgbClr val="EAF2FF"/>
+              </a:solidFill>
+              <a:latin typeface="Consolas" panose="020B0609020204030204"/>
+              <a:ea typeface="Consolas" panose="020B0609020204030204"/>
+              <a:cs typeface="Consolas" panose="020B0609020204030204"/>
+            </a:endParaRPr>
           </a:p>
           <a:p>
             <a:pPr>
@@ -4149,9 +3744,9 @@
                 <a:solidFill>
                   <a:srgbClr val="EAF2FF"/>
                 </a:solidFill>
-                <a:latin typeface="Consolas"/>
-                <a:ea typeface="Consolas"/>
-                <a:cs typeface="Consolas"/>
+                <a:latin typeface="Consolas" panose="020B0609020204030204"/>
+                <a:ea typeface="Consolas" panose="020B0609020204030204"/>
+                <a:cs typeface="Consolas" panose="020B0609020204030204"/>
               </a:defRPr>
             </a:pPr>
             <a:r>
@@ -4159,12 +3754,20 @@
                 <a:solidFill>
                   <a:srgbClr val="EAF2FF"/>
                 </a:solidFill>
-                <a:latin typeface="Consolas"/>
-                <a:ea typeface="Consolas"/>
-                <a:cs typeface="Consolas"/>
+                <a:latin typeface="Consolas" panose="020B0609020204030204"/>
+                <a:ea typeface="Consolas" panose="020B0609020204030204"/>
+                <a:cs typeface="Consolas" panose="020B0609020204030204"/>
               </a:rPr>
               <a:t>    ...                   # 上方各行向下搬移</a:t>
             </a:r>
+            <a:endParaRPr sz="1275" b="0">
+              <a:solidFill>
+                <a:srgbClr val="EAF2FF"/>
+              </a:solidFill>
+              <a:latin typeface="Consolas" panose="020B0609020204030204"/>
+              <a:ea typeface="Consolas" panose="020B0609020204030204"/>
+              <a:cs typeface="Consolas" panose="020B0609020204030204"/>
+            </a:endParaRPr>
           </a:p>
           <a:p>
             <a:pPr>
@@ -4172,9 +3775,9 @@
                 <a:solidFill>
                   <a:srgbClr val="EAF2FF"/>
                 </a:solidFill>
-                <a:latin typeface="Consolas"/>
-                <a:ea typeface="Consolas"/>
-                <a:cs typeface="Consolas"/>
+                <a:latin typeface="Consolas" panose="020B0609020204030204"/>
+                <a:ea typeface="Consolas" panose="020B0609020204030204"/>
+                <a:cs typeface="Consolas" panose="020B0609020204030204"/>
               </a:defRPr>
             </a:pPr>
             <a:r>
@@ -4182,24 +3785,26 @@
                 <a:solidFill>
                   <a:srgbClr val="EAF2FF"/>
                 </a:solidFill>
-                <a:latin typeface="Consolas"/>
-                <a:ea typeface="Consolas"/>
-                <a:cs typeface="Consolas"/>
+                <a:latin typeface="Consolas" panose="020B0609020204030204"/>
+                <a:ea typeface="Consolas" panose="020B0609020204030204"/>
+                <a:cs typeface="Consolas" panose="020B0609020204030204"/>
               </a:rPr>
               <a:t>    sw   t0, 56(s0)       # BUZZER_TRIGGER</a:t>
             </a:r>
+            <a:endParaRPr sz="1275" b="0">
+              <a:solidFill>
+                <a:srgbClr val="EAF2FF"/>
+              </a:solidFill>
+              <a:latin typeface="Consolas" panose="020B0609020204030204"/>
+              <a:ea typeface="Consolas" panose="020B0609020204030204"/>
+              <a:cs typeface="Consolas" panose="020B0609020204030204"/>
+            </a:endParaRPr>
           </a:p>
         </p:txBody>
       </p:sp>
       <p:sp>
         <p:nvSpPr>
-          <p:cNvPr id="22" name="矩形 21">
-            <a:extLst>
-              <a:ext uri="{FF2B5EF4-FFF2-40B4-BE49-F238E27FC236}">
-                <a16:creationId xmlns:a16="http://schemas.microsoft.com/office/drawing/2014/main" id="{D5C9D58D-F586-426A-BC45-84D87BA58AC7}"/>
-              </a:ext>
-            </a:extLst>
-          </p:cNvPr>
+          <p:cNvPr id="22" name="矩形 21"/>
           <p:cNvSpPr>
             <a:spLocks noGrp="1"/>
           </p:cNvSpPr>
@@ -4245,6 +3850,14 @@
               </a:rPr>
               <a:t>蜂鸣器硬件输出</a:t>
             </a:r>
+            <a:endParaRPr sz="1650" b="1">
+              <a:solidFill>
+                <a:srgbClr val="F5B942"/>
+              </a:solidFill>
+              <a:latin typeface="Noto Sans SC"/>
+              <a:ea typeface="Noto Sans SC"/>
+              <a:cs typeface="Noto Sans SC"/>
+            </a:endParaRPr>
           </a:p>
           <a:p>
             <a:pPr>
@@ -4268,6 +3881,14 @@
               </a:rPr>
               <a:t>约 2 kHz</a:t>
             </a:r>
+            <a:endParaRPr sz="1650" b="1">
+              <a:solidFill>
+                <a:srgbClr val="F5B942"/>
+              </a:solidFill>
+              <a:latin typeface="Noto Sans SC"/>
+              <a:ea typeface="Noto Sans SC"/>
+              <a:cs typeface="Noto Sans SC"/>
+            </a:endParaRPr>
           </a:p>
           <a:p>
             <a:pPr>
@@ -4291,18 +3912,20 @@
               </a:rPr>
               <a:t>约 120 ms</a:t>
             </a:r>
+            <a:endParaRPr sz="1650" b="1">
+              <a:solidFill>
+                <a:srgbClr val="F5B942"/>
+              </a:solidFill>
+              <a:latin typeface="Noto Sans SC"/>
+              <a:ea typeface="Noto Sans SC"/>
+              <a:cs typeface="Noto Sans SC"/>
+            </a:endParaRPr>
           </a:p>
         </p:txBody>
       </p:sp>
       <p:sp>
         <p:nvSpPr>
-          <p:cNvPr id="23" name="矩形 22">
-            <a:extLst>
-              <a:ext uri="{FF2B5EF4-FFF2-40B4-BE49-F238E27FC236}">
-                <a16:creationId xmlns:a16="http://schemas.microsoft.com/office/drawing/2014/main" id="{23B2F12B-4F81-46F0-9D4A-02C6684D57DD}"/>
-              </a:ext>
-            </a:extLst>
-          </p:cNvPr>
+          <p:cNvPr id="23" name="矩形 22"/>
           <p:cNvSpPr>
             <a:spLocks noGrp="1"/>
           </p:cNvSpPr>
@@ -4327,13 +3950,7 @@
       </p:sp>
       <p:sp>
         <p:nvSpPr>
-          <p:cNvPr id="24" name="矩形 23">
-            <a:extLst>
-              <a:ext uri="{FF2B5EF4-FFF2-40B4-BE49-F238E27FC236}">
-                <a16:creationId xmlns:a16="http://schemas.microsoft.com/office/drawing/2014/main" id="{A9E42C69-7B5E-45C5-8753-E48B2C3C5C7C}"/>
-              </a:ext>
-            </a:extLst>
-          </p:cNvPr>
+          <p:cNvPr id="24" name="矩形 23"/>
           <p:cNvSpPr>
             <a:spLocks noGrp="1"/>
           </p:cNvSpPr>
@@ -4379,15 +3996,18 @@
               </a:rPr>
               <a:t>10</a:t>
             </a:r>
+            <a:endParaRPr sz="825" b="0">
+              <a:solidFill>
+                <a:srgbClr val="A6B4C8"/>
+              </a:solidFill>
+              <a:latin typeface="Noto Sans SC"/>
+              <a:ea typeface="Noto Sans SC"/>
+              <a:cs typeface="Noto Sans SC"/>
+            </a:endParaRPr>
           </a:p>
         </p:txBody>
       </p:sp>
     </p:spTree>
-    <p:extLst>
-      <p:ext uri="{BB962C8B-B14F-4D97-AF65-F5344CB8AC3E}">
-        <p14:creationId xmlns:p14="http://schemas.microsoft.com/office/powerpoint/2010/main" val="212172286"/>
-      </p:ext>
-    </p:extLst>
   </p:cSld>
   <p:clrMapOvr>
     <a:masterClrMapping/>
@@ -4422,13 +4042,7 @@
       </p:grpSpPr>
       <p:sp>
         <p:nvSpPr>
-          <p:cNvPr id="35" name="矩形 34">
-            <a:extLst>
-              <a:ext uri="{FF2B5EF4-FFF2-40B4-BE49-F238E27FC236}">
-                <a16:creationId xmlns:a16="http://schemas.microsoft.com/office/drawing/2014/main" id="{40E04417-A78D-46D2-B03A-0B2BF6B1EC7D}"/>
-              </a:ext>
-            </a:extLst>
-          </p:cNvPr>
+          <p:cNvPr id="35" name="矩形 34"/>
           <p:cNvSpPr>
             <a:spLocks noGrp="1"/>
           </p:cNvSpPr>
@@ -4474,18 +4088,20 @@
               </a:rPr>
               <a:t>显示刷新</a:t>
             </a:r>
+            <a:endParaRPr sz="975" b="1">
+              <a:solidFill>
+                <a:srgbClr val="25D4E8"/>
+              </a:solidFill>
+              <a:latin typeface="Noto Sans SC"/>
+              <a:ea typeface="Noto Sans SC"/>
+              <a:cs typeface="Noto Sans SC"/>
+            </a:endParaRPr>
           </a:p>
         </p:txBody>
       </p:sp>
       <p:sp>
         <p:nvSpPr>
-          <p:cNvPr id="2" name="矩形 1">
-            <a:extLst>
-              <a:ext uri="{FF2B5EF4-FFF2-40B4-BE49-F238E27FC236}">
-                <a16:creationId xmlns:a16="http://schemas.microsoft.com/office/drawing/2014/main" id="{7D7A63C2-BAAD-443B-B42E-FC031FA3B53C}"/>
-              </a:ext>
-            </a:extLst>
-          </p:cNvPr>
+          <p:cNvPr id="2" name="矩形 1"/>
           <p:cNvSpPr>
             <a:spLocks noGrp="1"/>
           </p:cNvSpPr>
@@ -4531,18 +4147,20 @@
               </a:rPr>
               <a:t>棋盘上传与硬件像素映射</a:t>
             </a:r>
+            <a:endParaRPr sz="2475" b="1">
+              <a:solidFill>
+                <a:srgbClr val="EAF2FF"/>
+              </a:solidFill>
+              <a:latin typeface="Noto Sans SC"/>
+              <a:ea typeface="Noto Sans SC"/>
+              <a:cs typeface="Noto Sans SC"/>
+            </a:endParaRPr>
           </a:p>
         </p:txBody>
       </p:sp>
       <p:sp>
         <p:nvSpPr>
-          <p:cNvPr id="3" name="直接连接符 2">
-            <a:extLst>
-              <a:ext uri="{FF2B5EF4-FFF2-40B4-BE49-F238E27FC236}">
-                <a16:creationId xmlns:a16="http://schemas.microsoft.com/office/drawing/2014/main" id="{15C40B30-76CE-42FA-AD25-9C0AAD284514}"/>
-              </a:ext>
-            </a:extLst>
-          </p:cNvPr>
+          <p:cNvPr id="3" name="直接连接符 2"/>
           <p:cNvSpPr>
             <a:spLocks noGrp="1"/>
           </p:cNvSpPr>
@@ -4567,13 +4185,7 @@
       </p:sp>
       <p:sp>
         <p:nvSpPr>
-          <p:cNvPr id="4" name="矩形 3">
-            <a:extLst>
-              <a:ext uri="{FF2B5EF4-FFF2-40B4-BE49-F238E27FC236}">
-                <a16:creationId xmlns:a16="http://schemas.microsoft.com/office/drawing/2014/main" id="{CC916440-0CF9-4E75-9551-ACDE98F5C9E3}"/>
-              </a:ext>
-            </a:extLst>
-          </p:cNvPr>
+          <p:cNvPr id="4" name="矩形 3"/>
           <p:cNvSpPr>
             <a:spLocks noGrp="1"/>
           </p:cNvSpPr>
@@ -4619,18 +4231,20 @@
               </a:rPr>
               <a:t>10</a:t>
             </a:r>
+            <a:endParaRPr sz="825" b="0">
+              <a:solidFill>
+                <a:srgbClr val="A6B4C8"/>
+              </a:solidFill>
+              <a:latin typeface="Noto Sans SC"/>
+              <a:ea typeface="Noto Sans SC"/>
+              <a:cs typeface="Noto Sans SC"/>
+            </a:endParaRPr>
           </a:p>
         </p:txBody>
       </p:sp>
       <p:sp>
         <p:nvSpPr>
-          <p:cNvPr id="5" name="矩形: 圆角 4">
-            <a:extLst>
-              <a:ext uri="{FF2B5EF4-FFF2-40B4-BE49-F238E27FC236}">
-                <a16:creationId xmlns:a16="http://schemas.microsoft.com/office/drawing/2014/main" id="{2C8E4693-AC8F-46E8-8223-D3D1CD5DFD91}"/>
-              </a:ext>
-            </a:extLst>
-          </p:cNvPr>
+          <p:cNvPr id="5" name="矩形: 圆角 4"/>
           <p:cNvSpPr>
             <a:spLocks noGrp="1"/>
           </p:cNvSpPr>
@@ -4659,13 +4273,7 @@
       </p:sp>
       <p:sp>
         <p:nvSpPr>
-          <p:cNvPr id="6" name="矩形 5">
-            <a:extLst>
-              <a:ext uri="{FF2B5EF4-FFF2-40B4-BE49-F238E27FC236}">
-                <a16:creationId xmlns:a16="http://schemas.microsoft.com/office/drawing/2014/main" id="{854AB2A2-A26C-45DF-9751-5EAB823BE63A}"/>
-              </a:ext>
-            </a:extLst>
-          </p:cNvPr>
+          <p:cNvPr id="6" name="矩形 5"/>
           <p:cNvSpPr>
             <a:spLocks noGrp="1"/>
           </p:cNvSpPr>
@@ -4711,18 +4319,20 @@
               </a:rPr>
               <a:t>合成帧</a:t>
             </a:r>
+            <a:endParaRPr sz="1350" b="1">
+              <a:solidFill>
+                <a:srgbClr val="25D4E8"/>
+              </a:solidFill>
+              <a:latin typeface="Noto Sans SC"/>
+              <a:ea typeface="Noto Sans SC"/>
+              <a:cs typeface="Noto Sans SC"/>
+            </a:endParaRPr>
           </a:p>
         </p:txBody>
       </p:sp>
       <p:sp>
         <p:nvSpPr>
-          <p:cNvPr id="7" name="矩形 6">
-            <a:extLst>
-              <a:ext uri="{FF2B5EF4-FFF2-40B4-BE49-F238E27FC236}">
-                <a16:creationId xmlns:a16="http://schemas.microsoft.com/office/drawing/2014/main" id="{340148A7-11D1-4BCC-80C2-9350DC1BB972}"/>
-              </a:ext>
-            </a:extLst>
-          </p:cNvPr>
+          <p:cNvPr id="7" name="矩形 6"/>
           <p:cNvSpPr>
             <a:spLocks noGrp="1"/>
           </p:cNvSpPr>
@@ -4768,18 +4378,20 @@
               </a:rPr>
               <a:t>固定棋盘 + 活动方块</a:t>
             </a:r>
+            <a:endParaRPr sz="975" b="0">
+              <a:solidFill>
+                <a:srgbClr val="A6B4C8"/>
+              </a:solidFill>
+              <a:latin typeface="Noto Sans SC"/>
+              <a:ea typeface="Noto Sans SC"/>
+              <a:cs typeface="Noto Sans SC"/>
+            </a:endParaRPr>
           </a:p>
         </p:txBody>
       </p:sp>
       <p:sp>
         <p:nvSpPr>
-          <p:cNvPr id="8" name="矩形: 圆角 7">
-            <a:extLst>
-              <a:ext uri="{FF2B5EF4-FFF2-40B4-BE49-F238E27FC236}">
-                <a16:creationId xmlns:a16="http://schemas.microsoft.com/office/drawing/2014/main" id="{FC22877A-D9AD-442F-850F-84F6609AE17C}"/>
-              </a:ext>
-            </a:extLst>
-          </p:cNvPr>
+          <p:cNvPr id="8" name="矩形: 圆角 7"/>
           <p:cNvSpPr>
             <a:spLocks noGrp="1"/>
           </p:cNvSpPr>
@@ -4808,13 +4420,7 @@
       </p:sp>
       <p:sp>
         <p:nvSpPr>
-          <p:cNvPr id="9" name="矩形 8">
-            <a:extLst>
-              <a:ext uri="{FF2B5EF4-FFF2-40B4-BE49-F238E27FC236}">
-                <a16:creationId xmlns:a16="http://schemas.microsoft.com/office/drawing/2014/main" id="{5784FD81-7401-4495-ADDC-9C2AEEC1C056}"/>
-              </a:ext>
-            </a:extLst>
-          </p:cNvPr>
+          <p:cNvPr id="9" name="矩形 8"/>
           <p:cNvSpPr>
             <a:spLocks noGrp="1"/>
           </p:cNvSpPr>
@@ -4860,18 +4466,20 @@
               </a:rPr>
               <a:t>20 行上传</a:t>
             </a:r>
+            <a:endParaRPr sz="1350" b="1">
+              <a:solidFill>
+                <a:srgbClr val="4F83FF"/>
+              </a:solidFill>
+              <a:latin typeface="Noto Sans SC"/>
+              <a:ea typeface="Noto Sans SC"/>
+              <a:cs typeface="Noto Sans SC"/>
+            </a:endParaRPr>
           </a:p>
         </p:txBody>
       </p:sp>
       <p:sp>
         <p:nvSpPr>
-          <p:cNvPr id="10" name="矩形 9">
-            <a:extLst>
-              <a:ext uri="{FF2B5EF4-FFF2-40B4-BE49-F238E27FC236}">
-                <a16:creationId xmlns:a16="http://schemas.microsoft.com/office/drawing/2014/main" id="{1D73367B-99D7-4F29-B5AA-5A3A73C47A8A}"/>
-              </a:ext>
-            </a:extLst>
-          </p:cNvPr>
+          <p:cNvPr id="10" name="矩形 9"/>
           <p:cNvSpPr>
             <a:spLocks noGrp="1"/>
           </p:cNvSpPr>
@@ -4917,18 +4525,20 @@
               </a:rPr>
               <a:t>LCD_GAME_ROW</a:t>
             </a:r>
+            <a:endParaRPr sz="975" b="0">
+              <a:solidFill>
+                <a:srgbClr val="A6B4C8"/>
+              </a:solidFill>
+              <a:latin typeface="Noto Sans SC"/>
+              <a:ea typeface="Noto Sans SC"/>
+              <a:cs typeface="Noto Sans SC"/>
+            </a:endParaRPr>
           </a:p>
         </p:txBody>
       </p:sp>
       <p:sp>
         <p:nvSpPr>
-          <p:cNvPr id="11" name="矩形: 圆角 10">
-            <a:extLst>
-              <a:ext uri="{FF2B5EF4-FFF2-40B4-BE49-F238E27FC236}">
-                <a16:creationId xmlns:a16="http://schemas.microsoft.com/office/drawing/2014/main" id="{49F28111-087A-4F3E-8742-6EBC878E43A3}"/>
-              </a:ext>
-            </a:extLst>
-          </p:cNvPr>
+          <p:cNvPr id="11" name="矩形: 圆角 10"/>
           <p:cNvSpPr>
             <a:spLocks noGrp="1"/>
           </p:cNvSpPr>
@@ -4957,13 +4567,7 @@
       </p:sp>
       <p:sp>
         <p:nvSpPr>
-          <p:cNvPr id="12" name="矩形 11">
-            <a:extLst>
-              <a:ext uri="{FF2B5EF4-FFF2-40B4-BE49-F238E27FC236}">
-                <a16:creationId xmlns:a16="http://schemas.microsoft.com/office/drawing/2014/main" id="{94879E7F-4C82-441E-A047-F215B6A2694B}"/>
-              </a:ext>
-            </a:extLst>
-          </p:cNvPr>
+          <p:cNvPr id="12" name="矩形 11"/>
           <p:cNvSpPr>
             <a:spLocks noGrp="1"/>
           </p:cNvSpPr>
@@ -5009,18 +4613,20 @@
               </a:rPr>
               <a:t>刷新请求</a:t>
             </a:r>
+            <a:endParaRPr sz="1350" b="1">
+              <a:solidFill>
+                <a:srgbClr val="37D99A"/>
+              </a:solidFill>
+              <a:latin typeface="Noto Sans SC"/>
+              <a:ea typeface="Noto Sans SC"/>
+              <a:cs typeface="Noto Sans SC"/>
+            </a:endParaRPr>
           </a:p>
         </p:txBody>
       </p:sp>
       <p:sp>
         <p:nvSpPr>
-          <p:cNvPr id="13" name="矩形 12">
-            <a:extLst>
-              <a:ext uri="{FF2B5EF4-FFF2-40B4-BE49-F238E27FC236}">
-                <a16:creationId xmlns:a16="http://schemas.microsoft.com/office/drawing/2014/main" id="{F97DD6B5-BA5C-451B-AADB-21CEC7292740}"/>
-              </a:ext>
-            </a:extLst>
-          </p:cNvPr>
+          <p:cNvPr id="13" name="矩形 12"/>
           <p:cNvSpPr>
             <a:spLocks noGrp="1"/>
           </p:cNvSpPr>
@@ -5066,18 +4672,20 @@
               </a:rPr>
               <a:t>LCD_GAME_REFRESH</a:t>
             </a:r>
+            <a:endParaRPr sz="975" b="0">
+              <a:solidFill>
+                <a:srgbClr val="A6B4C8"/>
+              </a:solidFill>
+              <a:latin typeface="Noto Sans SC"/>
+              <a:ea typeface="Noto Sans SC"/>
+              <a:cs typeface="Noto Sans SC"/>
+            </a:endParaRPr>
           </a:p>
         </p:txBody>
       </p:sp>
       <p:sp>
         <p:nvSpPr>
-          <p:cNvPr id="14" name="矩形: 圆角 13">
-            <a:extLst>
-              <a:ext uri="{FF2B5EF4-FFF2-40B4-BE49-F238E27FC236}">
-                <a16:creationId xmlns:a16="http://schemas.microsoft.com/office/drawing/2014/main" id="{34D122C9-9EDE-45FF-B10B-0D6EB1DC1B94}"/>
-              </a:ext>
-            </a:extLst>
-          </p:cNvPr>
+          <p:cNvPr id="14" name="矩形: 圆角 13"/>
           <p:cNvSpPr>
             <a:spLocks noGrp="1"/>
           </p:cNvSpPr>
@@ -5106,13 +4714,7 @@
       </p:sp>
       <p:sp>
         <p:nvSpPr>
-          <p:cNvPr id="15" name="矩形 14">
-            <a:extLst>
-              <a:ext uri="{FF2B5EF4-FFF2-40B4-BE49-F238E27FC236}">
-                <a16:creationId xmlns:a16="http://schemas.microsoft.com/office/drawing/2014/main" id="{5607DFD9-D63C-48D9-8773-0C7EF07107A3}"/>
-              </a:ext>
-            </a:extLst>
-          </p:cNvPr>
+          <p:cNvPr id="15" name="矩形 14"/>
           <p:cNvSpPr>
             <a:spLocks noGrp="1"/>
           </p:cNvSpPr>
@@ -5158,18 +4760,20 @@
               </a:rPr>
               <a:t>硬件映射</a:t>
             </a:r>
+            <a:endParaRPr sz="1350" b="1">
+              <a:solidFill>
+                <a:srgbClr val="A78BFA"/>
+              </a:solidFill>
+              <a:latin typeface="Noto Sans SC"/>
+              <a:ea typeface="Noto Sans SC"/>
+              <a:cs typeface="Noto Sans SC"/>
+            </a:endParaRPr>
           </a:p>
         </p:txBody>
       </p:sp>
       <p:sp>
         <p:nvSpPr>
-          <p:cNvPr id="16" name="矩形 15">
-            <a:extLst>
-              <a:ext uri="{FF2B5EF4-FFF2-40B4-BE49-F238E27FC236}">
-                <a16:creationId xmlns:a16="http://schemas.microsoft.com/office/drawing/2014/main" id="{574B8FBF-3C50-4E05-B4F8-0DCF6723A230}"/>
-              </a:ext>
-            </a:extLst>
-          </p:cNvPr>
+          <p:cNvPr id="16" name="矩形 15"/>
           <p:cNvSpPr>
             <a:spLocks noGrp="1"/>
           </p:cNvSpPr>
@@ -5215,6 +4819,14 @@
               </a:rPr>
               <a:t>2 行 / page</a:t>
             </a:r>
+            <a:endParaRPr sz="975" b="0">
+              <a:solidFill>
+                <a:srgbClr val="A6B4C8"/>
+              </a:solidFill>
+              <a:latin typeface="Noto Sans SC"/>
+              <a:ea typeface="Noto Sans SC"/>
+              <a:cs typeface="Noto Sans SC"/>
+            </a:endParaRPr>
           </a:p>
           <a:p>
             <a:pPr>
@@ -5238,18 +4850,20 @@
               </a:rPr>
               <a:t>8 列块 + 2 列间隔</a:t>
             </a:r>
+            <a:endParaRPr sz="975" b="0">
+              <a:solidFill>
+                <a:srgbClr val="A6B4C8"/>
+              </a:solidFill>
+              <a:latin typeface="Noto Sans SC"/>
+              <a:ea typeface="Noto Sans SC"/>
+              <a:cs typeface="Noto Sans SC"/>
+            </a:endParaRPr>
           </a:p>
         </p:txBody>
       </p:sp>
       <p:sp>
         <p:nvSpPr>
-          <p:cNvPr id="17" name="矩形: 圆角 16">
-            <a:extLst>
-              <a:ext uri="{FF2B5EF4-FFF2-40B4-BE49-F238E27FC236}">
-                <a16:creationId xmlns:a16="http://schemas.microsoft.com/office/drawing/2014/main" id="{837A8EDE-70AF-4167-88CE-B1F6EAAAF53E}"/>
-              </a:ext>
-            </a:extLst>
-          </p:cNvPr>
+          <p:cNvPr id="17" name="矩形: 圆角 16"/>
           <p:cNvSpPr>
             <a:spLocks noGrp="1"/>
           </p:cNvSpPr>
@@ -5278,13 +4892,7 @@
       </p:sp>
       <p:sp>
         <p:nvSpPr>
-          <p:cNvPr id="18" name="矩形 17">
-            <a:extLst>
-              <a:ext uri="{FF2B5EF4-FFF2-40B4-BE49-F238E27FC236}">
-                <a16:creationId xmlns:a16="http://schemas.microsoft.com/office/drawing/2014/main" id="{8711711C-61BA-4F35-8E4D-206E1B2627FD}"/>
-              </a:ext>
-            </a:extLst>
-          </p:cNvPr>
+          <p:cNvPr id="18" name="矩形 17"/>
           <p:cNvSpPr>
             <a:spLocks noGrp="1"/>
           </p:cNvSpPr>
@@ -5330,18 +4938,20 @@
               </a:rPr>
               <a:t>SPI</a:t>
             </a:r>
+            <a:endParaRPr sz="1350" b="1">
+              <a:solidFill>
+                <a:srgbClr val="F5B942"/>
+              </a:solidFill>
+              <a:latin typeface="Noto Sans SC"/>
+              <a:ea typeface="Noto Sans SC"/>
+              <a:cs typeface="Noto Sans SC"/>
+            </a:endParaRPr>
           </a:p>
         </p:txBody>
       </p:sp>
       <p:sp>
         <p:nvSpPr>
-          <p:cNvPr id="19" name="矩形 18">
-            <a:extLst>
-              <a:ext uri="{FF2B5EF4-FFF2-40B4-BE49-F238E27FC236}">
-                <a16:creationId xmlns:a16="http://schemas.microsoft.com/office/drawing/2014/main" id="{601F92DF-8088-4767-B61F-F1893B8C5624}"/>
-              </a:ext>
-            </a:extLst>
-          </p:cNvPr>
+          <p:cNvPr id="19" name="矩形 18"/>
           <p:cNvSpPr>
             <a:spLocks noGrp="1"/>
           </p:cNvSpPr>
@@ -5387,6 +4997,14 @@
               </a:rPr>
               <a:t>页面与列数据</a:t>
             </a:r>
+            <a:endParaRPr sz="975" b="0">
+              <a:solidFill>
+                <a:srgbClr val="A6B4C8"/>
+              </a:solidFill>
+              <a:latin typeface="Noto Sans SC"/>
+              <a:ea typeface="Noto Sans SC"/>
+              <a:cs typeface="Noto Sans SC"/>
+            </a:endParaRPr>
           </a:p>
         </p:txBody>
       </p:sp>
@@ -5496,13 +5114,7 @@
       </p:cxnSp>
       <p:sp>
         <p:nvSpPr>
-          <p:cNvPr id="24" name="矩形: 圆角 23">
-            <a:extLst>
-              <a:ext uri="{FF2B5EF4-FFF2-40B4-BE49-F238E27FC236}">
-                <a16:creationId xmlns:a16="http://schemas.microsoft.com/office/drawing/2014/main" id="{B2FF6D28-C72B-44D2-806D-8F055065F02D}"/>
-              </a:ext>
-            </a:extLst>
-          </p:cNvPr>
+          <p:cNvPr id="24" name="矩形: 圆角 23"/>
           <p:cNvSpPr>
             <a:spLocks noGrp="1"/>
           </p:cNvSpPr>
@@ -5531,13 +5143,7 @@
       </p:sp>
       <p:sp>
         <p:nvSpPr>
-          <p:cNvPr id="25" name="矩形: 圆角 24">
-            <a:extLst>
-              <a:ext uri="{FF2B5EF4-FFF2-40B4-BE49-F238E27FC236}">
-                <a16:creationId xmlns:a16="http://schemas.microsoft.com/office/drawing/2014/main" id="{C58A4949-962E-4A10-A3E3-AF73F8B3DE8C}"/>
-              </a:ext>
-            </a:extLst>
-          </p:cNvPr>
+          <p:cNvPr id="25" name="矩形: 圆角 24"/>
           <p:cNvSpPr>
             <a:spLocks noGrp="1"/>
           </p:cNvSpPr>
@@ -5564,13 +5170,7 @@
       </p:sp>
       <p:sp>
         <p:nvSpPr>
-          <p:cNvPr id="26" name="矩形 25">
-            <a:extLst>
-              <a:ext uri="{FF2B5EF4-FFF2-40B4-BE49-F238E27FC236}">
-                <a16:creationId xmlns:a16="http://schemas.microsoft.com/office/drawing/2014/main" id="{91B9082D-1F05-4DA0-AAED-871C02A4CB91}"/>
-              </a:ext>
-            </a:extLst>
-          </p:cNvPr>
+          <p:cNvPr id="26" name="矩形 25"/>
           <p:cNvSpPr>
             <a:spLocks noGrp="1"/>
           </p:cNvSpPr>
@@ -5616,18 +5216,20 @@
               </a:rPr>
               <a:t>软件责任</a:t>
             </a:r>
+            <a:endParaRPr sz="1350" b="1">
+              <a:solidFill>
+                <a:srgbClr val="25D4E8"/>
+              </a:solidFill>
+              <a:latin typeface="Noto Sans SC"/>
+              <a:ea typeface="Noto Sans SC"/>
+              <a:cs typeface="Noto Sans SC"/>
+            </a:endParaRPr>
           </a:p>
         </p:txBody>
       </p:sp>
       <p:sp>
         <p:nvSpPr>
-          <p:cNvPr id="27" name="矩形 26">
-            <a:extLst>
-              <a:ext uri="{FF2B5EF4-FFF2-40B4-BE49-F238E27FC236}">
-                <a16:creationId xmlns:a16="http://schemas.microsoft.com/office/drawing/2014/main" id="{9828550B-A626-4047-B5AE-32F24F91B1C2}"/>
-              </a:ext>
-            </a:extLst>
-          </p:cNvPr>
+          <p:cNvPr id="27" name="矩形 26"/>
           <p:cNvSpPr>
             <a:spLocks noGrp="1"/>
           </p:cNvSpPr>
@@ -5673,6 +5275,14 @@
               </a:rPr>
               <a:t>维护棋盘与游戏状态</a:t>
             </a:r>
+            <a:endParaRPr sz="1125" b="0">
+              <a:solidFill>
+                <a:srgbClr val="EAF2FF"/>
+              </a:solidFill>
+              <a:latin typeface="Noto Sans SC"/>
+              <a:ea typeface="Noto Sans SC"/>
+              <a:cs typeface="Noto Sans SC"/>
+            </a:endParaRPr>
           </a:p>
           <a:p>
             <a:pPr>
@@ -5696,6 +5306,14 @@
               </a:rPr>
               <a:t>逐行写 10 位逻辑数据</a:t>
             </a:r>
+            <a:endParaRPr sz="1125" b="0">
+              <a:solidFill>
+                <a:srgbClr val="EAF2FF"/>
+              </a:solidFill>
+              <a:latin typeface="Noto Sans SC"/>
+              <a:ea typeface="Noto Sans SC"/>
+              <a:cs typeface="Noto Sans SC"/>
+            </a:endParaRPr>
           </a:p>
           <a:p>
             <a:pPr>
@@ -5719,18 +5337,20 @@
               </a:rPr>
               <a:t>刷新期间等待 ready</a:t>
             </a:r>
+            <a:endParaRPr sz="1125" b="0">
+              <a:solidFill>
+                <a:srgbClr val="EAF2FF"/>
+              </a:solidFill>
+              <a:latin typeface="Noto Sans SC"/>
+              <a:ea typeface="Noto Sans SC"/>
+              <a:cs typeface="Noto Sans SC"/>
+            </a:endParaRPr>
           </a:p>
         </p:txBody>
       </p:sp>
       <p:sp>
         <p:nvSpPr>
-          <p:cNvPr id="28" name="矩形: 圆角 27">
-            <a:extLst>
-              <a:ext uri="{FF2B5EF4-FFF2-40B4-BE49-F238E27FC236}">
-                <a16:creationId xmlns:a16="http://schemas.microsoft.com/office/drawing/2014/main" id="{0F57131C-9A9A-4197-922F-D0678F2A6F08}"/>
-              </a:ext>
-            </a:extLst>
-          </p:cNvPr>
+          <p:cNvPr id="28" name="矩形: 圆角 27"/>
           <p:cNvSpPr>
             <a:spLocks noGrp="1"/>
           </p:cNvSpPr>
@@ -5759,13 +5379,7 @@
       </p:sp>
       <p:sp>
         <p:nvSpPr>
-          <p:cNvPr id="29" name="矩形: 圆角 28">
-            <a:extLst>
-              <a:ext uri="{FF2B5EF4-FFF2-40B4-BE49-F238E27FC236}">
-                <a16:creationId xmlns:a16="http://schemas.microsoft.com/office/drawing/2014/main" id="{801DB6E2-60BC-4B34-A2B0-55E5B0F2FBDE}"/>
-              </a:ext>
-            </a:extLst>
-          </p:cNvPr>
+          <p:cNvPr id="29" name="矩形: 圆角 28"/>
           <p:cNvSpPr>
             <a:spLocks noGrp="1"/>
           </p:cNvSpPr>
@@ -5792,13 +5406,7 @@
       </p:sp>
       <p:sp>
         <p:nvSpPr>
-          <p:cNvPr id="30" name="矩形 29">
-            <a:extLst>
-              <a:ext uri="{FF2B5EF4-FFF2-40B4-BE49-F238E27FC236}">
-                <a16:creationId xmlns:a16="http://schemas.microsoft.com/office/drawing/2014/main" id="{DF41FAFF-732B-451A-8598-0296C14A4FA7}"/>
-              </a:ext>
-            </a:extLst>
-          </p:cNvPr>
+          <p:cNvPr id="30" name="矩形 29"/>
           <p:cNvSpPr>
             <a:spLocks noGrp="1"/>
           </p:cNvSpPr>
@@ -5844,18 +5452,20 @@
               </a:rPr>
               <a:t>硬件责任</a:t>
             </a:r>
+            <a:endParaRPr sz="1350" b="1">
+              <a:solidFill>
+                <a:srgbClr val="A78BFA"/>
+              </a:solidFill>
+              <a:latin typeface="Noto Sans SC"/>
+              <a:ea typeface="Noto Sans SC"/>
+              <a:cs typeface="Noto Sans SC"/>
+            </a:endParaRPr>
           </a:p>
         </p:txBody>
       </p:sp>
       <p:sp>
         <p:nvSpPr>
-          <p:cNvPr id="31" name="矩形 30">
-            <a:extLst>
-              <a:ext uri="{FF2B5EF4-FFF2-40B4-BE49-F238E27FC236}">
-                <a16:creationId xmlns:a16="http://schemas.microsoft.com/office/drawing/2014/main" id="{A236FB22-791A-4D27-8D38-32CC8DFDC9B6}"/>
-              </a:ext>
-            </a:extLst>
-          </p:cNvPr>
+          <p:cNvPr id="31" name="矩形 30"/>
           <p:cNvSpPr>
             <a:spLocks noGrp="1"/>
           </p:cNvSpPr>
@@ -5901,6 +5511,14 @@
               </a:rPr>
               <a:t>把逻辑行映射为 128×128 像素</a:t>
             </a:r>
+            <a:endParaRPr sz="1125" b="0">
+              <a:solidFill>
+                <a:srgbClr val="EAF2FF"/>
+              </a:solidFill>
+              <a:latin typeface="Noto Sans SC"/>
+              <a:ea typeface="Noto Sans SC"/>
+              <a:cs typeface="Noto Sans SC"/>
+            </a:endParaRPr>
           </a:p>
           <a:p>
             <a:pPr>
@@ -5924,6 +5542,14 @@
               </a:rPr>
               <a:t>安排页面、列与字节顺序</a:t>
             </a:r>
+            <a:endParaRPr sz="1125" b="0">
+              <a:solidFill>
+                <a:srgbClr val="EAF2FF"/>
+              </a:solidFill>
+              <a:latin typeface="Noto Sans SC"/>
+              <a:ea typeface="Noto Sans SC"/>
+              <a:cs typeface="Noto Sans SC"/>
+            </a:endParaRPr>
           </a:p>
           <a:p>
             <a:pPr>
@@ -5947,18 +5573,20 @@
               </a:rPr>
               <a:t>控制 SPI 时序</a:t>
             </a:r>
+            <a:endParaRPr sz="1125" b="0">
+              <a:solidFill>
+                <a:srgbClr val="EAF2FF"/>
+              </a:solidFill>
+              <a:latin typeface="Noto Sans SC"/>
+              <a:ea typeface="Noto Sans SC"/>
+              <a:cs typeface="Noto Sans SC"/>
+            </a:endParaRPr>
           </a:p>
         </p:txBody>
       </p:sp>
       <p:sp>
         <p:nvSpPr>
-          <p:cNvPr id="32" name="矩形 31">
-            <a:extLst>
-              <a:ext uri="{FF2B5EF4-FFF2-40B4-BE49-F238E27FC236}">
-                <a16:creationId xmlns:a16="http://schemas.microsoft.com/office/drawing/2014/main" id="{A2C62154-F48C-4848-BD82-5F2998C88339}"/>
-              </a:ext>
-            </a:extLst>
-          </p:cNvPr>
+          <p:cNvPr id="32" name="矩形 31"/>
           <p:cNvSpPr>
             <a:spLocks noGrp="1"/>
           </p:cNvSpPr>
@@ -6004,18 +5632,20 @@
               </a:rPr>
               <a:t>分层后，汇编程序不需要逐像素维护 LCD 时序</a:t>
             </a:r>
+            <a:endParaRPr sz="1275" b="1">
+              <a:solidFill>
+                <a:srgbClr val="37D99A"/>
+              </a:solidFill>
+              <a:latin typeface="Noto Sans SC"/>
+              <a:ea typeface="Noto Sans SC"/>
+              <a:cs typeface="Noto Sans SC"/>
+            </a:endParaRPr>
           </a:p>
         </p:txBody>
       </p:sp>
       <p:sp>
         <p:nvSpPr>
-          <p:cNvPr id="33" name="矩形 32">
-            <a:extLst>
-              <a:ext uri="{FF2B5EF4-FFF2-40B4-BE49-F238E27FC236}">
-                <a16:creationId xmlns:a16="http://schemas.microsoft.com/office/drawing/2014/main" id="{40231BF3-D29D-40B1-9C4D-B4ECDFCDB10E}"/>
-              </a:ext>
-            </a:extLst>
-          </p:cNvPr>
+          <p:cNvPr id="33" name="矩形 32"/>
           <p:cNvSpPr>
             <a:spLocks noGrp="1"/>
           </p:cNvSpPr>
@@ -6040,13 +5670,7 @@
       </p:sp>
       <p:sp>
         <p:nvSpPr>
-          <p:cNvPr id="34" name="矩形 33">
-            <a:extLst>
-              <a:ext uri="{FF2B5EF4-FFF2-40B4-BE49-F238E27FC236}">
-                <a16:creationId xmlns:a16="http://schemas.microsoft.com/office/drawing/2014/main" id="{60CED1C7-5398-4CE6-BD59-113ACAEFA26A}"/>
-              </a:ext>
-            </a:extLst>
-          </p:cNvPr>
+          <p:cNvPr id="34" name="矩形 33"/>
           <p:cNvSpPr>
             <a:spLocks noGrp="1"/>
           </p:cNvSpPr>
@@ -6092,15 +5716,18 @@
               </a:rPr>
               <a:t>11</a:t>
             </a:r>
+            <a:endParaRPr sz="825" b="0">
+              <a:solidFill>
+                <a:srgbClr val="A6B4C8"/>
+              </a:solidFill>
+              <a:latin typeface="Noto Sans SC"/>
+              <a:ea typeface="Noto Sans SC"/>
+              <a:cs typeface="Noto Sans SC"/>
+            </a:endParaRPr>
           </a:p>
         </p:txBody>
       </p:sp>
     </p:spTree>
-    <p:extLst>
-      <p:ext uri="{BB962C8B-B14F-4D97-AF65-F5344CB8AC3E}">
-        <p14:creationId xmlns:p14="http://schemas.microsoft.com/office/powerpoint/2010/main" val="1254675954"/>
-      </p:ext>
-    </p:extLst>
   </p:cSld>
   <p:clrMapOvr>
     <a:masterClrMapping/>
@@ -6135,13 +5762,7 @@
       </p:grpSpPr>
       <p:sp>
         <p:nvSpPr>
-          <p:cNvPr id="9" name="矩形 8">
-            <a:extLst>
-              <a:ext uri="{FF2B5EF4-FFF2-40B4-BE49-F238E27FC236}">
-                <a16:creationId xmlns:a16="http://schemas.microsoft.com/office/drawing/2014/main" id="{82E9B6D4-2DB4-4A64-A8A9-1E0F8504F837}"/>
-              </a:ext>
-            </a:extLst>
-          </p:cNvPr>
+          <p:cNvPr id="9" name="矩形 8"/>
           <p:cNvSpPr>
             <a:spLocks noGrp="1"/>
           </p:cNvSpPr>
@@ -6187,18 +5808,20 @@
               </a:rPr>
               <a:t>验证闭环</a:t>
             </a:r>
+            <a:endParaRPr sz="975" b="1">
+              <a:solidFill>
+                <a:srgbClr val="25D4E8"/>
+              </a:solidFill>
+              <a:latin typeface="Noto Sans SC"/>
+              <a:ea typeface="Noto Sans SC"/>
+              <a:cs typeface="Noto Sans SC"/>
+            </a:endParaRPr>
           </a:p>
         </p:txBody>
       </p:sp>
       <p:sp>
         <p:nvSpPr>
-          <p:cNvPr id="2" name="矩形 1">
-            <a:extLst>
-              <a:ext uri="{FF2B5EF4-FFF2-40B4-BE49-F238E27FC236}">
-                <a16:creationId xmlns:a16="http://schemas.microsoft.com/office/drawing/2014/main" id="{DC9D0F5C-151B-4B38-8F07-F82138A66D10}"/>
-              </a:ext>
-            </a:extLst>
-          </p:cNvPr>
+          <p:cNvPr id="2" name="矩形 1"/>
           <p:cNvSpPr>
             <a:spLocks noGrp="1"/>
           </p:cNvSpPr>
@@ -6244,18 +5867,20 @@
               </a:rPr>
               <a:t>接口、系统与应用验证</a:t>
             </a:r>
+            <a:endParaRPr sz="2475" b="1">
+              <a:solidFill>
+                <a:srgbClr val="EAF2FF"/>
+              </a:solidFill>
+              <a:latin typeface="Noto Sans SC"/>
+              <a:ea typeface="Noto Sans SC"/>
+              <a:cs typeface="Noto Sans SC"/>
+            </a:endParaRPr>
           </a:p>
         </p:txBody>
       </p:sp>
       <p:sp>
         <p:nvSpPr>
-          <p:cNvPr id="3" name="直接连接符 2">
-            <a:extLst>
-              <a:ext uri="{FF2B5EF4-FFF2-40B4-BE49-F238E27FC236}">
-                <a16:creationId xmlns:a16="http://schemas.microsoft.com/office/drawing/2014/main" id="{F4BBF654-AAA0-4A5A-95A0-E7D82A57B708}"/>
-              </a:ext>
-            </a:extLst>
-          </p:cNvPr>
+          <p:cNvPr id="3" name="直接连接符 2"/>
           <p:cNvSpPr>
             <a:spLocks noGrp="1"/>
           </p:cNvSpPr>
@@ -6280,13 +5905,7 @@
       </p:sp>
       <p:sp>
         <p:nvSpPr>
-          <p:cNvPr id="4" name="矩形 3">
-            <a:extLst>
-              <a:ext uri="{FF2B5EF4-FFF2-40B4-BE49-F238E27FC236}">
-                <a16:creationId xmlns:a16="http://schemas.microsoft.com/office/drawing/2014/main" id="{784DD90C-8D10-4F58-9072-7D02EEBF0D9A}"/>
-              </a:ext>
-            </a:extLst>
-          </p:cNvPr>
+          <p:cNvPr id="4" name="矩形 3"/>
           <p:cNvSpPr>
             <a:spLocks noGrp="1"/>
           </p:cNvSpPr>
@@ -6332,6 +5951,14 @@
               </a:rPr>
               <a:t>11</a:t>
             </a:r>
+            <a:endParaRPr sz="825" b="0">
+              <a:solidFill>
+                <a:srgbClr val="A6B4C8"/>
+              </a:solidFill>
+              <a:latin typeface="Noto Sans SC"/>
+              <a:ea typeface="Noto Sans SC"/>
+              <a:cs typeface="Noto Sans SC"/>
+            </a:endParaRPr>
           </a:p>
         </p:txBody>
       </p:sp>
@@ -6343,41 +5970,17 @@
         </p:nvGraphicFramePr>
         <p:xfrm>
           <a:off x="400050" y="1581150"/>
-          <a:ext cx="11391900" cy="3714750"/>
+          <a:ext cx="11391900" cy="3714753"/>
         </p:xfrm>
         <a:graphic>
           <a:graphicData uri="http://schemas.openxmlformats.org/drawingml/2006/table">
             <a:tbl>
               <a:tblPr/>
               <a:tblGrid>
-                <a:gridCol w="1485900">
-                  <a:extLst>
-                    <a:ext uri="{9D8B030D-6E8A-4147-A177-3AD203B41FA5}">
-                      <a16:colId xmlns:a16="http://schemas.microsoft.com/office/drawing/2014/main" val="20000"/>
-                    </a:ext>
-                  </a:extLst>
-                </a:gridCol>
-                <a:gridCol w="2806700">
-                  <a:extLst>
-                    <a:ext uri="{9D8B030D-6E8A-4147-A177-3AD203B41FA5}">
-                      <a16:colId xmlns:a16="http://schemas.microsoft.com/office/drawing/2014/main" val="20001"/>
-                    </a:ext>
-                  </a:extLst>
-                </a:gridCol>
-                <a:gridCol w="5448300">
-                  <a:extLst>
-                    <a:ext uri="{9D8B030D-6E8A-4147-A177-3AD203B41FA5}">
-                      <a16:colId xmlns:a16="http://schemas.microsoft.com/office/drawing/2014/main" val="20002"/>
-                    </a:ext>
-                  </a:extLst>
-                </a:gridCol>
-                <a:gridCol w="1651000">
-                  <a:extLst>
-                    <a:ext uri="{9D8B030D-6E8A-4147-A177-3AD203B41FA5}">
-                      <a16:colId xmlns:a16="http://schemas.microsoft.com/office/drawing/2014/main" val="20003"/>
-                    </a:ext>
-                  </a:extLst>
-                </a:gridCol>
+                <a:gridCol w="1485900"/>
+                <a:gridCol w="2806700"/>
+                <a:gridCol w="5448300"/>
+                <a:gridCol w="1651000"/>
               </a:tblGrid>
               <a:tr h="530679">
                 <a:tc>
@@ -6396,6 +5999,14 @@
                         </a:rPr>
                         <a:t>层次</a:t>
                       </a:r>
+                      <a:endParaRPr sz="1125" b="1">
+                        <a:solidFill>
+                          <a:srgbClr val="25D4E8"/>
+                        </a:solidFill>
+                        <a:latin typeface="Noto Sans SC"/>
+                        <a:ea typeface="Noto Sans SC"/>
+                        <a:cs typeface="Noto Sans SC"/>
+                      </a:endParaRPr>
                     </a:p>
                   </a:txBody>
                   <a:tcPr>
@@ -6420,6 +6031,14 @@
                         </a:rPr>
                         <a:t>测试对象</a:t>
                       </a:r>
+                      <a:endParaRPr sz="1125" b="1">
+                        <a:solidFill>
+                          <a:srgbClr val="25D4E8"/>
+                        </a:solidFill>
+                        <a:latin typeface="Noto Sans SC"/>
+                        <a:ea typeface="Noto Sans SC"/>
+                        <a:cs typeface="Noto Sans SC"/>
+                      </a:endParaRPr>
                     </a:p>
                   </a:txBody>
                   <a:tcPr>
@@ -6444,6 +6063,14 @@
                         </a:rPr>
                         <a:t>通过标准</a:t>
                       </a:r>
+                      <a:endParaRPr sz="1125" b="1">
+                        <a:solidFill>
+                          <a:srgbClr val="25D4E8"/>
+                        </a:solidFill>
+                        <a:latin typeface="Noto Sans SC"/>
+                        <a:ea typeface="Noto Sans SC"/>
+                        <a:cs typeface="Noto Sans SC"/>
+                      </a:endParaRPr>
                     </a:p>
                   </a:txBody>
                   <a:tcPr>
@@ -6468,6 +6095,14 @@
                         </a:rPr>
                         <a:t>状态</a:t>
                       </a:r>
+                      <a:endParaRPr sz="1125" b="1">
+                        <a:solidFill>
+                          <a:srgbClr val="25D4E8"/>
+                        </a:solidFill>
+                        <a:latin typeface="Noto Sans SC"/>
+                        <a:ea typeface="Noto Sans SC"/>
+                        <a:cs typeface="Noto Sans SC"/>
+                      </a:endParaRPr>
                     </a:p>
                   </a:txBody>
                   <a:tcPr>
@@ -6476,11 +6111,6 @@
                     </a:solidFill>
                   </a:tcPr>
                 </a:tc>
-                <a:extLst>
-                  <a:ext uri="{0D108BD9-81ED-4DB2-BD59-A6C34878D82A}">
-                    <a16:rowId xmlns:a16="http://schemas.microsoft.com/office/drawing/2014/main" val="10000"/>
-                  </a:ext>
-                </a:extLst>
               </a:tr>
               <a:tr h="530679">
                 <a:tc>
@@ -6499,6 +6129,14 @@
                         </a:rPr>
                         <a:t>SPI</a:t>
                       </a:r>
+                      <a:endParaRPr sz="1050" b="1">
+                        <a:solidFill>
+                          <a:srgbClr val="EAF2FF"/>
+                        </a:solidFill>
+                        <a:latin typeface="Noto Sans SC"/>
+                        <a:ea typeface="Noto Sans SC"/>
+                        <a:cs typeface="Noto Sans SC"/>
+                      </a:endParaRPr>
                     </a:p>
                   </a:txBody>
                   <a:tcPr>
@@ -6517,12 +6155,20 @@
                           <a:solidFill>
                             <a:srgbClr val="EAF2FF"/>
                           </a:solidFill>
-                          <a:latin typeface="Consolas"/>
-                          <a:ea typeface="Consolas"/>
-                          <a:cs typeface="Consolas"/>
+                          <a:latin typeface="Consolas" panose="020B0609020204030204"/>
+                          <a:ea typeface="Consolas" panose="020B0609020204030204"/>
+                          <a:cs typeface="Consolas" panose="020B0609020204030204"/>
                         </a:rPr>
                         <a:t>tb_lcd_spi_master</a:t>
                       </a:r>
+                      <a:endParaRPr sz="900" b="0">
+                        <a:solidFill>
+                          <a:srgbClr val="EAF2FF"/>
+                        </a:solidFill>
+                        <a:latin typeface="Consolas" panose="020B0609020204030204"/>
+                        <a:ea typeface="Consolas" panose="020B0609020204030204"/>
+                        <a:cs typeface="Consolas" panose="020B0609020204030204"/>
+                      </a:endParaRPr>
                     </a:p>
                   </a:txBody>
                   <a:tcPr>
@@ -6547,6 +6193,14 @@
                         </a:rPr>
                         <a:t>0xA5、8 位 MSB first、RS 与空闲恢复</a:t>
                       </a:r>
+                      <a:endParaRPr sz="1050" b="0">
+                        <a:solidFill>
+                          <a:srgbClr val="EAF2FF"/>
+                        </a:solidFill>
+                        <a:latin typeface="Noto Sans SC"/>
+                        <a:ea typeface="Noto Sans SC"/>
+                        <a:cs typeface="Noto Sans SC"/>
+                      </a:endParaRPr>
                     </a:p>
                   </a:txBody>
                   <a:tcPr>
@@ -6571,6 +6225,14 @@
                         </a:rPr>
                         <a:t>PASS</a:t>
                       </a:r>
+                      <a:endParaRPr sz="1050" b="1">
+                        <a:solidFill>
+                          <a:srgbClr val="37D99A"/>
+                        </a:solidFill>
+                        <a:latin typeface="Noto Sans SC"/>
+                        <a:ea typeface="Noto Sans SC"/>
+                        <a:cs typeface="Noto Sans SC"/>
+                      </a:endParaRPr>
                     </a:p>
                   </a:txBody>
                   <a:tcPr>
@@ -6579,11 +6241,6 @@
                     </a:solidFill>
                   </a:tcPr>
                 </a:tc>
-                <a:extLst>
-                  <a:ext uri="{0D108BD9-81ED-4DB2-BD59-A6C34878D82A}">
-                    <a16:rowId xmlns:a16="http://schemas.microsoft.com/office/drawing/2014/main" val="10001"/>
-                  </a:ext>
-                </a:extLst>
               </a:tr>
               <a:tr h="530679">
                 <a:tc>
@@ -6602,6 +6259,14 @@
                         </a:rPr>
                         <a:t>控制器</a:t>
                       </a:r>
+                      <a:endParaRPr sz="1050" b="1">
+                        <a:solidFill>
+                          <a:srgbClr val="EAF2FF"/>
+                        </a:solidFill>
+                        <a:latin typeface="Noto Sans SC"/>
+                        <a:ea typeface="Noto Sans SC"/>
+                        <a:cs typeface="Noto Sans SC"/>
+                      </a:endParaRPr>
                     </a:p>
                   </a:txBody>
                   <a:tcPr>
@@ -6620,12 +6285,20 @@
                           <a:solidFill>
                             <a:srgbClr val="EAF2FF"/>
                           </a:solidFill>
-                          <a:latin typeface="Consolas"/>
-                          <a:ea typeface="Consolas"/>
-                          <a:cs typeface="Consolas"/>
+                          <a:latin typeface="Consolas" panose="020B0609020204030204"/>
+                          <a:ea typeface="Consolas" panose="020B0609020204030204"/>
+                          <a:cs typeface="Consolas" panose="020B0609020204030204"/>
                         </a:rPr>
                         <a:t>tb_lcd_controller</a:t>
                       </a:r>
+                      <a:endParaRPr sz="900" b="0">
+                        <a:solidFill>
+                          <a:srgbClr val="EAF2FF"/>
+                        </a:solidFill>
+                        <a:latin typeface="Consolas" panose="020B0609020204030204"/>
+                        <a:ea typeface="Consolas" panose="020B0609020204030204"/>
+                        <a:cs typeface="Consolas" panose="020B0609020204030204"/>
+                      </a:endParaRPr>
                     </a:p>
                   </a:txBody>
                   <a:tcPr>
@@ -6650,6 +6323,14 @@
                         </a:rPr>
                         <a:t>复位、初始化、清屏、请求与传输计数</a:t>
                       </a:r>
+                      <a:endParaRPr sz="1050" b="0">
+                        <a:solidFill>
+                          <a:srgbClr val="EAF2FF"/>
+                        </a:solidFill>
+                        <a:latin typeface="Noto Sans SC"/>
+                        <a:ea typeface="Noto Sans SC"/>
+                        <a:cs typeface="Noto Sans SC"/>
+                      </a:endParaRPr>
                     </a:p>
                   </a:txBody>
                   <a:tcPr>
@@ -6674,6 +6355,14 @@
                         </a:rPr>
                         <a:t>PASS</a:t>
                       </a:r>
+                      <a:endParaRPr sz="1050" b="1">
+                        <a:solidFill>
+                          <a:srgbClr val="37D99A"/>
+                        </a:solidFill>
+                        <a:latin typeface="Noto Sans SC"/>
+                        <a:ea typeface="Noto Sans SC"/>
+                        <a:cs typeface="Noto Sans SC"/>
+                      </a:endParaRPr>
                     </a:p>
                   </a:txBody>
                   <a:tcPr>
@@ -6682,11 +6371,6 @@
                     </a:solidFill>
                   </a:tcPr>
                 </a:tc>
-                <a:extLst>
-                  <a:ext uri="{0D108BD9-81ED-4DB2-BD59-A6C34878D82A}">
-                    <a16:rowId xmlns:a16="http://schemas.microsoft.com/office/drawing/2014/main" val="10002"/>
-                  </a:ext>
-                </a:extLst>
               </a:tr>
               <a:tr h="530679">
                 <a:tc>
@@ -6705,6 +6389,14 @@
                         </a:rPr>
                         <a:t>MMIO</a:t>
                       </a:r>
+                      <a:endParaRPr sz="1050" b="1">
+                        <a:solidFill>
+                          <a:srgbClr val="EAF2FF"/>
+                        </a:solidFill>
+                        <a:latin typeface="Noto Sans SC"/>
+                        <a:ea typeface="Noto Sans SC"/>
+                        <a:cs typeface="Noto Sans SC"/>
+                      </a:endParaRPr>
                     </a:p>
                   </a:txBody>
                   <a:tcPr>
@@ -6723,12 +6415,20 @@
                           <a:solidFill>
                             <a:srgbClr val="EAF2FF"/>
                           </a:solidFill>
-                          <a:latin typeface="Consolas"/>
-                          <a:ea typeface="Consolas"/>
-                          <a:cs typeface="Consolas"/>
+                          <a:latin typeface="Consolas" panose="020B0609020204030204"/>
+                          <a:ea typeface="Consolas" panose="020B0609020204030204"/>
+                          <a:cs typeface="Consolas" panose="020B0609020204030204"/>
                         </a:rPr>
                         <a:t>tb_bringup_system</a:t>
                       </a:r>
+                      <a:endParaRPr sz="900" b="0">
+                        <a:solidFill>
+                          <a:srgbClr val="EAF2FF"/>
+                        </a:solidFill>
+                        <a:latin typeface="Consolas" panose="020B0609020204030204"/>
+                        <a:ea typeface="Consolas" panose="020B0609020204030204"/>
+                        <a:cs typeface="Consolas" panose="020B0609020204030204"/>
+                      </a:endParaRPr>
                     </a:p>
                   </a:txBody>
                   <a:tcPr>
@@ -6753,6 +6453,14 @@
                         </a:rPr>
                         <a:t>状态轮询、慢外设等待、一次请求一次发送</a:t>
                       </a:r>
+                      <a:endParaRPr sz="1050" b="0">
+                        <a:solidFill>
+                          <a:srgbClr val="EAF2FF"/>
+                        </a:solidFill>
+                        <a:latin typeface="Noto Sans SC"/>
+                        <a:ea typeface="Noto Sans SC"/>
+                        <a:cs typeface="Noto Sans SC"/>
+                      </a:endParaRPr>
                     </a:p>
                   </a:txBody>
                   <a:tcPr>
@@ -6777,6 +6485,14 @@
                         </a:rPr>
                         <a:t>PASS</a:t>
                       </a:r>
+                      <a:endParaRPr sz="1050" b="1">
+                        <a:solidFill>
+                          <a:srgbClr val="37D99A"/>
+                        </a:solidFill>
+                        <a:latin typeface="Noto Sans SC"/>
+                        <a:ea typeface="Noto Sans SC"/>
+                        <a:cs typeface="Noto Sans SC"/>
+                      </a:endParaRPr>
                     </a:p>
                   </a:txBody>
                   <a:tcPr>
@@ -6785,11 +6501,6 @@
                     </a:solidFill>
                   </a:tcPr>
                 </a:tc>
-                <a:extLst>
-                  <a:ext uri="{0D108BD9-81ED-4DB2-BD59-A6C34878D82A}">
-                    <a16:rowId xmlns:a16="http://schemas.microsoft.com/office/drawing/2014/main" val="10003"/>
-                  </a:ext>
-                </a:extLst>
               </a:tr>
               <a:tr h="530679">
                 <a:tc>
@@ -6808,6 +6519,14 @@
                         </a:rPr>
                         <a:t>游戏</a:t>
                       </a:r>
+                      <a:endParaRPr sz="1050" b="1">
+                        <a:solidFill>
+                          <a:srgbClr val="EAF2FF"/>
+                        </a:solidFill>
+                        <a:latin typeface="Noto Sans SC"/>
+                        <a:ea typeface="Noto Sans SC"/>
+                        <a:cs typeface="Noto Sans SC"/>
+                      </a:endParaRPr>
                     </a:p>
                   </a:txBody>
                   <a:tcPr>
@@ -6826,12 +6545,20 @@
                           <a:solidFill>
                             <a:srgbClr val="EAF2FF"/>
                           </a:solidFill>
-                          <a:latin typeface="Consolas"/>
-                          <a:ea typeface="Consolas"/>
-                          <a:cs typeface="Consolas"/>
+                          <a:latin typeface="Consolas" panose="020B0609020204030204"/>
+                          <a:ea typeface="Consolas" panose="020B0609020204030204"/>
+                          <a:cs typeface="Consolas" panose="020B0609020204030204"/>
                         </a:rPr>
                         <a:t>tb_tetris_system</a:t>
                       </a:r>
+                      <a:endParaRPr sz="900" b="0">
+                        <a:solidFill>
+                          <a:srgbClr val="EAF2FF"/>
+                        </a:solidFill>
+                        <a:latin typeface="Consolas" panose="020B0609020204030204"/>
+                        <a:ea typeface="Consolas" panose="020B0609020204030204"/>
+                        <a:cs typeface="Consolas" panose="020B0609020204030204"/>
+                      </a:endParaRPr>
                     </a:p>
                   </a:txBody>
                   <a:tcPr>
@@ -6856,6 +6583,14 @@
                         </a:rPr>
                         <a:t>行上传、方向键、软降释放、消行与蜂鸣</a:t>
                       </a:r>
+                      <a:endParaRPr sz="1050" b="0">
+                        <a:solidFill>
+                          <a:srgbClr val="EAF2FF"/>
+                        </a:solidFill>
+                        <a:latin typeface="Noto Sans SC"/>
+                        <a:ea typeface="Noto Sans SC"/>
+                        <a:cs typeface="Noto Sans SC"/>
+                      </a:endParaRPr>
                     </a:p>
                   </a:txBody>
                   <a:tcPr>
@@ -6880,6 +6615,14 @@
                         </a:rPr>
                         <a:t>PASS</a:t>
                       </a:r>
+                      <a:endParaRPr sz="1050" b="1">
+                        <a:solidFill>
+                          <a:srgbClr val="37D99A"/>
+                        </a:solidFill>
+                        <a:latin typeface="Noto Sans SC"/>
+                        <a:ea typeface="Noto Sans SC"/>
+                        <a:cs typeface="Noto Sans SC"/>
+                      </a:endParaRPr>
                     </a:p>
                   </a:txBody>
                   <a:tcPr>
@@ -6888,11 +6631,6 @@
                     </a:solidFill>
                   </a:tcPr>
                 </a:tc>
-                <a:extLst>
-                  <a:ext uri="{0D108BD9-81ED-4DB2-BD59-A6C34878D82A}">
-                    <a16:rowId xmlns:a16="http://schemas.microsoft.com/office/drawing/2014/main" val="10004"/>
-                  </a:ext>
-                </a:extLst>
               </a:tr>
               <a:tr h="530679">
                 <a:tc>
@@ -6911,6 +6649,14 @@
                         </a:rPr>
                         <a:t>IP</a:t>
                       </a:r>
+                      <a:endParaRPr sz="1050" b="1">
+                        <a:solidFill>
+                          <a:srgbClr val="EAF2FF"/>
+                        </a:solidFill>
+                        <a:latin typeface="Noto Sans SC"/>
+                        <a:ea typeface="Noto Sans SC"/>
+                        <a:cs typeface="Noto Sans SC"/>
+                      </a:endParaRPr>
                     </a:p>
                   </a:txBody>
                   <a:tcPr>
@@ -6929,12 +6675,20 @@
                           <a:solidFill>
                             <a:srgbClr val="EAF2FF"/>
                           </a:solidFill>
-                          <a:latin typeface="Consolas"/>
-                          <a:ea typeface="Consolas"/>
-                          <a:cs typeface="Consolas"/>
+                          <a:latin typeface="Consolas" panose="020B0609020204030204"/>
+                          <a:ea typeface="Consolas" panose="020B0609020204030204"/>
+                          <a:cs typeface="Consolas" panose="020B0609020204030204"/>
                         </a:rPr>
                         <a:t>Catalog / Block Design</a:t>
                       </a:r>
+                      <a:endParaRPr sz="900" b="0">
+                        <a:solidFill>
+                          <a:srgbClr val="EAF2FF"/>
+                        </a:solidFill>
+                        <a:latin typeface="Consolas" panose="020B0609020204030204"/>
+                        <a:ea typeface="Consolas" panose="020B0609020204030204"/>
+                        <a:cs typeface="Consolas" panose="020B0609020204030204"/>
+                      </a:endParaRPr>
                     </a:p>
                   </a:txBody>
                   <a:tcPr>
@@ -6959,6 +6713,14 @@
                         </a:rPr>
                         <a:t>注册、例化、Validate、输出产品</a:t>
                       </a:r>
+                      <a:endParaRPr sz="1050" b="0">
+                        <a:solidFill>
+                          <a:srgbClr val="EAF2FF"/>
+                        </a:solidFill>
+                        <a:latin typeface="Noto Sans SC"/>
+                        <a:ea typeface="Noto Sans SC"/>
+                        <a:cs typeface="Noto Sans SC"/>
+                      </a:endParaRPr>
                     </a:p>
                   </a:txBody>
                   <a:tcPr>
@@ -6975,14 +6737,23 @@
                       <a:r>
                         <a:rPr sz="1050" b="1">
                           <a:solidFill>
-                            <a:srgbClr val="F5B942"/>
+                            <a:srgbClr val="37D99A"/>
                           </a:solidFill>
                           <a:latin typeface="Noto Sans SC"/>
                           <a:ea typeface="Noto Sans SC"/>
                           <a:cs typeface="Noto Sans SC"/>
+                          <a:sym typeface="+mn-ea"/>
                         </a:rPr>
-                        <a:t>待补截图</a:t>
+                        <a:t>PASS</a:t>
                       </a:r>
+                      <a:endParaRPr lang="en-US" sz="1050" b="1">
+                        <a:solidFill>
+                          <a:srgbClr val="F5B942"/>
+                        </a:solidFill>
+                        <a:latin typeface="Noto Sans SC"/>
+                        <a:ea typeface="Noto Sans SC"/>
+                        <a:cs typeface="Noto Sans SC"/>
+                      </a:endParaRPr>
                     </a:p>
                   </a:txBody>
                   <a:tcPr>
@@ -6991,11 +6762,6 @@
                     </a:solidFill>
                   </a:tcPr>
                 </a:tc>
-                <a:extLst>
-                  <a:ext uri="{0D108BD9-81ED-4DB2-BD59-A6C34878D82A}">
-                    <a16:rowId xmlns:a16="http://schemas.microsoft.com/office/drawing/2014/main" val="10005"/>
-                  </a:ext>
-                </a:extLst>
               </a:tr>
               <a:tr h="530679">
                 <a:tc>
@@ -7014,6 +6780,14 @@
                         </a:rPr>
                         <a:t>实板</a:t>
                       </a:r>
+                      <a:endParaRPr sz="1050" b="1">
+                        <a:solidFill>
+                          <a:srgbClr val="EAF2FF"/>
+                        </a:solidFill>
+                        <a:latin typeface="Noto Sans SC"/>
+                        <a:ea typeface="Noto Sans SC"/>
+                        <a:cs typeface="Noto Sans SC"/>
+                      </a:endParaRPr>
                     </a:p>
                   </a:txBody>
                   <a:tcPr>
@@ -7032,12 +6806,20 @@
                           <a:solidFill>
                             <a:srgbClr val="EAF2FF"/>
                           </a:solidFill>
-                          <a:latin typeface="Consolas"/>
-                          <a:ea typeface="Consolas"/>
-                          <a:cs typeface="Consolas"/>
+                          <a:latin typeface="Consolas" panose="020B0609020204030204"/>
+                          <a:ea typeface="Consolas" panose="020B0609020204030204"/>
+                          <a:cs typeface="Consolas" panose="020B0609020204030204"/>
                         </a:rPr>
                         <a:t>EES-338 + LCD + 手柄</a:t>
                       </a:r>
+                      <a:endParaRPr sz="900" b="0">
+                        <a:solidFill>
+                          <a:srgbClr val="EAF2FF"/>
+                        </a:solidFill>
+                        <a:latin typeface="Consolas" panose="020B0609020204030204"/>
+                        <a:ea typeface="Consolas" panose="020B0609020204030204"/>
+                        <a:cs typeface="Consolas" panose="020B0609020204030204"/>
+                      </a:endParaRPr>
                     </a:p>
                   </a:txBody>
                   <a:tcPr>
@@ -7062,6 +6844,14 @@
                         </a:rPr>
                         <a:t>画面、控制、消行声音、重新开始</a:t>
                       </a:r>
+                      <a:endParaRPr sz="1050" b="0">
+                        <a:solidFill>
+                          <a:srgbClr val="EAF2FF"/>
+                        </a:solidFill>
+                        <a:latin typeface="Noto Sans SC"/>
+                        <a:ea typeface="Noto Sans SC"/>
+                        <a:cs typeface="Noto Sans SC"/>
+                      </a:endParaRPr>
                     </a:p>
                   </a:txBody>
                   <a:tcPr>
@@ -7076,16 +6866,24 @@
                     <a:lstStyle/>
                     <a:p>
                       <a:r>
-                        <a:rPr sz="1050" b="1">
+                        <a:rPr lang="zh-CN" altLang="en-US" sz="1050" b="1">
                           <a:solidFill>
-                            <a:srgbClr val="F5B942"/>
+                            <a:srgbClr val="00B050"/>
                           </a:solidFill>
                           <a:latin typeface="Noto Sans SC"/>
-                          <a:ea typeface="Noto Sans SC"/>
+                          <a:ea typeface="SimSun" charset="0"/>
                           <a:cs typeface="Noto Sans SC"/>
                         </a:rPr>
-                        <a:t>待视频</a:t>
+                        <a:t>见视频</a:t>
                       </a:r>
+                      <a:endParaRPr lang="zh-CN" altLang="en-US" sz="1050" b="1">
+                        <a:solidFill>
+                          <a:srgbClr val="00B050"/>
+                        </a:solidFill>
+                        <a:latin typeface="Noto Sans SC"/>
+                        <a:ea typeface="SimSun" charset="0"/>
+                        <a:cs typeface="Noto Sans SC"/>
+                      </a:endParaRPr>
                     </a:p>
                   </a:txBody>
                   <a:tcPr>
@@ -7094,11 +6892,6 @@
                     </a:solidFill>
                   </a:tcPr>
                 </a:tc>
-                <a:extLst>
-                  <a:ext uri="{0D108BD9-81ED-4DB2-BD59-A6C34878D82A}">
-                    <a16:rowId xmlns:a16="http://schemas.microsoft.com/office/drawing/2014/main" val="10006"/>
-                  </a:ext>
-                </a:extLst>
               </a:tr>
             </a:tbl>
           </a:graphicData>
@@ -7106,13 +6899,7 @@
       </p:graphicFrame>
       <p:sp>
         <p:nvSpPr>
-          <p:cNvPr id="6" name="矩形 5">
-            <a:extLst>
-              <a:ext uri="{FF2B5EF4-FFF2-40B4-BE49-F238E27FC236}">
-                <a16:creationId xmlns:a16="http://schemas.microsoft.com/office/drawing/2014/main" id="{7DE19739-C9BC-4134-90FA-B0F81E515003}"/>
-              </a:ext>
-            </a:extLst>
-          </p:cNvPr>
+          <p:cNvPr id="6" name="矩形 5"/>
           <p:cNvSpPr>
             <a:spLocks noGrp="1"/>
           </p:cNvSpPr>
@@ -7158,18 +6945,20 @@
               </a:rPr>
               <a:t>自动化证据与实物证据分开陈述，不用 CPU 波形替代 LCD 协议验证</a:t>
             </a:r>
+            <a:endParaRPr sz="1200" b="1">
+              <a:solidFill>
+                <a:srgbClr val="F5B942"/>
+              </a:solidFill>
+              <a:latin typeface="Noto Sans SC"/>
+              <a:ea typeface="Noto Sans SC"/>
+              <a:cs typeface="Noto Sans SC"/>
+            </a:endParaRPr>
           </a:p>
         </p:txBody>
       </p:sp>
       <p:sp>
         <p:nvSpPr>
-          <p:cNvPr id="7" name="矩形 6">
-            <a:extLst>
-              <a:ext uri="{FF2B5EF4-FFF2-40B4-BE49-F238E27FC236}">
-                <a16:creationId xmlns:a16="http://schemas.microsoft.com/office/drawing/2014/main" id="{CCBC4229-31F4-48BA-928F-1144CF8A67CC}"/>
-              </a:ext>
-            </a:extLst>
-          </p:cNvPr>
+          <p:cNvPr id="7" name="矩形 6"/>
           <p:cNvSpPr>
             <a:spLocks noGrp="1"/>
           </p:cNvSpPr>
@@ -7194,13 +6983,7 @@
       </p:sp>
       <p:sp>
         <p:nvSpPr>
-          <p:cNvPr id="8" name="矩形 7">
-            <a:extLst>
-              <a:ext uri="{FF2B5EF4-FFF2-40B4-BE49-F238E27FC236}">
-                <a16:creationId xmlns:a16="http://schemas.microsoft.com/office/drawing/2014/main" id="{FFEFA933-F81C-456F-A56A-D0A5DA941A14}"/>
-              </a:ext>
-            </a:extLst>
-          </p:cNvPr>
+          <p:cNvPr id="8" name="矩形 7"/>
           <p:cNvSpPr>
             <a:spLocks noGrp="1"/>
           </p:cNvSpPr>
@@ -7246,15 +7029,18 @@
               </a:rPr>
               <a:t>12</a:t>
             </a:r>
+            <a:endParaRPr sz="825" b="0">
+              <a:solidFill>
+                <a:srgbClr val="A6B4C8"/>
+              </a:solidFill>
+              <a:latin typeface="Noto Sans SC"/>
+              <a:ea typeface="Noto Sans SC"/>
+              <a:cs typeface="Noto Sans SC"/>
+            </a:endParaRPr>
           </a:p>
         </p:txBody>
       </p:sp>
     </p:spTree>
-    <p:extLst>
-      <p:ext uri="{BB962C8B-B14F-4D97-AF65-F5344CB8AC3E}">
-        <p14:creationId xmlns:p14="http://schemas.microsoft.com/office/powerpoint/2010/main" val="912386783"/>
-      </p:ext>
-    </p:extLst>
   </p:cSld>
   <p:clrMapOvr>
     <a:masterClrMapping/>
@@ -7289,13 +7075,7 @@
       </p:grpSpPr>
       <p:sp>
         <p:nvSpPr>
-          <p:cNvPr id="38" name="矩形 37">
-            <a:extLst>
-              <a:ext uri="{FF2B5EF4-FFF2-40B4-BE49-F238E27FC236}">
-                <a16:creationId xmlns:a16="http://schemas.microsoft.com/office/drawing/2014/main" id="{DE20DED1-E08F-44D2-B113-266AFD3FA2E1}"/>
-              </a:ext>
-            </a:extLst>
-          </p:cNvPr>
+          <p:cNvPr id="38" name="矩形 37"/>
           <p:cNvSpPr>
             <a:spLocks noGrp="1"/>
           </p:cNvSpPr>
@@ -7341,18 +7121,20 @@
               </a:rPr>
               <a:t>下板演示</a:t>
             </a:r>
+            <a:endParaRPr sz="975" b="1">
+              <a:solidFill>
+                <a:srgbClr val="25D4E8"/>
+              </a:solidFill>
+              <a:latin typeface="Noto Sans SC"/>
+              <a:ea typeface="Noto Sans SC"/>
+              <a:cs typeface="Noto Sans SC"/>
+            </a:endParaRPr>
           </a:p>
         </p:txBody>
       </p:sp>
       <p:sp>
         <p:nvSpPr>
-          <p:cNvPr id="2" name="矩形 1">
-            <a:extLst>
-              <a:ext uri="{FF2B5EF4-FFF2-40B4-BE49-F238E27FC236}">
-                <a16:creationId xmlns:a16="http://schemas.microsoft.com/office/drawing/2014/main" id="{E1BE04C6-AB52-4540-B5B7-06BCDC9136AE}"/>
-              </a:ext>
-            </a:extLst>
-          </p:cNvPr>
+          <p:cNvPr id="2" name="矩形 1"/>
           <p:cNvSpPr>
             <a:spLocks noGrp="1"/>
           </p:cNvSpPr>
@@ -7398,18 +7180,20 @@
               </a:rPr>
               <a:t>现场演示顺序与实物证据</a:t>
             </a:r>
+            <a:endParaRPr sz="2475" b="1">
+              <a:solidFill>
+                <a:srgbClr val="EAF2FF"/>
+              </a:solidFill>
+              <a:latin typeface="Noto Sans SC"/>
+              <a:ea typeface="Noto Sans SC"/>
+              <a:cs typeface="Noto Sans SC"/>
+            </a:endParaRPr>
           </a:p>
         </p:txBody>
       </p:sp>
       <p:sp>
         <p:nvSpPr>
-          <p:cNvPr id="3" name="直接连接符 2">
-            <a:extLst>
-              <a:ext uri="{FF2B5EF4-FFF2-40B4-BE49-F238E27FC236}">
-                <a16:creationId xmlns:a16="http://schemas.microsoft.com/office/drawing/2014/main" id="{26160B69-D3EC-43C1-BBF9-15B73E60A319}"/>
-              </a:ext>
-            </a:extLst>
-          </p:cNvPr>
+          <p:cNvPr id="3" name="直接连接符 2"/>
           <p:cNvSpPr>
             <a:spLocks noGrp="1"/>
           </p:cNvSpPr>
@@ -7434,13 +7218,7 @@
       </p:sp>
       <p:sp>
         <p:nvSpPr>
-          <p:cNvPr id="4" name="矩形 3">
-            <a:extLst>
-              <a:ext uri="{FF2B5EF4-FFF2-40B4-BE49-F238E27FC236}">
-                <a16:creationId xmlns:a16="http://schemas.microsoft.com/office/drawing/2014/main" id="{D2D04888-CFF3-48B4-8C2A-78B307791ABD}"/>
-              </a:ext>
-            </a:extLst>
-          </p:cNvPr>
+          <p:cNvPr id="4" name="矩形 3"/>
           <p:cNvSpPr>
             <a:spLocks noGrp="1"/>
           </p:cNvSpPr>
@@ -7486,18 +7264,20 @@
               </a:rPr>
               <a:t>12</a:t>
             </a:r>
+            <a:endParaRPr sz="825" b="0">
+              <a:solidFill>
+                <a:srgbClr val="A6B4C8"/>
+              </a:solidFill>
+              <a:latin typeface="Noto Sans SC"/>
+              <a:ea typeface="Noto Sans SC"/>
+              <a:cs typeface="Noto Sans SC"/>
+            </a:endParaRPr>
           </a:p>
         </p:txBody>
       </p:sp>
       <p:sp>
         <p:nvSpPr>
-          <p:cNvPr id="5" name="矩形: 圆角 4">
-            <a:extLst>
-              <a:ext uri="{FF2B5EF4-FFF2-40B4-BE49-F238E27FC236}">
-                <a16:creationId xmlns:a16="http://schemas.microsoft.com/office/drawing/2014/main" id="{851DC968-A889-437C-95A3-B934B7AFF6DE}"/>
-              </a:ext>
-            </a:extLst>
-          </p:cNvPr>
+          <p:cNvPr id="5" name="矩形: 圆角 4"/>
           <p:cNvSpPr>
             <a:spLocks noGrp="1"/>
           </p:cNvSpPr>
@@ -7526,13 +7306,7 @@
       </p:sp>
       <p:sp>
         <p:nvSpPr>
-          <p:cNvPr id="6" name="矩形: 圆角 5">
-            <a:extLst>
-              <a:ext uri="{FF2B5EF4-FFF2-40B4-BE49-F238E27FC236}">
-                <a16:creationId xmlns:a16="http://schemas.microsoft.com/office/drawing/2014/main" id="{DE255D9E-E479-4DB8-B902-8C1FEB836A63}"/>
-              </a:ext>
-            </a:extLst>
-          </p:cNvPr>
+          <p:cNvPr id="6" name="矩形: 圆角 5"/>
           <p:cNvSpPr>
             <a:spLocks noGrp="1"/>
           </p:cNvSpPr>
@@ -7559,13 +7333,7 @@
       </p:sp>
       <p:sp>
         <p:nvSpPr>
-          <p:cNvPr id="7" name="矩形 6">
-            <a:extLst>
-              <a:ext uri="{FF2B5EF4-FFF2-40B4-BE49-F238E27FC236}">
-                <a16:creationId xmlns:a16="http://schemas.microsoft.com/office/drawing/2014/main" id="{4C80AD48-D59A-405D-8683-F36ADECB9367}"/>
-              </a:ext>
-            </a:extLst>
-          </p:cNvPr>
+          <p:cNvPr id="7" name="矩形 6"/>
           <p:cNvSpPr>
             <a:spLocks noGrp="1"/>
           </p:cNvSpPr>
@@ -7611,18 +7379,20 @@
               </a:rPr>
               <a:t>1</a:t>
             </a:r>
+            <a:endParaRPr sz="975" b="1">
+              <a:solidFill>
+                <a:srgbClr val="25D4E8"/>
+              </a:solidFill>
+              <a:latin typeface="Noto Sans SC"/>
+              <a:ea typeface="Noto Sans SC"/>
+              <a:cs typeface="Noto Sans SC"/>
+            </a:endParaRPr>
           </a:p>
         </p:txBody>
       </p:sp>
       <p:sp>
         <p:nvSpPr>
-          <p:cNvPr id="8" name="矩形 7">
-            <a:extLst>
-              <a:ext uri="{FF2B5EF4-FFF2-40B4-BE49-F238E27FC236}">
-                <a16:creationId xmlns:a16="http://schemas.microsoft.com/office/drawing/2014/main" id="{6544F4F2-4467-4B99-8417-B63A234A8B6D}"/>
-              </a:ext>
-            </a:extLst>
-          </p:cNvPr>
+          <p:cNvPr id="8" name="矩形 7"/>
           <p:cNvSpPr>
             <a:spLocks noGrp="1"/>
           </p:cNvSpPr>
@@ -7668,18 +7438,20 @@
               </a:rPr>
               <a:t>上电复位</a:t>
             </a:r>
+            <a:endParaRPr sz="1350" b="1">
+              <a:solidFill>
+                <a:srgbClr val="EAF2FF"/>
+              </a:solidFill>
+              <a:latin typeface="Noto Sans SC"/>
+              <a:ea typeface="Noto Sans SC"/>
+              <a:cs typeface="Noto Sans SC"/>
+            </a:endParaRPr>
           </a:p>
         </p:txBody>
       </p:sp>
       <p:sp>
         <p:nvSpPr>
-          <p:cNvPr id="9" name="矩形 8">
-            <a:extLst>
-              <a:ext uri="{FF2B5EF4-FFF2-40B4-BE49-F238E27FC236}">
-                <a16:creationId xmlns:a16="http://schemas.microsoft.com/office/drawing/2014/main" id="{63CFF928-94C0-4281-8D0C-7792CAB594C1}"/>
-              </a:ext>
-            </a:extLst>
-          </p:cNvPr>
+          <p:cNvPr id="9" name="矩形 8"/>
           <p:cNvSpPr>
             <a:spLocks noGrp="1"/>
           </p:cNvSpPr>
@@ -7725,18 +7497,20 @@
               </a:rPr>
               <a:t>LCD 完成初始化</a:t>
             </a:r>
+            <a:endParaRPr sz="1050" b="0">
+              <a:solidFill>
+                <a:srgbClr val="A6B4C8"/>
+              </a:solidFill>
+              <a:latin typeface="Noto Sans SC"/>
+              <a:ea typeface="Noto Sans SC"/>
+              <a:cs typeface="Noto Sans SC"/>
+            </a:endParaRPr>
           </a:p>
         </p:txBody>
       </p:sp>
       <p:sp>
         <p:nvSpPr>
-          <p:cNvPr id="10" name="矩形: 圆角 9">
-            <a:extLst>
-              <a:ext uri="{FF2B5EF4-FFF2-40B4-BE49-F238E27FC236}">
-                <a16:creationId xmlns:a16="http://schemas.microsoft.com/office/drawing/2014/main" id="{B7D530A0-0DE8-4F90-A7CC-9C261333DEA2}"/>
-              </a:ext>
-            </a:extLst>
-          </p:cNvPr>
+          <p:cNvPr id="10" name="矩形: 圆角 9"/>
           <p:cNvSpPr>
             <a:spLocks noGrp="1"/>
           </p:cNvSpPr>
@@ -7765,13 +7539,7 @@
       </p:sp>
       <p:sp>
         <p:nvSpPr>
-          <p:cNvPr id="11" name="矩形: 圆角 10">
-            <a:extLst>
-              <a:ext uri="{FF2B5EF4-FFF2-40B4-BE49-F238E27FC236}">
-                <a16:creationId xmlns:a16="http://schemas.microsoft.com/office/drawing/2014/main" id="{59C6B106-400F-4A35-8445-6284A7957BD9}"/>
-              </a:ext>
-            </a:extLst>
-          </p:cNvPr>
+          <p:cNvPr id="11" name="矩形: 圆角 10"/>
           <p:cNvSpPr>
             <a:spLocks noGrp="1"/>
           </p:cNvSpPr>
@@ -7798,13 +7566,7 @@
       </p:sp>
       <p:sp>
         <p:nvSpPr>
-          <p:cNvPr id="12" name="矩形 11">
-            <a:extLst>
-              <a:ext uri="{FF2B5EF4-FFF2-40B4-BE49-F238E27FC236}">
-                <a16:creationId xmlns:a16="http://schemas.microsoft.com/office/drawing/2014/main" id="{D0DBFD2D-29A8-4FBF-B771-6D3226B5D064}"/>
-              </a:ext>
-            </a:extLst>
-          </p:cNvPr>
+          <p:cNvPr id="12" name="矩形 11"/>
           <p:cNvSpPr>
             <a:spLocks noGrp="1"/>
           </p:cNvSpPr>
@@ -7850,18 +7612,20 @@
               </a:rPr>
               <a:t>2</a:t>
             </a:r>
+            <a:endParaRPr sz="975" b="1">
+              <a:solidFill>
+                <a:srgbClr val="4F83FF"/>
+              </a:solidFill>
+              <a:latin typeface="Noto Sans SC"/>
+              <a:ea typeface="Noto Sans SC"/>
+              <a:cs typeface="Noto Sans SC"/>
+            </a:endParaRPr>
           </a:p>
         </p:txBody>
       </p:sp>
       <p:sp>
         <p:nvSpPr>
-          <p:cNvPr id="13" name="矩形 12">
-            <a:extLst>
-              <a:ext uri="{FF2B5EF4-FFF2-40B4-BE49-F238E27FC236}">
-                <a16:creationId xmlns:a16="http://schemas.microsoft.com/office/drawing/2014/main" id="{E1464CAF-2735-45E1-A8F2-BD1FE96795A9}"/>
-              </a:ext>
-            </a:extLst>
-          </p:cNvPr>
+          <p:cNvPr id="13" name="矩形 12"/>
           <p:cNvSpPr>
             <a:spLocks noGrp="1"/>
           </p:cNvSpPr>
@@ -7907,18 +7671,20 @@
               </a:rPr>
               <a:t>开始游戏</a:t>
             </a:r>
+            <a:endParaRPr sz="1350" b="1">
+              <a:solidFill>
+                <a:srgbClr val="EAF2FF"/>
+              </a:solidFill>
+              <a:latin typeface="Noto Sans SC"/>
+              <a:ea typeface="Noto Sans SC"/>
+              <a:cs typeface="Noto Sans SC"/>
+            </a:endParaRPr>
           </a:p>
         </p:txBody>
       </p:sp>
       <p:sp>
         <p:nvSpPr>
-          <p:cNvPr id="14" name="矩形 13">
-            <a:extLst>
-              <a:ext uri="{FF2B5EF4-FFF2-40B4-BE49-F238E27FC236}">
-                <a16:creationId xmlns:a16="http://schemas.microsoft.com/office/drawing/2014/main" id="{924CF9F1-393D-4354-A235-AB89355428F8}"/>
-              </a:ext>
-            </a:extLst>
-          </p:cNvPr>
+          <p:cNvPr id="14" name="矩形 13"/>
           <p:cNvSpPr>
             <a:spLocks noGrp="1"/>
           </p:cNvSpPr>
@@ -7964,18 +7730,20 @@
               </a:rPr>
               <a:t>SW0 进入主循环</a:t>
             </a:r>
+            <a:endParaRPr sz="1050" b="0">
+              <a:solidFill>
+                <a:srgbClr val="A6B4C8"/>
+              </a:solidFill>
+              <a:latin typeface="Noto Sans SC"/>
+              <a:ea typeface="Noto Sans SC"/>
+              <a:cs typeface="Noto Sans SC"/>
+            </a:endParaRPr>
           </a:p>
         </p:txBody>
       </p:sp>
       <p:sp>
         <p:nvSpPr>
-          <p:cNvPr id="15" name="矩形: 圆角 14">
-            <a:extLst>
-              <a:ext uri="{FF2B5EF4-FFF2-40B4-BE49-F238E27FC236}">
-                <a16:creationId xmlns:a16="http://schemas.microsoft.com/office/drawing/2014/main" id="{6A99C916-6033-4A32-8602-1DF3A6D7CB15}"/>
-              </a:ext>
-            </a:extLst>
-          </p:cNvPr>
+          <p:cNvPr id="15" name="矩形: 圆角 14"/>
           <p:cNvSpPr>
             <a:spLocks noGrp="1"/>
           </p:cNvSpPr>
@@ -8004,13 +7772,7 @@
       </p:sp>
       <p:sp>
         <p:nvSpPr>
-          <p:cNvPr id="16" name="矩形: 圆角 15">
-            <a:extLst>
-              <a:ext uri="{FF2B5EF4-FFF2-40B4-BE49-F238E27FC236}">
-                <a16:creationId xmlns:a16="http://schemas.microsoft.com/office/drawing/2014/main" id="{D4EDCAB1-CC94-49E5-A06A-BF47C4E3783F}"/>
-              </a:ext>
-            </a:extLst>
-          </p:cNvPr>
+          <p:cNvPr id="16" name="矩形: 圆角 15"/>
           <p:cNvSpPr>
             <a:spLocks noGrp="1"/>
           </p:cNvSpPr>
@@ -8037,13 +7799,7 @@
       </p:sp>
       <p:sp>
         <p:nvSpPr>
-          <p:cNvPr id="17" name="矩形 16">
-            <a:extLst>
-              <a:ext uri="{FF2B5EF4-FFF2-40B4-BE49-F238E27FC236}">
-                <a16:creationId xmlns:a16="http://schemas.microsoft.com/office/drawing/2014/main" id="{A7F3CDAD-345E-419B-B61C-1064301EB0D6}"/>
-              </a:ext>
-            </a:extLst>
-          </p:cNvPr>
+          <p:cNvPr id="17" name="矩形 16"/>
           <p:cNvSpPr>
             <a:spLocks noGrp="1"/>
           </p:cNvSpPr>
@@ -8089,18 +7845,20 @@
               </a:rPr>
               <a:t>3</a:t>
             </a:r>
+            <a:endParaRPr sz="975" b="1">
+              <a:solidFill>
+                <a:srgbClr val="A78BFA"/>
+              </a:solidFill>
+              <a:latin typeface="Noto Sans SC"/>
+              <a:ea typeface="Noto Sans SC"/>
+              <a:cs typeface="Noto Sans SC"/>
+            </a:endParaRPr>
           </a:p>
         </p:txBody>
       </p:sp>
       <p:sp>
         <p:nvSpPr>
-          <p:cNvPr id="18" name="矩形 17">
-            <a:extLst>
-              <a:ext uri="{FF2B5EF4-FFF2-40B4-BE49-F238E27FC236}">
-                <a16:creationId xmlns:a16="http://schemas.microsoft.com/office/drawing/2014/main" id="{0F5AF173-4D41-4326-B97D-51351F6D001D}"/>
-              </a:ext>
-            </a:extLst>
-          </p:cNvPr>
+          <p:cNvPr id="18" name="矩形 17"/>
           <p:cNvSpPr>
             <a:spLocks noGrp="1"/>
           </p:cNvSpPr>
@@ -8146,18 +7904,20 @@
               </a:rPr>
               <a:t>左右与旋转</a:t>
             </a:r>
+            <a:endParaRPr sz="1350" b="1">
+              <a:solidFill>
+                <a:srgbClr val="EAF2FF"/>
+              </a:solidFill>
+              <a:latin typeface="Noto Sans SC"/>
+              <a:ea typeface="Noto Sans SC"/>
+              <a:cs typeface="Noto Sans SC"/>
+            </a:endParaRPr>
           </a:p>
         </p:txBody>
       </p:sp>
       <p:sp>
         <p:nvSpPr>
-          <p:cNvPr id="19" name="矩形 18">
-            <a:extLst>
-              <a:ext uri="{FF2B5EF4-FFF2-40B4-BE49-F238E27FC236}">
-                <a16:creationId xmlns:a16="http://schemas.microsoft.com/office/drawing/2014/main" id="{01710153-D62E-41A1-A466-0A978522240B}"/>
-              </a:ext>
-            </a:extLst>
-          </p:cNvPr>
+          <p:cNvPr id="19" name="矩形 18"/>
           <p:cNvSpPr>
             <a:spLocks noGrp="1"/>
           </p:cNvSpPr>
@@ -8203,18 +7963,20 @@
               </a:rPr>
               <a:t>手柄输入响应</a:t>
             </a:r>
+            <a:endParaRPr sz="1050" b="0">
+              <a:solidFill>
+                <a:srgbClr val="A6B4C8"/>
+              </a:solidFill>
+              <a:latin typeface="Noto Sans SC"/>
+              <a:ea typeface="Noto Sans SC"/>
+              <a:cs typeface="Noto Sans SC"/>
+            </a:endParaRPr>
           </a:p>
         </p:txBody>
       </p:sp>
       <p:sp>
         <p:nvSpPr>
-          <p:cNvPr id="20" name="矩形: 圆角 19">
-            <a:extLst>
-              <a:ext uri="{FF2B5EF4-FFF2-40B4-BE49-F238E27FC236}">
-                <a16:creationId xmlns:a16="http://schemas.microsoft.com/office/drawing/2014/main" id="{87DF30D7-07F7-4080-BAC5-4DEAA2D6F1B2}"/>
-              </a:ext>
-            </a:extLst>
-          </p:cNvPr>
+          <p:cNvPr id="20" name="矩形: 圆角 19"/>
           <p:cNvSpPr>
             <a:spLocks noGrp="1"/>
           </p:cNvSpPr>
@@ -8243,13 +8005,7 @@
       </p:sp>
       <p:sp>
         <p:nvSpPr>
-          <p:cNvPr id="21" name="矩形: 圆角 20">
-            <a:extLst>
-              <a:ext uri="{FF2B5EF4-FFF2-40B4-BE49-F238E27FC236}">
-                <a16:creationId xmlns:a16="http://schemas.microsoft.com/office/drawing/2014/main" id="{158AF328-AD78-4011-A25D-8EA09781D22F}"/>
-              </a:ext>
-            </a:extLst>
-          </p:cNvPr>
+          <p:cNvPr id="21" name="矩形: 圆角 20"/>
           <p:cNvSpPr>
             <a:spLocks noGrp="1"/>
           </p:cNvSpPr>
@@ -8276,13 +8032,7 @@
       </p:sp>
       <p:sp>
         <p:nvSpPr>
-          <p:cNvPr id="22" name="矩形 21">
-            <a:extLst>
-              <a:ext uri="{FF2B5EF4-FFF2-40B4-BE49-F238E27FC236}">
-                <a16:creationId xmlns:a16="http://schemas.microsoft.com/office/drawing/2014/main" id="{0FCFA788-52C1-478D-B73A-AACA6187D88F}"/>
-              </a:ext>
-            </a:extLst>
-          </p:cNvPr>
+          <p:cNvPr id="22" name="矩形 21"/>
           <p:cNvSpPr>
             <a:spLocks noGrp="1"/>
           </p:cNvSpPr>
@@ -8328,18 +8078,20 @@
               </a:rPr>
               <a:t>4</a:t>
             </a:r>
+            <a:endParaRPr sz="975" b="1">
+              <a:solidFill>
+                <a:srgbClr val="F5B942"/>
+              </a:solidFill>
+              <a:latin typeface="Noto Sans SC"/>
+              <a:ea typeface="Noto Sans SC"/>
+              <a:cs typeface="Noto Sans SC"/>
+            </a:endParaRPr>
           </a:p>
         </p:txBody>
       </p:sp>
       <p:sp>
         <p:nvSpPr>
-          <p:cNvPr id="23" name="矩形 22">
-            <a:extLst>
-              <a:ext uri="{FF2B5EF4-FFF2-40B4-BE49-F238E27FC236}">
-                <a16:creationId xmlns:a16="http://schemas.microsoft.com/office/drawing/2014/main" id="{28300BA2-E5D6-4001-BECB-B275422F1DA0}"/>
-              </a:ext>
-            </a:extLst>
-          </p:cNvPr>
+          <p:cNvPr id="23" name="矩形 22"/>
           <p:cNvSpPr>
             <a:spLocks noGrp="1"/>
           </p:cNvSpPr>
@@ -8385,18 +8137,20 @@
               </a:rPr>
               <a:t>软降与锁定</a:t>
             </a:r>
+            <a:endParaRPr sz="1350" b="1">
+              <a:solidFill>
+                <a:srgbClr val="EAF2FF"/>
+              </a:solidFill>
+              <a:latin typeface="Noto Sans SC"/>
+              <a:ea typeface="Noto Sans SC"/>
+              <a:cs typeface="Noto Sans SC"/>
+            </a:endParaRPr>
           </a:p>
         </p:txBody>
       </p:sp>
       <p:sp>
         <p:nvSpPr>
-          <p:cNvPr id="24" name="矩形 23">
-            <a:extLst>
-              <a:ext uri="{FF2B5EF4-FFF2-40B4-BE49-F238E27FC236}">
-                <a16:creationId xmlns:a16="http://schemas.microsoft.com/office/drawing/2014/main" id="{2B683515-AE5A-4EFF-AB10-1EC95BB4BF71}"/>
-              </a:ext>
-            </a:extLst>
-          </p:cNvPr>
+          <p:cNvPr id="24" name="矩形 23"/>
           <p:cNvSpPr>
             <a:spLocks noGrp="1"/>
           </p:cNvSpPr>
@@ -8442,18 +8196,20 @@
               </a:rPr>
               <a:t>方块进入固定棋盘</a:t>
             </a:r>
+            <a:endParaRPr sz="1050" b="0">
+              <a:solidFill>
+                <a:srgbClr val="A6B4C8"/>
+              </a:solidFill>
+              <a:latin typeface="Noto Sans SC"/>
+              <a:ea typeface="Noto Sans SC"/>
+              <a:cs typeface="Noto Sans SC"/>
+            </a:endParaRPr>
           </a:p>
         </p:txBody>
       </p:sp>
       <p:sp>
         <p:nvSpPr>
-          <p:cNvPr id="25" name="矩形: 圆角 24">
-            <a:extLst>
-              <a:ext uri="{FF2B5EF4-FFF2-40B4-BE49-F238E27FC236}">
-                <a16:creationId xmlns:a16="http://schemas.microsoft.com/office/drawing/2014/main" id="{A7039AC8-4EF7-4C89-A6C1-D5DA56C7AC82}"/>
-              </a:ext>
-            </a:extLst>
-          </p:cNvPr>
+          <p:cNvPr id="25" name="矩形: 圆角 24"/>
           <p:cNvSpPr>
             <a:spLocks noGrp="1"/>
           </p:cNvSpPr>
@@ -8482,13 +8238,7 @@
       </p:sp>
       <p:sp>
         <p:nvSpPr>
-          <p:cNvPr id="26" name="矩形: 圆角 25">
-            <a:extLst>
-              <a:ext uri="{FF2B5EF4-FFF2-40B4-BE49-F238E27FC236}">
-                <a16:creationId xmlns:a16="http://schemas.microsoft.com/office/drawing/2014/main" id="{4CB596A5-51F1-4A56-A8FC-17D217027F5E}"/>
-              </a:ext>
-            </a:extLst>
-          </p:cNvPr>
+          <p:cNvPr id="26" name="矩形: 圆角 25"/>
           <p:cNvSpPr>
             <a:spLocks noGrp="1"/>
           </p:cNvSpPr>
@@ -8515,13 +8265,7 @@
       </p:sp>
       <p:sp>
         <p:nvSpPr>
-          <p:cNvPr id="27" name="矩形 26">
-            <a:extLst>
-              <a:ext uri="{FF2B5EF4-FFF2-40B4-BE49-F238E27FC236}">
-                <a16:creationId xmlns:a16="http://schemas.microsoft.com/office/drawing/2014/main" id="{35A70F0B-DFA3-41D4-A5C7-71EF3ACB3BA2}"/>
-              </a:ext>
-            </a:extLst>
-          </p:cNvPr>
+          <p:cNvPr id="27" name="矩形 26"/>
           <p:cNvSpPr>
             <a:spLocks noGrp="1"/>
           </p:cNvSpPr>
@@ -8567,18 +8311,20 @@
               </a:rPr>
               <a:t>5</a:t>
             </a:r>
+            <a:endParaRPr sz="975" b="1">
+              <a:solidFill>
+                <a:srgbClr val="37D99A"/>
+              </a:solidFill>
+              <a:latin typeface="Noto Sans SC"/>
+              <a:ea typeface="Noto Sans SC"/>
+              <a:cs typeface="Noto Sans SC"/>
+            </a:endParaRPr>
           </a:p>
         </p:txBody>
       </p:sp>
       <p:sp>
         <p:nvSpPr>
-          <p:cNvPr id="28" name="矩形 27">
-            <a:extLst>
-              <a:ext uri="{FF2B5EF4-FFF2-40B4-BE49-F238E27FC236}">
-                <a16:creationId xmlns:a16="http://schemas.microsoft.com/office/drawing/2014/main" id="{86D8C851-1348-4743-B7F7-DFE3736EB5B3}"/>
-              </a:ext>
-            </a:extLst>
-          </p:cNvPr>
+          <p:cNvPr id="28" name="矩形 27"/>
           <p:cNvSpPr>
             <a:spLocks noGrp="1"/>
           </p:cNvSpPr>
@@ -8624,18 +8370,20 @@
               </a:rPr>
               <a:t>消行</a:t>
             </a:r>
+            <a:endParaRPr sz="1350" b="1">
+              <a:solidFill>
+                <a:srgbClr val="EAF2FF"/>
+              </a:solidFill>
+              <a:latin typeface="Noto Sans SC"/>
+              <a:ea typeface="Noto Sans SC"/>
+              <a:cs typeface="Noto Sans SC"/>
+            </a:endParaRPr>
           </a:p>
         </p:txBody>
       </p:sp>
       <p:sp>
         <p:nvSpPr>
-          <p:cNvPr id="29" name="矩形 28">
-            <a:extLst>
-              <a:ext uri="{FF2B5EF4-FFF2-40B4-BE49-F238E27FC236}">
-                <a16:creationId xmlns:a16="http://schemas.microsoft.com/office/drawing/2014/main" id="{13AD3561-AB21-417E-A38F-CA7CD5D5DD18}"/>
-              </a:ext>
-            </a:extLst>
-          </p:cNvPr>
+          <p:cNvPr id="29" name="矩形 28"/>
           <p:cNvSpPr>
             <a:spLocks noGrp="1"/>
           </p:cNvSpPr>
@@ -8681,18 +8429,20 @@
               </a:rPr>
               <a:t>画面更新并触发蜂鸣器</a:t>
             </a:r>
+            <a:endParaRPr sz="1050" b="0">
+              <a:solidFill>
+                <a:srgbClr val="A6B4C8"/>
+              </a:solidFill>
+              <a:latin typeface="Noto Sans SC"/>
+              <a:ea typeface="Noto Sans SC"/>
+              <a:cs typeface="Noto Sans SC"/>
+            </a:endParaRPr>
           </a:p>
         </p:txBody>
       </p:sp>
       <p:sp>
         <p:nvSpPr>
-          <p:cNvPr id="30" name="矩形: 圆角 29">
-            <a:extLst>
-              <a:ext uri="{FF2B5EF4-FFF2-40B4-BE49-F238E27FC236}">
-                <a16:creationId xmlns:a16="http://schemas.microsoft.com/office/drawing/2014/main" id="{842253A1-E39A-4C34-BB53-CE5E7FCA6B58}"/>
-              </a:ext>
-            </a:extLst>
-          </p:cNvPr>
+          <p:cNvPr id="30" name="矩形: 圆角 29"/>
           <p:cNvSpPr>
             <a:spLocks noGrp="1"/>
           </p:cNvSpPr>
@@ -8721,13 +8471,7 @@
       </p:sp>
       <p:sp>
         <p:nvSpPr>
-          <p:cNvPr id="31" name="矩形: 圆角 30">
-            <a:extLst>
-              <a:ext uri="{FF2B5EF4-FFF2-40B4-BE49-F238E27FC236}">
-                <a16:creationId xmlns:a16="http://schemas.microsoft.com/office/drawing/2014/main" id="{51D88C4F-B4A4-44EE-AADF-04FCFC11C507}"/>
-              </a:ext>
-            </a:extLst>
-          </p:cNvPr>
+          <p:cNvPr id="31" name="矩形: 圆角 30"/>
           <p:cNvSpPr>
             <a:spLocks noGrp="1"/>
           </p:cNvSpPr>
@@ -8754,13 +8498,7 @@
       </p:sp>
       <p:sp>
         <p:nvSpPr>
-          <p:cNvPr id="32" name="矩形 31">
-            <a:extLst>
-              <a:ext uri="{FF2B5EF4-FFF2-40B4-BE49-F238E27FC236}">
-                <a16:creationId xmlns:a16="http://schemas.microsoft.com/office/drawing/2014/main" id="{B476A092-CDB9-4F4D-A206-51A842637804}"/>
-              </a:ext>
-            </a:extLst>
-          </p:cNvPr>
+          <p:cNvPr id="32" name="矩形 31"/>
           <p:cNvSpPr>
             <a:spLocks noGrp="1"/>
           </p:cNvSpPr>
@@ -8806,18 +8544,20 @@
               </a:rPr>
               <a:t>6</a:t>
             </a:r>
+            <a:endParaRPr sz="975" b="1">
+              <a:solidFill>
+                <a:srgbClr val="F26B7A"/>
+              </a:solidFill>
+              <a:latin typeface="Noto Sans SC"/>
+              <a:ea typeface="Noto Sans SC"/>
+              <a:cs typeface="Noto Sans SC"/>
+            </a:endParaRPr>
           </a:p>
         </p:txBody>
       </p:sp>
       <p:sp>
         <p:nvSpPr>
-          <p:cNvPr id="33" name="矩形 32">
-            <a:extLst>
-              <a:ext uri="{FF2B5EF4-FFF2-40B4-BE49-F238E27FC236}">
-                <a16:creationId xmlns:a16="http://schemas.microsoft.com/office/drawing/2014/main" id="{160686EA-F8C1-4CC8-8496-0B6ED8065F38}"/>
-              </a:ext>
-            </a:extLst>
-          </p:cNvPr>
+          <p:cNvPr id="33" name="矩形 32"/>
           <p:cNvSpPr>
             <a:spLocks noGrp="1"/>
           </p:cNvSpPr>
@@ -8863,18 +8603,20 @@
               </a:rPr>
               <a:t>重新开始</a:t>
             </a:r>
+            <a:endParaRPr sz="1350" b="1">
+              <a:solidFill>
+                <a:srgbClr val="EAF2FF"/>
+              </a:solidFill>
+              <a:latin typeface="Noto Sans SC"/>
+              <a:ea typeface="Noto Sans SC"/>
+              <a:cs typeface="Noto Sans SC"/>
+            </a:endParaRPr>
           </a:p>
         </p:txBody>
       </p:sp>
       <p:sp>
         <p:nvSpPr>
-          <p:cNvPr id="34" name="矩形 33">
-            <a:extLst>
-              <a:ext uri="{FF2B5EF4-FFF2-40B4-BE49-F238E27FC236}">
-                <a16:creationId xmlns:a16="http://schemas.microsoft.com/office/drawing/2014/main" id="{BBCC544E-20B0-433D-9A4C-10786C24D2F1}"/>
-              </a:ext>
-            </a:extLst>
-          </p:cNvPr>
+          <p:cNvPr id="34" name="矩形 33"/>
           <p:cNvSpPr>
             <a:spLocks noGrp="1"/>
           </p:cNvSpPr>
@@ -8920,75 +8662,20 @@
               </a:rPr>
               <a:t>游戏状态清零</a:t>
             </a:r>
+            <a:endParaRPr sz="1050" b="0">
+              <a:solidFill>
+                <a:srgbClr val="A6B4C8"/>
+              </a:solidFill>
+              <a:latin typeface="Noto Sans SC"/>
+              <a:ea typeface="Noto Sans SC"/>
+              <a:cs typeface="Noto Sans SC"/>
+            </a:endParaRPr>
           </a:p>
         </p:txBody>
       </p:sp>
       <p:sp>
         <p:nvSpPr>
-          <p:cNvPr id="35" name="矩形 34">
-            <a:extLst>
-              <a:ext uri="{FF2B5EF4-FFF2-40B4-BE49-F238E27FC236}">
-                <a16:creationId xmlns:a16="http://schemas.microsoft.com/office/drawing/2014/main" id="{BCCFF0E2-D994-44E0-888F-0265FB154AEF}"/>
-              </a:ext>
-            </a:extLst>
-          </p:cNvPr>
-          <p:cNvSpPr>
-            <a:spLocks noGrp="1"/>
-          </p:cNvSpPr>
-          <p:nvPr/>
-        </p:nvSpPr>
-        <p:spPr>
-          <a:xfrm>
-            <a:off x="400050" y="5286375"/>
-            <a:ext cx="11391900" cy="342900"/>
-          </a:xfrm>
-          <a:prstGeom prst="rect">
-            <a:avLst/>
-          </a:prstGeom>
-          <a:noFill/>
-          <a:ln w="0">
-            <a:noFill/>
-          </a:ln>
-        </p:spPr>
-        <p:txBody>
-          <a:bodyPr anchor="t">
-            <a:normAutofit/>
-          </a:bodyPr>
-          <a:lstStyle/>
-          <a:p>
-            <a:pPr>
-              <a:defRPr sz="1275" b="1">
-                <a:solidFill>
-                  <a:srgbClr val="F5B942"/>
-                </a:solidFill>
-                <a:latin typeface="Noto Sans SC"/>
-                <a:ea typeface="Noto Sans SC"/>
-                <a:cs typeface="Noto Sans SC"/>
-              </a:defRPr>
-            </a:pPr>
-            <a:r>
-              <a:rPr sz="1275" b="1">
-                <a:solidFill>
-                  <a:srgbClr val="F5B942"/>
-                </a:solidFill>
-                <a:latin typeface="Noto Sans SC"/>
-                <a:ea typeface="Noto Sans SC"/>
-                <a:cs typeface="Noto Sans SC"/>
-              </a:rPr>
-              <a:t>答辩前补入：游戏画面、按键操作、消行帧与蜂鸣器视频截图；总视频不超过 5 分钟</a:t>
-            </a:r>
-          </a:p>
-        </p:txBody>
-      </p:sp>
-      <p:sp>
-        <p:nvSpPr>
-          <p:cNvPr id="36" name="矩形 35">
-            <a:extLst>
-              <a:ext uri="{FF2B5EF4-FFF2-40B4-BE49-F238E27FC236}">
-                <a16:creationId xmlns:a16="http://schemas.microsoft.com/office/drawing/2014/main" id="{8AF0AB09-282F-4567-93BA-5C8461F0751C}"/>
-              </a:ext>
-            </a:extLst>
-          </p:cNvPr>
+          <p:cNvPr id="36" name="矩形 35"/>
           <p:cNvSpPr>
             <a:spLocks noGrp="1"/>
           </p:cNvSpPr>
@@ -9013,13 +8700,7 @@
       </p:sp>
       <p:sp>
         <p:nvSpPr>
-          <p:cNvPr id="37" name="矩形 36">
-            <a:extLst>
-              <a:ext uri="{FF2B5EF4-FFF2-40B4-BE49-F238E27FC236}">
-                <a16:creationId xmlns:a16="http://schemas.microsoft.com/office/drawing/2014/main" id="{68C10433-76A9-4390-B156-E9F2019EF544}"/>
-              </a:ext>
-            </a:extLst>
-          </p:cNvPr>
+          <p:cNvPr id="37" name="矩形 36"/>
           <p:cNvSpPr>
             <a:spLocks noGrp="1"/>
           </p:cNvSpPr>
@@ -9065,15 +8746,18 @@
               </a:rPr>
               <a:t>13</a:t>
             </a:r>
+            <a:endParaRPr sz="825" b="0">
+              <a:solidFill>
+                <a:srgbClr val="A6B4C8"/>
+              </a:solidFill>
+              <a:latin typeface="Noto Sans SC"/>
+              <a:ea typeface="Noto Sans SC"/>
+              <a:cs typeface="Noto Sans SC"/>
+            </a:endParaRPr>
           </a:p>
         </p:txBody>
       </p:sp>
     </p:spTree>
-    <p:extLst>
-      <p:ext uri="{BB962C8B-B14F-4D97-AF65-F5344CB8AC3E}">
-        <p14:creationId xmlns:p14="http://schemas.microsoft.com/office/powerpoint/2010/main" val="1506252362"/>
-      </p:ext>
-    </p:extLst>
   </p:cSld>
   <p:clrMapOvr>
     <a:masterClrMapping/>
@@ -9108,13 +8792,7 @@
       </p:grpSpPr>
       <p:sp>
         <p:nvSpPr>
-          <p:cNvPr id="22" name="矩形 21">
-            <a:extLst>
-              <a:ext uri="{FF2B5EF4-FFF2-40B4-BE49-F238E27FC236}">
-                <a16:creationId xmlns:a16="http://schemas.microsoft.com/office/drawing/2014/main" id="{F374BCFB-FD5B-473A-A830-3D0B3B1069E8}"/>
-              </a:ext>
-            </a:extLst>
-          </p:cNvPr>
+          <p:cNvPr id="22" name="矩形 21"/>
           <p:cNvSpPr>
             <a:spLocks noGrp="1"/>
           </p:cNvSpPr>
@@ -9160,18 +8838,20 @@
               </a:rPr>
               <a:t>总结</a:t>
             </a:r>
+            <a:endParaRPr sz="975" b="1">
+              <a:solidFill>
+                <a:srgbClr val="25D4E8"/>
+              </a:solidFill>
+              <a:latin typeface="Noto Sans SC"/>
+              <a:ea typeface="Noto Sans SC"/>
+              <a:cs typeface="Noto Sans SC"/>
+            </a:endParaRPr>
           </a:p>
         </p:txBody>
       </p:sp>
       <p:sp>
         <p:nvSpPr>
-          <p:cNvPr id="2" name="矩形 1">
-            <a:extLst>
-              <a:ext uri="{FF2B5EF4-FFF2-40B4-BE49-F238E27FC236}">
-                <a16:creationId xmlns:a16="http://schemas.microsoft.com/office/drawing/2014/main" id="{6D834363-FEA4-4B97-9B53-4962271F9FAB}"/>
-              </a:ext>
-            </a:extLst>
-          </p:cNvPr>
+          <p:cNvPr id="2" name="矩形 1"/>
           <p:cNvSpPr>
             <a:spLocks noGrp="1"/>
           </p:cNvSpPr>
@@ -9217,18 +8897,20 @@
               </a:rPr>
               <a:t>接口 IP 与汇编应用形成完整系统</a:t>
             </a:r>
+            <a:endParaRPr sz="2475" b="1">
+              <a:solidFill>
+                <a:srgbClr val="EAF2FF"/>
+              </a:solidFill>
+              <a:latin typeface="Noto Sans SC"/>
+              <a:ea typeface="Noto Sans SC"/>
+              <a:cs typeface="Noto Sans SC"/>
+            </a:endParaRPr>
           </a:p>
         </p:txBody>
       </p:sp>
       <p:sp>
         <p:nvSpPr>
-          <p:cNvPr id="3" name="直接连接符 2">
-            <a:extLst>
-              <a:ext uri="{FF2B5EF4-FFF2-40B4-BE49-F238E27FC236}">
-                <a16:creationId xmlns:a16="http://schemas.microsoft.com/office/drawing/2014/main" id="{945C961C-B82D-4C4B-8A90-F3CA07AFBF07}"/>
-              </a:ext>
-            </a:extLst>
-          </p:cNvPr>
+          <p:cNvPr id="3" name="直接连接符 2"/>
           <p:cNvSpPr>
             <a:spLocks noGrp="1"/>
           </p:cNvSpPr>
@@ -9253,13 +8935,7 @@
       </p:sp>
       <p:sp>
         <p:nvSpPr>
-          <p:cNvPr id="4" name="矩形 3">
-            <a:extLst>
-              <a:ext uri="{FF2B5EF4-FFF2-40B4-BE49-F238E27FC236}">
-                <a16:creationId xmlns:a16="http://schemas.microsoft.com/office/drawing/2014/main" id="{506B2AD6-0CF7-4D21-BC9C-B79F97C8BF39}"/>
-              </a:ext>
-            </a:extLst>
-          </p:cNvPr>
+          <p:cNvPr id="4" name="矩形 3"/>
           <p:cNvSpPr>
             <a:spLocks noGrp="1"/>
           </p:cNvSpPr>
@@ -9305,18 +8981,20 @@
               </a:rPr>
               <a:t>13</a:t>
             </a:r>
+            <a:endParaRPr sz="825" b="0">
+              <a:solidFill>
+                <a:srgbClr val="A6B4C8"/>
+              </a:solidFill>
+              <a:latin typeface="Noto Sans SC"/>
+              <a:ea typeface="Noto Sans SC"/>
+              <a:cs typeface="Noto Sans SC"/>
+            </a:endParaRPr>
           </a:p>
         </p:txBody>
       </p:sp>
       <p:sp>
         <p:nvSpPr>
-          <p:cNvPr id="5" name="矩形: 圆角 4">
-            <a:extLst>
-              <a:ext uri="{FF2B5EF4-FFF2-40B4-BE49-F238E27FC236}">
-                <a16:creationId xmlns:a16="http://schemas.microsoft.com/office/drawing/2014/main" id="{99503D80-A857-4A15-AD9F-C81EF767A935}"/>
-              </a:ext>
-            </a:extLst>
-          </p:cNvPr>
+          <p:cNvPr id="5" name="矩形: 圆角 4"/>
           <p:cNvSpPr>
             <a:spLocks noGrp="1"/>
           </p:cNvSpPr>
@@ -9345,13 +9023,7 @@
       </p:sp>
       <p:sp>
         <p:nvSpPr>
-          <p:cNvPr id="6" name="矩形: 圆角 5">
-            <a:extLst>
-              <a:ext uri="{FF2B5EF4-FFF2-40B4-BE49-F238E27FC236}">
-                <a16:creationId xmlns:a16="http://schemas.microsoft.com/office/drawing/2014/main" id="{4FC26B9D-8A49-41DF-A2FA-CFB4376F7F6F}"/>
-              </a:ext>
-            </a:extLst>
-          </p:cNvPr>
+          <p:cNvPr id="6" name="矩形: 圆角 5"/>
           <p:cNvSpPr>
             <a:spLocks noGrp="1"/>
           </p:cNvSpPr>
@@ -9378,13 +9050,7 @@
       </p:sp>
       <p:sp>
         <p:nvSpPr>
-          <p:cNvPr id="7" name="矩形 6">
-            <a:extLst>
-              <a:ext uri="{FF2B5EF4-FFF2-40B4-BE49-F238E27FC236}">
-                <a16:creationId xmlns:a16="http://schemas.microsoft.com/office/drawing/2014/main" id="{A84798D4-AD44-43DE-A661-B58B7E155079}"/>
-              </a:ext>
-            </a:extLst>
-          </p:cNvPr>
+          <p:cNvPr id="7" name="矩形 6"/>
           <p:cNvSpPr>
             <a:spLocks noGrp="1"/>
           </p:cNvSpPr>
@@ -9430,18 +9096,20 @@
               </a:rPr>
               <a:t>可复用硬件</a:t>
             </a:r>
+            <a:endParaRPr sz="1350" b="1">
+              <a:solidFill>
+                <a:srgbClr val="A78BFA"/>
+              </a:solidFill>
+              <a:latin typeface="Noto Sans SC"/>
+              <a:ea typeface="Noto Sans SC"/>
+              <a:cs typeface="Noto Sans SC"/>
+            </a:endParaRPr>
           </a:p>
         </p:txBody>
       </p:sp>
       <p:sp>
         <p:nvSpPr>
-          <p:cNvPr id="8" name="矩形 7">
-            <a:extLst>
-              <a:ext uri="{FF2B5EF4-FFF2-40B4-BE49-F238E27FC236}">
-                <a16:creationId xmlns:a16="http://schemas.microsoft.com/office/drawing/2014/main" id="{FBAEF288-7622-4197-9163-18EC83DE84AE}"/>
-              </a:ext>
-            </a:extLst>
-          </p:cNvPr>
+          <p:cNvPr id="8" name="矩形 7"/>
           <p:cNvSpPr>
             <a:spLocks noGrp="1"/>
           </p:cNvSpPr>
@@ -9487,6 +9155,14 @@
               </a:rPr>
               <a:t>ST7571 复位与初始化</a:t>
             </a:r>
+            <a:endParaRPr sz="1125" b="0">
+              <a:solidFill>
+                <a:srgbClr val="EAF2FF"/>
+              </a:solidFill>
+              <a:latin typeface="Noto Sans SC"/>
+              <a:ea typeface="Noto Sans SC"/>
+              <a:cs typeface="Noto Sans SC"/>
+            </a:endParaRPr>
           </a:p>
           <a:p>
             <a:pPr>
@@ -9510,6 +9186,14 @@
               </a:rPr>
               <a:t>4 线 SPI 字节发送</a:t>
             </a:r>
+            <a:endParaRPr sz="1125" b="0">
+              <a:solidFill>
+                <a:srgbClr val="EAF2FF"/>
+              </a:solidFill>
+              <a:latin typeface="Noto Sans SC"/>
+              <a:ea typeface="Noto Sans SC"/>
+              <a:cs typeface="Noto Sans SC"/>
+            </a:endParaRPr>
           </a:p>
           <a:p>
             <a:pPr>
@@ -9533,18 +9217,20 @@
               </a:rPr>
               <a:t>IP Catalog 封装结构</a:t>
             </a:r>
+            <a:endParaRPr sz="1125" b="0">
+              <a:solidFill>
+                <a:srgbClr val="EAF2FF"/>
+              </a:solidFill>
+              <a:latin typeface="Noto Sans SC"/>
+              <a:ea typeface="Noto Sans SC"/>
+              <a:cs typeface="Noto Sans SC"/>
+            </a:endParaRPr>
           </a:p>
         </p:txBody>
       </p:sp>
       <p:sp>
         <p:nvSpPr>
-          <p:cNvPr id="9" name="矩形: 圆角 8">
-            <a:extLst>
-              <a:ext uri="{FF2B5EF4-FFF2-40B4-BE49-F238E27FC236}">
-                <a16:creationId xmlns:a16="http://schemas.microsoft.com/office/drawing/2014/main" id="{7E9E72B6-6526-433A-813D-211CB9D5667D}"/>
-              </a:ext>
-            </a:extLst>
-          </p:cNvPr>
+          <p:cNvPr id="9" name="矩形: 圆角 8"/>
           <p:cNvSpPr>
             <a:spLocks noGrp="1"/>
           </p:cNvSpPr>
@@ -9573,13 +9259,7 @@
       </p:sp>
       <p:sp>
         <p:nvSpPr>
-          <p:cNvPr id="10" name="矩形: 圆角 9">
-            <a:extLst>
-              <a:ext uri="{FF2B5EF4-FFF2-40B4-BE49-F238E27FC236}">
-                <a16:creationId xmlns:a16="http://schemas.microsoft.com/office/drawing/2014/main" id="{B76AF7FB-DABD-439D-80A0-B1F689BA595D}"/>
-              </a:ext>
-            </a:extLst>
-          </p:cNvPr>
+          <p:cNvPr id="10" name="矩形: 圆角 9"/>
           <p:cNvSpPr>
             <a:spLocks noGrp="1"/>
           </p:cNvSpPr>
@@ -9606,13 +9286,7 @@
       </p:sp>
       <p:sp>
         <p:nvSpPr>
-          <p:cNvPr id="11" name="矩形 10">
-            <a:extLst>
-              <a:ext uri="{FF2B5EF4-FFF2-40B4-BE49-F238E27FC236}">
-                <a16:creationId xmlns:a16="http://schemas.microsoft.com/office/drawing/2014/main" id="{0CF42FA1-5748-4270-9B6C-93F85E851175}"/>
-              </a:ext>
-            </a:extLst>
-          </p:cNvPr>
+          <p:cNvPr id="11" name="矩形 10"/>
           <p:cNvSpPr>
             <a:spLocks noGrp="1"/>
           </p:cNvSpPr>
@@ -9658,18 +9332,20 @@
               </a:rPr>
               <a:t>完整软件</a:t>
             </a:r>
+            <a:endParaRPr sz="1350" b="1">
+              <a:solidFill>
+                <a:srgbClr val="25D4E8"/>
+              </a:solidFill>
+              <a:latin typeface="Noto Sans SC"/>
+              <a:ea typeface="Noto Sans SC"/>
+              <a:cs typeface="Noto Sans SC"/>
+            </a:endParaRPr>
           </a:p>
         </p:txBody>
       </p:sp>
       <p:sp>
         <p:nvSpPr>
-          <p:cNvPr id="12" name="矩形 11">
-            <a:extLst>
-              <a:ext uri="{FF2B5EF4-FFF2-40B4-BE49-F238E27FC236}">
-                <a16:creationId xmlns:a16="http://schemas.microsoft.com/office/drawing/2014/main" id="{F36B23BA-45FC-4E6E-9688-FCD38F4B42C1}"/>
-              </a:ext>
-            </a:extLst>
-          </p:cNvPr>
+          <p:cNvPr id="12" name="矩形 11"/>
           <p:cNvSpPr>
             <a:spLocks noGrp="1"/>
           </p:cNvSpPr>
@@ -9715,6 +9391,14 @@
               </a:rPr>
               <a:t>MMIO 驱动与状态轮询</a:t>
             </a:r>
+            <a:endParaRPr sz="1125" b="0">
+              <a:solidFill>
+                <a:srgbClr val="EAF2FF"/>
+              </a:solidFill>
+              <a:latin typeface="Noto Sans SC"/>
+              <a:ea typeface="Noto Sans SC"/>
+              <a:cs typeface="Noto Sans SC"/>
+            </a:endParaRPr>
           </a:p>
           <a:p>
             <a:pPr>
@@ -9738,6 +9422,14 @@
               </a:rPr>
               <a:t>10×20 俄罗斯方块</a:t>
             </a:r>
+            <a:endParaRPr sz="1125" b="0">
+              <a:solidFill>
+                <a:srgbClr val="EAF2FF"/>
+              </a:solidFill>
+              <a:latin typeface="Noto Sans SC"/>
+              <a:ea typeface="Noto Sans SC"/>
+              <a:cs typeface="Noto Sans SC"/>
+            </a:endParaRPr>
           </a:p>
           <a:p>
             <a:pPr>
@@ -9761,18 +9453,20 @@
               </a:rPr>
               <a:t>移动、旋转、消行与重开</a:t>
             </a:r>
+            <a:endParaRPr sz="1125" b="0">
+              <a:solidFill>
+                <a:srgbClr val="EAF2FF"/>
+              </a:solidFill>
+              <a:latin typeface="Noto Sans SC"/>
+              <a:ea typeface="Noto Sans SC"/>
+              <a:cs typeface="Noto Sans SC"/>
+            </a:endParaRPr>
           </a:p>
         </p:txBody>
       </p:sp>
       <p:sp>
         <p:nvSpPr>
-          <p:cNvPr id="13" name="矩形: 圆角 12">
-            <a:extLst>
-              <a:ext uri="{FF2B5EF4-FFF2-40B4-BE49-F238E27FC236}">
-                <a16:creationId xmlns:a16="http://schemas.microsoft.com/office/drawing/2014/main" id="{60781D8B-3C62-4DEE-BEC1-69138F40707F}"/>
-              </a:ext>
-            </a:extLst>
-          </p:cNvPr>
+          <p:cNvPr id="13" name="矩形: 圆角 12"/>
           <p:cNvSpPr>
             <a:spLocks noGrp="1"/>
           </p:cNvSpPr>
@@ -9801,13 +9495,7 @@
       </p:sp>
       <p:sp>
         <p:nvSpPr>
-          <p:cNvPr id="14" name="矩形: 圆角 13">
-            <a:extLst>
-              <a:ext uri="{FF2B5EF4-FFF2-40B4-BE49-F238E27FC236}">
-                <a16:creationId xmlns:a16="http://schemas.microsoft.com/office/drawing/2014/main" id="{D83FEE3A-1C09-47BF-9B45-157539E4ADA3}"/>
-              </a:ext>
-            </a:extLst>
-          </p:cNvPr>
+          <p:cNvPr id="14" name="矩形: 圆角 13"/>
           <p:cNvSpPr>
             <a:spLocks noGrp="1"/>
           </p:cNvSpPr>
@@ -9834,13 +9522,7 @@
       </p:sp>
       <p:sp>
         <p:nvSpPr>
-          <p:cNvPr id="15" name="矩形 14">
-            <a:extLst>
-              <a:ext uri="{FF2B5EF4-FFF2-40B4-BE49-F238E27FC236}">
-                <a16:creationId xmlns:a16="http://schemas.microsoft.com/office/drawing/2014/main" id="{98705409-3436-441D-86D1-31EAFAAB69FE}"/>
-              </a:ext>
-            </a:extLst>
-          </p:cNvPr>
+          <p:cNvPr id="15" name="矩形 14"/>
           <p:cNvSpPr>
             <a:spLocks noGrp="1"/>
           </p:cNvSpPr>
@@ -9886,18 +9568,20 @@
               </a:rPr>
               <a:t>分层验证</a:t>
             </a:r>
+            <a:endParaRPr sz="1350" b="1">
+              <a:solidFill>
+                <a:srgbClr val="37D99A"/>
+              </a:solidFill>
+              <a:latin typeface="Noto Sans SC"/>
+              <a:ea typeface="Noto Sans SC"/>
+              <a:cs typeface="Noto Sans SC"/>
+            </a:endParaRPr>
           </a:p>
         </p:txBody>
       </p:sp>
       <p:sp>
         <p:nvSpPr>
-          <p:cNvPr id="16" name="矩形 15">
-            <a:extLst>
-              <a:ext uri="{FF2B5EF4-FFF2-40B4-BE49-F238E27FC236}">
-                <a16:creationId xmlns:a16="http://schemas.microsoft.com/office/drawing/2014/main" id="{874D3608-BDDE-4ACA-98FD-02E871F849F6}"/>
-              </a:ext>
-            </a:extLst>
-          </p:cNvPr>
+          <p:cNvPr id="16" name="矩形 15"/>
           <p:cNvSpPr>
             <a:spLocks noGrp="1"/>
           </p:cNvSpPr>
@@ -9943,6 +9627,14 @@
               </a:rPr>
               <a:t>SPI 与控制器单元测试</a:t>
             </a:r>
+            <a:endParaRPr sz="1125" b="0">
+              <a:solidFill>
+                <a:srgbClr val="EAF2FF"/>
+              </a:solidFill>
+              <a:latin typeface="Noto Sans SC"/>
+              <a:ea typeface="Noto Sans SC"/>
+              <a:cs typeface="Noto Sans SC"/>
+            </a:endParaRPr>
           </a:p>
           <a:p>
             <a:pPr>
@@ -9966,6 +9658,14 @@
               </a:rPr>
               <a:t>MMIO 与游戏系统测试</a:t>
             </a:r>
+            <a:endParaRPr sz="1125" b="0">
+              <a:solidFill>
+                <a:srgbClr val="EAF2FF"/>
+              </a:solidFill>
+              <a:latin typeface="Noto Sans SC"/>
+              <a:ea typeface="Noto Sans SC"/>
+              <a:cs typeface="Noto Sans SC"/>
+            </a:endParaRPr>
           </a:p>
           <a:p>
             <a:pPr>
@@ -9989,18 +9689,20 @@
               </a:rPr>
               <a:t>基础 LCD 下板闭环</a:t>
             </a:r>
+            <a:endParaRPr sz="1125" b="0">
+              <a:solidFill>
+                <a:srgbClr val="EAF2FF"/>
+              </a:solidFill>
+              <a:latin typeface="Noto Sans SC"/>
+              <a:ea typeface="Noto Sans SC"/>
+              <a:cs typeface="Noto Sans SC"/>
+            </a:endParaRPr>
           </a:p>
         </p:txBody>
       </p:sp>
       <p:sp>
         <p:nvSpPr>
-          <p:cNvPr id="17" name="矩形 16">
-            <a:extLst>
-              <a:ext uri="{FF2B5EF4-FFF2-40B4-BE49-F238E27FC236}">
-                <a16:creationId xmlns:a16="http://schemas.microsoft.com/office/drawing/2014/main" id="{62DD284A-D1CD-4EEB-BE0C-67905F46AF74}"/>
-              </a:ext>
-            </a:extLst>
-          </p:cNvPr>
+          <p:cNvPr id="17" name="矩形 16"/>
           <p:cNvSpPr>
             <a:spLocks noGrp="1"/>
           </p:cNvSpPr>
@@ -10046,18 +9748,20 @@
               </a:rPr>
               <a:t>课程边界</a:t>
             </a:r>
+            <a:endParaRPr sz="1500" b="1">
+              <a:solidFill>
+                <a:srgbClr val="25D4E8"/>
+              </a:solidFill>
+              <a:latin typeface="Noto Sans SC"/>
+              <a:ea typeface="Noto Sans SC"/>
+              <a:cs typeface="Noto Sans SC"/>
+            </a:endParaRPr>
           </a:p>
         </p:txBody>
       </p:sp>
       <p:sp>
         <p:nvSpPr>
-          <p:cNvPr id="18" name="矩形 17">
-            <a:extLst>
-              <a:ext uri="{FF2B5EF4-FFF2-40B4-BE49-F238E27FC236}">
-                <a16:creationId xmlns:a16="http://schemas.microsoft.com/office/drawing/2014/main" id="{E457D8F6-050C-48A4-8419-97FB6E09F307}"/>
-              </a:ext>
-            </a:extLst>
-          </p:cNvPr>
+          <p:cNvPr id="18" name="矩形 17"/>
           <p:cNvSpPr>
             <a:spLocks noGrp="1"/>
           </p:cNvSpPr>
@@ -10103,75 +9807,20 @@
               </a:rPr>
               <a:t>计组评价 CPU 微架构与性能；本课程评价接口协议、IP 封装、汇编驱动与软硬件协同。</a:t>
             </a:r>
+            <a:endParaRPr sz="1425" b="1">
+              <a:solidFill>
+                <a:srgbClr val="EAF2FF"/>
+              </a:solidFill>
+              <a:latin typeface="Noto Sans SC"/>
+              <a:ea typeface="Noto Sans SC"/>
+              <a:cs typeface="Noto Sans SC"/>
+            </a:endParaRPr>
           </a:p>
         </p:txBody>
       </p:sp>
       <p:sp>
         <p:nvSpPr>
-          <p:cNvPr id="19" name="矩形 18">
-            <a:extLst>
-              <a:ext uri="{FF2B5EF4-FFF2-40B4-BE49-F238E27FC236}">
-                <a16:creationId xmlns:a16="http://schemas.microsoft.com/office/drawing/2014/main" id="{72DE4ECF-7456-4EA2-8042-FA55E5E9204B}"/>
-              </a:ext>
-            </a:extLst>
-          </p:cNvPr>
-          <p:cNvSpPr>
-            <a:spLocks noGrp="1"/>
-          </p:cNvSpPr>
-          <p:nvPr/>
-        </p:nvSpPr>
-        <p:spPr>
-          <a:xfrm>
-            <a:off x="400050" y="5181600"/>
-            <a:ext cx="11391900" cy="342900"/>
-          </a:xfrm>
-          <a:prstGeom prst="rect">
-            <a:avLst/>
-          </a:prstGeom>
-          <a:noFill/>
-          <a:ln w="0">
-            <a:noFill/>
-          </a:ln>
-        </p:spPr>
-        <p:txBody>
-          <a:bodyPr anchor="t">
-            <a:normAutofit/>
-          </a:bodyPr>
-          <a:lstStyle/>
-          <a:p>
-            <a:pPr>
-              <a:defRPr sz="1275" b="1">
-                <a:solidFill>
-                  <a:srgbClr val="F26B7A"/>
-                </a:solidFill>
-                <a:latin typeface="Noto Sans SC"/>
-                <a:ea typeface="Noto Sans SC"/>
-                <a:cs typeface="Noto Sans SC"/>
-              </a:defRPr>
-            </a:pPr>
-            <a:r>
-              <a:rPr sz="1275" b="1">
-                <a:solidFill>
-                  <a:srgbClr val="F26B7A"/>
-                </a:solidFill>
-                <a:latin typeface="Noto Sans SC"/>
-                <a:ea typeface="Noto Sans SC"/>
-                <a:cs typeface="Noto Sans SC"/>
-              </a:rPr>
-              <a:t>提交前仍需补齐 IP 工具截图、最终游戏实物照片和不超过 5 分钟的下板视频。</a:t>
-            </a:r>
-          </a:p>
-        </p:txBody>
-      </p:sp>
-      <p:sp>
-        <p:nvSpPr>
-          <p:cNvPr id="20" name="矩形 19">
-            <a:extLst>
-              <a:ext uri="{FF2B5EF4-FFF2-40B4-BE49-F238E27FC236}">
-                <a16:creationId xmlns:a16="http://schemas.microsoft.com/office/drawing/2014/main" id="{0F9F6605-1BF2-4E1D-9117-3889D8BDB9C0}"/>
-              </a:ext>
-            </a:extLst>
-          </p:cNvPr>
+          <p:cNvPr id="20" name="矩形 19"/>
           <p:cNvSpPr>
             <a:spLocks noGrp="1"/>
           </p:cNvSpPr>
@@ -10196,13 +9845,7 @@
       </p:sp>
       <p:sp>
         <p:nvSpPr>
-          <p:cNvPr id="21" name="矩形 20">
-            <a:extLst>
-              <a:ext uri="{FF2B5EF4-FFF2-40B4-BE49-F238E27FC236}">
-                <a16:creationId xmlns:a16="http://schemas.microsoft.com/office/drawing/2014/main" id="{D4C557CB-2C1B-44F7-869E-A1636BCCFB32}"/>
-              </a:ext>
-            </a:extLst>
-          </p:cNvPr>
+          <p:cNvPr id="21" name="矩形 20"/>
           <p:cNvSpPr>
             <a:spLocks noGrp="1"/>
           </p:cNvSpPr>
@@ -10248,15 +9891,18 @@
               </a:rPr>
               <a:t>14</a:t>
             </a:r>
+            <a:endParaRPr sz="825" b="0">
+              <a:solidFill>
+                <a:srgbClr val="A6B4C8"/>
+              </a:solidFill>
+              <a:latin typeface="Noto Sans SC"/>
+              <a:ea typeface="Noto Sans SC"/>
+              <a:cs typeface="Noto Sans SC"/>
+            </a:endParaRPr>
           </a:p>
         </p:txBody>
       </p:sp>
     </p:spTree>
-    <p:extLst>
-      <p:ext uri="{BB962C8B-B14F-4D97-AF65-F5344CB8AC3E}">
-        <p14:creationId xmlns:p14="http://schemas.microsoft.com/office/powerpoint/2010/main" val="709751947"/>
-      </p:ext>
-    </p:extLst>
   </p:cSld>
   <p:clrMapOvr>
     <a:masterClrMapping/>
@@ -10291,13 +9937,7 @@
       </p:grpSpPr>
       <p:sp>
         <p:nvSpPr>
-          <p:cNvPr id="26" name="矩形 25">
-            <a:extLst>
-              <a:ext uri="{FF2B5EF4-FFF2-40B4-BE49-F238E27FC236}">
-                <a16:creationId xmlns:a16="http://schemas.microsoft.com/office/drawing/2014/main" id="{CBF501B3-45F1-4837-A95E-F1B6432CAEB2}"/>
-              </a:ext>
-            </a:extLst>
-          </p:cNvPr>
+          <p:cNvPr id="26" name="矩形 25"/>
           <p:cNvSpPr>
             <a:spLocks noGrp="1"/>
           </p:cNvSpPr>
@@ -10336,7 +9976,6 @@
               <a:buSzTx/>
               <a:buFontTx/>
               <a:buNone/>
-              <a:tabLst/>
               <a:defRPr sz="975" b="1">
                 <a:solidFill>
                   <a:srgbClr val="25D4E8"/>
@@ -10363,18 +10002,26 @@
               </a:rPr>
               <a:t>汇报安排</a:t>
             </a:r>
+            <a:endParaRPr kumimoji="0" sz="975" b="1" i="0" u="none" strike="noStrike" kern="1200" cap="none" spc="0" normalizeH="0" baseline="0" noProof="0">
+              <a:ln>
+                <a:noFill/>
+              </a:ln>
+              <a:solidFill>
+                <a:srgbClr val="25D4E8"/>
+              </a:solidFill>
+              <a:effectLst/>
+              <a:uLnTx/>
+              <a:uFillTx/>
+              <a:latin typeface="Noto Sans SC"/>
+              <a:ea typeface="Noto Sans SC"/>
+              <a:cs typeface="Noto Sans SC"/>
+            </a:endParaRPr>
           </a:p>
         </p:txBody>
       </p:sp>
       <p:sp>
         <p:nvSpPr>
-          <p:cNvPr id="2" name="矩形 1">
-            <a:extLst>
-              <a:ext uri="{FF2B5EF4-FFF2-40B4-BE49-F238E27FC236}">
-                <a16:creationId xmlns:a16="http://schemas.microsoft.com/office/drawing/2014/main" id="{B9F1AE66-8BBB-4F6D-8C90-77BC98795952}"/>
-              </a:ext>
-            </a:extLst>
-          </p:cNvPr>
+          <p:cNvPr id="2" name="矩形 1"/>
           <p:cNvSpPr>
             <a:spLocks noGrp="1"/>
           </p:cNvSpPr>
@@ -10413,7 +10060,6 @@
               <a:buSzTx/>
               <a:buFontTx/>
               <a:buNone/>
-              <a:tabLst/>
               <a:defRPr sz="2475" b="1">
                 <a:solidFill>
                   <a:srgbClr val="EAF2FF"/>
@@ -10476,13 +10122,7 @@
       </p:sp>
       <p:sp>
         <p:nvSpPr>
-          <p:cNvPr id="3" name="直接连接符 2">
-            <a:extLst>
-              <a:ext uri="{FF2B5EF4-FFF2-40B4-BE49-F238E27FC236}">
-                <a16:creationId xmlns:a16="http://schemas.microsoft.com/office/drawing/2014/main" id="{B79095D5-3494-4C48-9EB5-DB17F7581080}"/>
-              </a:ext>
-            </a:extLst>
-          </p:cNvPr>
+          <p:cNvPr id="3" name="直接连接符 2"/>
           <p:cNvSpPr>
             <a:spLocks noGrp="1"/>
           </p:cNvSpPr>
@@ -10507,13 +10147,7 @@
       </p:sp>
       <p:sp>
         <p:nvSpPr>
-          <p:cNvPr id="4" name="矩形 3">
-            <a:extLst>
-              <a:ext uri="{FF2B5EF4-FFF2-40B4-BE49-F238E27FC236}">
-                <a16:creationId xmlns:a16="http://schemas.microsoft.com/office/drawing/2014/main" id="{D95A1CFC-BB7C-44FC-91D6-610893486667}"/>
-              </a:ext>
-            </a:extLst>
-          </p:cNvPr>
+          <p:cNvPr id="4" name="矩形 3"/>
           <p:cNvSpPr>
             <a:spLocks noGrp="1"/>
           </p:cNvSpPr>
@@ -10552,7 +10186,6 @@
               <a:buSzTx/>
               <a:buFontTx/>
               <a:buNone/>
-              <a:tabLst/>
               <a:defRPr sz="825" b="0">
                 <a:solidFill>
                   <a:srgbClr val="A6B4C8"/>
@@ -10579,18 +10212,26 @@
               </a:rPr>
               <a:t>02</a:t>
             </a:r>
+            <a:endParaRPr kumimoji="0" sz="825" b="0" i="0" u="none" strike="noStrike" kern="1200" cap="none" spc="0" normalizeH="0" baseline="0" noProof="0">
+              <a:ln>
+                <a:noFill/>
+              </a:ln>
+              <a:solidFill>
+                <a:srgbClr val="A6B4C8"/>
+              </a:solidFill>
+              <a:effectLst/>
+              <a:uLnTx/>
+              <a:uFillTx/>
+              <a:latin typeface="Noto Sans SC"/>
+              <a:ea typeface="Noto Sans SC"/>
+              <a:cs typeface="Noto Sans SC"/>
+            </a:endParaRPr>
           </a:p>
         </p:txBody>
       </p:sp>
       <p:sp>
         <p:nvSpPr>
-          <p:cNvPr id="24" name="矩形 23">
-            <a:extLst>
-              <a:ext uri="{FF2B5EF4-FFF2-40B4-BE49-F238E27FC236}">
-                <a16:creationId xmlns:a16="http://schemas.microsoft.com/office/drawing/2014/main" id="{006529B8-CB46-4352-9E3E-3BFECFBA5158}"/>
-              </a:ext>
-            </a:extLst>
-          </p:cNvPr>
+          <p:cNvPr id="24" name="矩形 23"/>
           <p:cNvSpPr>
             <a:spLocks noGrp="1"/>
           </p:cNvSpPr>
@@ -10615,13 +10256,7 @@
       </p:sp>
       <p:sp>
         <p:nvSpPr>
-          <p:cNvPr id="25" name="矩形 24">
-            <a:extLst>
-              <a:ext uri="{FF2B5EF4-FFF2-40B4-BE49-F238E27FC236}">
-                <a16:creationId xmlns:a16="http://schemas.microsoft.com/office/drawing/2014/main" id="{0BAB2132-19E5-4777-9446-2644F433B7CB}"/>
-              </a:ext>
-            </a:extLst>
-          </p:cNvPr>
+          <p:cNvPr id="25" name="矩形 24"/>
           <p:cNvSpPr>
             <a:spLocks noGrp="1"/>
           </p:cNvSpPr>
@@ -10660,7 +10295,6 @@
               <a:buSzTx/>
               <a:buFontTx/>
               <a:buNone/>
-              <a:tabLst/>
               <a:defRPr sz="825" b="0">
                 <a:solidFill>
                   <a:srgbClr val="A6B4C8"/>
@@ -10687,18 +10321,26 @@
               </a:rPr>
               <a:t>02</a:t>
             </a:r>
+            <a:endParaRPr kumimoji="0" sz="825" b="0" i="0" u="none" strike="noStrike" kern="1200" cap="none" spc="0" normalizeH="0" baseline="0" noProof="0">
+              <a:ln>
+                <a:noFill/>
+              </a:ln>
+              <a:solidFill>
+                <a:srgbClr val="A6B4C8"/>
+              </a:solidFill>
+              <a:effectLst/>
+              <a:uLnTx/>
+              <a:uFillTx/>
+              <a:latin typeface="Noto Sans SC"/>
+              <a:ea typeface="Noto Sans SC"/>
+              <a:cs typeface="Noto Sans SC"/>
+            </a:endParaRPr>
           </a:p>
         </p:txBody>
       </p:sp>
       <p:sp>
         <p:nvSpPr>
-          <p:cNvPr id="30" name="矩形 29">
-            <a:extLst>
-              <a:ext uri="{FF2B5EF4-FFF2-40B4-BE49-F238E27FC236}">
-                <a16:creationId xmlns:a16="http://schemas.microsoft.com/office/drawing/2014/main" id="{D4403BCB-F322-AFB6-E81A-88242098F08D}"/>
-              </a:ext>
-            </a:extLst>
-          </p:cNvPr>
+          <p:cNvPr id="30" name="矩形 29"/>
           <p:cNvSpPr>
             <a:spLocks noGrp="1"/>
           </p:cNvSpPr>
@@ -10737,7 +10379,6 @@
               <a:buSzTx/>
               <a:buFontTx/>
               <a:buNone/>
-              <a:tabLst/>
               <a:defRPr sz="1650" b="1">
                 <a:solidFill>
                   <a:srgbClr val="22D3EE"/>
@@ -10781,18 +10422,26 @@
               </a:rPr>
               <a:t>）</a:t>
             </a:r>
+            <a:endParaRPr kumimoji="0" sz="1650" b="1" i="0" u="none" strike="noStrike" kern="1200" cap="none" spc="0" normalizeH="0" baseline="0" noProof="0" dirty="0">
+              <a:ln>
+                <a:noFill/>
+              </a:ln>
+              <a:solidFill>
+                <a:srgbClr val="22D3EE"/>
+              </a:solidFill>
+              <a:effectLst/>
+              <a:uLnTx/>
+              <a:uFillTx/>
+              <a:latin typeface="Microsoft YaHei"/>
+              <a:ea typeface="Microsoft YaHei"/>
+              <a:cs typeface="Microsoft YaHei"/>
+            </a:endParaRPr>
           </a:p>
         </p:txBody>
       </p:sp>
       <p:sp>
         <p:nvSpPr>
-          <p:cNvPr id="32" name="矩形 31">
-            <a:extLst>
-              <a:ext uri="{FF2B5EF4-FFF2-40B4-BE49-F238E27FC236}">
-                <a16:creationId xmlns:a16="http://schemas.microsoft.com/office/drawing/2014/main" id="{5B209471-360E-1DC0-A65F-C3BE1F1DBF3F}"/>
-              </a:ext>
-            </a:extLst>
-          </p:cNvPr>
+          <p:cNvPr id="32" name="矩形 31"/>
           <p:cNvSpPr>
             <a:spLocks noGrp="1"/>
           </p:cNvSpPr>
@@ -10831,7 +10480,6 @@
               <a:buSzTx/>
               <a:buFontTx/>
               <a:buNone/>
-              <a:tabLst/>
               <a:defRPr sz="1575" b="0">
                 <a:solidFill>
                   <a:srgbClr val="F7FAFF"/>
@@ -10892,13 +10540,7 @@
       </p:sp>
       <p:sp>
         <p:nvSpPr>
-          <p:cNvPr id="34" name="矩形 33">
-            <a:extLst>
-              <a:ext uri="{FF2B5EF4-FFF2-40B4-BE49-F238E27FC236}">
-                <a16:creationId xmlns:a16="http://schemas.microsoft.com/office/drawing/2014/main" id="{B0014932-8F74-5C88-CBD8-5F165747881A}"/>
-              </a:ext>
-            </a:extLst>
-          </p:cNvPr>
+          <p:cNvPr id="34" name="矩形 33"/>
           <p:cNvSpPr>
             <a:spLocks noGrp="1"/>
           </p:cNvSpPr>
@@ -10937,7 +10579,6 @@
               <a:buSzTx/>
               <a:buFontTx/>
               <a:buNone/>
-              <a:tabLst/>
               <a:defRPr sz="1650" b="1">
                 <a:solidFill>
                   <a:srgbClr val="22D3EE"/>
@@ -11015,18 +10656,26 @@
               </a:rPr>
               <a:t>）</a:t>
             </a:r>
+            <a:endParaRPr kumimoji="0" sz="1650" b="1" i="0" u="none" strike="noStrike" kern="1200" cap="none" spc="0" normalizeH="0" baseline="0" noProof="0" dirty="0">
+              <a:ln>
+                <a:noFill/>
+              </a:ln>
+              <a:solidFill>
+                <a:srgbClr val="22D3EE"/>
+              </a:solidFill>
+              <a:effectLst/>
+              <a:uLnTx/>
+              <a:uFillTx/>
+              <a:latin typeface="Microsoft YaHei"/>
+              <a:ea typeface="Microsoft YaHei"/>
+              <a:cs typeface="Microsoft YaHei"/>
+            </a:endParaRPr>
           </a:p>
         </p:txBody>
       </p:sp>
       <p:sp>
         <p:nvSpPr>
-          <p:cNvPr id="36" name="矩形 35">
-            <a:extLst>
-              <a:ext uri="{FF2B5EF4-FFF2-40B4-BE49-F238E27FC236}">
-                <a16:creationId xmlns:a16="http://schemas.microsoft.com/office/drawing/2014/main" id="{C4B7DA12-34D3-BB62-4C3A-151B33A1E9C9}"/>
-              </a:ext>
-            </a:extLst>
-          </p:cNvPr>
+          <p:cNvPr id="36" name="矩形 35"/>
           <p:cNvSpPr>
             <a:spLocks noGrp="1"/>
           </p:cNvSpPr>
@@ -11065,7 +10714,6 @@
               <a:buSzTx/>
               <a:buFontTx/>
               <a:buNone/>
-              <a:tabLst/>
               <a:defRPr sz="1575" b="0">
                 <a:solidFill>
                   <a:srgbClr val="F7FAFF"/>
@@ -11110,13 +10758,7 @@
       </p:sp>
       <p:sp>
         <p:nvSpPr>
-          <p:cNvPr id="38" name="矩形 37">
-            <a:extLst>
-              <a:ext uri="{FF2B5EF4-FFF2-40B4-BE49-F238E27FC236}">
-                <a16:creationId xmlns:a16="http://schemas.microsoft.com/office/drawing/2014/main" id="{A2EFF5F2-9AD9-C2EF-9526-4A79EBB513E1}"/>
-              </a:ext>
-            </a:extLst>
-          </p:cNvPr>
+          <p:cNvPr id="38" name="矩形 37"/>
           <p:cNvSpPr>
             <a:spLocks noGrp="1"/>
           </p:cNvSpPr>
@@ -11155,7 +10797,6 @@
               <a:buSzTx/>
               <a:buFontTx/>
               <a:buNone/>
-              <a:tabLst/>
               <a:defRPr sz="1650" b="1">
                 <a:solidFill>
                   <a:srgbClr val="22D3EE"/>
@@ -11233,18 +10874,26 @@
               </a:rPr>
               <a:t>）</a:t>
             </a:r>
+            <a:endParaRPr kumimoji="0" sz="1650" b="1" i="0" u="none" strike="noStrike" kern="1200" cap="none" spc="0" normalizeH="0" baseline="0" noProof="0" dirty="0">
+              <a:ln>
+                <a:noFill/>
+              </a:ln>
+              <a:solidFill>
+                <a:srgbClr val="22D3EE"/>
+              </a:solidFill>
+              <a:effectLst/>
+              <a:uLnTx/>
+              <a:uFillTx/>
+              <a:latin typeface="Microsoft YaHei"/>
+              <a:ea typeface="Microsoft YaHei"/>
+              <a:cs typeface="Microsoft YaHei"/>
+            </a:endParaRPr>
           </a:p>
         </p:txBody>
       </p:sp>
       <p:sp>
         <p:nvSpPr>
-          <p:cNvPr id="40" name="矩形 39">
-            <a:extLst>
-              <a:ext uri="{FF2B5EF4-FFF2-40B4-BE49-F238E27FC236}">
-                <a16:creationId xmlns:a16="http://schemas.microsoft.com/office/drawing/2014/main" id="{06B77F0C-1888-9CDA-7F1F-7D3C693E02C1}"/>
-              </a:ext>
-            </a:extLst>
-          </p:cNvPr>
+          <p:cNvPr id="40" name="矩形 39"/>
           <p:cNvSpPr>
             <a:spLocks noGrp="1"/>
           </p:cNvSpPr>
@@ -11283,7 +10932,6 @@
               <a:buSzTx/>
               <a:buFontTx/>
               <a:buNone/>
-              <a:tabLst/>
               <a:defRPr sz="1575" b="0">
                 <a:solidFill>
                   <a:srgbClr val="F7FAFF"/>
@@ -11327,11 +10975,6 @@
         </p:txBody>
       </p:sp>
     </p:spTree>
-    <p:extLst>
-      <p:ext uri="{BB962C8B-B14F-4D97-AF65-F5344CB8AC3E}">
-        <p14:creationId xmlns:p14="http://schemas.microsoft.com/office/powerpoint/2010/main" val="664363646"/>
-      </p:ext>
-    </p:extLst>
   </p:cSld>
   <p:clrMapOvr>
     <a:masterClrMapping/>
@@ -11366,13 +11009,7 @@
       </p:grpSpPr>
       <p:sp>
         <p:nvSpPr>
-          <p:cNvPr id="9" name="矩形 8">
-            <a:extLst>
-              <a:ext uri="{FF2B5EF4-FFF2-40B4-BE49-F238E27FC236}">
-                <a16:creationId xmlns:a16="http://schemas.microsoft.com/office/drawing/2014/main" id="{A6422E83-3374-4FAF-B0C3-9EB827633A3D}"/>
-              </a:ext>
-            </a:extLst>
-          </p:cNvPr>
+          <p:cNvPr id="9" name="矩形 8"/>
           <p:cNvSpPr>
             <a:spLocks noGrp="1"/>
           </p:cNvSpPr>
@@ -11418,18 +11055,20 @@
               </a:rPr>
               <a:t>系统结构</a:t>
             </a:r>
+            <a:endParaRPr sz="975" b="1">
+              <a:solidFill>
+                <a:srgbClr val="25D4E8"/>
+              </a:solidFill>
+              <a:latin typeface="Noto Sans SC"/>
+              <a:ea typeface="Noto Sans SC"/>
+              <a:cs typeface="Noto Sans SC"/>
+            </a:endParaRPr>
           </a:p>
         </p:txBody>
       </p:sp>
       <p:sp>
         <p:nvSpPr>
-          <p:cNvPr id="2" name="矩形 1">
-            <a:extLst>
-              <a:ext uri="{FF2B5EF4-FFF2-40B4-BE49-F238E27FC236}">
-                <a16:creationId xmlns:a16="http://schemas.microsoft.com/office/drawing/2014/main" id="{0B7E2209-B976-43E7-809C-215B0AC66E59}"/>
-              </a:ext>
-            </a:extLst>
-          </p:cNvPr>
+          <p:cNvPr id="2" name="矩形 1"/>
           <p:cNvSpPr>
             <a:spLocks noGrp="1"/>
           </p:cNvSpPr>
@@ -11475,18 +11114,20 @@
               </a:rPr>
               <a:t>输入、软件、MMIO 与 LCD</a:t>
             </a:r>
+            <a:endParaRPr sz="2475" b="1">
+              <a:solidFill>
+                <a:srgbClr val="EAF2FF"/>
+              </a:solidFill>
+              <a:latin typeface="Noto Sans SC"/>
+              <a:ea typeface="Noto Sans SC"/>
+              <a:cs typeface="Noto Sans SC"/>
+            </a:endParaRPr>
           </a:p>
         </p:txBody>
       </p:sp>
       <p:sp>
         <p:nvSpPr>
-          <p:cNvPr id="3" name="直接连接符 2">
-            <a:extLst>
-              <a:ext uri="{FF2B5EF4-FFF2-40B4-BE49-F238E27FC236}">
-                <a16:creationId xmlns:a16="http://schemas.microsoft.com/office/drawing/2014/main" id="{E5A70275-2ACE-4A7B-B571-92234C41785D}"/>
-              </a:ext>
-            </a:extLst>
-          </p:cNvPr>
+          <p:cNvPr id="3" name="直接连接符 2"/>
           <p:cNvSpPr>
             <a:spLocks noGrp="1"/>
           </p:cNvSpPr>
@@ -11511,13 +11152,7 @@
       </p:sp>
       <p:sp>
         <p:nvSpPr>
-          <p:cNvPr id="4" name="矩形 3">
-            <a:extLst>
-              <a:ext uri="{FF2B5EF4-FFF2-40B4-BE49-F238E27FC236}">
-                <a16:creationId xmlns:a16="http://schemas.microsoft.com/office/drawing/2014/main" id="{014B71D6-7A5C-4E66-955E-56954D449F12}"/>
-              </a:ext>
-            </a:extLst>
-          </p:cNvPr>
+          <p:cNvPr id="4" name="矩形 3"/>
           <p:cNvSpPr>
             <a:spLocks noGrp="1"/>
           </p:cNvSpPr>
@@ -11563,6 +11198,14 @@
               </a:rPr>
               <a:t>02</a:t>
             </a:r>
+            <a:endParaRPr sz="825" b="0">
+              <a:solidFill>
+                <a:srgbClr val="A6B4C8"/>
+              </a:solidFill>
+              <a:latin typeface="Noto Sans SC"/>
+              <a:ea typeface="Noto Sans SC"/>
+              <a:cs typeface="Noto Sans SC"/>
+            </a:endParaRPr>
           </a:p>
         </p:txBody>
       </p:sp>
@@ -11575,8 +11218,10 @@
           <p:nvPr/>
         </p:nvPicPr>
         <p:blipFill>
-          <a:blip r:embed="rId3"/>
-          <a:stretch/>
+          <a:blip r:embed="rId1"/>
+          <a:stretch>
+            <a:fillRect/>
+          </a:stretch>
         </p:blipFill>
         <p:spPr>
           <a:xfrm>
@@ -11590,70 +11235,7 @@
       </p:pic>
       <p:sp>
         <p:nvSpPr>
-          <p:cNvPr id="6" name="矩形 5">
-            <a:extLst>
-              <a:ext uri="{FF2B5EF4-FFF2-40B4-BE49-F238E27FC236}">
-                <a16:creationId xmlns:a16="http://schemas.microsoft.com/office/drawing/2014/main" id="{BB37CEA3-3576-495B-9F91-6C4A2918A34A}"/>
-              </a:ext>
-            </a:extLst>
-          </p:cNvPr>
-          <p:cNvSpPr>
-            <a:spLocks noGrp="1"/>
-          </p:cNvSpPr>
-          <p:nvPr/>
-        </p:nvSpPr>
-        <p:spPr>
-          <a:xfrm>
-            <a:off x="400050" y="5867400"/>
-            <a:ext cx="11391900" cy="285750"/>
-          </a:xfrm>
-          <a:prstGeom prst="rect">
-            <a:avLst/>
-          </a:prstGeom>
-          <a:noFill/>
-          <a:ln w="0">
-            <a:noFill/>
-          </a:ln>
-        </p:spPr>
-        <p:txBody>
-          <a:bodyPr anchor="t">
-            <a:normAutofit/>
-          </a:bodyPr>
-          <a:lstStyle/>
-          <a:p>
-            <a:pPr>
-              <a:defRPr sz="1275" b="1">
-                <a:solidFill>
-                  <a:srgbClr val="25D4E8"/>
-                </a:solidFill>
-                <a:latin typeface="Noto Sans SC"/>
-                <a:ea typeface="Noto Sans SC"/>
-                <a:cs typeface="Noto Sans SC"/>
-              </a:defRPr>
-            </a:pPr>
-            <a:r>
-              <a:rPr sz="1275" b="1">
-                <a:solidFill>
-                  <a:srgbClr val="25D4E8"/>
-                </a:solidFill>
-                <a:latin typeface="Noto Sans SC"/>
-                <a:ea typeface="Noto Sans SC"/>
-                <a:cs typeface="Noto Sans SC"/>
-              </a:rPr>
-              <a:t>课程评价对象：LCD 接口控制器 IP、汇编驱动与软硬件协同</a:t>
-            </a:r>
-          </a:p>
-        </p:txBody>
-      </p:sp>
-      <p:sp>
-        <p:nvSpPr>
-          <p:cNvPr id="7" name="矩形 6">
-            <a:extLst>
-              <a:ext uri="{FF2B5EF4-FFF2-40B4-BE49-F238E27FC236}">
-                <a16:creationId xmlns:a16="http://schemas.microsoft.com/office/drawing/2014/main" id="{A2501387-2032-4040-8346-BBD8E1D91333}"/>
-              </a:ext>
-            </a:extLst>
-          </p:cNvPr>
+          <p:cNvPr id="7" name="矩形 6"/>
           <p:cNvSpPr>
             <a:spLocks noGrp="1"/>
           </p:cNvSpPr>
@@ -11678,13 +11260,7 @@
       </p:sp>
       <p:sp>
         <p:nvSpPr>
-          <p:cNvPr id="8" name="矩形 7">
-            <a:extLst>
-              <a:ext uri="{FF2B5EF4-FFF2-40B4-BE49-F238E27FC236}">
-                <a16:creationId xmlns:a16="http://schemas.microsoft.com/office/drawing/2014/main" id="{F01C7CEB-99B2-472F-8996-8E6E2CC98D9D}"/>
-              </a:ext>
-            </a:extLst>
-          </p:cNvPr>
+          <p:cNvPr id="8" name="矩形 7"/>
           <p:cNvSpPr>
             <a:spLocks noGrp="1"/>
           </p:cNvSpPr>
@@ -11730,15 +11306,18 @@
               </a:rPr>
               <a:t>03</a:t>
             </a:r>
+            <a:endParaRPr sz="825" b="0">
+              <a:solidFill>
+                <a:srgbClr val="A6B4C8"/>
+              </a:solidFill>
+              <a:latin typeface="Noto Sans SC"/>
+              <a:ea typeface="Noto Sans SC"/>
+              <a:cs typeface="Noto Sans SC"/>
+            </a:endParaRPr>
           </a:p>
         </p:txBody>
       </p:sp>
     </p:spTree>
-    <p:extLst>
-      <p:ext uri="{BB962C8B-B14F-4D97-AF65-F5344CB8AC3E}">
-        <p14:creationId xmlns:p14="http://schemas.microsoft.com/office/powerpoint/2010/main" val="1709310312"/>
-      </p:ext>
-    </p:extLst>
   </p:cSld>
   <p:clrMapOvr>
     <a:masterClrMapping/>
@@ -11773,13 +11352,7 @@
       </p:grpSpPr>
       <p:sp>
         <p:nvSpPr>
-          <p:cNvPr id="9" name="矩形 8">
-            <a:extLst>
-              <a:ext uri="{FF2B5EF4-FFF2-40B4-BE49-F238E27FC236}">
-                <a16:creationId xmlns:a16="http://schemas.microsoft.com/office/drawing/2014/main" id="{884A08A8-4D57-4FA4-8086-839A54727335}"/>
-              </a:ext>
-            </a:extLst>
-          </p:cNvPr>
+          <p:cNvPr id="9" name="矩形 8"/>
           <p:cNvSpPr>
             <a:spLocks noGrp="1"/>
           </p:cNvSpPr>
@@ -11825,18 +11398,20 @@
               </a:rPr>
               <a:t>硬件控制器</a:t>
             </a:r>
+            <a:endParaRPr sz="975" b="1">
+              <a:solidFill>
+                <a:srgbClr val="25D4E8"/>
+              </a:solidFill>
+              <a:latin typeface="Noto Sans SC"/>
+              <a:ea typeface="Noto Sans SC"/>
+              <a:cs typeface="Noto Sans SC"/>
+            </a:endParaRPr>
           </a:p>
         </p:txBody>
       </p:sp>
       <p:sp>
         <p:nvSpPr>
-          <p:cNvPr id="2" name="矩形 1">
-            <a:extLst>
-              <a:ext uri="{FF2B5EF4-FFF2-40B4-BE49-F238E27FC236}">
-                <a16:creationId xmlns:a16="http://schemas.microsoft.com/office/drawing/2014/main" id="{6F60934B-DC09-4DB5-B4B2-63C85C6A46FF}"/>
-              </a:ext>
-            </a:extLst>
-          </p:cNvPr>
+          <p:cNvPr id="2" name="矩形 1"/>
           <p:cNvSpPr>
             <a:spLocks noGrp="1"/>
           </p:cNvSpPr>
@@ -11882,18 +11457,20 @@
               </a:rPr>
               <a:t>LCD 控制器状态机与发送闭环</a:t>
             </a:r>
+            <a:endParaRPr sz="2475" b="1">
+              <a:solidFill>
+                <a:srgbClr val="EAF2FF"/>
+              </a:solidFill>
+              <a:latin typeface="Noto Sans SC"/>
+              <a:ea typeface="Noto Sans SC"/>
+              <a:cs typeface="Noto Sans SC"/>
+            </a:endParaRPr>
           </a:p>
         </p:txBody>
       </p:sp>
       <p:sp>
         <p:nvSpPr>
-          <p:cNvPr id="3" name="直接连接符 2">
-            <a:extLst>
-              <a:ext uri="{FF2B5EF4-FFF2-40B4-BE49-F238E27FC236}">
-                <a16:creationId xmlns:a16="http://schemas.microsoft.com/office/drawing/2014/main" id="{2645CBCD-7E55-44D7-8262-1DFC63FE150D}"/>
-              </a:ext>
-            </a:extLst>
-          </p:cNvPr>
+          <p:cNvPr id="3" name="直接连接符 2"/>
           <p:cNvSpPr>
             <a:spLocks noGrp="1"/>
           </p:cNvSpPr>
@@ -11918,13 +11495,7 @@
       </p:sp>
       <p:sp>
         <p:nvSpPr>
-          <p:cNvPr id="4" name="矩形 3">
-            <a:extLst>
-              <a:ext uri="{FF2B5EF4-FFF2-40B4-BE49-F238E27FC236}">
-                <a16:creationId xmlns:a16="http://schemas.microsoft.com/office/drawing/2014/main" id="{8DCDBB0A-25F6-4C77-AD47-4AF061EEFFD6}"/>
-              </a:ext>
-            </a:extLst>
-          </p:cNvPr>
+          <p:cNvPr id="4" name="矩形 3"/>
           <p:cNvSpPr>
             <a:spLocks noGrp="1"/>
           </p:cNvSpPr>
@@ -11970,6 +11541,14 @@
               </a:rPr>
               <a:t>03</a:t>
             </a:r>
+            <a:endParaRPr sz="825" b="0">
+              <a:solidFill>
+                <a:srgbClr val="A6B4C8"/>
+              </a:solidFill>
+              <a:latin typeface="Noto Sans SC"/>
+              <a:ea typeface="Noto Sans SC"/>
+              <a:cs typeface="Noto Sans SC"/>
+            </a:endParaRPr>
           </a:p>
         </p:txBody>
       </p:sp>
@@ -11982,8 +11561,10 @@
           <p:nvPr/>
         </p:nvPicPr>
         <p:blipFill>
-          <a:blip r:embed="rId3"/>
-          <a:stretch/>
+          <a:blip r:embed="rId1"/>
+          <a:stretch>
+            <a:fillRect/>
+          </a:stretch>
         </p:blipFill>
         <p:spPr>
           <a:xfrm>
@@ -11997,13 +11578,7 @@
       </p:pic>
       <p:sp>
         <p:nvSpPr>
-          <p:cNvPr id="6" name="矩形 5">
-            <a:extLst>
-              <a:ext uri="{FF2B5EF4-FFF2-40B4-BE49-F238E27FC236}">
-                <a16:creationId xmlns:a16="http://schemas.microsoft.com/office/drawing/2014/main" id="{628A5746-1210-40B9-ABF7-9C8BE43306DF}"/>
-              </a:ext>
-            </a:extLst>
-          </p:cNvPr>
+          <p:cNvPr id="6" name="矩形 5"/>
           <p:cNvSpPr>
             <a:spLocks noGrp="1"/>
           </p:cNvSpPr>
@@ -12049,18 +11624,20 @@
               </a:rPr>
               <a:t>tx_ready 只在 IDLE 且 SPI 空闲时有效，一次请求只产生一次发送</a:t>
             </a:r>
+            <a:endParaRPr sz="1275" b="1">
+              <a:solidFill>
+                <a:srgbClr val="F5B942"/>
+              </a:solidFill>
+              <a:latin typeface="Noto Sans SC"/>
+              <a:ea typeface="Noto Sans SC"/>
+              <a:cs typeface="Noto Sans SC"/>
+            </a:endParaRPr>
           </a:p>
         </p:txBody>
       </p:sp>
       <p:sp>
         <p:nvSpPr>
-          <p:cNvPr id="7" name="矩形 6">
-            <a:extLst>
-              <a:ext uri="{FF2B5EF4-FFF2-40B4-BE49-F238E27FC236}">
-                <a16:creationId xmlns:a16="http://schemas.microsoft.com/office/drawing/2014/main" id="{D37D1A62-2D15-4DB6-9669-F0A6DD71E382}"/>
-              </a:ext>
-            </a:extLst>
-          </p:cNvPr>
+          <p:cNvPr id="7" name="矩形 6"/>
           <p:cNvSpPr>
             <a:spLocks noGrp="1"/>
           </p:cNvSpPr>
@@ -12085,13 +11662,7 @@
       </p:sp>
       <p:sp>
         <p:nvSpPr>
-          <p:cNvPr id="8" name="矩形 7">
-            <a:extLst>
-              <a:ext uri="{FF2B5EF4-FFF2-40B4-BE49-F238E27FC236}">
-                <a16:creationId xmlns:a16="http://schemas.microsoft.com/office/drawing/2014/main" id="{3A3A505B-DBE7-4477-B5D8-ED02698E93AA}"/>
-              </a:ext>
-            </a:extLst>
-          </p:cNvPr>
+          <p:cNvPr id="8" name="矩形 7"/>
           <p:cNvSpPr>
             <a:spLocks noGrp="1"/>
           </p:cNvSpPr>
@@ -12137,15 +11708,18 @@
               </a:rPr>
               <a:t>04</a:t>
             </a:r>
+            <a:endParaRPr sz="825" b="0">
+              <a:solidFill>
+                <a:srgbClr val="A6B4C8"/>
+              </a:solidFill>
+              <a:latin typeface="Noto Sans SC"/>
+              <a:ea typeface="Noto Sans SC"/>
+              <a:cs typeface="Noto Sans SC"/>
+            </a:endParaRPr>
           </a:p>
         </p:txBody>
       </p:sp>
     </p:spTree>
-    <p:extLst>
-      <p:ext uri="{BB962C8B-B14F-4D97-AF65-F5344CB8AC3E}">
-        <p14:creationId xmlns:p14="http://schemas.microsoft.com/office/powerpoint/2010/main" val="1964556493"/>
-      </p:ext>
-    </p:extLst>
   </p:cSld>
   <p:clrMapOvr>
     <a:masterClrMapping/>
@@ -12180,13 +11754,7 @@
       </p:grpSpPr>
       <p:sp>
         <p:nvSpPr>
-          <p:cNvPr id="9" name="矩形 8">
-            <a:extLst>
-              <a:ext uri="{FF2B5EF4-FFF2-40B4-BE49-F238E27FC236}">
-                <a16:creationId xmlns:a16="http://schemas.microsoft.com/office/drawing/2014/main" id="{2107EAF4-7698-414D-9929-B841678FE8BB}"/>
-              </a:ext>
-            </a:extLst>
-          </p:cNvPr>
+          <p:cNvPr id="9" name="矩形 8"/>
           <p:cNvSpPr>
             <a:spLocks noGrp="1"/>
           </p:cNvSpPr>
@@ -12232,18 +11800,20 @@
               </a:rPr>
               <a:t>软件接口</a:t>
             </a:r>
+            <a:endParaRPr sz="975" b="1">
+              <a:solidFill>
+                <a:srgbClr val="25D4E8"/>
+              </a:solidFill>
+              <a:latin typeface="Noto Sans SC"/>
+              <a:ea typeface="Noto Sans SC"/>
+              <a:cs typeface="Noto Sans SC"/>
+            </a:endParaRPr>
           </a:p>
         </p:txBody>
       </p:sp>
       <p:sp>
         <p:nvSpPr>
-          <p:cNvPr id="2" name="矩形 1">
-            <a:extLst>
-              <a:ext uri="{FF2B5EF4-FFF2-40B4-BE49-F238E27FC236}">
-                <a16:creationId xmlns:a16="http://schemas.microsoft.com/office/drawing/2014/main" id="{893502AA-3174-42CE-8A73-50EA25E163CD}"/>
-              </a:ext>
-            </a:extLst>
-          </p:cNvPr>
+          <p:cNvPr id="2" name="矩形 1"/>
           <p:cNvSpPr>
             <a:spLocks noGrp="1"/>
           </p:cNvSpPr>
@@ -12289,18 +11859,20 @@
               </a:rPr>
               <a:t>LCD 与蜂鸣器 MMIO</a:t>
             </a:r>
+            <a:endParaRPr sz="2475" b="1">
+              <a:solidFill>
+                <a:srgbClr val="EAF2FF"/>
+              </a:solidFill>
+              <a:latin typeface="Noto Sans SC"/>
+              <a:ea typeface="Noto Sans SC"/>
+              <a:cs typeface="Noto Sans SC"/>
+            </a:endParaRPr>
           </a:p>
         </p:txBody>
       </p:sp>
       <p:sp>
         <p:nvSpPr>
-          <p:cNvPr id="3" name="直接连接符 2">
-            <a:extLst>
-              <a:ext uri="{FF2B5EF4-FFF2-40B4-BE49-F238E27FC236}">
-                <a16:creationId xmlns:a16="http://schemas.microsoft.com/office/drawing/2014/main" id="{8135C7E9-E8BA-4D2D-8E07-D4CF857D8ED0}"/>
-              </a:ext>
-            </a:extLst>
-          </p:cNvPr>
+          <p:cNvPr id="3" name="直接连接符 2"/>
           <p:cNvSpPr>
             <a:spLocks noGrp="1"/>
           </p:cNvSpPr>
@@ -12325,13 +11897,7 @@
       </p:sp>
       <p:sp>
         <p:nvSpPr>
-          <p:cNvPr id="4" name="矩形 3">
-            <a:extLst>
-              <a:ext uri="{FF2B5EF4-FFF2-40B4-BE49-F238E27FC236}">
-                <a16:creationId xmlns:a16="http://schemas.microsoft.com/office/drawing/2014/main" id="{45CC8934-1076-4EA5-8122-784CB8770F6D}"/>
-              </a:ext>
-            </a:extLst>
-          </p:cNvPr>
+          <p:cNvPr id="4" name="矩形 3"/>
           <p:cNvSpPr>
             <a:spLocks noGrp="1"/>
           </p:cNvSpPr>
@@ -12377,6 +11943,14 @@
               </a:rPr>
               <a:t>04</a:t>
             </a:r>
+            <a:endParaRPr sz="825" b="0">
+              <a:solidFill>
+                <a:srgbClr val="A6B4C8"/>
+              </a:solidFill>
+              <a:latin typeface="Noto Sans SC"/>
+              <a:ea typeface="Noto Sans SC"/>
+              <a:cs typeface="Noto Sans SC"/>
+            </a:endParaRPr>
           </a:p>
         </p:txBody>
       </p:sp>
@@ -12395,27 +11969,9 @@
             <a:tbl>
               <a:tblPr/>
               <a:tblGrid>
-                <a:gridCol w="2614534">
-                  <a:extLst>
-                    <a:ext uri="{9D8B030D-6E8A-4147-A177-3AD203B41FA5}">
-                      <a16:colId xmlns:a16="http://schemas.microsoft.com/office/drawing/2014/main" val="20000"/>
-                    </a:ext>
-                  </a:extLst>
-                </a:gridCol>
-                <a:gridCol w="2801287">
-                  <a:extLst>
-                    <a:ext uri="{9D8B030D-6E8A-4147-A177-3AD203B41FA5}">
-                      <a16:colId xmlns:a16="http://schemas.microsoft.com/office/drawing/2014/main" val="20001"/>
-                    </a:ext>
-                  </a:extLst>
-                </a:gridCol>
-                <a:gridCol w="5976079">
-                  <a:extLst>
-                    <a:ext uri="{9D8B030D-6E8A-4147-A177-3AD203B41FA5}">
-                      <a16:colId xmlns:a16="http://schemas.microsoft.com/office/drawing/2014/main" val="20002"/>
-                    </a:ext>
-                  </a:extLst>
-                </a:gridCol>
+                <a:gridCol w="2614534"/>
+                <a:gridCol w="2801287"/>
+                <a:gridCol w="5976079"/>
               </a:tblGrid>
               <a:tr h="488156">
                 <a:tc>
@@ -12434,6 +11990,14 @@
                         </a:rPr>
                         <a:t>地址</a:t>
                       </a:r>
+                      <a:endParaRPr sz="1125" b="1">
+                        <a:solidFill>
+                          <a:srgbClr val="25D4E8"/>
+                        </a:solidFill>
+                        <a:latin typeface="Noto Sans SC"/>
+                        <a:ea typeface="Noto Sans SC"/>
+                        <a:cs typeface="Noto Sans SC"/>
+                      </a:endParaRPr>
                     </a:p>
                   </a:txBody>
                   <a:tcPr>
@@ -12458,6 +12022,14 @@
                         </a:rPr>
                         <a:t>寄存器</a:t>
                       </a:r>
+                      <a:endParaRPr sz="1125" b="1">
+                        <a:solidFill>
+                          <a:srgbClr val="25D4E8"/>
+                        </a:solidFill>
+                        <a:latin typeface="Noto Sans SC"/>
+                        <a:ea typeface="Noto Sans SC"/>
+                        <a:cs typeface="Noto Sans SC"/>
+                      </a:endParaRPr>
                     </a:p>
                   </a:txBody>
                   <a:tcPr>
@@ -12482,6 +12054,14 @@
                         </a:rPr>
                         <a:t>软件用途</a:t>
                       </a:r>
+                      <a:endParaRPr sz="1125" b="1">
+                        <a:solidFill>
+                          <a:srgbClr val="25D4E8"/>
+                        </a:solidFill>
+                        <a:latin typeface="Noto Sans SC"/>
+                        <a:ea typeface="Noto Sans SC"/>
+                        <a:cs typeface="Noto Sans SC"/>
+                      </a:endParaRPr>
                     </a:p>
                   </a:txBody>
                   <a:tcPr>
@@ -12490,11 +12070,6 @@
                     </a:solidFill>
                   </a:tcPr>
                 </a:tc>
-                <a:extLst>
-                  <a:ext uri="{0D108BD9-81ED-4DB2-BD59-A6C34878D82A}">
-                    <a16:rowId xmlns:a16="http://schemas.microsoft.com/office/drawing/2014/main" val="10000"/>
-                  </a:ext>
-                </a:extLst>
               </a:tr>
               <a:tr h="488156">
                 <a:tc>
@@ -12507,12 +12082,20 @@
                           <a:solidFill>
                             <a:srgbClr val="EAF2FF"/>
                           </a:solidFill>
-                          <a:latin typeface="Consolas"/>
-                          <a:ea typeface="Consolas"/>
-                          <a:cs typeface="Consolas"/>
+                          <a:latin typeface="Consolas" panose="020B0609020204030204"/>
+                          <a:ea typeface="Consolas" panose="020B0609020204030204"/>
+                          <a:cs typeface="Consolas" panose="020B0609020204030204"/>
                         </a:rPr>
                         <a:t>0x2000_0020</a:t>
                       </a:r>
+                      <a:endParaRPr sz="975" b="0">
+                        <a:solidFill>
+                          <a:srgbClr val="EAF2FF"/>
+                        </a:solidFill>
+                        <a:latin typeface="Consolas" panose="020B0609020204030204"/>
+                        <a:ea typeface="Consolas" panose="020B0609020204030204"/>
+                        <a:cs typeface="Consolas" panose="020B0609020204030204"/>
+                      </a:endParaRPr>
                     </a:p>
                   </a:txBody>
                   <a:tcPr>
@@ -12531,12 +12114,20 @@
                           <a:solidFill>
                             <a:srgbClr val="EAF2FF"/>
                           </a:solidFill>
-                          <a:latin typeface="Consolas"/>
-                          <a:ea typeface="Consolas"/>
-                          <a:cs typeface="Consolas"/>
+                          <a:latin typeface="Consolas" panose="020B0609020204030204"/>
+                          <a:ea typeface="Consolas" panose="020B0609020204030204"/>
+                          <a:cs typeface="Consolas" panose="020B0609020204030204"/>
                         </a:rPr>
                         <a:t>LCD_CMD</a:t>
                       </a:r>
+                      <a:endParaRPr sz="975" b="1">
+                        <a:solidFill>
+                          <a:srgbClr val="EAF2FF"/>
+                        </a:solidFill>
+                        <a:latin typeface="Consolas" panose="020B0609020204030204"/>
+                        <a:ea typeface="Consolas" panose="020B0609020204030204"/>
+                        <a:cs typeface="Consolas" panose="020B0609020204030204"/>
+                      </a:endParaRPr>
                     </a:p>
                   </a:txBody>
                   <a:tcPr>
@@ -12561,6 +12152,14 @@
                         </a:rPr>
                         <a:t>写低 8 位命令，RS = 0</a:t>
                       </a:r>
+                      <a:endParaRPr sz="1050" b="0">
+                        <a:solidFill>
+                          <a:srgbClr val="EAF2FF"/>
+                        </a:solidFill>
+                        <a:latin typeface="Noto Sans SC"/>
+                        <a:ea typeface="Noto Sans SC"/>
+                        <a:cs typeface="Noto Sans SC"/>
+                      </a:endParaRPr>
                     </a:p>
                   </a:txBody>
                   <a:tcPr>
@@ -12569,11 +12168,6 @@
                     </a:solidFill>
                   </a:tcPr>
                 </a:tc>
-                <a:extLst>
-                  <a:ext uri="{0D108BD9-81ED-4DB2-BD59-A6C34878D82A}">
-                    <a16:rowId xmlns:a16="http://schemas.microsoft.com/office/drawing/2014/main" val="10001"/>
-                  </a:ext>
-                </a:extLst>
               </a:tr>
               <a:tr h="488156">
                 <a:tc>
@@ -12586,12 +12180,20 @@
                           <a:solidFill>
                             <a:srgbClr val="EAF2FF"/>
                           </a:solidFill>
-                          <a:latin typeface="Consolas"/>
-                          <a:ea typeface="Consolas"/>
-                          <a:cs typeface="Consolas"/>
+                          <a:latin typeface="Consolas" panose="020B0609020204030204"/>
+                          <a:ea typeface="Consolas" panose="020B0609020204030204"/>
+                          <a:cs typeface="Consolas" panose="020B0609020204030204"/>
                         </a:rPr>
                         <a:t>0x2000_0024</a:t>
                       </a:r>
+                      <a:endParaRPr sz="975" b="0">
+                        <a:solidFill>
+                          <a:srgbClr val="EAF2FF"/>
+                        </a:solidFill>
+                        <a:latin typeface="Consolas" panose="020B0609020204030204"/>
+                        <a:ea typeface="Consolas" panose="020B0609020204030204"/>
+                        <a:cs typeface="Consolas" panose="020B0609020204030204"/>
+                      </a:endParaRPr>
                     </a:p>
                   </a:txBody>
                   <a:tcPr>
@@ -12610,12 +12212,20 @@
                           <a:solidFill>
                             <a:srgbClr val="EAF2FF"/>
                           </a:solidFill>
-                          <a:latin typeface="Consolas"/>
-                          <a:ea typeface="Consolas"/>
-                          <a:cs typeface="Consolas"/>
+                          <a:latin typeface="Consolas" panose="020B0609020204030204"/>
+                          <a:ea typeface="Consolas" panose="020B0609020204030204"/>
+                          <a:cs typeface="Consolas" panose="020B0609020204030204"/>
                         </a:rPr>
                         <a:t>LCD_DATA</a:t>
                       </a:r>
+                      <a:endParaRPr sz="975" b="1">
+                        <a:solidFill>
+                          <a:srgbClr val="EAF2FF"/>
+                        </a:solidFill>
+                        <a:latin typeface="Consolas" panose="020B0609020204030204"/>
+                        <a:ea typeface="Consolas" panose="020B0609020204030204"/>
+                        <a:cs typeface="Consolas" panose="020B0609020204030204"/>
+                      </a:endParaRPr>
                     </a:p>
                   </a:txBody>
                   <a:tcPr>
@@ -12640,6 +12250,14 @@
                         </a:rPr>
                         <a:t>写低 8 位数据，RS = 1</a:t>
                       </a:r>
+                      <a:endParaRPr sz="1050" b="0">
+                        <a:solidFill>
+                          <a:srgbClr val="EAF2FF"/>
+                        </a:solidFill>
+                        <a:latin typeface="Noto Sans SC"/>
+                        <a:ea typeface="Noto Sans SC"/>
+                        <a:cs typeface="Noto Sans SC"/>
+                      </a:endParaRPr>
                     </a:p>
                   </a:txBody>
                   <a:tcPr>
@@ -12648,11 +12266,6 @@
                     </a:solidFill>
                   </a:tcPr>
                 </a:tc>
-                <a:extLst>
-                  <a:ext uri="{0D108BD9-81ED-4DB2-BD59-A6C34878D82A}">
-                    <a16:rowId xmlns:a16="http://schemas.microsoft.com/office/drawing/2014/main" val="10002"/>
-                  </a:ext>
-                </a:extLst>
               </a:tr>
               <a:tr h="488156">
                 <a:tc>
@@ -12665,12 +12278,20 @@
                           <a:solidFill>
                             <a:srgbClr val="EAF2FF"/>
                           </a:solidFill>
-                          <a:latin typeface="Consolas"/>
-                          <a:ea typeface="Consolas"/>
-                          <a:cs typeface="Consolas"/>
+                          <a:latin typeface="Consolas" panose="020B0609020204030204"/>
+                          <a:ea typeface="Consolas" panose="020B0609020204030204"/>
+                          <a:cs typeface="Consolas" panose="020B0609020204030204"/>
                         </a:rPr>
                         <a:t>0x2000_0028</a:t>
                       </a:r>
+                      <a:endParaRPr sz="975" b="0">
+                        <a:solidFill>
+                          <a:srgbClr val="EAF2FF"/>
+                        </a:solidFill>
+                        <a:latin typeface="Consolas" panose="020B0609020204030204"/>
+                        <a:ea typeface="Consolas" panose="020B0609020204030204"/>
+                        <a:cs typeface="Consolas" panose="020B0609020204030204"/>
+                      </a:endParaRPr>
                     </a:p>
                   </a:txBody>
                   <a:tcPr>
@@ -12689,12 +12310,20 @@
                           <a:solidFill>
                             <a:srgbClr val="EAF2FF"/>
                           </a:solidFill>
-                          <a:latin typeface="Consolas"/>
-                          <a:ea typeface="Consolas"/>
-                          <a:cs typeface="Consolas"/>
+                          <a:latin typeface="Consolas" panose="020B0609020204030204"/>
+                          <a:ea typeface="Consolas" panose="020B0609020204030204"/>
+                          <a:cs typeface="Consolas" panose="020B0609020204030204"/>
                         </a:rPr>
                         <a:t>LCD_STATUS</a:t>
                       </a:r>
+                      <a:endParaRPr sz="975" b="1">
+                        <a:solidFill>
+                          <a:srgbClr val="EAF2FF"/>
+                        </a:solidFill>
+                        <a:latin typeface="Consolas" panose="020B0609020204030204"/>
+                        <a:ea typeface="Consolas" panose="020B0609020204030204"/>
+                        <a:cs typeface="Consolas" panose="020B0609020204030204"/>
+                      </a:endParaRPr>
                     </a:p>
                   </a:txBody>
                   <a:tcPr>
@@ -12719,6 +12348,14 @@
                         </a:rPr>
                         <a:t>bit0 ready，bit1 initialized</a:t>
                       </a:r>
+                      <a:endParaRPr sz="1050" b="0">
+                        <a:solidFill>
+                          <a:srgbClr val="EAF2FF"/>
+                        </a:solidFill>
+                        <a:latin typeface="Noto Sans SC"/>
+                        <a:ea typeface="Noto Sans SC"/>
+                        <a:cs typeface="Noto Sans SC"/>
+                      </a:endParaRPr>
                     </a:p>
                   </a:txBody>
                   <a:tcPr>
@@ -12727,11 +12364,6 @@
                     </a:solidFill>
                   </a:tcPr>
                 </a:tc>
-                <a:extLst>
-                  <a:ext uri="{0D108BD9-81ED-4DB2-BD59-A6C34878D82A}">
-                    <a16:rowId xmlns:a16="http://schemas.microsoft.com/office/drawing/2014/main" val="10003"/>
-                  </a:ext>
-                </a:extLst>
               </a:tr>
               <a:tr h="488156">
                 <a:tc>
@@ -12744,12 +12376,20 @@
                           <a:solidFill>
                             <a:srgbClr val="EAF2FF"/>
                           </a:solidFill>
-                          <a:latin typeface="Consolas"/>
-                          <a:ea typeface="Consolas"/>
-                          <a:cs typeface="Consolas"/>
+                          <a:latin typeface="Consolas" panose="020B0609020204030204"/>
+                          <a:ea typeface="Consolas" panose="020B0609020204030204"/>
+                          <a:cs typeface="Consolas" panose="020B0609020204030204"/>
                         </a:rPr>
                         <a:t>0x2000_002C</a:t>
                       </a:r>
+                      <a:endParaRPr sz="975" b="0">
+                        <a:solidFill>
+                          <a:srgbClr val="EAF2FF"/>
+                        </a:solidFill>
+                        <a:latin typeface="Consolas" panose="020B0609020204030204"/>
+                        <a:ea typeface="Consolas" panose="020B0609020204030204"/>
+                        <a:cs typeface="Consolas" panose="020B0609020204030204"/>
+                      </a:endParaRPr>
                     </a:p>
                   </a:txBody>
                   <a:tcPr>
@@ -12768,12 +12408,20 @@
                           <a:solidFill>
                             <a:srgbClr val="EAF2FF"/>
                           </a:solidFill>
-                          <a:latin typeface="Consolas"/>
-                          <a:ea typeface="Consolas"/>
-                          <a:cs typeface="Consolas"/>
+                          <a:latin typeface="Consolas" panose="020B0609020204030204"/>
+                          <a:ea typeface="Consolas" panose="020B0609020204030204"/>
+                          <a:cs typeface="Consolas" panose="020B0609020204030204"/>
                         </a:rPr>
                         <a:t>LCD_CTRL</a:t>
                       </a:r>
+                      <a:endParaRPr sz="975" b="1">
+                        <a:solidFill>
+                          <a:srgbClr val="EAF2FF"/>
+                        </a:solidFill>
+                        <a:latin typeface="Consolas" panose="020B0609020204030204"/>
+                        <a:ea typeface="Consolas" panose="020B0609020204030204"/>
+                        <a:cs typeface="Consolas" panose="020B0609020204030204"/>
+                      </a:endParaRPr>
                     </a:p>
                   </a:txBody>
                   <a:tcPr>
@@ -12798,6 +12446,14 @@
                         </a:rPr>
                         <a:t>重初始化、清屏、固定文字</a:t>
                       </a:r>
+                      <a:endParaRPr sz="1050" b="0">
+                        <a:solidFill>
+                          <a:srgbClr val="EAF2FF"/>
+                        </a:solidFill>
+                        <a:latin typeface="Noto Sans SC"/>
+                        <a:ea typeface="Noto Sans SC"/>
+                        <a:cs typeface="Noto Sans SC"/>
+                      </a:endParaRPr>
                     </a:p>
                   </a:txBody>
                   <a:tcPr>
@@ -12806,11 +12462,6 @@
                     </a:solidFill>
                   </a:tcPr>
                 </a:tc>
-                <a:extLst>
-                  <a:ext uri="{0D108BD9-81ED-4DB2-BD59-A6C34878D82A}">
-                    <a16:rowId xmlns:a16="http://schemas.microsoft.com/office/drawing/2014/main" val="10004"/>
-                  </a:ext>
-                </a:extLst>
               </a:tr>
               <a:tr h="488156">
                 <a:tc>
@@ -12823,12 +12474,20 @@
                           <a:solidFill>
                             <a:srgbClr val="EAF2FF"/>
                           </a:solidFill>
-                          <a:latin typeface="Consolas"/>
-                          <a:ea typeface="Consolas"/>
-                          <a:cs typeface="Consolas"/>
+                          <a:latin typeface="Consolas" panose="020B0609020204030204"/>
+                          <a:ea typeface="Consolas" panose="020B0609020204030204"/>
+                          <a:cs typeface="Consolas" panose="020B0609020204030204"/>
                         </a:rPr>
                         <a:t>0x2000_0030</a:t>
                       </a:r>
+                      <a:endParaRPr sz="975" b="0">
+                        <a:solidFill>
+                          <a:srgbClr val="EAF2FF"/>
+                        </a:solidFill>
+                        <a:latin typeface="Consolas" panose="020B0609020204030204"/>
+                        <a:ea typeface="Consolas" panose="020B0609020204030204"/>
+                        <a:cs typeface="Consolas" panose="020B0609020204030204"/>
+                      </a:endParaRPr>
                     </a:p>
                   </a:txBody>
                   <a:tcPr>
@@ -12847,12 +12506,20 @@
                           <a:solidFill>
                             <a:srgbClr val="EAF2FF"/>
                           </a:solidFill>
-                          <a:latin typeface="Consolas"/>
-                          <a:ea typeface="Consolas"/>
-                          <a:cs typeface="Consolas"/>
+                          <a:latin typeface="Consolas" panose="020B0609020204030204"/>
+                          <a:ea typeface="Consolas" panose="020B0609020204030204"/>
+                          <a:cs typeface="Consolas" panose="020B0609020204030204"/>
                         </a:rPr>
                         <a:t>LCD_GAME_ROW</a:t>
                       </a:r>
+                      <a:endParaRPr sz="975" b="1">
+                        <a:solidFill>
+                          <a:srgbClr val="EAF2FF"/>
+                        </a:solidFill>
+                        <a:latin typeface="Consolas" panose="020B0609020204030204"/>
+                        <a:ea typeface="Consolas" panose="020B0609020204030204"/>
+                        <a:cs typeface="Consolas" panose="020B0609020204030204"/>
+                      </a:endParaRPr>
                     </a:p>
                   </a:txBody>
                   <a:tcPr>
@@ -12877,6 +12544,14 @@
                         </a:rPr>
                         <a:t>行号 + 10 位棋盘数据</a:t>
                       </a:r>
+                      <a:endParaRPr sz="1050" b="0">
+                        <a:solidFill>
+                          <a:srgbClr val="EAF2FF"/>
+                        </a:solidFill>
+                        <a:latin typeface="Noto Sans SC"/>
+                        <a:ea typeface="Noto Sans SC"/>
+                        <a:cs typeface="Noto Sans SC"/>
+                      </a:endParaRPr>
                     </a:p>
                   </a:txBody>
                   <a:tcPr>
@@ -12885,11 +12560,6 @@
                     </a:solidFill>
                   </a:tcPr>
                 </a:tc>
-                <a:extLst>
-                  <a:ext uri="{0D108BD9-81ED-4DB2-BD59-A6C34878D82A}">
-                    <a16:rowId xmlns:a16="http://schemas.microsoft.com/office/drawing/2014/main" val="10005"/>
-                  </a:ext>
-                </a:extLst>
               </a:tr>
               <a:tr h="488156">
                 <a:tc>
@@ -12902,12 +12572,20 @@
                           <a:solidFill>
                             <a:srgbClr val="EAF2FF"/>
                           </a:solidFill>
-                          <a:latin typeface="Consolas"/>
-                          <a:ea typeface="Consolas"/>
-                          <a:cs typeface="Consolas"/>
+                          <a:latin typeface="Consolas" panose="020B0609020204030204"/>
+                          <a:ea typeface="Consolas" panose="020B0609020204030204"/>
+                          <a:cs typeface="Consolas" panose="020B0609020204030204"/>
                         </a:rPr>
                         <a:t>0x2000_0034</a:t>
                       </a:r>
+                      <a:endParaRPr sz="975" b="0">
+                        <a:solidFill>
+                          <a:srgbClr val="EAF2FF"/>
+                        </a:solidFill>
+                        <a:latin typeface="Consolas" panose="020B0609020204030204"/>
+                        <a:ea typeface="Consolas" panose="020B0609020204030204"/>
+                        <a:cs typeface="Consolas" panose="020B0609020204030204"/>
+                      </a:endParaRPr>
                     </a:p>
                   </a:txBody>
                   <a:tcPr>
@@ -12926,12 +12604,20 @@
                           <a:solidFill>
                             <a:srgbClr val="EAF2FF"/>
                           </a:solidFill>
-                          <a:latin typeface="Consolas"/>
-                          <a:ea typeface="Consolas"/>
-                          <a:cs typeface="Consolas"/>
+                          <a:latin typeface="Consolas" panose="020B0609020204030204"/>
+                          <a:ea typeface="Consolas" panose="020B0609020204030204"/>
+                          <a:cs typeface="Consolas" panose="020B0609020204030204"/>
                         </a:rPr>
                         <a:t>LCD_GAME_REFRESH</a:t>
                       </a:r>
+                      <a:endParaRPr sz="975" b="1">
+                        <a:solidFill>
+                          <a:srgbClr val="EAF2FF"/>
+                        </a:solidFill>
+                        <a:latin typeface="Consolas" panose="020B0609020204030204"/>
+                        <a:ea typeface="Consolas" panose="020B0609020204030204"/>
+                        <a:cs typeface="Consolas" panose="020B0609020204030204"/>
+                      </a:endParaRPr>
                     </a:p>
                   </a:txBody>
                   <a:tcPr>
@@ -12956,6 +12642,14 @@
                         </a:rPr>
                         <a:t>请求刷新完整棋盘</a:t>
                       </a:r>
+                      <a:endParaRPr sz="1050" b="0">
+                        <a:solidFill>
+                          <a:srgbClr val="EAF2FF"/>
+                        </a:solidFill>
+                        <a:latin typeface="Noto Sans SC"/>
+                        <a:ea typeface="Noto Sans SC"/>
+                        <a:cs typeface="Noto Sans SC"/>
+                      </a:endParaRPr>
                     </a:p>
                   </a:txBody>
                   <a:tcPr>
@@ -12964,11 +12658,6 @@
                     </a:solidFill>
                   </a:tcPr>
                 </a:tc>
-                <a:extLst>
-                  <a:ext uri="{0D108BD9-81ED-4DB2-BD59-A6C34878D82A}">
-                    <a16:rowId xmlns:a16="http://schemas.microsoft.com/office/drawing/2014/main" val="10006"/>
-                  </a:ext>
-                </a:extLst>
               </a:tr>
               <a:tr h="488156">
                 <a:tc>
@@ -12981,12 +12670,20 @@
                           <a:solidFill>
                             <a:srgbClr val="EAF2FF"/>
                           </a:solidFill>
-                          <a:latin typeface="Consolas"/>
-                          <a:ea typeface="Consolas"/>
-                          <a:cs typeface="Consolas"/>
+                          <a:latin typeface="Consolas" panose="020B0609020204030204"/>
+                          <a:ea typeface="Consolas" panose="020B0609020204030204"/>
+                          <a:cs typeface="Consolas" panose="020B0609020204030204"/>
                         </a:rPr>
                         <a:t>0x2000_0038</a:t>
                       </a:r>
+                      <a:endParaRPr sz="975" b="0">
+                        <a:solidFill>
+                          <a:srgbClr val="EAF2FF"/>
+                        </a:solidFill>
+                        <a:latin typeface="Consolas" panose="020B0609020204030204"/>
+                        <a:ea typeface="Consolas" panose="020B0609020204030204"/>
+                        <a:cs typeface="Consolas" panose="020B0609020204030204"/>
+                      </a:endParaRPr>
                     </a:p>
                   </a:txBody>
                   <a:tcPr>
@@ -13005,12 +12702,20 @@
                           <a:solidFill>
                             <a:srgbClr val="EAF2FF"/>
                           </a:solidFill>
-                          <a:latin typeface="Consolas"/>
-                          <a:ea typeface="Consolas"/>
-                          <a:cs typeface="Consolas"/>
+                          <a:latin typeface="Consolas" panose="020B0609020204030204"/>
+                          <a:ea typeface="Consolas" panose="020B0609020204030204"/>
+                          <a:cs typeface="Consolas" panose="020B0609020204030204"/>
                         </a:rPr>
                         <a:t>BUZZER_TRIGGER</a:t>
                       </a:r>
+                      <a:endParaRPr sz="975" b="1">
+                        <a:solidFill>
+                          <a:srgbClr val="EAF2FF"/>
+                        </a:solidFill>
+                        <a:latin typeface="Consolas" panose="020B0609020204030204"/>
+                        <a:ea typeface="Consolas" panose="020B0609020204030204"/>
+                        <a:cs typeface="Consolas" panose="020B0609020204030204"/>
+                      </a:endParaRPr>
                     </a:p>
                   </a:txBody>
                   <a:tcPr>
@@ -13035,6 +12740,14 @@
                         </a:rPr>
                         <a:t>消行后触发短音</a:t>
                       </a:r>
+                      <a:endParaRPr sz="1050" b="0">
+                        <a:solidFill>
+                          <a:srgbClr val="EAF2FF"/>
+                        </a:solidFill>
+                        <a:latin typeface="Noto Sans SC"/>
+                        <a:ea typeface="Noto Sans SC"/>
+                        <a:cs typeface="Noto Sans SC"/>
+                      </a:endParaRPr>
                     </a:p>
                   </a:txBody>
                   <a:tcPr>
@@ -13043,11 +12756,6 @@
                     </a:solidFill>
                   </a:tcPr>
                 </a:tc>
-                <a:extLst>
-                  <a:ext uri="{0D108BD9-81ED-4DB2-BD59-A6C34878D82A}">
-                    <a16:rowId xmlns:a16="http://schemas.microsoft.com/office/drawing/2014/main" val="10007"/>
-                  </a:ext>
-                </a:extLst>
               </a:tr>
             </a:tbl>
           </a:graphicData>
@@ -13055,13 +12763,7 @@
       </p:graphicFrame>
       <p:sp>
         <p:nvSpPr>
-          <p:cNvPr id="6" name="矩形 5">
-            <a:extLst>
-              <a:ext uri="{FF2B5EF4-FFF2-40B4-BE49-F238E27FC236}">
-                <a16:creationId xmlns:a16="http://schemas.microsoft.com/office/drawing/2014/main" id="{BE3EA8AA-5ECC-45E2-92A1-5F814580081E}"/>
-              </a:ext>
-            </a:extLst>
-          </p:cNvPr>
+          <p:cNvPr id="6" name="矩形 5"/>
           <p:cNvSpPr>
             <a:spLocks noGrp="1"/>
           </p:cNvSpPr>
@@ -13107,18 +12809,20 @@
               </a:rPr>
               <a:t>MMIO 不缓存、强顺序，写副作用只在 req &amp;&amp; ready 时产生一次</a:t>
             </a:r>
+            <a:endParaRPr sz="1275" b="1">
+              <a:solidFill>
+                <a:srgbClr val="37D99A"/>
+              </a:solidFill>
+              <a:latin typeface="Noto Sans SC"/>
+              <a:ea typeface="Noto Sans SC"/>
+              <a:cs typeface="Noto Sans SC"/>
+            </a:endParaRPr>
           </a:p>
         </p:txBody>
       </p:sp>
       <p:sp>
         <p:nvSpPr>
-          <p:cNvPr id="7" name="矩形 6">
-            <a:extLst>
-              <a:ext uri="{FF2B5EF4-FFF2-40B4-BE49-F238E27FC236}">
-                <a16:creationId xmlns:a16="http://schemas.microsoft.com/office/drawing/2014/main" id="{C9920BF8-D209-4B2B-A2B0-156DB39B0295}"/>
-              </a:ext>
-            </a:extLst>
-          </p:cNvPr>
+          <p:cNvPr id="7" name="矩形 6"/>
           <p:cNvSpPr>
             <a:spLocks noGrp="1"/>
           </p:cNvSpPr>
@@ -13143,13 +12847,7 @@
       </p:sp>
       <p:sp>
         <p:nvSpPr>
-          <p:cNvPr id="8" name="矩形 7">
-            <a:extLst>
-              <a:ext uri="{FF2B5EF4-FFF2-40B4-BE49-F238E27FC236}">
-                <a16:creationId xmlns:a16="http://schemas.microsoft.com/office/drawing/2014/main" id="{9F430D21-16E0-4CBD-93A7-0ECBBCE0AF17}"/>
-              </a:ext>
-            </a:extLst>
-          </p:cNvPr>
+          <p:cNvPr id="8" name="矩形 7"/>
           <p:cNvSpPr>
             <a:spLocks noGrp="1"/>
           </p:cNvSpPr>
@@ -13195,15 +12893,18 @@
               </a:rPr>
               <a:t>05</a:t>
             </a:r>
+            <a:endParaRPr sz="825" b="0">
+              <a:solidFill>
+                <a:srgbClr val="A6B4C8"/>
+              </a:solidFill>
+              <a:latin typeface="Noto Sans SC"/>
+              <a:ea typeface="Noto Sans SC"/>
+              <a:cs typeface="Noto Sans SC"/>
+            </a:endParaRPr>
           </a:p>
         </p:txBody>
       </p:sp>
     </p:spTree>
-    <p:extLst>
-      <p:ext uri="{BB962C8B-B14F-4D97-AF65-F5344CB8AC3E}">
-        <p14:creationId xmlns:p14="http://schemas.microsoft.com/office/powerpoint/2010/main" val="1123286947"/>
-      </p:ext>
-    </p:extLst>
   </p:cSld>
   <p:clrMapOvr>
     <a:masterClrMapping/>
@@ -13238,13 +12939,7 @@
       </p:grpSpPr>
       <p:sp>
         <p:nvSpPr>
-          <p:cNvPr id="32" name="矩形 31">
-            <a:extLst>
-              <a:ext uri="{FF2B5EF4-FFF2-40B4-BE49-F238E27FC236}">
-                <a16:creationId xmlns:a16="http://schemas.microsoft.com/office/drawing/2014/main" id="{17641338-41D8-4DAB-8317-2AE1B9304C54}"/>
-              </a:ext>
-            </a:extLst>
-          </p:cNvPr>
+          <p:cNvPr id="32" name="矩形 31"/>
           <p:cNvSpPr>
             <a:spLocks noGrp="1"/>
           </p:cNvSpPr>
@@ -13290,18 +12985,20 @@
               </a:rPr>
               <a:t>IP 核</a:t>
             </a:r>
+            <a:endParaRPr sz="975" b="1">
+              <a:solidFill>
+                <a:srgbClr val="25D4E8"/>
+              </a:solidFill>
+              <a:latin typeface="Noto Sans SC"/>
+              <a:ea typeface="Noto Sans SC"/>
+              <a:cs typeface="Noto Sans SC"/>
+            </a:endParaRPr>
           </a:p>
         </p:txBody>
       </p:sp>
       <p:sp>
         <p:nvSpPr>
-          <p:cNvPr id="2" name="矩形 1">
-            <a:extLst>
-              <a:ext uri="{FF2B5EF4-FFF2-40B4-BE49-F238E27FC236}">
-                <a16:creationId xmlns:a16="http://schemas.microsoft.com/office/drawing/2014/main" id="{FC56B0F2-1011-4DCB-A057-BBAF8EAECCF4}"/>
-              </a:ext>
-            </a:extLst>
-          </p:cNvPr>
+          <p:cNvPr id="2" name="矩形 1"/>
           <p:cNvSpPr>
             <a:spLocks noGrp="1"/>
           </p:cNvSpPr>
@@ -13347,18 +13044,20 @@
               </a:rPr>
               <a:t>LCD 控制器 IP 封装与复用</a:t>
             </a:r>
+            <a:endParaRPr sz="2475" b="1">
+              <a:solidFill>
+                <a:srgbClr val="EAF2FF"/>
+              </a:solidFill>
+              <a:latin typeface="Noto Sans SC"/>
+              <a:ea typeface="Noto Sans SC"/>
+              <a:cs typeface="Noto Sans SC"/>
+            </a:endParaRPr>
           </a:p>
         </p:txBody>
       </p:sp>
       <p:sp>
         <p:nvSpPr>
-          <p:cNvPr id="3" name="直接连接符 2">
-            <a:extLst>
-              <a:ext uri="{FF2B5EF4-FFF2-40B4-BE49-F238E27FC236}">
-                <a16:creationId xmlns:a16="http://schemas.microsoft.com/office/drawing/2014/main" id="{8E8769E5-E7DA-4946-9EA9-C0BB3845E90B}"/>
-              </a:ext>
-            </a:extLst>
-          </p:cNvPr>
+          <p:cNvPr id="3" name="直接连接符 2"/>
           <p:cNvSpPr>
             <a:spLocks noGrp="1"/>
           </p:cNvSpPr>
@@ -13383,13 +13082,7 @@
       </p:sp>
       <p:sp>
         <p:nvSpPr>
-          <p:cNvPr id="4" name="矩形 3">
-            <a:extLst>
-              <a:ext uri="{FF2B5EF4-FFF2-40B4-BE49-F238E27FC236}">
-                <a16:creationId xmlns:a16="http://schemas.microsoft.com/office/drawing/2014/main" id="{F5A78F4B-B510-490C-A4C7-60C5391F4019}"/>
-              </a:ext>
-            </a:extLst>
-          </p:cNvPr>
+          <p:cNvPr id="4" name="矩形 3"/>
           <p:cNvSpPr>
             <a:spLocks noGrp="1"/>
           </p:cNvSpPr>
@@ -13435,18 +13128,20 @@
               </a:rPr>
               <a:t>05</a:t>
             </a:r>
+            <a:endParaRPr sz="825" b="0">
+              <a:solidFill>
+                <a:srgbClr val="A6B4C8"/>
+              </a:solidFill>
+              <a:latin typeface="Noto Sans SC"/>
+              <a:ea typeface="Noto Sans SC"/>
+              <a:cs typeface="Noto Sans SC"/>
+            </a:endParaRPr>
           </a:p>
         </p:txBody>
       </p:sp>
       <p:sp>
         <p:nvSpPr>
-          <p:cNvPr id="5" name="矩形 4">
-            <a:extLst>
-              <a:ext uri="{FF2B5EF4-FFF2-40B4-BE49-F238E27FC236}">
-                <a16:creationId xmlns:a16="http://schemas.microsoft.com/office/drawing/2014/main" id="{C95D55B5-1F64-4D78-A07D-6BB186FAF645}"/>
-              </a:ext>
-            </a:extLst>
-          </p:cNvPr>
+          <p:cNvPr id="5" name="矩形 4"/>
           <p:cNvSpPr>
             <a:spLocks noGrp="1"/>
           </p:cNvSpPr>
@@ -13492,18 +13187,20 @@
               </a:rPr>
               <a:t>VLNV</a:t>
             </a:r>
+            <a:endParaRPr sz="1200" b="1">
+              <a:solidFill>
+                <a:srgbClr val="A6B4C8"/>
+              </a:solidFill>
+              <a:latin typeface="Noto Sans SC"/>
+              <a:ea typeface="Noto Sans SC"/>
+              <a:cs typeface="Noto Sans SC"/>
+            </a:endParaRPr>
           </a:p>
         </p:txBody>
       </p:sp>
       <p:sp>
         <p:nvSpPr>
-          <p:cNvPr id="6" name="矩形 5">
-            <a:extLst>
-              <a:ext uri="{FF2B5EF4-FFF2-40B4-BE49-F238E27FC236}">
-                <a16:creationId xmlns:a16="http://schemas.microsoft.com/office/drawing/2014/main" id="{2AAEDA5D-B81D-4DE1-B59B-0CB323A59C6E}"/>
-              </a:ext>
-            </a:extLst>
-          </p:cNvPr>
+          <p:cNvPr id="6" name="矩形 5"/>
           <p:cNvSpPr>
             <a:spLocks noGrp="1"/>
           </p:cNvSpPr>
@@ -13533,9 +13230,9 @@
                 <a:solidFill>
                   <a:srgbClr val="A78BFA"/>
                 </a:solidFill>
-                <a:latin typeface="Consolas"/>
-                <a:ea typeface="Consolas"/>
-                <a:cs typeface="Consolas"/>
+                <a:latin typeface="Consolas" panose="020B0609020204030204"/>
+                <a:ea typeface="Consolas" panose="020B0609020204030204"/>
+                <a:cs typeface="Consolas" panose="020B0609020204030204"/>
               </a:defRPr>
             </a:pPr>
             <a:r>
@@ -13543,24 +13240,26 @@
                 <a:solidFill>
                   <a:srgbClr val="A78BFA"/>
                 </a:solidFill>
-                <a:latin typeface="Consolas"/>
-                <a:ea typeface="Consolas"/>
-                <a:cs typeface="Consolas"/>
+                <a:latin typeface="Consolas" panose="020B0609020204030204"/>
+                <a:ea typeface="Consolas" panose="020B0609020204030204"/>
+                <a:cs typeface="Consolas" panose="020B0609020204030204"/>
               </a:rPr>
               <a:t>local:user:lcd_controller:1.0</a:t>
             </a:r>
+            <a:endParaRPr sz="1725" b="1">
+              <a:solidFill>
+                <a:srgbClr val="A78BFA"/>
+              </a:solidFill>
+              <a:latin typeface="Consolas" panose="020B0609020204030204"/>
+              <a:ea typeface="Consolas" panose="020B0609020204030204"/>
+              <a:cs typeface="Consolas" panose="020B0609020204030204"/>
+            </a:endParaRPr>
           </a:p>
         </p:txBody>
       </p:sp>
       <p:sp>
         <p:nvSpPr>
-          <p:cNvPr id="7" name="矩形: 圆角 6">
-            <a:extLst>
-              <a:ext uri="{FF2B5EF4-FFF2-40B4-BE49-F238E27FC236}">
-                <a16:creationId xmlns:a16="http://schemas.microsoft.com/office/drawing/2014/main" id="{CAD4C193-6885-4E97-BD8C-9FB8D1278FD9}"/>
-              </a:ext>
-            </a:extLst>
-          </p:cNvPr>
+          <p:cNvPr id="7" name="矩形: 圆角 6"/>
           <p:cNvSpPr>
             <a:spLocks noGrp="1"/>
           </p:cNvSpPr>
@@ -13589,13 +13288,7 @@
       </p:sp>
       <p:sp>
         <p:nvSpPr>
-          <p:cNvPr id="8" name="矩形 7">
-            <a:extLst>
-              <a:ext uri="{FF2B5EF4-FFF2-40B4-BE49-F238E27FC236}">
-                <a16:creationId xmlns:a16="http://schemas.microsoft.com/office/drawing/2014/main" id="{DECF5BCD-B6FE-4C1C-866D-F4EDC4100AB1}"/>
-              </a:ext>
-            </a:extLst>
-          </p:cNvPr>
+          <p:cNvPr id="8" name="矩形 7"/>
           <p:cNvSpPr>
             <a:spLocks noGrp="1"/>
           </p:cNvSpPr>
@@ -13641,18 +13334,20 @@
               </a:rPr>
               <a:t>component.xml</a:t>
             </a:r>
+            <a:endParaRPr sz="1350" b="1">
+              <a:solidFill>
+                <a:srgbClr val="A78BFA"/>
+              </a:solidFill>
+              <a:latin typeface="Noto Sans SC"/>
+              <a:ea typeface="Noto Sans SC"/>
+              <a:cs typeface="Noto Sans SC"/>
+            </a:endParaRPr>
           </a:p>
         </p:txBody>
       </p:sp>
       <p:sp>
         <p:nvSpPr>
-          <p:cNvPr id="9" name="矩形 8">
-            <a:extLst>
-              <a:ext uri="{FF2B5EF4-FFF2-40B4-BE49-F238E27FC236}">
-                <a16:creationId xmlns:a16="http://schemas.microsoft.com/office/drawing/2014/main" id="{5A82C0CE-912F-424F-BA7B-3924CF24ED87}"/>
-              </a:ext>
-            </a:extLst>
-          </p:cNvPr>
+          <p:cNvPr id="9" name="矩形 8"/>
           <p:cNvSpPr>
             <a:spLocks noGrp="1"/>
           </p:cNvSpPr>
@@ -13698,6 +13393,14 @@
               </a:rPr>
               <a:t>19 个端口</a:t>
             </a:r>
+            <a:endParaRPr sz="975" b="0">
+              <a:solidFill>
+                <a:srgbClr val="A6B4C8"/>
+              </a:solidFill>
+              <a:latin typeface="Noto Sans SC"/>
+              <a:ea typeface="Noto Sans SC"/>
+              <a:cs typeface="Noto Sans SC"/>
+            </a:endParaRPr>
           </a:p>
           <a:p>
             <a:pPr>
@@ -13721,18 +13424,20 @@
               </a:rPr>
               <a:t>9 个时序参数</a:t>
             </a:r>
+            <a:endParaRPr sz="975" b="0">
+              <a:solidFill>
+                <a:srgbClr val="A6B4C8"/>
+              </a:solidFill>
+              <a:latin typeface="Noto Sans SC"/>
+              <a:ea typeface="Noto Sans SC"/>
+              <a:cs typeface="Noto Sans SC"/>
+            </a:endParaRPr>
           </a:p>
         </p:txBody>
       </p:sp>
       <p:sp>
         <p:nvSpPr>
-          <p:cNvPr id="10" name="矩形: 圆角 9">
-            <a:extLst>
-              <a:ext uri="{FF2B5EF4-FFF2-40B4-BE49-F238E27FC236}">
-                <a16:creationId xmlns:a16="http://schemas.microsoft.com/office/drawing/2014/main" id="{18EE1DBD-12F6-4782-867C-17FF22B145B3}"/>
-              </a:ext>
-            </a:extLst>
-          </p:cNvPr>
+          <p:cNvPr id="10" name="矩形: 圆角 9"/>
           <p:cNvSpPr>
             <a:spLocks noGrp="1"/>
           </p:cNvSpPr>
@@ -13761,13 +13466,7 @@
       </p:sp>
       <p:sp>
         <p:nvSpPr>
-          <p:cNvPr id="11" name="矩形 10">
-            <a:extLst>
-              <a:ext uri="{FF2B5EF4-FFF2-40B4-BE49-F238E27FC236}">
-                <a16:creationId xmlns:a16="http://schemas.microsoft.com/office/drawing/2014/main" id="{25F03BAE-910A-46A3-9C0B-EB569C5328EC}"/>
-              </a:ext>
-            </a:extLst>
-          </p:cNvPr>
+          <p:cNvPr id="11" name="矩形 10"/>
           <p:cNvSpPr>
             <a:spLocks noGrp="1"/>
           </p:cNvSpPr>
@@ -13813,18 +13512,20 @@
               </a:rPr>
               <a:t>src/</a:t>
             </a:r>
+            <a:endParaRPr sz="1350" b="1">
+              <a:solidFill>
+                <a:srgbClr val="25D4E8"/>
+              </a:solidFill>
+              <a:latin typeface="Noto Sans SC"/>
+              <a:ea typeface="Noto Sans SC"/>
+              <a:cs typeface="Noto Sans SC"/>
+            </a:endParaRPr>
           </a:p>
         </p:txBody>
       </p:sp>
       <p:sp>
         <p:nvSpPr>
-          <p:cNvPr id="12" name="矩形 11">
-            <a:extLst>
-              <a:ext uri="{FF2B5EF4-FFF2-40B4-BE49-F238E27FC236}">
-                <a16:creationId xmlns:a16="http://schemas.microsoft.com/office/drawing/2014/main" id="{66E758B3-D325-4201-B926-110274EDA873}"/>
-              </a:ext>
-            </a:extLst>
-          </p:cNvPr>
+          <p:cNvPr id="12" name="矩形 11"/>
           <p:cNvSpPr>
             <a:spLocks noGrp="1"/>
           </p:cNvSpPr>
@@ -13870,6 +13571,14 @@
               </a:rPr>
               <a:t>lcd_controller.sv</a:t>
             </a:r>
+            <a:endParaRPr sz="975" b="0">
+              <a:solidFill>
+                <a:srgbClr val="A6B4C8"/>
+              </a:solidFill>
+              <a:latin typeface="Noto Sans SC"/>
+              <a:ea typeface="Noto Sans SC"/>
+              <a:cs typeface="Noto Sans SC"/>
+            </a:endParaRPr>
           </a:p>
           <a:p>
             <a:pPr>
@@ -13893,18 +13602,20 @@
               </a:rPr>
               <a:t>lcd_spi_master.sv</a:t>
             </a:r>
+            <a:endParaRPr sz="975" b="0">
+              <a:solidFill>
+                <a:srgbClr val="A6B4C8"/>
+              </a:solidFill>
+              <a:latin typeface="Noto Sans SC"/>
+              <a:ea typeface="Noto Sans SC"/>
+              <a:cs typeface="Noto Sans SC"/>
+            </a:endParaRPr>
           </a:p>
         </p:txBody>
       </p:sp>
       <p:sp>
         <p:nvSpPr>
-          <p:cNvPr id="13" name="矩形: 圆角 12">
-            <a:extLst>
-              <a:ext uri="{FF2B5EF4-FFF2-40B4-BE49-F238E27FC236}">
-                <a16:creationId xmlns:a16="http://schemas.microsoft.com/office/drawing/2014/main" id="{F7BFEB75-A7BB-4C98-8837-CA07E91D326A}"/>
-              </a:ext>
-            </a:extLst>
-          </p:cNvPr>
+          <p:cNvPr id="13" name="矩形: 圆角 12"/>
           <p:cNvSpPr>
             <a:spLocks noGrp="1"/>
           </p:cNvSpPr>
@@ -13933,13 +13644,7 @@
       </p:sp>
       <p:sp>
         <p:nvSpPr>
-          <p:cNvPr id="14" name="矩形 13">
-            <a:extLst>
-              <a:ext uri="{FF2B5EF4-FFF2-40B4-BE49-F238E27FC236}">
-                <a16:creationId xmlns:a16="http://schemas.microsoft.com/office/drawing/2014/main" id="{6D58903E-1F8D-4149-9CD8-812DC9AAF777}"/>
-              </a:ext>
-            </a:extLst>
-          </p:cNvPr>
+          <p:cNvPr id="14" name="矩形 13"/>
           <p:cNvSpPr>
             <a:spLocks noGrp="1"/>
           </p:cNvSpPr>
@@ -13985,18 +13690,20 @@
               </a:rPr>
               <a:t>xgui/</a:t>
             </a:r>
+            <a:endParaRPr sz="1350" b="1">
+              <a:solidFill>
+                <a:srgbClr val="37D99A"/>
+              </a:solidFill>
+              <a:latin typeface="Noto Sans SC"/>
+              <a:ea typeface="Noto Sans SC"/>
+              <a:cs typeface="Noto Sans SC"/>
+            </a:endParaRPr>
           </a:p>
         </p:txBody>
       </p:sp>
       <p:sp>
         <p:nvSpPr>
-          <p:cNvPr id="15" name="矩形 14">
-            <a:extLst>
-              <a:ext uri="{FF2B5EF4-FFF2-40B4-BE49-F238E27FC236}">
-                <a16:creationId xmlns:a16="http://schemas.microsoft.com/office/drawing/2014/main" id="{ED06FCD8-651F-475C-B893-891F3DF9F82F}"/>
-              </a:ext>
-            </a:extLst>
-          </p:cNvPr>
+          <p:cNvPr id="15" name="矩形 14"/>
           <p:cNvSpPr>
             <a:spLocks noGrp="1"/>
           </p:cNvSpPr>
@@ -14042,18 +13749,20 @@
               </a:rPr>
               <a:t>参数界面与校验</a:t>
             </a:r>
+            <a:endParaRPr sz="975" b="0">
+              <a:solidFill>
+                <a:srgbClr val="A6B4C8"/>
+              </a:solidFill>
+              <a:latin typeface="Noto Sans SC"/>
+              <a:ea typeface="Noto Sans SC"/>
+              <a:cs typeface="Noto Sans SC"/>
+            </a:endParaRPr>
           </a:p>
         </p:txBody>
       </p:sp>
       <p:sp>
         <p:nvSpPr>
-          <p:cNvPr id="16" name="矩形: 圆角 15">
-            <a:extLst>
-              <a:ext uri="{FF2B5EF4-FFF2-40B4-BE49-F238E27FC236}">
-                <a16:creationId xmlns:a16="http://schemas.microsoft.com/office/drawing/2014/main" id="{686FEBE0-93C5-4694-B962-38AC4F9A40BB}"/>
-              </a:ext>
-            </a:extLst>
-          </p:cNvPr>
+          <p:cNvPr id="16" name="矩形: 圆角 15"/>
           <p:cNvSpPr>
             <a:spLocks noGrp="1"/>
           </p:cNvSpPr>
@@ -14082,13 +13791,7 @@
       </p:sp>
       <p:sp>
         <p:nvSpPr>
-          <p:cNvPr id="17" name="矩形 16">
-            <a:extLst>
-              <a:ext uri="{FF2B5EF4-FFF2-40B4-BE49-F238E27FC236}">
-                <a16:creationId xmlns:a16="http://schemas.microsoft.com/office/drawing/2014/main" id="{BBB27A41-AC5E-4676-9735-5AB31A98693E}"/>
-              </a:ext>
-            </a:extLst>
-          </p:cNvPr>
+          <p:cNvPr id="17" name="矩形 16"/>
           <p:cNvSpPr>
             <a:spLocks noGrp="1"/>
           </p:cNvSpPr>
@@ -14134,18 +13837,20 @@
               </a:rPr>
               <a:t>IP Catalog</a:t>
             </a:r>
+            <a:endParaRPr sz="1350" b="1">
+              <a:solidFill>
+                <a:srgbClr val="F5B942"/>
+              </a:solidFill>
+              <a:latin typeface="Noto Sans SC"/>
+              <a:ea typeface="Noto Sans SC"/>
+              <a:cs typeface="Noto Sans SC"/>
+            </a:endParaRPr>
           </a:p>
         </p:txBody>
       </p:sp>
       <p:sp>
         <p:nvSpPr>
-          <p:cNvPr id="18" name="矩形 17">
-            <a:extLst>
-              <a:ext uri="{FF2B5EF4-FFF2-40B4-BE49-F238E27FC236}">
-                <a16:creationId xmlns:a16="http://schemas.microsoft.com/office/drawing/2014/main" id="{D1063819-7488-40EC-9020-A88A626F685B}"/>
-              </a:ext>
-            </a:extLst>
-          </p:cNvPr>
+          <p:cNvPr id="18" name="矩形 17"/>
           <p:cNvSpPr>
             <a:spLocks noGrp="1"/>
           </p:cNvSpPr>
@@ -14191,6 +13896,14 @@
               </a:rPr>
               <a:t>注册、例化、Validate</a:t>
             </a:r>
+            <a:endParaRPr sz="975" b="0">
+              <a:solidFill>
+                <a:srgbClr val="A6B4C8"/>
+              </a:solidFill>
+              <a:latin typeface="Noto Sans SC"/>
+              <a:ea typeface="Noto Sans SC"/>
+              <a:cs typeface="Noto Sans SC"/>
+            </a:endParaRPr>
           </a:p>
         </p:txBody>
       </p:sp>
@@ -14274,13 +13987,7 @@
       </p:cxnSp>
       <p:sp>
         <p:nvSpPr>
-          <p:cNvPr id="22" name="矩形: 圆角 21">
-            <a:extLst>
-              <a:ext uri="{FF2B5EF4-FFF2-40B4-BE49-F238E27FC236}">
-                <a16:creationId xmlns:a16="http://schemas.microsoft.com/office/drawing/2014/main" id="{1C1CFD42-F80B-4AC9-B17F-AAAADC78C444}"/>
-              </a:ext>
-            </a:extLst>
-          </p:cNvPr>
+          <p:cNvPr id="22" name="矩形: 圆角 21"/>
           <p:cNvSpPr>
             <a:spLocks noGrp="1"/>
           </p:cNvSpPr>
@@ -14309,13 +14016,7 @@
       </p:sp>
       <p:sp>
         <p:nvSpPr>
-          <p:cNvPr id="23" name="矩形: 圆角 22">
-            <a:extLst>
-              <a:ext uri="{FF2B5EF4-FFF2-40B4-BE49-F238E27FC236}">
-                <a16:creationId xmlns:a16="http://schemas.microsoft.com/office/drawing/2014/main" id="{894E8662-2DC1-4AB8-8B9C-61FE4E68EDBB}"/>
-              </a:ext>
-            </a:extLst>
-          </p:cNvPr>
+          <p:cNvPr id="23" name="矩形: 圆角 22"/>
           <p:cNvSpPr>
             <a:spLocks noGrp="1"/>
           </p:cNvSpPr>
@@ -14342,13 +14043,7 @@
       </p:sp>
       <p:sp>
         <p:nvSpPr>
-          <p:cNvPr id="24" name="矩形 23">
-            <a:extLst>
-              <a:ext uri="{FF2B5EF4-FFF2-40B4-BE49-F238E27FC236}">
-                <a16:creationId xmlns:a16="http://schemas.microsoft.com/office/drawing/2014/main" id="{AF1BBAF5-D69F-4A4E-9E49-1F3277D68003}"/>
-              </a:ext>
-            </a:extLst>
-          </p:cNvPr>
+          <p:cNvPr id="24" name="矩形 23"/>
           <p:cNvSpPr>
             <a:spLocks noGrp="1"/>
           </p:cNvSpPr>
@@ -14394,18 +14089,20 @@
               </a:rPr>
               <a:t>封装边界</a:t>
             </a:r>
+            <a:endParaRPr sz="1350" b="1">
+              <a:solidFill>
+                <a:srgbClr val="25D4E8"/>
+              </a:solidFill>
+              <a:latin typeface="Noto Sans SC"/>
+              <a:ea typeface="Noto Sans SC"/>
+              <a:cs typeface="Noto Sans SC"/>
+            </a:endParaRPr>
           </a:p>
         </p:txBody>
       </p:sp>
       <p:sp>
         <p:nvSpPr>
-          <p:cNvPr id="25" name="矩形 24">
-            <a:extLst>
-              <a:ext uri="{FF2B5EF4-FFF2-40B4-BE49-F238E27FC236}">
-                <a16:creationId xmlns:a16="http://schemas.microsoft.com/office/drawing/2014/main" id="{730090B1-5A98-4BE0-84BD-A485B909D471}"/>
-              </a:ext>
-            </a:extLst>
-          </p:cNvPr>
+          <p:cNvPr id="25" name="矩形 24"/>
           <p:cNvSpPr>
             <a:spLocks noGrp="1"/>
           </p:cNvSpPr>
@@ -14451,200 +14148,20 @@
               </a:rPr>
               <a:t>只打包 LCD 控制器和 SPI master，不把 CPU、SoC、约束或测试平台混入 IP。</a:t>
             </a:r>
+            <a:endParaRPr sz="1125" b="0">
+              <a:solidFill>
+                <a:srgbClr val="EAF2FF"/>
+              </a:solidFill>
+              <a:latin typeface="Noto Sans SC"/>
+              <a:ea typeface="Noto Sans SC"/>
+              <a:cs typeface="Noto Sans SC"/>
+            </a:endParaRPr>
           </a:p>
         </p:txBody>
       </p:sp>
       <p:sp>
         <p:nvSpPr>
-          <p:cNvPr id="26" name="矩形: 圆角 25">
-            <a:extLst>
-              <a:ext uri="{FF2B5EF4-FFF2-40B4-BE49-F238E27FC236}">
-                <a16:creationId xmlns:a16="http://schemas.microsoft.com/office/drawing/2014/main" id="{37E3CB16-48AE-40FD-BA53-25E55445167F}"/>
-              </a:ext>
-            </a:extLst>
-          </p:cNvPr>
-          <p:cNvSpPr>
-            <a:spLocks noGrp="1"/>
-          </p:cNvSpPr>
-          <p:nvPr/>
-        </p:nvSpPr>
-        <p:spPr>
-          <a:xfrm>
-            <a:off x="6591300" y="4095750"/>
-            <a:ext cx="5048250" cy="1285875"/>
-          </a:xfrm>
-          <a:prstGeom prst="roundRect">
-            <a:avLst>
-              <a:gd name="adj" fmla="val 6667"/>
-            </a:avLst>
-          </a:prstGeom>
-          <a:solidFill>
-            <a:srgbClr val="111C2F"/>
-          </a:solidFill>
-          <a:ln w="9525">
-            <a:solidFill>
-              <a:srgbClr val="283A55"/>
-            </a:solidFill>
-            <a:prstDash val="solid"/>
-          </a:ln>
-        </p:spPr>
-      </p:sp>
-      <p:sp>
-        <p:nvSpPr>
-          <p:cNvPr id="27" name="矩形: 圆角 26">
-            <a:extLst>
-              <a:ext uri="{FF2B5EF4-FFF2-40B4-BE49-F238E27FC236}">
-                <a16:creationId xmlns:a16="http://schemas.microsoft.com/office/drawing/2014/main" id="{0ABC0498-4B01-4A71-9A02-E069601AB272}"/>
-              </a:ext>
-            </a:extLst>
-          </p:cNvPr>
-          <p:cNvSpPr>
-            <a:spLocks noGrp="1"/>
-          </p:cNvSpPr>
-          <p:nvPr/>
-        </p:nvSpPr>
-        <p:spPr>
-          <a:xfrm>
-            <a:off x="6591300" y="4095750"/>
-            <a:ext cx="47625" cy="1285875"/>
-          </a:xfrm>
-          <a:prstGeom prst="roundRect">
-            <a:avLst>
-              <a:gd name="adj" fmla="val 50000"/>
-            </a:avLst>
-          </a:prstGeom>
-          <a:solidFill>
-            <a:srgbClr val="F5B942"/>
-          </a:solidFill>
-          <a:ln w="0">
-            <a:noFill/>
-            <a:prstDash val="solid"/>
-          </a:ln>
-        </p:spPr>
-      </p:sp>
-      <p:sp>
-        <p:nvSpPr>
-          <p:cNvPr id="28" name="矩形 27">
-            <a:extLst>
-              <a:ext uri="{FF2B5EF4-FFF2-40B4-BE49-F238E27FC236}">
-                <a16:creationId xmlns:a16="http://schemas.microsoft.com/office/drawing/2014/main" id="{40446DCE-83AA-44E9-97BF-C777F9E98D4F}"/>
-              </a:ext>
-            </a:extLst>
-          </p:cNvPr>
-          <p:cNvSpPr>
-            <a:spLocks noGrp="1"/>
-          </p:cNvSpPr>
-          <p:nvPr/>
-        </p:nvSpPr>
-        <p:spPr>
-          <a:xfrm>
-            <a:off x="6800850" y="4257675"/>
-            <a:ext cx="4667250" cy="266700"/>
-          </a:xfrm>
-          <a:prstGeom prst="rect">
-            <a:avLst/>
-          </a:prstGeom>
-          <a:noFill/>
-          <a:ln w="0">
-            <a:noFill/>
-          </a:ln>
-        </p:spPr>
-        <p:txBody>
-          <a:bodyPr anchor="t">
-            <a:normAutofit fontScale="85185"/>
-          </a:bodyPr>
-          <a:lstStyle/>
-          <a:p>
-            <a:pPr>
-              <a:defRPr sz="1350" b="1">
-                <a:solidFill>
-                  <a:srgbClr val="F5B942"/>
-                </a:solidFill>
-                <a:latin typeface="Noto Sans SC"/>
-                <a:ea typeface="Noto Sans SC"/>
-                <a:cs typeface="Noto Sans SC"/>
-              </a:defRPr>
-            </a:pPr>
-            <a:r>
-              <a:rPr sz="1350" b="1">
-                <a:solidFill>
-                  <a:srgbClr val="F5B942"/>
-                </a:solidFill>
-                <a:latin typeface="Noto Sans SC"/>
-                <a:ea typeface="Noto Sans SC"/>
-                <a:cs typeface="Noto Sans SC"/>
-              </a:rPr>
-              <a:t>答辩前补图</a:t>
-            </a:r>
-          </a:p>
-        </p:txBody>
-      </p:sp>
-      <p:sp>
-        <p:nvSpPr>
-          <p:cNvPr id="29" name="矩形 28">
-            <a:extLst>
-              <a:ext uri="{FF2B5EF4-FFF2-40B4-BE49-F238E27FC236}">
-                <a16:creationId xmlns:a16="http://schemas.microsoft.com/office/drawing/2014/main" id="{84C2207D-00D7-4E24-B905-6E5CEC317FCB}"/>
-              </a:ext>
-            </a:extLst>
-          </p:cNvPr>
-          <p:cNvSpPr>
-            <a:spLocks noGrp="1"/>
-          </p:cNvSpPr>
-          <p:nvPr/>
-        </p:nvSpPr>
-        <p:spPr>
-          <a:xfrm>
-            <a:off x="6800850" y="4600575"/>
-            <a:ext cx="4667250" cy="638175"/>
-          </a:xfrm>
-          <a:prstGeom prst="rect">
-            <a:avLst/>
-          </a:prstGeom>
-          <a:noFill/>
-          <a:ln w="0">
-            <a:noFill/>
-          </a:ln>
-        </p:spPr>
-        <p:txBody>
-          <a:bodyPr anchor="t">
-            <a:normAutofit/>
-          </a:bodyPr>
-          <a:lstStyle/>
-          <a:p>
-            <a:pPr>
-              <a:defRPr sz="1125" b="0">
-                <a:solidFill>
-                  <a:srgbClr val="EAF2FF"/>
-                </a:solidFill>
-                <a:latin typeface="Noto Sans SC"/>
-                <a:ea typeface="Noto Sans SC"/>
-                <a:cs typeface="Noto Sans SC"/>
-              </a:defRPr>
-            </a:pPr>
-            <a:r>
-              <a:rPr sz="1125" b="0">
-                <a:solidFill>
-                  <a:srgbClr val="EAF2FF"/>
-                </a:solidFill>
-                <a:latin typeface="Noto Sans SC"/>
-                <a:ea typeface="Noto Sans SC"/>
-                <a:cs typeface="Noto Sans SC"/>
-              </a:rPr>
-              <a:t>IP Catalog、Block Design、Validate Design、Generate Output Products 四张截图。</a:t>
-            </a:r>
-          </a:p>
-        </p:txBody>
-      </p:sp>
-      <p:sp>
-        <p:nvSpPr>
-          <p:cNvPr id="30" name="矩形 29">
-            <a:extLst>
-              <a:ext uri="{FF2B5EF4-FFF2-40B4-BE49-F238E27FC236}">
-                <a16:creationId xmlns:a16="http://schemas.microsoft.com/office/drawing/2014/main" id="{F1B664B1-09A0-4E23-B03F-598442822C05}"/>
-              </a:ext>
-            </a:extLst>
-          </p:cNvPr>
+          <p:cNvPr id="30" name="矩形 29"/>
           <p:cNvSpPr>
             <a:spLocks noGrp="1"/>
           </p:cNvSpPr>
@@ -14669,13 +14186,7 @@
       </p:sp>
       <p:sp>
         <p:nvSpPr>
-          <p:cNvPr id="31" name="矩形 30">
-            <a:extLst>
-              <a:ext uri="{FF2B5EF4-FFF2-40B4-BE49-F238E27FC236}">
-                <a16:creationId xmlns:a16="http://schemas.microsoft.com/office/drawing/2014/main" id="{B1B130DD-A917-45A7-9591-1C13EDB1A7DC}"/>
-              </a:ext>
-            </a:extLst>
-          </p:cNvPr>
+          <p:cNvPr id="31" name="矩形 30"/>
           <p:cNvSpPr>
             <a:spLocks noGrp="1"/>
           </p:cNvSpPr>
@@ -14721,15 +14232,18 @@
               </a:rPr>
               <a:t>06</a:t>
             </a:r>
+            <a:endParaRPr sz="825" b="0">
+              <a:solidFill>
+                <a:srgbClr val="A6B4C8"/>
+              </a:solidFill>
+              <a:latin typeface="Noto Sans SC"/>
+              <a:ea typeface="Noto Sans SC"/>
+              <a:cs typeface="Noto Sans SC"/>
+            </a:endParaRPr>
           </a:p>
         </p:txBody>
       </p:sp>
     </p:spTree>
-    <p:extLst>
-      <p:ext uri="{BB962C8B-B14F-4D97-AF65-F5344CB8AC3E}">
-        <p14:creationId xmlns:p14="http://schemas.microsoft.com/office/powerpoint/2010/main" val="830969612"/>
-      </p:ext>
-    </p:extLst>
   </p:cSld>
   <p:clrMapOvr>
     <a:masterClrMapping/>
@@ -14764,13 +14278,7 @@
       </p:grpSpPr>
       <p:sp>
         <p:nvSpPr>
-          <p:cNvPr id="9" name="矩形 8">
-            <a:extLst>
-              <a:ext uri="{FF2B5EF4-FFF2-40B4-BE49-F238E27FC236}">
-                <a16:creationId xmlns:a16="http://schemas.microsoft.com/office/drawing/2014/main" id="{FE3F2004-DD05-4954-A61B-D6FD6501639F}"/>
-              </a:ext>
-            </a:extLst>
-          </p:cNvPr>
+          <p:cNvPr id="9" name="矩形 8"/>
           <p:cNvSpPr>
             <a:spLocks noGrp="1"/>
           </p:cNvSpPr>
@@ -14816,18 +14324,20 @@
               </a:rPr>
               <a:t>软件架构</a:t>
             </a:r>
+            <a:endParaRPr sz="975" b="1">
+              <a:solidFill>
+                <a:srgbClr val="25D4E8"/>
+              </a:solidFill>
+              <a:latin typeface="Noto Sans SC"/>
+              <a:ea typeface="Noto Sans SC"/>
+              <a:cs typeface="Noto Sans SC"/>
+            </a:endParaRPr>
           </a:p>
         </p:txBody>
       </p:sp>
       <p:sp>
         <p:nvSpPr>
-          <p:cNvPr id="2" name="矩形 1">
-            <a:extLst>
-              <a:ext uri="{FF2B5EF4-FFF2-40B4-BE49-F238E27FC236}">
-                <a16:creationId xmlns:a16="http://schemas.microsoft.com/office/drawing/2014/main" id="{AE3D1F3B-2F79-4CD9-A35D-02CAE07B3D47}"/>
-              </a:ext>
-            </a:extLst>
-          </p:cNvPr>
+          <p:cNvPr id="2" name="矩形 1"/>
           <p:cNvSpPr>
             <a:spLocks noGrp="1"/>
           </p:cNvSpPr>
@@ -14873,18 +14383,20 @@
               </a:rPr>
               <a:t>汇编软件分层与显示数据流</a:t>
             </a:r>
+            <a:endParaRPr sz="2475" b="1">
+              <a:solidFill>
+                <a:srgbClr val="EAF2FF"/>
+              </a:solidFill>
+              <a:latin typeface="Noto Sans SC"/>
+              <a:ea typeface="Noto Sans SC"/>
+              <a:cs typeface="Noto Sans SC"/>
+            </a:endParaRPr>
           </a:p>
         </p:txBody>
       </p:sp>
       <p:sp>
         <p:nvSpPr>
-          <p:cNvPr id="3" name="直接连接符 2">
-            <a:extLst>
-              <a:ext uri="{FF2B5EF4-FFF2-40B4-BE49-F238E27FC236}">
-                <a16:creationId xmlns:a16="http://schemas.microsoft.com/office/drawing/2014/main" id="{D0AF8D64-12D5-4010-BDC0-BEE9827ABDF1}"/>
-              </a:ext>
-            </a:extLst>
-          </p:cNvPr>
+          <p:cNvPr id="3" name="直接连接符 2"/>
           <p:cNvSpPr>
             <a:spLocks noGrp="1"/>
           </p:cNvSpPr>
@@ -14909,13 +14421,7 @@
       </p:sp>
       <p:sp>
         <p:nvSpPr>
-          <p:cNvPr id="4" name="矩形 3">
-            <a:extLst>
-              <a:ext uri="{FF2B5EF4-FFF2-40B4-BE49-F238E27FC236}">
-                <a16:creationId xmlns:a16="http://schemas.microsoft.com/office/drawing/2014/main" id="{156A7A67-4666-4A52-94C1-D7FD71837C4D}"/>
-              </a:ext>
-            </a:extLst>
-          </p:cNvPr>
+          <p:cNvPr id="4" name="矩形 3"/>
           <p:cNvSpPr>
             <a:spLocks noGrp="1"/>
           </p:cNvSpPr>
@@ -14961,6 +14467,14 @@
               </a:rPr>
               <a:t>06</a:t>
             </a:r>
+            <a:endParaRPr sz="825" b="0">
+              <a:solidFill>
+                <a:srgbClr val="A6B4C8"/>
+              </a:solidFill>
+              <a:latin typeface="Noto Sans SC"/>
+              <a:ea typeface="Noto Sans SC"/>
+              <a:cs typeface="Noto Sans SC"/>
+            </a:endParaRPr>
           </a:p>
         </p:txBody>
       </p:sp>
@@ -14973,8 +14487,10 @@
           <p:nvPr/>
         </p:nvPicPr>
         <p:blipFill>
-          <a:blip r:embed="rId3"/>
-          <a:stretch/>
+          <a:blip r:embed="rId1"/>
+          <a:stretch>
+            <a:fillRect/>
+          </a:stretch>
         </p:blipFill>
         <p:spPr>
           <a:xfrm>
@@ -14988,13 +14504,7 @@
       </p:pic>
       <p:sp>
         <p:nvSpPr>
-          <p:cNvPr id="6" name="矩形 5">
-            <a:extLst>
-              <a:ext uri="{FF2B5EF4-FFF2-40B4-BE49-F238E27FC236}">
-                <a16:creationId xmlns:a16="http://schemas.microsoft.com/office/drawing/2014/main" id="{EDA8ADBE-76EF-426F-8C40-14FDC288EC2A}"/>
-              </a:ext>
-            </a:extLst>
-          </p:cNvPr>
+          <p:cNvPr id="6" name="矩形 5"/>
           <p:cNvSpPr>
             <a:spLocks noGrp="1"/>
           </p:cNvSpPr>
@@ -15040,18 +14550,20 @@
               </a:rPr>
               <a:t>软件处理规则与棋盘位图，硬件处理时序与像素映射</a:t>
             </a:r>
+            <a:endParaRPr sz="1275" b="1">
+              <a:solidFill>
+                <a:srgbClr val="37D99A"/>
+              </a:solidFill>
+              <a:latin typeface="Noto Sans SC"/>
+              <a:ea typeface="Noto Sans SC"/>
+              <a:cs typeface="Noto Sans SC"/>
+            </a:endParaRPr>
           </a:p>
         </p:txBody>
       </p:sp>
       <p:sp>
         <p:nvSpPr>
-          <p:cNvPr id="7" name="矩形 6">
-            <a:extLst>
-              <a:ext uri="{FF2B5EF4-FFF2-40B4-BE49-F238E27FC236}">
-                <a16:creationId xmlns:a16="http://schemas.microsoft.com/office/drawing/2014/main" id="{3880A4BC-D04C-4E0B-8703-4340027FE7C7}"/>
-              </a:ext>
-            </a:extLst>
-          </p:cNvPr>
+          <p:cNvPr id="7" name="矩形 6"/>
           <p:cNvSpPr>
             <a:spLocks noGrp="1"/>
           </p:cNvSpPr>
@@ -15076,13 +14588,7 @@
       </p:sp>
       <p:sp>
         <p:nvSpPr>
-          <p:cNvPr id="8" name="矩形 7">
-            <a:extLst>
-              <a:ext uri="{FF2B5EF4-FFF2-40B4-BE49-F238E27FC236}">
-                <a16:creationId xmlns:a16="http://schemas.microsoft.com/office/drawing/2014/main" id="{39C4AA10-4252-4400-AA72-D994F3252BF0}"/>
-              </a:ext>
-            </a:extLst>
-          </p:cNvPr>
+          <p:cNvPr id="8" name="矩形 7"/>
           <p:cNvSpPr>
             <a:spLocks noGrp="1"/>
           </p:cNvSpPr>
@@ -15128,15 +14634,18 @@
               </a:rPr>
               <a:t>07</a:t>
             </a:r>
+            <a:endParaRPr sz="825" b="0">
+              <a:solidFill>
+                <a:srgbClr val="A6B4C8"/>
+              </a:solidFill>
+              <a:latin typeface="Noto Sans SC"/>
+              <a:ea typeface="Noto Sans SC"/>
+              <a:cs typeface="Noto Sans SC"/>
+            </a:endParaRPr>
           </a:p>
         </p:txBody>
       </p:sp>
     </p:spTree>
-    <p:extLst>
-      <p:ext uri="{BB962C8B-B14F-4D97-AF65-F5344CB8AC3E}">
-        <p14:creationId xmlns:p14="http://schemas.microsoft.com/office/powerpoint/2010/main" val="753656254"/>
-      </p:ext>
-    </p:extLst>
   </p:cSld>
   <p:clrMapOvr>
     <a:masterClrMapping/>
@@ -15171,13 +14680,7 @@
       </p:grpSpPr>
       <p:sp>
         <p:nvSpPr>
-          <p:cNvPr id="26" name="矩形 25">
-            <a:extLst>
-              <a:ext uri="{FF2B5EF4-FFF2-40B4-BE49-F238E27FC236}">
-                <a16:creationId xmlns:a16="http://schemas.microsoft.com/office/drawing/2014/main" id="{C1E658EC-0E7E-4401-8D3E-9CFF983DB38F}"/>
-              </a:ext>
-            </a:extLst>
-          </p:cNvPr>
+          <p:cNvPr id="26" name="矩形 25"/>
           <p:cNvSpPr>
             <a:spLocks noGrp="1"/>
           </p:cNvSpPr>
@@ -15223,18 +14726,20 @@
               </a:rPr>
               <a:t>数据结构</a:t>
             </a:r>
+            <a:endParaRPr sz="975" b="1">
+              <a:solidFill>
+                <a:srgbClr val="25D4E8"/>
+              </a:solidFill>
+              <a:latin typeface="Noto Sans SC"/>
+              <a:ea typeface="Noto Sans SC"/>
+              <a:cs typeface="Noto Sans SC"/>
+            </a:endParaRPr>
           </a:p>
         </p:txBody>
       </p:sp>
       <p:sp>
         <p:nvSpPr>
-          <p:cNvPr id="2" name="矩形 1">
-            <a:extLst>
-              <a:ext uri="{FF2B5EF4-FFF2-40B4-BE49-F238E27FC236}">
-                <a16:creationId xmlns:a16="http://schemas.microsoft.com/office/drawing/2014/main" id="{1DA46648-7117-4338-B9CF-A03E0F3B6B35}"/>
-              </a:ext>
-            </a:extLst>
-          </p:cNvPr>
+          <p:cNvPr id="2" name="矩形 1"/>
           <p:cNvSpPr>
             <a:spLocks noGrp="1"/>
           </p:cNvSpPr>
@@ -15280,18 +14785,20 @@
               </a:rPr>
               <a:t>棋盘、方块与活动状态</a:t>
             </a:r>
+            <a:endParaRPr sz="2475" b="1">
+              <a:solidFill>
+                <a:srgbClr val="EAF2FF"/>
+              </a:solidFill>
+              <a:latin typeface="Noto Sans SC"/>
+              <a:ea typeface="Noto Sans SC"/>
+              <a:cs typeface="Noto Sans SC"/>
+            </a:endParaRPr>
           </a:p>
         </p:txBody>
       </p:sp>
       <p:sp>
         <p:nvSpPr>
-          <p:cNvPr id="3" name="直接连接符 2">
-            <a:extLst>
-              <a:ext uri="{FF2B5EF4-FFF2-40B4-BE49-F238E27FC236}">
-                <a16:creationId xmlns:a16="http://schemas.microsoft.com/office/drawing/2014/main" id="{3BB71BFD-6D8B-4001-9E4D-7FF4E954D3DD}"/>
-              </a:ext>
-            </a:extLst>
-          </p:cNvPr>
+          <p:cNvPr id="3" name="直接连接符 2"/>
           <p:cNvSpPr>
             <a:spLocks noGrp="1"/>
           </p:cNvSpPr>
@@ -15316,13 +14823,7 @@
       </p:sp>
       <p:sp>
         <p:nvSpPr>
-          <p:cNvPr id="4" name="矩形 3">
-            <a:extLst>
-              <a:ext uri="{FF2B5EF4-FFF2-40B4-BE49-F238E27FC236}">
-                <a16:creationId xmlns:a16="http://schemas.microsoft.com/office/drawing/2014/main" id="{5C254665-781D-4BC1-9AA9-9193A0FFDFD2}"/>
-              </a:ext>
-            </a:extLst>
-          </p:cNvPr>
+          <p:cNvPr id="4" name="矩形 3"/>
           <p:cNvSpPr>
             <a:spLocks noGrp="1"/>
           </p:cNvSpPr>
@@ -15368,18 +14869,20 @@
               </a:rPr>
               <a:t>07</a:t>
             </a:r>
+            <a:endParaRPr sz="825" b="0">
+              <a:solidFill>
+                <a:srgbClr val="A6B4C8"/>
+              </a:solidFill>
+              <a:latin typeface="Noto Sans SC"/>
+              <a:ea typeface="Noto Sans SC"/>
+              <a:cs typeface="Noto Sans SC"/>
+            </a:endParaRPr>
           </a:p>
         </p:txBody>
       </p:sp>
       <p:sp>
         <p:nvSpPr>
-          <p:cNvPr id="5" name="矩形: 圆角 4">
-            <a:extLst>
-              <a:ext uri="{FF2B5EF4-FFF2-40B4-BE49-F238E27FC236}">
-                <a16:creationId xmlns:a16="http://schemas.microsoft.com/office/drawing/2014/main" id="{170CFE14-A36C-49EE-A2C2-A68B4F244964}"/>
-              </a:ext>
-            </a:extLst>
-          </p:cNvPr>
+          <p:cNvPr id="5" name="矩形: 圆角 4"/>
           <p:cNvSpPr>
             <a:spLocks noGrp="1"/>
           </p:cNvSpPr>
@@ -15408,13 +14911,7 @@
       </p:sp>
       <p:sp>
         <p:nvSpPr>
-          <p:cNvPr id="6" name="矩形 5">
-            <a:extLst>
-              <a:ext uri="{FF2B5EF4-FFF2-40B4-BE49-F238E27FC236}">
-                <a16:creationId xmlns:a16="http://schemas.microsoft.com/office/drawing/2014/main" id="{518FFBFB-2327-4946-8730-E1D01E26814A}"/>
-              </a:ext>
-            </a:extLst>
-          </p:cNvPr>
+          <p:cNvPr id="6" name="矩形 5"/>
           <p:cNvSpPr>
             <a:spLocks noGrp="1"/>
           </p:cNvSpPr>
@@ -15444,9 +14941,9 @@
                 <a:solidFill>
                   <a:srgbClr val="37D99A"/>
                 </a:solidFill>
-                <a:latin typeface="Consolas"/>
-                <a:ea typeface="Consolas"/>
-                <a:cs typeface="Consolas"/>
+                <a:latin typeface="Consolas" panose="020B0609020204030204"/>
+                <a:ea typeface="Consolas" panose="020B0609020204030204"/>
+                <a:cs typeface="Consolas" panose="020B0609020204030204"/>
               </a:defRPr>
             </a:pPr>
             <a:r>
@@ -15454,12 +14951,20 @@
                 <a:solidFill>
                   <a:srgbClr val="37D99A"/>
                 </a:solidFill>
-                <a:latin typeface="Consolas"/>
-                <a:ea typeface="Consolas"/>
-                <a:cs typeface="Consolas"/>
+                <a:latin typeface="Consolas" panose="020B0609020204030204"/>
+                <a:ea typeface="Consolas" panose="020B0609020204030204"/>
+                <a:cs typeface="Consolas" panose="020B0609020204030204"/>
               </a:rPr>
               <a:t>0000000000</a:t>
             </a:r>
+            <a:endParaRPr sz="1125" b="1">
+              <a:solidFill>
+                <a:srgbClr val="37D99A"/>
+              </a:solidFill>
+              <a:latin typeface="Consolas" panose="020B0609020204030204"/>
+              <a:ea typeface="Consolas" panose="020B0609020204030204"/>
+              <a:cs typeface="Consolas" panose="020B0609020204030204"/>
+            </a:endParaRPr>
           </a:p>
           <a:p>
             <a:pPr>
@@ -15467,9 +14972,9 @@
                 <a:solidFill>
                   <a:srgbClr val="37D99A"/>
                 </a:solidFill>
-                <a:latin typeface="Consolas"/>
-                <a:ea typeface="Consolas"/>
-                <a:cs typeface="Consolas"/>
+                <a:latin typeface="Consolas" panose="020B0609020204030204"/>
+                <a:ea typeface="Consolas" panose="020B0609020204030204"/>
+                <a:cs typeface="Consolas" panose="020B0609020204030204"/>
               </a:defRPr>
             </a:pPr>
             <a:r>
@@ -15477,12 +14982,20 @@
                 <a:solidFill>
                   <a:srgbClr val="37D99A"/>
                 </a:solidFill>
-                <a:latin typeface="Consolas"/>
-                <a:ea typeface="Consolas"/>
-                <a:cs typeface="Consolas"/>
+                <a:latin typeface="Consolas" panose="020B0609020204030204"/>
+                <a:ea typeface="Consolas" panose="020B0609020204030204"/>
+                <a:cs typeface="Consolas" panose="020B0609020204030204"/>
               </a:rPr>
               <a:t>0000000000</a:t>
             </a:r>
+            <a:endParaRPr sz="1125" b="1">
+              <a:solidFill>
+                <a:srgbClr val="37D99A"/>
+              </a:solidFill>
+              <a:latin typeface="Consolas" panose="020B0609020204030204"/>
+              <a:ea typeface="Consolas" panose="020B0609020204030204"/>
+              <a:cs typeface="Consolas" panose="020B0609020204030204"/>
+            </a:endParaRPr>
           </a:p>
           <a:p>
             <a:pPr>
@@ -15490,9 +15003,9 @@
                 <a:solidFill>
                   <a:srgbClr val="37D99A"/>
                 </a:solidFill>
-                <a:latin typeface="Consolas"/>
-                <a:ea typeface="Consolas"/>
-                <a:cs typeface="Consolas"/>
+                <a:latin typeface="Consolas" panose="020B0609020204030204"/>
+                <a:ea typeface="Consolas" panose="020B0609020204030204"/>
+                <a:cs typeface="Consolas" panose="020B0609020204030204"/>
               </a:defRPr>
             </a:pPr>
             <a:r>
@@ -15500,12 +15013,20 @@
                 <a:solidFill>
                   <a:srgbClr val="37D99A"/>
                 </a:solidFill>
-                <a:latin typeface="Consolas"/>
-                <a:ea typeface="Consolas"/>
-                <a:cs typeface="Consolas"/>
+                <a:latin typeface="Consolas" panose="020B0609020204030204"/>
+                <a:ea typeface="Consolas" panose="020B0609020204030204"/>
+                <a:cs typeface="Consolas" panose="020B0609020204030204"/>
               </a:rPr>
               <a:t>0001111000</a:t>
             </a:r>
+            <a:endParaRPr sz="1125" b="1">
+              <a:solidFill>
+                <a:srgbClr val="37D99A"/>
+              </a:solidFill>
+              <a:latin typeface="Consolas" panose="020B0609020204030204"/>
+              <a:ea typeface="Consolas" panose="020B0609020204030204"/>
+              <a:cs typeface="Consolas" panose="020B0609020204030204"/>
+            </a:endParaRPr>
           </a:p>
           <a:p>
             <a:pPr>
@@ -15513,9 +15034,9 @@
                 <a:solidFill>
                   <a:srgbClr val="37D99A"/>
                 </a:solidFill>
-                <a:latin typeface="Consolas"/>
-                <a:ea typeface="Consolas"/>
-                <a:cs typeface="Consolas"/>
+                <a:latin typeface="Consolas" panose="020B0609020204030204"/>
+                <a:ea typeface="Consolas" panose="020B0609020204030204"/>
+                <a:cs typeface="Consolas" panose="020B0609020204030204"/>
               </a:defRPr>
             </a:pPr>
             <a:r>
@@ -15523,12 +15044,20 @@
                 <a:solidFill>
                   <a:srgbClr val="37D99A"/>
                 </a:solidFill>
-                <a:latin typeface="Consolas"/>
-                <a:ea typeface="Consolas"/>
-                <a:cs typeface="Consolas"/>
+                <a:latin typeface="Consolas" panose="020B0609020204030204"/>
+                <a:ea typeface="Consolas" panose="020B0609020204030204"/>
+                <a:cs typeface="Consolas" panose="020B0609020204030204"/>
               </a:rPr>
               <a:t>0000110000</a:t>
             </a:r>
+            <a:endParaRPr sz="1125" b="1">
+              <a:solidFill>
+                <a:srgbClr val="37D99A"/>
+              </a:solidFill>
+              <a:latin typeface="Consolas" panose="020B0609020204030204"/>
+              <a:ea typeface="Consolas" panose="020B0609020204030204"/>
+              <a:cs typeface="Consolas" panose="020B0609020204030204"/>
+            </a:endParaRPr>
           </a:p>
           <a:p>
             <a:pPr>
@@ -15536,9 +15065,9 @@
                 <a:solidFill>
                   <a:srgbClr val="37D99A"/>
                 </a:solidFill>
-                <a:latin typeface="Consolas"/>
-                <a:ea typeface="Consolas"/>
-                <a:cs typeface="Consolas"/>
+                <a:latin typeface="Consolas" panose="020B0609020204030204"/>
+                <a:ea typeface="Consolas" panose="020B0609020204030204"/>
+                <a:cs typeface="Consolas" panose="020B0609020204030204"/>
               </a:defRPr>
             </a:pPr>
             <a:r>
@@ -15546,12 +15075,20 @@
                 <a:solidFill>
                   <a:srgbClr val="37D99A"/>
                 </a:solidFill>
-                <a:latin typeface="Consolas"/>
-                <a:ea typeface="Consolas"/>
-                <a:cs typeface="Consolas"/>
+                <a:latin typeface="Consolas" panose="020B0609020204030204"/>
+                <a:ea typeface="Consolas" panose="020B0609020204030204"/>
+                <a:cs typeface="Consolas" panose="020B0609020204030204"/>
               </a:rPr>
               <a:t>0000110000</a:t>
             </a:r>
+            <a:endParaRPr sz="1125" b="1">
+              <a:solidFill>
+                <a:srgbClr val="37D99A"/>
+              </a:solidFill>
+              <a:latin typeface="Consolas" panose="020B0609020204030204"/>
+              <a:ea typeface="Consolas" panose="020B0609020204030204"/>
+              <a:cs typeface="Consolas" panose="020B0609020204030204"/>
+            </a:endParaRPr>
           </a:p>
           <a:p>
             <a:pPr>
@@ -15559,9 +15096,9 @@
                 <a:solidFill>
                   <a:srgbClr val="37D99A"/>
                 </a:solidFill>
-                <a:latin typeface="Consolas"/>
-                <a:ea typeface="Consolas"/>
-                <a:cs typeface="Consolas"/>
+                <a:latin typeface="Consolas" panose="020B0609020204030204"/>
+                <a:ea typeface="Consolas" panose="020B0609020204030204"/>
+                <a:cs typeface="Consolas" panose="020B0609020204030204"/>
               </a:defRPr>
             </a:pPr>
             <a:r>
@@ -15569,12 +15106,20 @@
                 <a:solidFill>
                   <a:srgbClr val="37D99A"/>
                 </a:solidFill>
-                <a:latin typeface="Consolas"/>
-                <a:ea typeface="Consolas"/>
-                <a:cs typeface="Consolas"/>
+                <a:latin typeface="Consolas" panose="020B0609020204030204"/>
+                <a:ea typeface="Consolas" panose="020B0609020204030204"/>
+                <a:cs typeface="Consolas" panose="020B0609020204030204"/>
               </a:rPr>
               <a:t>0001100000</a:t>
             </a:r>
+            <a:endParaRPr sz="1125" b="1">
+              <a:solidFill>
+                <a:srgbClr val="37D99A"/>
+              </a:solidFill>
+              <a:latin typeface="Consolas" panose="020B0609020204030204"/>
+              <a:ea typeface="Consolas" panose="020B0609020204030204"/>
+              <a:cs typeface="Consolas" panose="020B0609020204030204"/>
+            </a:endParaRPr>
           </a:p>
           <a:p>
             <a:pPr>
@@ -15582,9 +15127,9 @@
                 <a:solidFill>
                   <a:srgbClr val="37D99A"/>
                 </a:solidFill>
-                <a:latin typeface="Consolas"/>
-                <a:ea typeface="Consolas"/>
-                <a:cs typeface="Consolas"/>
+                <a:latin typeface="Consolas" panose="020B0609020204030204"/>
+                <a:ea typeface="Consolas" panose="020B0609020204030204"/>
+                <a:cs typeface="Consolas" panose="020B0609020204030204"/>
               </a:defRPr>
             </a:pPr>
             <a:r>
@@ -15592,12 +15137,20 @@
                 <a:solidFill>
                   <a:srgbClr val="37D99A"/>
                 </a:solidFill>
-                <a:latin typeface="Consolas"/>
-                <a:ea typeface="Consolas"/>
-                <a:cs typeface="Consolas"/>
+                <a:latin typeface="Consolas" panose="020B0609020204030204"/>
+                <a:ea typeface="Consolas" panose="020B0609020204030204"/>
+                <a:cs typeface="Consolas" panose="020B0609020204030204"/>
               </a:rPr>
               <a:t>0001100000</a:t>
             </a:r>
+            <a:endParaRPr sz="1125" b="1">
+              <a:solidFill>
+                <a:srgbClr val="37D99A"/>
+              </a:solidFill>
+              <a:latin typeface="Consolas" panose="020B0609020204030204"/>
+              <a:ea typeface="Consolas" panose="020B0609020204030204"/>
+              <a:cs typeface="Consolas" panose="020B0609020204030204"/>
+            </a:endParaRPr>
           </a:p>
           <a:p>
             <a:pPr>
@@ -15605,9 +15158,9 @@
                 <a:solidFill>
                   <a:srgbClr val="37D99A"/>
                 </a:solidFill>
-                <a:latin typeface="Consolas"/>
-                <a:ea typeface="Consolas"/>
-                <a:cs typeface="Consolas"/>
+                <a:latin typeface="Consolas" panose="020B0609020204030204"/>
+                <a:ea typeface="Consolas" panose="020B0609020204030204"/>
+                <a:cs typeface="Consolas" panose="020B0609020204030204"/>
               </a:defRPr>
             </a:pPr>
             <a:r>
@@ -15615,12 +15168,20 @@
                 <a:solidFill>
                   <a:srgbClr val="37D99A"/>
                 </a:solidFill>
-                <a:latin typeface="Consolas"/>
-                <a:ea typeface="Consolas"/>
-                <a:cs typeface="Consolas"/>
+                <a:latin typeface="Consolas" panose="020B0609020204030204"/>
+                <a:ea typeface="Consolas" panose="020B0609020204030204"/>
+                <a:cs typeface="Consolas" panose="020B0609020204030204"/>
               </a:rPr>
               <a:t>0011110000</a:t>
             </a:r>
+            <a:endParaRPr sz="1125" b="1">
+              <a:solidFill>
+                <a:srgbClr val="37D99A"/>
+              </a:solidFill>
+              <a:latin typeface="Consolas" panose="020B0609020204030204"/>
+              <a:ea typeface="Consolas" panose="020B0609020204030204"/>
+              <a:cs typeface="Consolas" panose="020B0609020204030204"/>
+            </a:endParaRPr>
           </a:p>
           <a:p>
             <a:pPr>
@@ -15628,9 +15189,9 @@
                 <a:solidFill>
                   <a:srgbClr val="37D99A"/>
                 </a:solidFill>
-                <a:latin typeface="Consolas"/>
-                <a:ea typeface="Consolas"/>
-                <a:cs typeface="Consolas"/>
+                <a:latin typeface="Consolas" panose="020B0609020204030204"/>
+                <a:ea typeface="Consolas" panose="020B0609020204030204"/>
+                <a:cs typeface="Consolas" panose="020B0609020204030204"/>
               </a:defRPr>
             </a:pPr>
             <a:r>
@@ -15638,12 +15199,20 @@
                 <a:solidFill>
                   <a:srgbClr val="37D99A"/>
                 </a:solidFill>
-                <a:latin typeface="Consolas"/>
-                <a:ea typeface="Consolas"/>
-                <a:cs typeface="Consolas"/>
+                <a:latin typeface="Consolas" panose="020B0609020204030204"/>
+                <a:ea typeface="Consolas" panose="020B0609020204030204"/>
+                <a:cs typeface="Consolas" panose="020B0609020204030204"/>
               </a:rPr>
               <a:t>0000110000</a:t>
             </a:r>
+            <a:endParaRPr sz="1125" b="1">
+              <a:solidFill>
+                <a:srgbClr val="37D99A"/>
+              </a:solidFill>
+              <a:latin typeface="Consolas" panose="020B0609020204030204"/>
+              <a:ea typeface="Consolas" panose="020B0609020204030204"/>
+              <a:cs typeface="Consolas" panose="020B0609020204030204"/>
+            </a:endParaRPr>
           </a:p>
           <a:p>
             <a:pPr>
@@ -15651,9 +15220,9 @@
                 <a:solidFill>
                   <a:srgbClr val="37D99A"/>
                 </a:solidFill>
-                <a:latin typeface="Consolas"/>
-                <a:ea typeface="Consolas"/>
-                <a:cs typeface="Consolas"/>
+                <a:latin typeface="Consolas" panose="020B0609020204030204"/>
+                <a:ea typeface="Consolas" panose="020B0609020204030204"/>
+                <a:cs typeface="Consolas" panose="020B0609020204030204"/>
               </a:defRPr>
             </a:pPr>
             <a:r>
@@ -15661,12 +15230,20 @@
                 <a:solidFill>
                   <a:srgbClr val="37D99A"/>
                 </a:solidFill>
-                <a:latin typeface="Consolas"/>
-                <a:ea typeface="Consolas"/>
-                <a:cs typeface="Consolas"/>
+                <a:latin typeface="Consolas" panose="020B0609020204030204"/>
+                <a:ea typeface="Consolas" panose="020B0609020204030204"/>
+                <a:cs typeface="Consolas" panose="020B0609020204030204"/>
               </a:rPr>
               <a:t>0001111000</a:t>
             </a:r>
+            <a:endParaRPr sz="1125" b="1">
+              <a:solidFill>
+                <a:srgbClr val="37D99A"/>
+              </a:solidFill>
+              <a:latin typeface="Consolas" panose="020B0609020204030204"/>
+              <a:ea typeface="Consolas" panose="020B0609020204030204"/>
+              <a:cs typeface="Consolas" panose="020B0609020204030204"/>
+            </a:endParaRPr>
           </a:p>
           <a:p>
             <a:pPr>
@@ -15674,9 +15251,9 @@
                 <a:solidFill>
                   <a:srgbClr val="37D99A"/>
                 </a:solidFill>
-                <a:latin typeface="Consolas"/>
-                <a:ea typeface="Consolas"/>
-                <a:cs typeface="Consolas"/>
+                <a:latin typeface="Consolas" panose="020B0609020204030204"/>
+                <a:ea typeface="Consolas" panose="020B0609020204030204"/>
+                <a:cs typeface="Consolas" panose="020B0609020204030204"/>
               </a:defRPr>
             </a:pPr>
             <a:r>
@@ -15684,12 +15261,20 @@
                 <a:solidFill>
                   <a:srgbClr val="37D99A"/>
                 </a:solidFill>
-                <a:latin typeface="Consolas"/>
-                <a:ea typeface="Consolas"/>
-                <a:cs typeface="Consolas"/>
+                <a:latin typeface="Consolas" panose="020B0609020204030204"/>
+                <a:ea typeface="Consolas" panose="020B0609020204030204"/>
+                <a:cs typeface="Consolas" panose="020B0609020204030204"/>
               </a:rPr>
               <a:t>0010010000</a:t>
             </a:r>
+            <a:endParaRPr sz="1125" b="1">
+              <a:solidFill>
+                <a:srgbClr val="37D99A"/>
+              </a:solidFill>
+              <a:latin typeface="Consolas" panose="020B0609020204030204"/>
+              <a:ea typeface="Consolas" panose="020B0609020204030204"/>
+              <a:cs typeface="Consolas" panose="020B0609020204030204"/>
+            </a:endParaRPr>
           </a:p>
           <a:p>
             <a:pPr>
@@ -15697,9 +15282,9 @@
                 <a:solidFill>
                   <a:srgbClr val="37D99A"/>
                 </a:solidFill>
-                <a:latin typeface="Consolas"/>
-                <a:ea typeface="Consolas"/>
-                <a:cs typeface="Consolas"/>
+                <a:latin typeface="Consolas" panose="020B0609020204030204"/>
+                <a:ea typeface="Consolas" panose="020B0609020204030204"/>
+                <a:cs typeface="Consolas" panose="020B0609020204030204"/>
               </a:defRPr>
             </a:pPr>
             <a:r>
@@ -15707,12 +15292,20 @@
                 <a:solidFill>
                   <a:srgbClr val="37D99A"/>
                 </a:solidFill>
-                <a:latin typeface="Consolas"/>
-                <a:ea typeface="Consolas"/>
-                <a:cs typeface="Consolas"/>
+                <a:latin typeface="Consolas" panose="020B0609020204030204"/>
+                <a:ea typeface="Consolas" panose="020B0609020204030204"/>
+                <a:cs typeface="Consolas" panose="020B0609020204030204"/>
               </a:rPr>
               <a:t>0011110000</a:t>
             </a:r>
+            <a:endParaRPr sz="1125" b="1">
+              <a:solidFill>
+                <a:srgbClr val="37D99A"/>
+              </a:solidFill>
+              <a:latin typeface="Consolas" panose="020B0609020204030204"/>
+              <a:ea typeface="Consolas" panose="020B0609020204030204"/>
+              <a:cs typeface="Consolas" panose="020B0609020204030204"/>
+            </a:endParaRPr>
           </a:p>
           <a:p>
             <a:pPr>
@@ -15720,9 +15313,9 @@
                 <a:solidFill>
                   <a:srgbClr val="37D99A"/>
                 </a:solidFill>
-                <a:latin typeface="Consolas"/>
-                <a:ea typeface="Consolas"/>
-                <a:cs typeface="Consolas"/>
+                <a:latin typeface="Consolas" panose="020B0609020204030204"/>
+                <a:ea typeface="Consolas" panose="020B0609020204030204"/>
+                <a:cs typeface="Consolas" panose="020B0609020204030204"/>
               </a:defRPr>
             </a:pPr>
             <a:r>
@@ -15730,12 +15323,20 @@
                 <a:solidFill>
                   <a:srgbClr val="37D99A"/>
                 </a:solidFill>
-                <a:latin typeface="Consolas"/>
-                <a:ea typeface="Consolas"/>
-                <a:cs typeface="Consolas"/>
+                <a:latin typeface="Consolas" panose="020B0609020204030204"/>
+                <a:ea typeface="Consolas" panose="020B0609020204030204"/>
+                <a:cs typeface="Consolas" panose="020B0609020204030204"/>
               </a:rPr>
               <a:t>0110110000</a:t>
             </a:r>
+            <a:endParaRPr sz="1125" b="1">
+              <a:solidFill>
+                <a:srgbClr val="37D99A"/>
+              </a:solidFill>
+              <a:latin typeface="Consolas" panose="020B0609020204030204"/>
+              <a:ea typeface="Consolas" panose="020B0609020204030204"/>
+              <a:cs typeface="Consolas" panose="020B0609020204030204"/>
+            </a:endParaRPr>
           </a:p>
           <a:p>
             <a:pPr>
@@ -15743,9 +15344,9 @@
                 <a:solidFill>
                   <a:srgbClr val="37D99A"/>
                 </a:solidFill>
-                <a:latin typeface="Consolas"/>
-                <a:ea typeface="Consolas"/>
-                <a:cs typeface="Consolas"/>
+                <a:latin typeface="Consolas" panose="020B0609020204030204"/>
+                <a:ea typeface="Consolas" panose="020B0609020204030204"/>
+                <a:cs typeface="Consolas" panose="020B0609020204030204"/>
               </a:defRPr>
             </a:pPr>
             <a:r>
@@ -15753,12 +15354,20 @@
                 <a:solidFill>
                   <a:srgbClr val="37D99A"/>
                 </a:solidFill>
-                <a:latin typeface="Consolas"/>
-                <a:ea typeface="Consolas"/>
-                <a:cs typeface="Consolas"/>
+                <a:latin typeface="Consolas" panose="020B0609020204030204"/>
+                <a:ea typeface="Consolas" panose="020B0609020204030204"/>
+                <a:cs typeface="Consolas" panose="020B0609020204030204"/>
               </a:rPr>
               <a:t>0111111000</a:t>
             </a:r>
+            <a:endParaRPr sz="1125" b="1">
+              <a:solidFill>
+                <a:srgbClr val="37D99A"/>
+              </a:solidFill>
+              <a:latin typeface="Consolas" panose="020B0609020204030204"/>
+              <a:ea typeface="Consolas" panose="020B0609020204030204"/>
+              <a:cs typeface="Consolas" panose="020B0609020204030204"/>
+            </a:endParaRPr>
           </a:p>
           <a:p>
             <a:pPr>
@@ -15766,9 +15375,9 @@
                 <a:solidFill>
                   <a:srgbClr val="37D99A"/>
                 </a:solidFill>
-                <a:latin typeface="Consolas"/>
-                <a:ea typeface="Consolas"/>
-                <a:cs typeface="Consolas"/>
+                <a:latin typeface="Consolas" panose="020B0609020204030204"/>
+                <a:ea typeface="Consolas" panose="020B0609020204030204"/>
+                <a:cs typeface="Consolas" panose="020B0609020204030204"/>
               </a:defRPr>
             </a:pPr>
             <a:r>
@@ -15776,12 +15385,20 @@
                 <a:solidFill>
                   <a:srgbClr val="37D99A"/>
                 </a:solidFill>
-                <a:latin typeface="Consolas"/>
-                <a:ea typeface="Consolas"/>
-                <a:cs typeface="Consolas"/>
+                <a:latin typeface="Consolas" panose="020B0609020204030204"/>
+                <a:ea typeface="Consolas" panose="020B0609020204030204"/>
+                <a:cs typeface="Consolas" panose="020B0609020204030204"/>
               </a:rPr>
               <a:t>0110011000</a:t>
             </a:r>
+            <a:endParaRPr sz="1125" b="1">
+              <a:solidFill>
+                <a:srgbClr val="37D99A"/>
+              </a:solidFill>
+              <a:latin typeface="Consolas" panose="020B0609020204030204"/>
+              <a:ea typeface="Consolas" panose="020B0609020204030204"/>
+              <a:cs typeface="Consolas" panose="020B0609020204030204"/>
+            </a:endParaRPr>
           </a:p>
           <a:p>
             <a:pPr>
@@ -15789,9 +15406,9 @@
                 <a:solidFill>
                   <a:srgbClr val="37D99A"/>
                 </a:solidFill>
-                <a:latin typeface="Consolas"/>
-                <a:ea typeface="Consolas"/>
-                <a:cs typeface="Consolas"/>
+                <a:latin typeface="Consolas" panose="020B0609020204030204"/>
+                <a:ea typeface="Consolas" panose="020B0609020204030204"/>
+                <a:cs typeface="Consolas" panose="020B0609020204030204"/>
               </a:defRPr>
             </a:pPr>
             <a:r>
@@ -15799,12 +15416,20 @@
                 <a:solidFill>
                   <a:srgbClr val="37D99A"/>
                 </a:solidFill>
-                <a:latin typeface="Consolas"/>
-                <a:ea typeface="Consolas"/>
-                <a:cs typeface="Consolas"/>
+                <a:latin typeface="Consolas" panose="020B0609020204030204"/>
+                <a:ea typeface="Consolas" panose="020B0609020204030204"/>
+                <a:cs typeface="Consolas" panose="020B0609020204030204"/>
               </a:rPr>
               <a:t>1111011000</a:t>
             </a:r>
+            <a:endParaRPr sz="1125" b="1">
+              <a:solidFill>
+                <a:srgbClr val="37D99A"/>
+              </a:solidFill>
+              <a:latin typeface="Consolas" panose="020B0609020204030204"/>
+              <a:ea typeface="Consolas" panose="020B0609020204030204"/>
+              <a:cs typeface="Consolas" panose="020B0609020204030204"/>
+            </a:endParaRPr>
           </a:p>
           <a:p>
             <a:pPr>
@@ -15812,9 +15437,9 @@
                 <a:solidFill>
                   <a:srgbClr val="37D99A"/>
                 </a:solidFill>
-                <a:latin typeface="Consolas"/>
-                <a:ea typeface="Consolas"/>
-                <a:cs typeface="Consolas"/>
+                <a:latin typeface="Consolas" panose="020B0609020204030204"/>
+                <a:ea typeface="Consolas" panose="020B0609020204030204"/>
+                <a:cs typeface="Consolas" panose="020B0609020204030204"/>
               </a:defRPr>
             </a:pPr>
             <a:r>
@@ -15822,12 +15447,20 @@
                 <a:solidFill>
                   <a:srgbClr val="37D99A"/>
                 </a:solidFill>
-                <a:latin typeface="Consolas"/>
-                <a:ea typeface="Consolas"/>
-                <a:cs typeface="Consolas"/>
+                <a:latin typeface="Consolas" panose="020B0609020204030204"/>
+                <a:ea typeface="Consolas" panose="020B0609020204030204"/>
+                <a:cs typeface="Consolas" panose="020B0609020204030204"/>
               </a:rPr>
               <a:t>1111111100</a:t>
             </a:r>
+            <a:endParaRPr sz="1125" b="1">
+              <a:solidFill>
+                <a:srgbClr val="37D99A"/>
+              </a:solidFill>
+              <a:latin typeface="Consolas" panose="020B0609020204030204"/>
+              <a:ea typeface="Consolas" panose="020B0609020204030204"/>
+              <a:cs typeface="Consolas" panose="020B0609020204030204"/>
+            </a:endParaRPr>
           </a:p>
           <a:p>
             <a:pPr>
@@ -15835,9 +15468,9 @@
                 <a:solidFill>
                   <a:srgbClr val="37D99A"/>
                 </a:solidFill>
-                <a:latin typeface="Consolas"/>
-                <a:ea typeface="Consolas"/>
-                <a:cs typeface="Consolas"/>
+                <a:latin typeface="Consolas" panose="020B0609020204030204"/>
+                <a:ea typeface="Consolas" panose="020B0609020204030204"/>
+                <a:cs typeface="Consolas" panose="020B0609020204030204"/>
               </a:defRPr>
             </a:pPr>
             <a:r>
@@ -15845,12 +15478,20 @@
                 <a:solidFill>
                   <a:srgbClr val="37D99A"/>
                 </a:solidFill>
-                <a:latin typeface="Consolas"/>
-                <a:ea typeface="Consolas"/>
-                <a:cs typeface="Consolas"/>
+                <a:latin typeface="Consolas" panose="020B0609020204030204"/>
+                <a:ea typeface="Consolas" panose="020B0609020204030204"/>
+                <a:cs typeface="Consolas" panose="020B0609020204030204"/>
               </a:rPr>
               <a:t>1110111000</a:t>
             </a:r>
+            <a:endParaRPr sz="1125" b="1">
+              <a:solidFill>
+                <a:srgbClr val="37D99A"/>
+              </a:solidFill>
+              <a:latin typeface="Consolas" panose="020B0609020204030204"/>
+              <a:ea typeface="Consolas" panose="020B0609020204030204"/>
+              <a:cs typeface="Consolas" panose="020B0609020204030204"/>
+            </a:endParaRPr>
           </a:p>
           <a:p>
             <a:pPr>
@@ -15858,9 +15499,9 @@
                 <a:solidFill>
                   <a:srgbClr val="37D99A"/>
                 </a:solidFill>
-                <a:latin typeface="Consolas"/>
-                <a:ea typeface="Consolas"/>
-                <a:cs typeface="Consolas"/>
+                <a:latin typeface="Consolas" panose="020B0609020204030204"/>
+                <a:ea typeface="Consolas" panose="020B0609020204030204"/>
+                <a:cs typeface="Consolas" panose="020B0609020204030204"/>
               </a:defRPr>
             </a:pPr>
             <a:r>
@@ -15868,12 +15509,20 @@
                 <a:solidFill>
                   <a:srgbClr val="37D99A"/>
                 </a:solidFill>
-                <a:latin typeface="Consolas"/>
-                <a:ea typeface="Consolas"/>
-                <a:cs typeface="Consolas"/>
+                <a:latin typeface="Consolas" panose="020B0609020204030204"/>
+                <a:ea typeface="Consolas" panose="020B0609020204030204"/>
+                <a:cs typeface="Consolas" panose="020B0609020204030204"/>
               </a:rPr>
               <a:t>1111111100</a:t>
             </a:r>
+            <a:endParaRPr sz="1125" b="1">
+              <a:solidFill>
+                <a:srgbClr val="37D99A"/>
+              </a:solidFill>
+              <a:latin typeface="Consolas" panose="020B0609020204030204"/>
+              <a:ea typeface="Consolas" panose="020B0609020204030204"/>
+              <a:cs typeface="Consolas" panose="020B0609020204030204"/>
+            </a:endParaRPr>
           </a:p>
           <a:p>
             <a:pPr>
@@ -15881,9 +15530,9 @@
                 <a:solidFill>
                   <a:srgbClr val="37D99A"/>
                 </a:solidFill>
-                <a:latin typeface="Consolas"/>
-                <a:ea typeface="Consolas"/>
-                <a:cs typeface="Consolas"/>
+                <a:latin typeface="Consolas" panose="020B0609020204030204"/>
+                <a:ea typeface="Consolas" panose="020B0609020204030204"/>
+                <a:cs typeface="Consolas" panose="020B0609020204030204"/>
               </a:defRPr>
             </a:pPr>
             <a:r>
@@ -15891,24 +15540,26 @@
                 <a:solidFill>
                   <a:srgbClr val="37D99A"/>
                 </a:solidFill>
-                <a:latin typeface="Consolas"/>
-                <a:ea typeface="Consolas"/>
-                <a:cs typeface="Consolas"/>
+                <a:latin typeface="Consolas" panose="020B0609020204030204"/>
+                <a:ea typeface="Consolas" panose="020B0609020204030204"/>
+                <a:cs typeface="Consolas" panose="020B0609020204030204"/>
               </a:rPr>
               <a:t>1111111111</a:t>
             </a:r>
+            <a:endParaRPr sz="1125" b="1">
+              <a:solidFill>
+                <a:srgbClr val="37D99A"/>
+              </a:solidFill>
+              <a:latin typeface="Consolas" panose="020B0609020204030204"/>
+              <a:ea typeface="Consolas" panose="020B0609020204030204"/>
+              <a:cs typeface="Consolas" panose="020B0609020204030204"/>
+            </a:endParaRPr>
           </a:p>
         </p:txBody>
       </p:sp>
       <p:sp>
         <p:nvSpPr>
-          <p:cNvPr id="7" name="矩形: 圆角 6">
-            <a:extLst>
-              <a:ext uri="{FF2B5EF4-FFF2-40B4-BE49-F238E27FC236}">
-                <a16:creationId xmlns:a16="http://schemas.microsoft.com/office/drawing/2014/main" id="{035F2730-72CD-4D95-9315-25FEFC5E766E}"/>
-              </a:ext>
-            </a:extLst>
-          </p:cNvPr>
+          <p:cNvPr id="7" name="矩形: 圆角 6"/>
           <p:cNvSpPr>
             <a:spLocks noGrp="1"/>
           </p:cNvSpPr>
@@ -15937,13 +15588,7 @@
       </p:sp>
       <p:sp>
         <p:nvSpPr>
-          <p:cNvPr id="8" name="矩形: 圆角 7">
-            <a:extLst>
-              <a:ext uri="{FF2B5EF4-FFF2-40B4-BE49-F238E27FC236}">
-                <a16:creationId xmlns:a16="http://schemas.microsoft.com/office/drawing/2014/main" id="{8E7007FF-0D9E-4D3D-AB25-2F6CFDDEB981}"/>
-              </a:ext>
-            </a:extLst>
-          </p:cNvPr>
+          <p:cNvPr id="8" name="矩形: 圆角 7"/>
           <p:cNvSpPr>
             <a:spLocks noGrp="1"/>
           </p:cNvSpPr>
@@ -15970,13 +15615,7 @@
       </p:sp>
       <p:sp>
         <p:nvSpPr>
-          <p:cNvPr id="9" name="矩形 8">
-            <a:extLst>
-              <a:ext uri="{FF2B5EF4-FFF2-40B4-BE49-F238E27FC236}">
-                <a16:creationId xmlns:a16="http://schemas.microsoft.com/office/drawing/2014/main" id="{92556D27-5F6A-4DEC-9D9C-F55C9F6D9B9A}"/>
-              </a:ext>
-            </a:extLst>
-          </p:cNvPr>
+          <p:cNvPr id="9" name="矩形 8"/>
           <p:cNvSpPr>
             <a:spLocks noGrp="1"/>
           </p:cNvSpPr>
@@ -16022,18 +15661,20 @@
               </a:rPr>
               <a:t>固定棋盘</a:t>
             </a:r>
+            <a:endParaRPr sz="1350" b="1">
+              <a:solidFill>
+                <a:srgbClr val="25D4E8"/>
+              </a:solidFill>
+              <a:latin typeface="Noto Sans SC"/>
+              <a:ea typeface="Noto Sans SC"/>
+              <a:cs typeface="Noto Sans SC"/>
+            </a:endParaRPr>
           </a:p>
         </p:txBody>
       </p:sp>
       <p:sp>
         <p:nvSpPr>
-          <p:cNvPr id="10" name="矩形 9">
-            <a:extLst>
-              <a:ext uri="{FF2B5EF4-FFF2-40B4-BE49-F238E27FC236}">
-                <a16:creationId xmlns:a16="http://schemas.microsoft.com/office/drawing/2014/main" id="{F00CCACE-64B0-4714-B0D7-47F968253836}"/>
-              </a:ext>
-            </a:extLst>
-          </p:cNvPr>
+          <p:cNvPr id="10" name="矩形 9"/>
           <p:cNvSpPr>
             <a:spLocks noGrp="1"/>
           </p:cNvSpPr>
@@ -16079,6 +15720,14 @@
               </a:rPr>
               <a:t>DMEM 保存 20 个 10 位行</a:t>
             </a:r>
+            <a:endParaRPr sz="1125" b="0">
+              <a:solidFill>
+                <a:srgbClr val="EAF2FF"/>
+              </a:solidFill>
+              <a:latin typeface="Noto Sans SC"/>
+              <a:ea typeface="Noto Sans SC"/>
+              <a:cs typeface="Noto Sans SC"/>
+            </a:endParaRPr>
           </a:p>
           <a:p>
             <a:pPr>
@@ -16102,6 +15751,14 @@
               </a:rPr>
               <a:t>满行值为 0x3FF</a:t>
             </a:r>
+            <a:endParaRPr sz="1125" b="0">
+              <a:solidFill>
+                <a:srgbClr val="EAF2FF"/>
+              </a:solidFill>
+              <a:latin typeface="Noto Sans SC"/>
+              <a:ea typeface="Noto Sans SC"/>
+              <a:cs typeface="Noto Sans SC"/>
+            </a:endParaRPr>
           </a:p>
           <a:p>
             <a:pPr>
@@ -16125,18 +15782,20 @@
               </a:rPr>
               <a:t>上方行向下压缩</a:t>
             </a:r>
+            <a:endParaRPr sz="1125" b="0">
+              <a:solidFill>
+                <a:srgbClr val="EAF2FF"/>
+              </a:solidFill>
+              <a:latin typeface="Noto Sans SC"/>
+              <a:ea typeface="Noto Sans SC"/>
+              <a:cs typeface="Noto Sans SC"/>
+            </a:endParaRPr>
           </a:p>
         </p:txBody>
       </p:sp>
       <p:sp>
         <p:nvSpPr>
-          <p:cNvPr id="11" name="矩形: 圆角 10">
-            <a:extLst>
-              <a:ext uri="{FF2B5EF4-FFF2-40B4-BE49-F238E27FC236}">
-                <a16:creationId xmlns:a16="http://schemas.microsoft.com/office/drawing/2014/main" id="{D032ADBD-757C-4002-AC31-311D11C1C20F}"/>
-              </a:ext>
-            </a:extLst>
-          </p:cNvPr>
+          <p:cNvPr id="11" name="矩形: 圆角 10"/>
           <p:cNvSpPr>
             <a:spLocks noGrp="1"/>
           </p:cNvSpPr>
@@ -16165,13 +15824,7 @@
       </p:sp>
       <p:sp>
         <p:nvSpPr>
-          <p:cNvPr id="12" name="矩形: 圆角 11">
-            <a:extLst>
-              <a:ext uri="{FF2B5EF4-FFF2-40B4-BE49-F238E27FC236}">
-                <a16:creationId xmlns:a16="http://schemas.microsoft.com/office/drawing/2014/main" id="{40DC52E2-F55B-4DE3-9E31-A5C426357604}"/>
-              </a:ext>
-            </a:extLst>
-          </p:cNvPr>
+          <p:cNvPr id="12" name="矩形: 圆角 11"/>
           <p:cNvSpPr>
             <a:spLocks noGrp="1"/>
           </p:cNvSpPr>
@@ -16198,13 +15851,7 @@
       </p:sp>
       <p:sp>
         <p:nvSpPr>
-          <p:cNvPr id="13" name="矩形 12">
-            <a:extLst>
-              <a:ext uri="{FF2B5EF4-FFF2-40B4-BE49-F238E27FC236}">
-                <a16:creationId xmlns:a16="http://schemas.microsoft.com/office/drawing/2014/main" id="{1A91209E-3D57-43C2-B2D9-01FC4794CE69}"/>
-              </a:ext>
-            </a:extLst>
-          </p:cNvPr>
+          <p:cNvPr id="13" name="矩形 12"/>
           <p:cNvSpPr>
             <a:spLocks noGrp="1"/>
           </p:cNvSpPr>
@@ -16250,18 +15897,20 @@
               </a:rPr>
               <a:t>方块位图</a:t>
             </a:r>
+            <a:endParaRPr sz="1350" b="1">
+              <a:solidFill>
+                <a:srgbClr val="A78BFA"/>
+              </a:solidFill>
+              <a:latin typeface="Noto Sans SC"/>
+              <a:ea typeface="Noto Sans SC"/>
+              <a:cs typeface="Noto Sans SC"/>
+            </a:endParaRPr>
           </a:p>
         </p:txBody>
       </p:sp>
       <p:sp>
         <p:nvSpPr>
-          <p:cNvPr id="14" name="矩形 13">
-            <a:extLst>
-              <a:ext uri="{FF2B5EF4-FFF2-40B4-BE49-F238E27FC236}">
-                <a16:creationId xmlns:a16="http://schemas.microsoft.com/office/drawing/2014/main" id="{07B61F58-0C8B-4572-BCC8-DBDFABF55461}"/>
-              </a:ext>
-            </a:extLst>
-          </p:cNvPr>
+          <p:cNvPr id="14" name="矩形 13"/>
           <p:cNvSpPr>
             <a:spLocks noGrp="1"/>
           </p:cNvSpPr>
@@ -16307,6 +15956,14 @@
               </a:rPr>
               <a:t>7 种类型</a:t>
             </a:r>
+            <a:endParaRPr sz="1125" b="0">
+              <a:solidFill>
+                <a:srgbClr val="EAF2FF"/>
+              </a:solidFill>
+              <a:latin typeface="Noto Sans SC"/>
+              <a:ea typeface="Noto Sans SC"/>
+              <a:cs typeface="Noto Sans SC"/>
+            </a:endParaRPr>
           </a:p>
           <a:p>
             <a:pPr>
@@ -16330,6 +15987,14 @@
               </a:rPr>
               <a:t>每种 4 个旋转状态</a:t>
             </a:r>
+            <a:endParaRPr sz="1125" b="0">
+              <a:solidFill>
+                <a:srgbClr val="EAF2FF"/>
+              </a:solidFill>
+              <a:latin typeface="Noto Sans SC"/>
+              <a:ea typeface="Noto Sans SC"/>
+              <a:cs typeface="Noto Sans SC"/>
+            </a:endParaRPr>
           </a:p>
           <a:p>
             <a:pPr>
@@ -16353,18 +16018,20 @@
               </a:rPr>
               <a:t>每个状态为 4×4 位图</a:t>
             </a:r>
+            <a:endParaRPr sz="1125" b="0">
+              <a:solidFill>
+                <a:srgbClr val="EAF2FF"/>
+              </a:solidFill>
+              <a:latin typeface="Noto Sans SC"/>
+              <a:ea typeface="Noto Sans SC"/>
+              <a:cs typeface="Noto Sans SC"/>
+            </a:endParaRPr>
           </a:p>
         </p:txBody>
       </p:sp>
       <p:sp>
         <p:nvSpPr>
-          <p:cNvPr id="15" name="矩形: 圆角 14">
-            <a:extLst>
-              <a:ext uri="{FF2B5EF4-FFF2-40B4-BE49-F238E27FC236}">
-                <a16:creationId xmlns:a16="http://schemas.microsoft.com/office/drawing/2014/main" id="{B6AA90B2-7872-4C84-B6B5-737A717297AF}"/>
-              </a:ext>
-            </a:extLst>
-          </p:cNvPr>
+          <p:cNvPr id="15" name="矩形: 圆角 14"/>
           <p:cNvSpPr>
             <a:spLocks noGrp="1"/>
           </p:cNvSpPr>
@@ -16393,13 +16060,7 @@
       </p:sp>
       <p:sp>
         <p:nvSpPr>
-          <p:cNvPr id="16" name="矩形: 圆角 15">
-            <a:extLst>
-              <a:ext uri="{FF2B5EF4-FFF2-40B4-BE49-F238E27FC236}">
-                <a16:creationId xmlns:a16="http://schemas.microsoft.com/office/drawing/2014/main" id="{A0017A07-4847-4D6E-BA78-640818B5A17B}"/>
-              </a:ext>
-            </a:extLst>
-          </p:cNvPr>
+          <p:cNvPr id="16" name="矩形: 圆角 15"/>
           <p:cNvSpPr>
             <a:spLocks noGrp="1"/>
           </p:cNvSpPr>
@@ -16426,13 +16087,7 @@
       </p:sp>
       <p:sp>
         <p:nvSpPr>
-          <p:cNvPr id="17" name="矩形 16">
-            <a:extLst>
-              <a:ext uri="{FF2B5EF4-FFF2-40B4-BE49-F238E27FC236}">
-                <a16:creationId xmlns:a16="http://schemas.microsoft.com/office/drawing/2014/main" id="{B319DE9A-A9EC-4556-924A-BA73DF44E0C8}"/>
-              </a:ext>
-            </a:extLst>
-          </p:cNvPr>
+          <p:cNvPr id="17" name="矩形 16"/>
           <p:cNvSpPr>
             <a:spLocks noGrp="1"/>
           </p:cNvSpPr>
@@ -16478,18 +16133,20 @@
               </a:rPr>
               <a:t>活动状态</a:t>
             </a:r>
+            <a:endParaRPr sz="1350" b="1">
+              <a:solidFill>
+                <a:srgbClr val="F5B942"/>
+              </a:solidFill>
+              <a:latin typeface="Noto Sans SC"/>
+              <a:ea typeface="Noto Sans SC"/>
+              <a:cs typeface="Noto Sans SC"/>
+            </a:endParaRPr>
           </a:p>
         </p:txBody>
       </p:sp>
       <p:sp>
         <p:nvSpPr>
-          <p:cNvPr id="18" name="矩形 17">
-            <a:extLst>
-              <a:ext uri="{FF2B5EF4-FFF2-40B4-BE49-F238E27FC236}">
-                <a16:creationId xmlns:a16="http://schemas.microsoft.com/office/drawing/2014/main" id="{FFBEC239-45B9-4661-993C-2F2A1858B2C9}"/>
-              </a:ext>
-            </a:extLst>
-          </p:cNvPr>
+          <p:cNvPr id="18" name="矩形 17"/>
           <p:cNvSpPr>
             <a:spLocks noGrp="1"/>
           </p:cNvSpPr>
@@ -16535,6 +16192,14 @@
               </a:rPr>
               <a:t>type / rotation</a:t>
             </a:r>
+            <a:endParaRPr sz="1125" b="0">
+              <a:solidFill>
+                <a:srgbClr val="EAF2FF"/>
+              </a:solidFill>
+              <a:latin typeface="Noto Sans SC"/>
+              <a:ea typeface="Noto Sans SC"/>
+              <a:cs typeface="Noto Sans SC"/>
+            </a:endParaRPr>
           </a:p>
           <a:p>
             <a:pPr>
@@ -16558,6 +16223,14 @@
               </a:rPr>
               <a:t>x / y 坐标</a:t>
             </a:r>
+            <a:endParaRPr sz="1125" b="0">
+              <a:solidFill>
+                <a:srgbClr val="EAF2FF"/>
+              </a:solidFill>
+              <a:latin typeface="Noto Sans SC"/>
+              <a:ea typeface="Noto Sans SC"/>
+              <a:cs typeface="Noto Sans SC"/>
+            </a:endParaRPr>
           </a:p>
           <a:p>
             <a:pPr>
@@ -16581,18 +16254,20 @@
               </a:rPr>
               <a:t>边沿检测与下降计数</a:t>
             </a:r>
+            <a:endParaRPr sz="1125" b="0">
+              <a:solidFill>
+                <a:srgbClr val="EAF2FF"/>
+              </a:solidFill>
+              <a:latin typeface="Noto Sans SC"/>
+              <a:ea typeface="Noto Sans SC"/>
+              <a:cs typeface="Noto Sans SC"/>
+            </a:endParaRPr>
           </a:p>
         </p:txBody>
       </p:sp>
       <p:sp>
         <p:nvSpPr>
-          <p:cNvPr id="19" name="矩形: 圆角 18">
-            <a:extLst>
-              <a:ext uri="{FF2B5EF4-FFF2-40B4-BE49-F238E27FC236}">
-                <a16:creationId xmlns:a16="http://schemas.microsoft.com/office/drawing/2014/main" id="{0B38AFDC-516C-48FE-BD74-6F5FE42FCA20}"/>
-              </a:ext>
-            </a:extLst>
-          </p:cNvPr>
+          <p:cNvPr id="19" name="矩形: 圆角 18"/>
           <p:cNvSpPr>
             <a:spLocks noGrp="1"/>
           </p:cNvSpPr>
@@ -16621,13 +16296,7 @@
       </p:sp>
       <p:sp>
         <p:nvSpPr>
-          <p:cNvPr id="20" name="矩形: 圆角 19">
-            <a:extLst>
-              <a:ext uri="{FF2B5EF4-FFF2-40B4-BE49-F238E27FC236}">
-                <a16:creationId xmlns:a16="http://schemas.microsoft.com/office/drawing/2014/main" id="{FE779783-90D9-4C74-BABC-D046F30B4C3D}"/>
-              </a:ext>
-            </a:extLst>
-          </p:cNvPr>
+          <p:cNvPr id="20" name="矩形: 圆角 19"/>
           <p:cNvSpPr>
             <a:spLocks noGrp="1"/>
           </p:cNvSpPr>
@@ -16654,13 +16323,7 @@
       </p:sp>
       <p:sp>
         <p:nvSpPr>
-          <p:cNvPr id="21" name="矩形 20">
-            <a:extLst>
-              <a:ext uri="{FF2B5EF4-FFF2-40B4-BE49-F238E27FC236}">
-                <a16:creationId xmlns:a16="http://schemas.microsoft.com/office/drawing/2014/main" id="{6332426F-D2BE-4010-8292-497968C92B4E}"/>
-              </a:ext>
-            </a:extLst>
-          </p:cNvPr>
+          <p:cNvPr id="21" name="矩形 20"/>
           <p:cNvSpPr>
             <a:spLocks noGrp="1"/>
           </p:cNvSpPr>
@@ -16706,18 +16369,20 @@
               </a:rPr>
               <a:t>显示帧</a:t>
             </a:r>
+            <a:endParaRPr sz="1350" b="1">
+              <a:solidFill>
+                <a:srgbClr val="37D99A"/>
+              </a:solidFill>
+              <a:latin typeface="Noto Sans SC"/>
+              <a:ea typeface="Noto Sans SC"/>
+              <a:cs typeface="Noto Sans SC"/>
+            </a:endParaRPr>
           </a:p>
         </p:txBody>
       </p:sp>
       <p:sp>
         <p:nvSpPr>
-          <p:cNvPr id="22" name="矩形 21">
-            <a:extLst>
-              <a:ext uri="{FF2B5EF4-FFF2-40B4-BE49-F238E27FC236}">
-                <a16:creationId xmlns:a16="http://schemas.microsoft.com/office/drawing/2014/main" id="{9B0DB78A-4187-41E1-BD75-3A019F75AC60}"/>
-              </a:ext>
-            </a:extLst>
-          </p:cNvPr>
+          <p:cNvPr id="22" name="矩形 21"/>
           <p:cNvSpPr>
             <a:spLocks noGrp="1"/>
           </p:cNvSpPr>
@@ -16763,6 +16428,14 @@
               </a:rPr>
               <a:t>复制固定棋盘</a:t>
             </a:r>
+            <a:endParaRPr sz="1125" b="0">
+              <a:solidFill>
+                <a:srgbClr val="EAF2FF"/>
+              </a:solidFill>
+              <a:latin typeface="Noto Sans SC"/>
+              <a:ea typeface="Noto Sans SC"/>
+              <a:cs typeface="Noto Sans SC"/>
+            </a:endParaRPr>
           </a:p>
           <a:p>
             <a:pPr>
@@ -16786,6 +16459,14 @@
               </a:rPr>
               <a:t>叠加活动方块</a:t>
             </a:r>
+            <a:endParaRPr sz="1125" b="0">
+              <a:solidFill>
+                <a:srgbClr val="EAF2FF"/>
+              </a:solidFill>
+              <a:latin typeface="Noto Sans SC"/>
+              <a:ea typeface="Noto Sans SC"/>
+              <a:cs typeface="Noto Sans SC"/>
+            </a:endParaRPr>
           </a:p>
           <a:p>
             <a:pPr>
@@ -16809,18 +16490,20 @@
               </a:rPr>
               <a:t>逐行上传 20 行</a:t>
             </a:r>
+            <a:endParaRPr sz="1125" b="0">
+              <a:solidFill>
+                <a:srgbClr val="EAF2FF"/>
+              </a:solidFill>
+              <a:latin typeface="Noto Sans SC"/>
+              <a:ea typeface="Noto Sans SC"/>
+              <a:cs typeface="Noto Sans SC"/>
+            </a:endParaRPr>
           </a:p>
         </p:txBody>
       </p:sp>
       <p:sp>
         <p:nvSpPr>
-          <p:cNvPr id="23" name="矩形 22">
-            <a:extLst>
-              <a:ext uri="{FF2B5EF4-FFF2-40B4-BE49-F238E27FC236}">
-                <a16:creationId xmlns:a16="http://schemas.microsoft.com/office/drawing/2014/main" id="{82693D4A-1A4D-41E1-AF76-9375B0F1767F}"/>
-              </a:ext>
-            </a:extLst>
-          </p:cNvPr>
+          <p:cNvPr id="23" name="矩形 22"/>
           <p:cNvSpPr>
             <a:spLocks noGrp="1"/>
           </p:cNvSpPr>
@@ -16866,18 +16549,20 @@
               </a:rPr>
               <a:t>活动方块在锁定前不修改固定棋盘</a:t>
             </a:r>
+            <a:endParaRPr sz="1275" b="1">
+              <a:solidFill>
+                <a:srgbClr val="A6B4C8"/>
+              </a:solidFill>
+              <a:latin typeface="Noto Sans SC"/>
+              <a:ea typeface="Noto Sans SC"/>
+              <a:cs typeface="Noto Sans SC"/>
+            </a:endParaRPr>
           </a:p>
         </p:txBody>
       </p:sp>
       <p:sp>
         <p:nvSpPr>
-          <p:cNvPr id="24" name="矩形 23">
-            <a:extLst>
-              <a:ext uri="{FF2B5EF4-FFF2-40B4-BE49-F238E27FC236}">
-                <a16:creationId xmlns:a16="http://schemas.microsoft.com/office/drawing/2014/main" id="{3C47DFA8-5C5D-4D99-AB49-9470DDEB5E2C}"/>
-              </a:ext>
-            </a:extLst>
-          </p:cNvPr>
+          <p:cNvPr id="24" name="矩形 23"/>
           <p:cNvSpPr>
             <a:spLocks noGrp="1"/>
           </p:cNvSpPr>
@@ -16902,13 +16587,7 @@
       </p:sp>
       <p:sp>
         <p:nvSpPr>
-          <p:cNvPr id="25" name="矩形 24">
-            <a:extLst>
-              <a:ext uri="{FF2B5EF4-FFF2-40B4-BE49-F238E27FC236}">
-                <a16:creationId xmlns:a16="http://schemas.microsoft.com/office/drawing/2014/main" id="{8C277708-F9F0-43D8-97B9-AEAD6E59F013}"/>
-              </a:ext>
-            </a:extLst>
-          </p:cNvPr>
+          <p:cNvPr id="25" name="矩形 24"/>
           <p:cNvSpPr>
             <a:spLocks noGrp="1"/>
           </p:cNvSpPr>
@@ -16954,15 +16633,18 @@
               </a:rPr>
               <a:t>08</a:t>
             </a:r>
+            <a:endParaRPr sz="825" b="0">
+              <a:solidFill>
+                <a:srgbClr val="A6B4C8"/>
+              </a:solidFill>
+              <a:latin typeface="Noto Sans SC"/>
+              <a:ea typeface="Noto Sans SC"/>
+              <a:cs typeface="Noto Sans SC"/>
+            </a:endParaRPr>
           </a:p>
         </p:txBody>
       </p:sp>
     </p:spTree>
-    <p:extLst>
-      <p:ext uri="{BB962C8B-B14F-4D97-AF65-F5344CB8AC3E}">
-        <p14:creationId xmlns:p14="http://schemas.microsoft.com/office/powerpoint/2010/main" val="1291617442"/>
-      </p:ext>
-    </p:extLst>
   </p:cSld>
   <p:clrMapOvr>
     <a:masterClrMapping/>
@@ -16997,13 +16679,7 @@
       </p:grpSpPr>
       <p:sp>
         <p:nvSpPr>
-          <p:cNvPr id="39" name="矩形 38">
-            <a:extLst>
-              <a:ext uri="{FF2B5EF4-FFF2-40B4-BE49-F238E27FC236}">
-                <a16:creationId xmlns:a16="http://schemas.microsoft.com/office/drawing/2014/main" id="{4522F08C-9A58-4436-A113-CAC3071A37F2}"/>
-              </a:ext>
-            </a:extLst>
-          </p:cNvPr>
+          <p:cNvPr id="39" name="矩形 38"/>
           <p:cNvSpPr>
             <a:spLocks noGrp="1"/>
           </p:cNvSpPr>
@@ -17049,18 +16725,20 @@
               </a:rPr>
               <a:t>核心算法</a:t>
             </a:r>
+            <a:endParaRPr sz="975" b="1">
+              <a:solidFill>
+                <a:srgbClr val="25D4E8"/>
+              </a:solidFill>
+              <a:latin typeface="Noto Sans SC"/>
+              <a:ea typeface="Noto Sans SC"/>
+              <a:cs typeface="Noto Sans SC"/>
+            </a:endParaRPr>
           </a:p>
         </p:txBody>
       </p:sp>
       <p:sp>
         <p:nvSpPr>
-          <p:cNvPr id="2" name="矩形 1">
-            <a:extLst>
-              <a:ext uri="{FF2B5EF4-FFF2-40B4-BE49-F238E27FC236}">
-                <a16:creationId xmlns:a16="http://schemas.microsoft.com/office/drawing/2014/main" id="{9F9B93B9-0B60-4419-BD4E-3DAB703EDE0E}"/>
-              </a:ext>
-            </a:extLst>
-          </p:cNvPr>
+          <p:cNvPr id="2" name="矩形 1"/>
           <p:cNvSpPr>
             <a:spLocks noGrp="1"/>
           </p:cNvSpPr>
@@ -17106,18 +16784,20 @@
               </a:rPr>
               <a:t>碰撞检测、移动与旋转</a:t>
             </a:r>
+            <a:endParaRPr sz="2475" b="1">
+              <a:solidFill>
+                <a:srgbClr val="EAF2FF"/>
+              </a:solidFill>
+              <a:latin typeface="Noto Sans SC"/>
+              <a:ea typeface="Noto Sans SC"/>
+              <a:cs typeface="Noto Sans SC"/>
+            </a:endParaRPr>
           </a:p>
         </p:txBody>
       </p:sp>
       <p:sp>
         <p:nvSpPr>
-          <p:cNvPr id="3" name="直接连接符 2">
-            <a:extLst>
-              <a:ext uri="{FF2B5EF4-FFF2-40B4-BE49-F238E27FC236}">
-                <a16:creationId xmlns:a16="http://schemas.microsoft.com/office/drawing/2014/main" id="{DF7F4A8A-BC73-48CB-826B-EC2009730ECB}"/>
-              </a:ext>
-            </a:extLst>
-          </p:cNvPr>
+          <p:cNvPr id="3" name="直接连接符 2"/>
           <p:cNvSpPr>
             <a:spLocks noGrp="1"/>
           </p:cNvSpPr>
@@ -17142,13 +16822,7 @@
       </p:sp>
       <p:sp>
         <p:nvSpPr>
-          <p:cNvPr id="4" name="矩形 3">
-            <a:extLst>
-              <a:ext uri="{FF2B5EF4-FFF2-40B4-BE49-F238E27FC236}">
-                <a16:creationId xmlns:a16="http://schemas.microsoft.com/office/drawing/2014/main" id="{02192DCA-77DB-44EB-9792-3F822298B4AF}"/>
-              </a:ext>
-            </a:extLst>
-          </p:cNvPr>
+          <p:cNvPr id="4" name="矩形 3"/>
           <p:cNvSpPr>
             <a:spLocks noGrp="1"/>
           </p:cNvSpPr>
@@ -17194,18 +16868,20 @@
               </a:rPr>
               <a:t>08</a:t>
             </a:r>
+            <a:endParaRPr sz="825" b="0">
+              <a:solidFill>
+                <a:srgbClr val="A6B4C8"/>
+              </a:solidFill>
+              <a:latin typeface="Noto Sans SC"/>
+              <a:ea typeface="Noto Sans SC"/>
+              <a:cs typeface="Noto Sans SC"/>
+            </a:endParaRPr>
           </a:p>
         </p:txBody>
       </p:sp>
       <p:sp>
         <p:nvSpPr>
-          <p:cNvPr id="5" name="矩形: 圆角 4">
-            <a:extLst>
-              <a:ext uri="{FF2B5EF4-FFF2-40B4-BE49-F238E27FC236}">
-                <a16:creationId xmlns:a16="http://schemas.microsoft.com/office/drawing/2014/main" id="{6817E96F-A3F4-403E-B9CA-C05FE264FFA1}"/>
-              </a:ext>
-            </a:extLst>
-          </p:cNvPr>
+          <p:cNvPr id="5" name="矩形: 圆角 4"/>
           <p:cNvSpPr>
             <a:spLocks noGrp="1"/>
           </p:cNvSpPr>
@@ -17234,13 +16910,7 @@
       </p:sp>
       <p:sp>
         <p:nvSpPr>
-          <p:cNvPr id="6" name="矩形 5">
-            <a:extLst>
-              <a:ext uri="{FF2B5EF4-FFF2-40B4-BE49-F238E27FC236}">
-                <a16:creationId xmlns:a16="http://schemas.microsoft.com/office/drawing/2014/main" id="{BDA6EF69-1CC5-4819-AEFC-21ED27C99B89}"/>
-              </a:ext>
-            </a:extLst>
-          </p:cNvPr>
+          <p:cNvPr id="6" name="矩形 5"/>
           <p:cNvSpPr>
             <a:spLocks noGrp="1"/>
           </p:cNvSpPr>
@@ -17286,18 +16956,20 @@
               </a:rPr>
               <a:t>生成候选状态</a:t>
             </a:r>
+            <a:endParaRPr sz="1350" b="1">
+              <a:solidFill>
+                <a:srgbClr val="25D4E8"/>
+              </a:solidFill>
+              <a:latin typeface="Noto Sans SC"/>
+              <a:ea typeface="Noto Sans SC"/>
+              <a:cs typeface="Noto Sans SC"/>
+            </a:endParaRPr>
           </a:p>
         </p:txBody>
       </p:sp>
       <p:sp>
         <p:nvSpPr>
-          <p:cNvPr id="7" name="矩形 6">
-            <a:extLst>
-              <a:ext uri="{FF2B5EF4-FFF2-40B4-BE49-F238E27FC236}">
-                <a16:creationId xmlns:a16="http://schemas.microsoft.com/office/drawing/2014/main" id="{FDFD7CDC-7C44-4B1E-8AB2-E1EED072CB84}"/>
-              </a:ext>
-            </a:extLst>
-          </p:cNvPr>
+          <p:cNvPr id="7" name="矩形 6"/>
           <p:cNvSpPr>
             <a:spLocks noGrp="1"/>
           </p:cNvSpPr>
@@ -17343,18 +17015,20 @@
               </a:rPr>
               <a:t>x / y / rotation</a:t>
             </a:r>
+            <a:endParaRPr sz="975" b="0">
+              <a:solidFill>
+                <a:srgbClr val="A6B4C8"/>
+              </a:solidFill>
+              <a:latin typeface="Noto Sans SC"/>
+              <a:ea typeface="Noto Sans SC"/>
+              <a:cs typeface="Noto Sans SC"/>
+            </a:endParaRPr>
           </a:p>
         </p:txBody>
       </p:sp>
       <p:sp>
         <p:nvSpPr>
-          <p:cNvPr id="8" name="矩形: 圆角 7">
-            <a:extLst>
-              <a:ext uri="{FF2B5EF4-FFF2-40B4-BE49-F238E27FC236}">
-                <a16:creationId xmlns:a16="http://schemas.microsoft.com/office/drawing/2014/main" id="{D4722289-DFA8-4FF9-BBF7-B02DF112D7D2}"/>
-              </a:ext>
-            </a:extLst>
-          </p:cNvPr>
+          <p:cNvPr id="8" name="矩形: 圆角 7"/>
           <p:cNvSpPr>
             <a:spLocks noGrp="1"/>
           </p:cNvSpPr>
@@ -17383,13 +17057,7 @@
       </p:sp>
       <p:sp>
         <p:nvSpPr>
-          <p:cNvPr id="9" name="矩形 8">
-            <a:extLst>
-              <a:ext uri="{FF2B5EF4-FFF2-40B4-BE49-F238E27FC236}">
-                <a16:creationId xmlns:a16="http://schemas.microsoft.com/office/drawing/2014/main" id="{DA15BB9D-1AE2-4FC4-A8B6-520E0A6292C1}"/>
-              </a:ext>
-            </a:extLst>
-          </p:cNvPr>
+          <p:cNvPr id="9" name="矩形 8"/>
           <p:cNvSpPr>
             <a:spLocks noGrp="1"/>
           </p:cNvSpPr>
@@ -17435,18 +17103,20 @@
               </a:rPr>
               <a:t>逐位扫描</a:t>
             </a:r>
+            <a:endParaRPr sz="1350" b="1">
+              <a:solidFill>
+                <a:srgbClr val="4F83FF"/>
+              </a:solidFill>
+              <a:latin typeface="Noto Sans SC"/>
+              <a:ea typeface="Noto Sans SC"/>
+              <a:cs typeface="Noto Sans SC"/>
+            </a:endParaRPr>
           </a:p>
         </p:txBody>
       </p:sp>
       <p:sp>
         <p:nvSpPr>
-          <p:cNvPr id="10" name="矩形 9">
-            <a:extLst>
-              <a:ext uri="{FF2B5EF4-FFF2-40B4-BE49-F238E27FC236}">
-                <a16:creationId xmlns:a16="http://schemas.microsoft.com/office/drawing/2014/main" id="{1B04D40F-8DDB-4E5D-80C4-FE2005436B05}"/>
-              </a:ext>
-            </a:extLst>
-          </p:cNvPr>
+          <p:cNvPr id="10" name="矩形 9"/>
           <p:cNvSpPr>
             <a:spLocks noGrp="1"/>
           </p:cNvSpPr>
@@ -17492,18 +17162,20 @@
               </a:rPr>
               <a:t>4×4 mask 中的有效格</a:t>
             </a:r>
+            <a:endParaRPr sz="975" b="0">
+              <a:solidFill>
+                <a:srgbClr val="A6B4C8"/>
+              </a:solidFill>
+              <a:latin typeface="Noto Sans SC"/>
+              <a:ea typeface="Noto Sans SC"/>
+              <a:cs typeface="Noto Sans SC"/>
+            </a:endParaRPr>
           </a:p>
         </p:txBody>
       </p:sp>
       <p:sp>
         <p:nvSpPr>
-          <p:cNvPr id="11" name="矩形: 圆角 10">
-            <a:extLst>
-              <a:ext uri="{FF2B5EF4-FFF2-40B4-BE49-F238E27FC236}">
-                <a16:creationId xmlns:a16="http://schemas.microsoft.com/office/drawing/2014/main" id="{67C082A5-48D9-477C-A834-739F9223D835}"/>
-              </a:ext>
-            </a:extLst>
-          </p:cNvPr>
+          <p:cNvPr id="11" name="矩形: 圆角 10"/>
           <p:cNvSpPr>
             <a:spLocks noGrp="1"/>
           </p:cNvSpPr>
@@ -17532,13 +17204,7 @@
       </p:sp>
       <p:sp>
         <p:nvSpPr>
-          <p:cNvPr id="12" name="矩形 11">
-            <a:extLst>
-              <a:ext uri="{FF2B5EF4-FFF2-40B4-BE49-F238E27FC236}">
-                <a16:creationId xmlns:a16="http://schemas.microsoft.com/office/drawing/2014/main" id="{821FC104-C46E-40D1-856D-ED86384599E5}"/>
-              </a:ext>
-            </a:extLst>
-          </p:cNvPr>
+          <p:cNvPr id="12" name="矩形 11"/>
           <p:cNvSpPr>
             <a:spLocks noGrp="1"/>
           </p:cNvSpPr>
@@ -17584,18 +17250,20 @@
               </a:rPr>
               <a:t>边界检查</a:t>
             </a:r>
+            <a:endParaRPr sz="1350" b="1">
+              <a:solidFill>
+                <a:srgbClr val="F5B942"/>
+              </a:solidFill>
+              <a:latin typeface="Noto Sans SC"/>
+              <a:ea typeface="Noto Sans SC"/>
+              <a:cs typeface="Noto Sans SC"/>
+            </a:endParaRPr>
           </a:p>
         </p:txBody>
       </p:sp>
       <p:sp>
         <p:nvSpPr>
-          <p:cNvPr id="13" name="矩形 12">
-            <a:extLst>
-              <a:ext uri="{FF2B5EF4-FFF2-40B4-BE49-F238E27FC236}">
-                <a16:creationId xmlns:a16="http://schemas.microsoft.com/office/drawing/2014/main" id="{16246EDA-C09C-4C46-AC42-702C8EE772A7}"/>
-              </a:ext>
-            </a:extLst>
-          </p:cNvPr>
+          <p:cNvPr id="13" name="矩形 12"/>
           <p:cNvSpPr>
             <a:spLocks noGrp="1"/>
           </p:cNvSpPr>
@@ -17641,18 +17309,20 @@
               </a:rPr>
               <a:t>左右、底部、顶部</a:t>
             </a:r>
+            <a:endParaRPr sz="975" b="0">
+              <a:solidFill>
+                <a:srgbClr val="A6B4C8"/>
+              </a:solidFill>
+              <a:latin typeface="Noto Sans SC"/>
+              <a:ea typeface="Noto Sans SC"/>
+              <a:cs typeface="Noto Sans SC"/>
+            </a:endParaRPr>
           </a:p>
         </p:txBody>
       </p:sp>
       <p:sp>
         <p:nvSpPr>
-          <p:cNvPr id="14" name="矩形: 圆角 13">
-            <a:extLst>
-              <a:ext uri="{FF2B5EF4-FFF2-40B4-BE49-F238E27FC236}">
-                <a16:creationId xmlns:a16="http://schemas.microsoft.com/office/drawing/2014/main" id="{EFF8ACAB-4717-46F9-B907-FAFA23B72F14}"/>
-              </a:ext>
-            </a:extLst>
-          </p:cNvPr>
+          <p:cNvPr id="14" name="矩形: 圆角 13"/>
           <p:cNvSpPr>
             <a:spLocks noGrp="1"/>
           </p:cNvSpPr>
@@ -17681,13 +17351,7 @@
       </p:sp>
       <p:sp>
         <p:nvSpPr>
-          <p:cNvPr id="15" name="矩形 14">
-            <a:extLst>
-              <a:ext uri="{FF2B5EF4-FFF2-40B4-BE49-F238E27FC236}">
-                <a16:creationId xmlns:a16="http://schemas.microsoft.com/office/drawing/2014/main" id="{DC19DE02-26A1-451E-9C48-78D8855A51CC}"/>
-              </a:ext>
-            </a:extLst>
-          </p:cNvPr>
+          <p:cNvPr id="15" name="矩形 14"/>
           <p:cNvSpPr>
             <a:spLocks noGrp="1"/>
           </p:cNvSpPr>
@@ -17733,18 +17397,20 @@
               </a:rPr>
               <a:t>棋盘相与</a:t>
             </a:r>
+            <a:endParaRPr sz="1350" b="1">
+              <a:solidFill>
+                <a:srgbClr val="A78BFA"/>
+              </a:solidFill>
+              <a:latin typeface="Noto Sans SC"/>
+              <a:ea typeface="Noto Sans SC"/>
+              <a:cs typeface="Noto Sans SC"/>
+            </a:endParaRPr>
           </a:p>
         </p:txBody>
       </p:sp>
       <p:sp>
         <p:nvSpPr>
-          <p:cNvPr id="16" name="矩形 15">
-            <a:extLst>
-              <a:ext uri="{FF2B5EF4-FFF2-40B4-BE49-F238E27FC236}">
-                <a16:creationId xmlns:a16="http://schemas.microsoft.com/office/drawing/2014/main" id="{BE537632-814B-4179-BDCE-5896864D5696}"/>
-              </a:ext>
-            </a:extLst>
-          </p:cNvPr>
+          <p:cNvPr id="16" name="矩形 15"/>
           <p:cNvSpPr>
             <a:spLocks noGrp="1"/>
           </p:cNvSpPr>
@@ -17790,18 +17456,20 @@
               </a:rPr>
               <a:t>对应行已有固定块</a:t>
             </a:r>
+            <a:endParaRPr sz="975" b="0">
+              <a:solidFill>
+                <a:srgbClr val="A6B4C8"/>
+              </a:solidFill>
+              <a:latin typeface="Noto Sans SC"/>
+              <a:ea typeface="Noto Sans SC"/>
+              <a:cs typeface="Noto Sans SC"/>
+            </a:endParaRPr>
           </a:p>
         </p:txBody>
       </p:sp>
       <p:sp>
         <p:nvSpPr>
-          <p:cNvPr id="17" name="矩形: 圆角 16">
-            <a:extLst>
-              <a:ext uri="{FF2B5EF4-FFF2-40B4-BE49-F238E27FC236}">
-                <a16:creationId xmlns:a16="http://schemas.microsoft.com/office/drawing/2014/main" id="{843D476B-CE21-4FE1-9F5F-CCF125665026}"/>
-              </a:ext>
-            </a:extLst>
-          </p:cNvPr>
+          <p:cNvPr id="17" name="矩形: 圆角 16"/>
           <p:cNvSpPr>
             <a:spLocks noGrp="1"/>
           </p:cNvSpPr>
@@ -17830,13 +17498,7 @@
       </p:sp>
       <p:sp>
         <p:nvSpPr>
-          <p:cNvPr id="18" name="矩形 17">
-            <a:extLst>
-              <a:ext uri="{FF2B5EF4-FFF2-40B4-BE49-F238E27FC236}">
-                <a16:creationId xmlns:a16="http://schemas.microsoft.com/office/drawing/2014/main" id="{73EA9F5B-42DF-4122-9186-8705FAE6840A}"/>
-              </a:ext>
-            </a:extLst>
-          </p:cNvPr>
+          <p:cNvPr id="18" name="矩形 17"/>
           <p:cNvSpPr>
             <a:spLocks noGrp="1"/>
           </p:cNvSpPr>
@@ -17882,18 +17544,20 @@
               </a:rPr>
               <a:t>结果</a:t>
             </a:r>
+            <a:endParaRPr sz="1350" b="1">
+              <a:solidFill>
+                <a:srgbClr val="37D99A"/>
+              </a:solidFill>
+              <a:latin typeface="Noto Sans SC"/>
+              <a:ea typeface="Noto Sans SC"/>
+              <a:cs typeface="Noto Sans SC"/>
+            </a:endParaRPr>
           </a:p>
         </p:txBody>
       </p:sp>
       <p:sp>
         <p:nvSpPr>
-          <p:cNvPr id="19" name="矩形 18">
-            <a:extLst>
-              <a:ext uri="{FF2B5EF4-FFF2-40B4-BE49-F238E27FC236}">
-                <a16:creationId xmlns:a16="http://schemas.microsoft.com/office/drawing/2014/main" id="{90A6FFF4-0F97-47DA-9361-2892BA594CF1}"/>
-              </a:ext>
-            </a:extLst>
-          </p:cNvPr>
+          <p:cNvPr id="19" name="矩形 18"/>
           <p:cNvSpPr>
             <a:spLocks noGrp="1"/>
           </p:cNvSpPr>
@@ -17939,6 +17603,14 @@
               </a:rPr>
               <a:t>接受或撤销</a:t>
             </a:r>
+            <a:endParaRPr sz="975" b="0">
+              <a:solidFill>
+                <a:srgbClr val="A6B4C8"/>
+              </a:solidFill>
+              <a:latin typeface="Noto Sans SC"/>
+              <a:ea typeface="Noto Sans SC"/>
+              <a:cs typeface="Noto Sans SC"/>
+            </a:endParaRPr>
           </a:p>
         </p:txBody>
       </p:sp>
@@ -18048,13 +17720,7 @@
       </p:cxnSp>
       <p:sp>
         <p:nvSpPr>
-          <p:cNvPr id="24" name="矩形: 圆角 23">
-            <a:extLst>
-              <a:ext uri="{FF2B5EF4-FFF2-40B4-BE49-F238E27FC236}">
-                <a16:creationId xmlns:a16="http://schemas.microsoft.com/office/drawing/2014/main" id="{532793EA-CA6D-41E8-80B7-81F5057ABC56}"/>
-              </a:ext>
-            </a:extLst>
-          </p:cNvPr>
+          <p:cNvPr id="24" name="矩形: 圆角 23"/>
           <p:cNvSpPr>
             <a:spLocks noGrp="1"/>
           </p:cNvSpPr>
@@ -18083,13 +17749,7 @@
       </p:sp>
       <p:sp>
         <p:nvSpPr>
-          <p:cNvPr id="25" name="矩形: 圆角 24">
-            <a:extLst>
-              <a:ext uri="{FF2B5EF4-FFF2-40B4-BE49-F238E27FC236}">
-                <a16:creationId xmlns:a16="http://schemas.microsoft.com/office/drawing/2014/main" id="{B58410F9-E313-4D20-969D-13D55891C2E2}"/>
-              </a:ext>
-            </a:extLst>
-          </p:cNvPr>
+          <p:cNvPr id="25" name="矩形: 圆角 24"/>
           <p:cNvSpPr>
             <a:spLocks noGrp="1"/>
           </p:cNvSpPr>
@@ -18116,13 +17776,7 @@
       </p:sp>
       <p:sp>
         <p:nvSpPr>
-          <p:cNvPr id="26" name="矩形 25">
-            <a:extLst>
-              <a:ext uri="{FF2B5EF4-FFF2-40B4-BE49-F238E27FC236}">
-                <a16:creationId xmlns:a16="http://schemas.microsoft.com/office/drawing/2014/main" id="{6C1585A5-2299-496A-8A27-B60106FDF93B}"/>
-              </a:ext>
-            </a:extLst>
-          </p:cNvPr>
+          <p:cNvPr id="26" name="矩形 25"/>
           <p:cNvSpPr>
             <a:spLocks noGrp="1"/>
           </p:cNvSpPr>
@@ -18168,18 +17822,20 @@
               </a:rPr>
               <a:t>左右移动</a:t>
             </a:r>
+            <a:endParaRPr sz="1350" b="1">
+              <a:solidFill>
+                <a:srgbClr val="25D4E8"/>
+              </a:solidFill>
+              <a:latin typeface="Noto Sans SC"/>
+              <a:ea typeface="Noto Sans SC"/>
+              <a:cs typeface="Noto Sans SC"/>
+            </a:endParaRPr>
           </a:p>
         </p:txBody>
       </p:sp>
       <p:sp>
         <p:nvSpPr>
-          <p:cNvPr id="27" name="矩形 26">
-            <a:extLst>
-              <a:ext uri="{FF2B5EF4-FFF2-40B4-BE49-F238E27FC236}">
-                <a16:creationId xmlns:a16="http://schemas.microsoft.com/office/drawing/2014/main" id="{19E71CFA-65ED-425E-AACE-98351B9063BA}"/>
-              </a:ext>
-            </a:extLst>
-          </p:cNvPr>
+          <p:cNvPr id="27" name="矩形 26"/>
           <p:cNvSpPr>
             <a:spLocks noGrp="1"/>
           </p:cNvSpPr>
@@ -18225,6 +17881,14 @@
               </a:rPr>
               <a:t>x ± 1 后调用 collision</a:t>
             </a:r>
+            <a:endParaRPr sz="1125" b="0">
+              <a:solidFill>
+                <a:srgbClr val="EAF2FF"/>
+              </a:solidFill>
+              <a:latin typeface="Noto Sans SC"/>
+              <a:ea typeface="Noto Sans SC"/>
+              <a:cs typeface="Noto Sans SC"/>
+            </a:endParaRPr>
           </a:p>
           <a:p>
             <a:pPr>
@@ -18248,18 +17912,20 @@
               </a:rPr>
               <a:t>未碰撞才提交新坐标</a:t>
             </a:r>
+            <a:endParaRPr sz="1125" b="0">
+              <a:solidFill>
+                <a:srgbClr val="EAF2FF"/>
+              </a:solidFill>
+              <a:latin typeface="Noto Sans SC"/>
+              <a:ea typeface="Noto Sans SC"/>
+              <a:cs typeface="Noto Sans SC"/>
+            </a:endParaRPr>
           </a:p>
         </p:txBody>
       </p:sp>
       <p:sp>
         <p:nvSpPr>
-          <p:cNvPr id="28" name="矩形: 圆角 27">
-            <a:extLst>
-              <a:ext uri="{FF2B5EF4-FFF2-40B4-BE49-F238E27FC236}">
-                <a16:creationId xmlns:a16="http://schemas.microsoft.com/office/drawing/2014/main" id="{7F954353-E555-42D0-9C42-3D80C8AA8327}"/>
-              </a:ext>
-            </a:extLst>
-          </p:cNvPr>
+          <p:cNvPr id="28" name="矩形: 圆角 27"/>
           <p:cNvSpPr>
             <a:spLocks noGrp="1"/>
           </p:cNvSpPr>
@@ -18288,13 +17954,7 @@
       </p:sp>
       <p:sp>
         <p:nvSpPr>
-          <p:cNvPr id="29" name="矩形: 圆角 28">
-            <a:extLst>
-              <a:ext uri="{FF2B5EF4-FFF2-40B4-BE49-F238E27FC236}">
-                <a16:creationId xmlns:a16="http://schemas.microsoft.com/office/drawing/2014/main" id="{04BAABBF-83DF-437A-8714-DAB866CD6BDB}"/>
-              </a:ext>
-            </a:extLst>
-          </p:cNvPr>
+          <p:cNvPr id="29" name="矩形: 圆角 28"/>
           <p:cNvSpPr>
             <a:spLocks noGrp="1"/>
           </p:cNvSpPr>
@@ -18321,13 +17981,7 @@
       </p:sp>
       <p:sp>
         <p:nvSpPr>
-          <p:cNvPr id="30" name="矩形 29">
-            <a:extLst>
-              <a:ext uri="{FF2B5EF4-FFF2-40B4-BE49-F238E27FC236}">
-                <a16:creationId xmlns:a16="http://schemas.microsoft.com/office/drawing/2014/main" id="{51DD4F52-8F52-4064-BB38-908E94DDEA52}"/>
-              </a:ext>
-            </a:extLst>
-          </p:cNvPr>
+          <p:cNvPr id="30" name="矩形 29"/>
           <p:cNvSpPr>
             <a:spLocks noGrp="1"/>
           </p:cNvSpPr>
@@ -18373,18 +18027,20 @@
               </a:rPr>
               <a:t>旋转</a:t>
             </a:r>
+            <a:endParaRPr sz="1350" b="1">
+              <a:solidFill>
+                <a:srgbClr val="A78BFA"/>
+              </a:solidFill>
+              <a:latin typeface="Noto Sans SC"/>
+              <a:ea typeface="Noto Sans SC"/>
+              <a:cs typeface="Noto Sans SC"/>
+            </a:endParaRPr>
           </a:p>
         </p:txBody>
       </p:sp>
       <p:sp>
         <p:nvSpPr>
-          <p:cNvPr id="31" name="矩形 30">
-            <a:extLst>
-              <a:ext uri="{FF2B5EF4-FFF2-40B4-BE49-F238E27FC236}">
-                <a16:creationId xmlns:a16="http://schemas.microsoft.com/office/drawing/2014/main" id="{5783BF8B-3BD3-417C-A5B3-2F96A7B89EFE}"/>
-              </a:ext>
-            </a:extLst>
-          </p:cNvPr>
+          <p:cNvPr id="31" name="矩形 30"/>
           <p:cNvSpPr>
             <a:spLocks noGrp="1"/>
           </p:cNvSpPr>
@@ -18430,6 +18086,14 @@
               </a:rPr>
               <a:t>尝试下一旋转状态</a:t>
             </a:r>
+            <a:endParaRPr sz="1125" b="0">
+              <a:solidFill>
+                <a:srgbClr val="EAF2FF"/>
+              </a:solidFill>
+              <a:latin typeface="Noto Sans SC"/>
+              <a:ea typeface="Noto Sans SC"/>
+              <a:cs typeface="Noto Sans SC"/>
+            </a:endParaRPr>
           </a:p>
           <a:p>
             <a:pPr>
@@ -18453,18 +18117,20 @@
               </a:rPr>
               <a:t>失败后分别尝试左移、右移一次</a:t>
             </a:r>
+            <a:endParaRPr sz="1125" b="0">
+              <a:solidFill>
+                <a:srgbClr val="EAF2FF"/>
+              </a:solidFill>
+              <a:latin typeface="Noto Sans SC"/>
+              <a:ea typeface="Noto Sans SC"/>
+              <a:cs typeface="Noto Sans SC"/>
+            </a:endParaRPr>
           </a:p>
         </p:txBody>
       </p:sp>
       <p:sp>
         <p:nvSpPr>
-          <p:cNvPr id="32" name="矩形: 圆角 31">
-            <a:extLst>
-              <a:ext uri="{FF2B5EF4-FFF2-40B4-BE49-F238E27FC236}">
-                <a16:creationId xmlns:a16="http://schemas.microsoft.com/office/drawing/2014/main" id="{6CAE8566-F69E-435C-ABBC-79261F1680CA}"/>
-              </a:ext>
-            </a:extLst>
-          </p:cNvPr>
+          <p:cNvPr id="32" name="矩形: 圆角 31"/>
           <p:cNvSpPr>
             <a:spLocks noGrp="1"/>
           </p:cNvSpPr>
@@ -18493,13 +18159,7 @@
       </p:sp>
       <p:sp>
         <p:nvSpPr>
-          <p:cNvPr id="33" name="矩形: 圆角 32">
-            <a:extLst>
-              <a:ext uri="{FF2B5EF4-FFF2-40B4-BE49-F238E27FC236}">
-                <a16:creationId xmlns:a16="http://schemas.microsoft.com/office/drawing/2014/main" id="{CE314F13-F8BA-4306-B4C2-5440359F7C92}"/>
-              </a:ext>
-            </a:extLst>
-          </p:cNvPr>
+          <p:cNvPr id="33" name="矩形: 圆角 32"/>
           <p:cNvSpPr>
             <a:spLocks noGrp="1"/>
           </p:cNvSpPr>
@@ -18526,13 +18186,7 @@
       </p:sp>
       <p:sp>
         <p:nvSpPr>
-          <p:cNvPr id="34" name="矩形 33">
-            <a:extLst>
-              <a:ext uri="{FF2B5EF4-FFF2-40B4-BE49-F238E27FC236}">
-                <a16:creationId xmlns:a16="http://schemas.microsoft.com/office/drawing/2014/main" id="{49AB917D-F7B0-4B42-BE5D-F0B463854B83}"/>
-              </a:ext>
-            </a:extLst>
-          </p:cNvPr>
+          <p:cNvPr id="34" name="矩形 33"/>
           <p:cNvSpPr>
             <a:spLocks noGrp="1"/>
           </p:cNvSpPr>
@@ -18578,18 +18232,20 @@
               </a:rPr>
               <a:t>下降</a:t>
             </a:r>
+            <a:endParaRPr sz="1350" b="1">
+              <a:solidFill>
+                <a:srgbClr val="F5B942"/>
+              </a:solidFill>
+              <a:latin typeface="Noto Sans SC"/>
+              <a:ea typeface="Noto Sans SC"/>
+              <a:cs typeface="Noto Sans SC"/>
+            </a:endParaRPr>
           </a:p>
         </p:txBody>
       </p:sp>
       <p:sp>
         <p:nvSpPr>
-          <p:cNvPr id="35" name="矩形 34">
-            <a:extLst>
-              <a:ext uri="{FF2B5EF4-FFF2-40B4-BE49-F238E27FC236}">
-                <a16:creationId xmlns:a16="http://schemas.microsoft.com/office/drawing/2014/main" id="{8CB34351-4F1F-485E-978D-588AE88F26C3}"/>
-              </a:ext>
-            </a:extLst>
-          </p:cNvPr>
+          <p:cNvPr id="35" name="矩形 34"/>
           <p:cNvSpPr>
             <a:spLocks noGrp="1"/>
           </p:cNvSpPr>
@@ -18635,6 +18291,14 @@
               </a:rPr>
               <a:t>普通下降由软件计数触发</a:t>
             </a:r>
+            <a:endParaRPr sz="1125" b="0">
+              <a:solidFill>
+                <a:srgbClr val="EAF2FF"/>
+              </a:solidFill>
+              <a:latin typeface="Noto Sans SC"/>
+              <a:ea typeface="Noto Sans SC"/>
+              <a:cs typeface="Noto Sans SC"/>
+            </a:endParaRPr>
           </a:p>
           <a:p>
             <a:pPr>
@@ -18658,18 +18322,20 @@
               </a:rPr>
               <a:t>按住下键连续软降</a:t>
             </a:r>
+            <a:endParaRPr sz="1125" b="0">
+              <a:solidFill>
+                <a:srgbClr val="EAF2FF"/>
+              </a:solidFill>
+              <a:latin typeface="Noto Sans SC"/>
+              <a:ea typeface="Noto Sans SC"/>
+              <a:cs typeface="Noto Sans SC"/>
+            </a:endParaRPr>
           </a:p>
         </p:txBody>
       </p:sp>
       <p:sp>
         <p:nvSpPr>
-          <p:cNvPr id="36" name="矩形 35">
-            <a:extLst>
-              <a:ext uri="{FF2B5EF4-FFF2-40B4-BE49-F238E27FC236}">
-                <a16:creationId xmlns:a16="http://schemas.microsoft.com/office/drawing/2014/main" id="{093C8BDD-25BB-4B11-8AFB-5522696FE6C5}"/>
-              </a:ext>
-            </a:extLst>
-          </p:cNvPr>
+          <p:cNvPr id="36" name="矩形 35"/>
           <p:cNvSpPr>
             <a:spLocks noGrp="1"/>
           </p:cNvSpPr>
@@ -18715,18 +18381,20 @@
               </a:rPr>
               <a:t>碰撞函数只返回 blocked，不直接修改游戏状态</a:t>
             </a:r>
+            <a:endParaRPr sz="1200" b="1">
+              <a:solidFill>
+                <a:srgbClr val="37D99A"/>
+              </a:solidFill>
+              <a:latin typeface="Noto Sans SC"/>
+              <a:ea typeface="Noto Sans SC"/>
+              <a:cs typeface="Noto Sans SC"/>
+            </a:endParaRPr>
           </a:p>
         </p:txBody>
       </p:sp>
       <p:sp>
         <p:nvSpPr>
-          <p:cNvPr id="37" name="矩形 36">
-            <a:extLst>
-              <a:ext uri="{FF2B5EF4-FFF2-40B4-BE49-F238E27FC236}">
-                <a16:creationId xmlns:a16="http://schemas.microsoft.com/office/drawing/2014/main" id="{2F5A90A8-6361-4D7A-A64E-BACA6F219729}"/>
-              </a:ext>
-            </a:extLst>
-          </p:cNvPr>
+          <p:cNvPr id="37" name="矩形 36"/>
           <p:cNvSpPr>
             <a:spLocks noGrp="1"/>
           </p:cNvSpPr>
@@ -18751,13 +18419,7 @@
       </p:sp>
       <p:sp>
         <p:nvSpPr>
-          <p:cNvPr id="38" name="矩形 37">
-            <a:extLst>
-              <a:ext uri="{FF2B5EF4-FFF2-40B4-BE49-F238E27FC236}">
-                <a16:creationId xmlns:a16="http://schemas.microsoft.com/office/drawing/2014/main" id="{75F74FA5-EB71-445C-A3BF-AAA5B350AF10}"/>
-              </a:ext>
-            </a:extLst>
-          </p:cNvPr>
+          <p:cNvPr id="38" name="矩形 37"/>
           <p:cNvSpPr>
             <a:spLocks noGrp="1"/>
           </p:cNvSpPr>
@@ -18803,15 +18465,18 @@
               </a:rPr>
               <a:t>09</a:t>
             </a:r>
+            <a:endParaRPr sz="825" b="0">
+              <a:solidFill>
+                <a:srgbClr val="A6B4C8"/>
+              </a:solidFill>
+              <a:latin typeface="Noto Sans SC"/>
+              <a:ea typeface="Noto Sans SC"/>
+              <a:cs typeface="Noto Sans SC"/>
+            </a:endParaRPr>
           </a:p>
         </p:txBody>
       </p:sp>
     </p:spTree>
-    <p:extLst>
-      <p:ext uri="{BB962C8B-B14F-4D97-AF65-F5344CB8AC3E}">
-        <p14:creationId xmlns:p14="http://schemas.microsoft.com/office/powerpoint/2010/main" val="1060743357"/>
-      </p:ext>
-    </p:extLst>
   </p:cSld>
   <p:clrMapOvr>
     <a:masterClrMapping/>
@@ -19067,8 +18732,11 @@
       </a:bgFillStyleLst>
     </a:fmtScheme>
   </a:themeElements>
-  <a:objectDefaults/>
-  <a:extraClrSchemeLst/>
+  <a:extLst>
+    <a:ext uri="{05A4C25C-085E-4340-85A3-A5531E510DB2}">
+      <thm15:themeFamily xmlns:thm15="http://schemas.microsoft.com/office/thememl/2012/main" name="Office Theme" id="{62F939B6-93AF-4DB8-9C6B-D6C7DFDC589F}" vid="{4A3C46E8-61CC-4603-A589-7422A47A8E4A}"/>
+    </a:ext>
+  </a:extLst>
 </a:theme>
 </file>
 
@@ -19148,23 +18816,6 @@
         <a:font script="Viet" typeface="Times New Roman"/>
         <a:font script="Uigh" typeface="Microsoft Uighur"/>
         <a:font script="Geor" typeface="Sylfaen"/>
-        <a:font script="Armn" typeface="Arial"/>
-        <a:font script="Bugi" typeface="Leelawadee UI"/>
-        <a:font script="Bopo" typeface="Microsoft JhengHei"/>
-        <a:font script="Java" typeface="Javanese Text"/>
-        <a:font script="Lisu" typeface="Segoe UI"/>
-        <a:font script="Mymr" typeface="Myanmar Text"/>
-        <a:font script="Nkoo" typeface="Ebrima"/>
-        <a:font script="Olck" typeface="Nirmala UI"/>
-        <a:font script="Osma" typeface="Ebrima"/>
-        <a:font script="Phag" typeface="Phagspa"/>
-        <a:font script="Syrn" typeface="Estrangelo Edessa"/>
-        <a:font script="Syrj" typeface="Estrangelo Edessa"/>
-        <a:font script="Syre" typeface="Estrangelo Edessa"/>
-        <a:font script="Sora" typeface="Nirmala UI"/>
-        <a:font script="Tale" typeface="Microsoft Tai Le"/>
-        <a:font script="Talu" typeface="Microsoft New Tai Lue"/>
-        <a:font script="Tfng" typeface="Ebrima"/>
       </a:majorFont>
       <a:minorFont>
         <a:latin typeface="Microsoft YaHei"/>
@@ -19200,23 +18851,6 @@
         <a:font script="Viet" typeface="Arial"/>
         <a:font script="Uigh" typeface="Microsoft Uighur"/>
         <a:font script="Geor" typeface="Sylfaen"/>
-        <a:font script="Armn" typeface="Arial"/>
-        <a:font script="Bugi" typeface="Leelawadee UI"/>
-        <a:font script="Bopo" typeface="Microsoft JhengHei"/>
-        <a:font script="Java" typeface="Javanese Text"/>
-        <a:font script="Lisu" typeface="Segoe UI"/>
-        <a:font script="Mymr" typeface="Myanmar Text"/>
-        <a:font script="Nkoo" typeface="Ebrima"/>
-        <a:font script="Olck" typeface="Nirmala UI"/>
-        <a:font script="Osma" typeface="Ebrima"/>
-        <a:font script="Phag" typeface="Phagspa"/>
-        <a:font script="Syrn" typeface="Estrangelo Edessa"/>
-        <a:font script="Syrj" typeface="Estrangelo Edessa"/>
-        <a:font script="Syre" typeface="Estrangelo Edessa"/>
-        <a:font script="Sora" typeface="Nirmala UI"/>
-        <a:font script="Tale" typeface="Microsoft Tai Le"/>
-        <a:font script="Talu" typeface="Microsoft New Tai Lue"/>
-        <a:font script="Tfng" typeface="Ebrima"/>
       </a:minorFont>
     </a:fontScheme>
     <a:fmtScheme name="Office">
@@ -19354,8 +18988,11 @@
       </a:bgFillStyleLst>
     </a:fmtScheme>
   </a:themeElements>
-  <a:objectDefaults/>
-  <a:extraClrSchemeLst/>
+  <a:extLst>
+    <a:ext uri="{05A4C25C-085E-4340-85A3-A5531E510DB2}">
+      <thm15:themeFamily xmlns:thm15="http://schemas.microsoft.com/office/thememl/2012/main" name="Office Theme" id="{62F939B6-93AF-4DB8-9C6B-D6C7DFDC589F}" vid="{4A3C46E8-61CC-4603-A589-7422A47A8E4A}"/>
+    </a:ext>
+  </a:extLst>
 </a:theme>
 </file>
 
@@ -19607,7 +19244,10 @@
       </a:bgFillStyleLst>
     </a:fmtScheme>
   </a:themeElements>
-  <a:objectDefaults/>
-  <a:extraClrSchemeLst/>
+  <a:extLst>
+    <a:ext uri="{05A4C25C-085E-4340-85A3-A5531E510DB2}">
+      <thm15:themeFamily xmlns:thm15="http://schemas.microsoft.com/office/thememl/2012/main" name="Office Theme" id="{62F939B6-93AF-4DB8-9C6B-D6C7DFDC589F}" vid="{4A3C46E8-61CC-4603-A589-7422A47A8E4A}"/>
+    </a:ext>
+  </a:extLst>
 </a:theme>
 </file>